--- a/fall_2025/Mathematical Model/Flight Controls Mathematical Model.pptx
+++ b/fall_2025/Mathematical Model/Flight Controls Mathematical Model.pptx
@@ -11,9 +11,10 @@
     <p:sldId id="264" r:id="rId5"/>
     <p:sldId id="262" r:id="rId6"/>
     <p:sldId id="263" r:id="rId7"/>
-    <p:sldId id="265" r:id="rId8"/>
-    <p:sldId id="267" r:id="rId9"/>
-    <p:sldId id="261" r:id="rId10"/>
+    <p:sldId id="268" r:id="rId8"/>
+    <p:sldId id="265" r:id="rId9"/>
+    <p:sldId id="267" r:id="rId10"/>
+    <p:sldId id="261" r:id="rId11"/>
   </p:sldIdLst>
   <p:sldSz cx="12192000" cy="6858000"/>
   <p:notesSz cx="6858000" cy="9144000"/>
@@ -123,7 +124,7 @@
 <file path=ppt/revisionInfo.xml><?xml version="1.0" encoding="utf-8"?>
 <p1510:revInfo xmlns:a="http://schemas.openxmlformats.org/drawingml/2006/main" xmlns:r="http://schemas.openxmlformats.org/officeDocument/2006/relationships" xmlns:p1510="http://schemas.microsoft.com/office/powerpoint/2015/10/main">
   <p1510:revLst>
-    <p1510:client id="{C5AFB76F-F360-4BAA-B357-ABE9793EF015}" v="54" dt="2025-09-20T17:03:23.833"/>
+    <p1510:client id="{119C1645-25BF-4125-9DBD-47C0423EEB24}" v="120" dt="2025-09-25T12:44:15.756"/>
   </p1510:revLst>
 </p1510:revInfo>
 </file>
@@ -917,6 +918,38 @@
             <pc:docMk/>
             <pc:sldMk cId="3786574737" sldId="267"/>
             <ac:spMk id="4" creationId="{1BEF1A3B-3AC3-E83A-4355-90EFAFAABFA0}"/>
+          </ac:spMkLst>
+        </pc:spChg>
+      </pc:sldChg>
+    </pc:docChg>
+  </pc:docChgLst>
+  <pc:docChgLst>
+    <pc:chgData name="Brady Schick" userId="b2b33ab7-3f5f-4057-91d3-3d23bb8ba623" providerId="ADAL" clId="{119C1645-25BF-4125-9DBD-47C0423EEB24}"/>
+    <pc:docChg chg="custSel addSld modSld">
+      <pc:chgData name="Brady Schick" userId="b2b33ab7-3f5f-4057-91d3-3d23bb8ba623" providerId="ADAL" clId="{119C1645-25BF-4125-9DBD-47C0423EEB24}" dt="2025-09-25T12:45:02.581" v="305" actId="20577"/>
+      <pc:docMkLst>
+        <pc:docMk/>
+      </pc:docMkLst>
+      <pc:sldChg chg="modSp add mod">
+        <pc:chgData name="Brady Schick" userId="b2b33ab7-3f5f-4057-91d3-3d23bb8ba623" providerId="ADAL" clId="{119C1645-25BF-4125-9DBD-47C0423EEB24}" dt="2025-09-25T12:45:02.581" v="305" actId="20577"/>
+        <pc:sldMkLst>
+          <pc:docMk/>
+          <pc:sldMk cId="2499484992" sldId="268"/>
+        </pc:sldMkLst>
+        <pc:spChg chg="mod">
+          <ac:chgData name="Brady Schick" userId="b2b33ab7-3f5f-4057-91d3-3d23bb8ba623" providerId="ADAL" clId="{119C1645-25BF-4125-9DBD-47C0423EEB24}" dt="2025-09-25T12:38:15.784" v="5" actId="20577"/>
+          <ac:spMkLst>
+            <pc:docMk/>
+            <pc:sldMk cId="2499484992" sldId="268"/>
+            <ac:spMk id="2" creationId="{EC24E606-9007-D956-678B-3A4FAE5CBD8C}"/>
+          </ac:spMkLst>
+        </pc:spChg>
+        <pc:spChg chg="mod">
+          <ac:chgData name="Brady Schick" userId="b2b33ab7-3f5f-4057-91d3-3d23bb8ba623" providerId="ADAL" clId="{119C1645-25BF-4125-9DBD-47C0423EEB24}" dt="2025-09-25T12:45:02.581" v="305" actId="20577"/>
+          <ac:spMkLst>
+            <pc:docMk/>
+            <pc:sldMk cId="2499484992" sldId="268"/>
+            <ac:spMk id="3" creationId="{6D5E60D6-9EBD-1A61-B20C-576B5403A52F}"/>
           </ac:spMkLst>
         </pc:spChg>
       </pc:sldChg>
@@ -1316,7 +1349,7 @@
           <a:p>
             <a:fld id="{CCE55368-DE8C-481A-9FFC-45CFE5380273}" type="datetimeFigureOut">
               <a:rPr lang="en-US" smtClean="0"/>
-              <a:t>9/20/2025</a:t>
+              <a:t>9/25/2025</a:t>
             </a:fld>
             <a:endParaRPr lang="en-US"/>
           </a:p>
@@ -1514,7 +1547,7 @@
           <a:p>
             <a:fld id="{CCE55368-DE8C-481A-9FFC-45CFE5380273}" type="datetimeFigureOut">
               <a:rPr lang="en-US" smtClean="0"/>
-              <a:t>9/20/2025</a:t>
+              <a:t>9/25/2025</a:t>
             </a:fld>
             <a:endParaRPr lang="en-US"/>
           </a:p>
@@ -1722,7 +1755,7 @@
           <a:p>
             <a:fld id="{CCE55368-DE8C-481A-9FFC-45CFE5380273}" type="datetimeFigureOut">
               <a:rPr lang="en-US" smtClean="0"/>
-              <a:t>9/20/2025</a:t>
+              <a:t>9/25/2025</a:t>
             </a:fld>
             <a:endParaRPr lang="en-US"/>
           </a:p>
@@ -1920,7 +1953,7 @@
           <a:p>
             <a:fld id="{CCE55368-DE8C-481A-9FFC-45CFE5380273}" type="datetimeFigureOut">
               <a:rPr lang="en-US" smtClean="0"/>
-              <a:t>9/20/2025</a:t>
+              <a:t>9/25/2025</a:t>
             </a:fld>
             <a:endParaRPr lang="en-US"/>
           </a:p>
@@ -2195,7 +2228,7 @@
           <a:p>
             <a:fld id="{CCE55368-DE8C-481A-9FFC-45CFE5380273}" type="datetimeFigureOut">
               <a:rPr lang="en-US" smtClean="0"/>
-              <a:t>9/20/2025</a:t>
+              <a:t>9/25/2025</a:t>
             </a:fld>
             <a:endParaRPr lang="en-US"/>
           </a:p>
@@ -2460,7 +2493,7 @@
           <a:p>
             <a:fld id="{CCE55368-DE8C-481A-9FFC-45CFE5380273}" type="datetimeFigureOut">
               <a:rPr lang="en-US" smtClean="0"/>
-              <a:t>9/20/2025</a:t>
+              <a:t>9/25/2025</a:t>
             </a:fld>
             <a:endParaRPr lang="en-US"/>
           </a:p>
@@ -2872,7 +2905,7 @@
           <a:p>
             <a:fld id="{CCE55368-DE8C-481A-9FFC-45CFE5380273}" type="datetimeFigureOut">
               <a:rPr lang="en-US" smtClean="0"/>
-              <a:t>9/20/2025</a:t>
+              <a:t>9/25/2025</a:t>
             </a:fld>
             <a:endParaRPr lang="en-US"/>
           </a:p>
@@ -3013,7 +3046,7 @@
           <a:p>
             <a:fld id="{CCE55368-DE8C-481A-9FFC-45CFE5380273}" type="datetimeFigureOut">
               <a:rPr lang="en-US" smtClean="0"/>
-              <a:t>9/20/2025</a:t>
+              <a:t>9/25/2025</a:t>
             </a:fld>
             <a:endParaRPr lang="en-US"/>
           </a:p>
@@ -3126,7 +3159,7 @@
           <a:p>
             <a:fld id="{CCE55368-DE8C-481A-9FFC-45CFE5380273}" type="datetimeFigureOut">
               <a:rPr lang="en-US" smtClean="0"/>
-              <a:t>9/20/2025</a:t>
+              <a:t>9/25/2025</a:t>
             </a:fld>
             <a:endParaRPr lang="en-US"/>
           </a:p>
@@ -3437,7 +3470,7 @@
           <a:p>
             <a:fld id="{CCE55368-DE8C-481A-9FFC-45CFE5380273}" type="datetimeFigureOut">
               <a:rPr lang="en-US" smtClean="0"/>
-              <a:t>9/20/2025</a:t>
+              <a:t>9/25/2025</a:t>
             </a:fld>
             <a:endParaRPr lang="en-US"/>
           </a:p>
@@ -3725,7 +3758,7 @@
           <a:p>
             <a:fld id="{CCE55368-DE8C-481A-9FFC-45CFE5380273}" type="datetimeFigureOut">
               <a:rPr lang="en-US" smtClean="0"/>
-              <a:t>9/20/2025</a:t>
+              <a:t>9/25/2025</a:t>
             </a:fld>
             <a:endParaRPr lang="en-US"/>
           </a:p>
@@ -3966,7 +3999,7 @@
           <a:p>
             <a:fld id="{CCE55368-DE8C-481A-9FFC-45CFE5380273}" type="datetimeFigureOut">
               <a:rPr lang="en-US" smtClean="0"/>
-              <a:t>9/20/2025</a:t>
+              <a:t>9/25/2025</a:t>
             </a:fld>
             <a:endParaRPr lang="en-US"/>
           </a:p>
@@ -4449,4329 +4482,7 @@
 </p:sld>
 </file>
 
-<file path=ppt/slides/slide2.xml><?xml version="1.0" encoding="utf-8"?>
-<p:sld xmlns:a="http://schemas.openxmlformats.org/drawingml/2006/main" xmlns:r="http://schemas.openxmlformats.org/officeDocument/2006/relationships" xmlns:p="http://schemas.openxmlformats.org/presentationml/2006/main">
-  <p:cSld>
-    <p:spTree>
-      <p:nvGrpSpPr>
-        <p:cNvPr id="1" name=""/>
-        <p:cNvGrpSpPr/>
-        <p:nvPr/>
-      </p:nvGrpSpPr>
-      <p:grpSpPr>
-        <a:xfrm>
-          <a:off x="0" y="0"/>
-          <a:ext cx="0" cy="0"/>
-          <a:chOff x="0" y="0"/>
-          <a:chExt cx="0" cy="0"/>
-        </a:xfrm>
-      </p:grpSpPr>
-      <p:sp>
-        <p:nvSpPr>
-          <p:cNvPr id="3" name="Rectangle 2">
-            <a:extLst>
-              <a:ext uri="{FF2B5EF4-FFF2-40B4-BE49-F238E27FC236}">
-                <a16:creationId xmlns:a16="http://schemas.microsoft.com/office/drawing/2014/main" id="{3B1FF5EB-2BC9-C328-43F3-F3AD2B2D8C7C}"/>
-              </a:ext>
-            </a:extLst>
-          </p:cNvPr>
-          <p:cNvSpPr/>
-          <p:nvPr/>
-        </p:nvSpPr>
-        <p:spPr>
-          <a:xfrm>
-            <a:off x="6597396" y="2631948"/>
-            <a:ext cx="557784" cy="411480"/>
-          </a:xfrm>
-          <a:prstGeom prst="rect">
-            <a:avLst/>
-          </a:prstGeom>
-        </p:spPr>
-        <p:style>
-          <a:lnRef idx="2">
-            <a:schemeClr val="accent1">
-              <a:shade val="15000"/>
-            </a:schemeClr>
-          </a:lnRef>
-          <a:fillRef idx="1">
-            <a:schemeClr val="accent1"/>
-          </a:fillRef>
-          <a:effectRef idx="0">
-            <a:schemeClr val="accent1"/>
-          </a:effectRef>
-          <a:fontRef idx="minor">
-            <a:schemeClr val="lt1"/>
-          </a:fontRef>
-        </p:style>
-        <p:txBody>
-          <a:bodyPr rtlCol="0" anchor="ctr"/>
-          <a:lstStyle/>
-          <a:p>
-            <a:pPr algn="ctr"/>
-            <a:r>
-              <a:rPr lang="en-US" dirty="0"/>
-              <a:t>PID</a:t>
-            </a:r>
-          </a:p>
-        </p:txBody>
-      </p:sp>
-      <p:sp>
-        <p:nvSpPr>
-          <p:cNvPr id="6" name="Rectangle 5">
-            <a:extLst>
-              <a:ext uri="{FF2B5EF4-FFF2-40B4-BE49-F238E27FC236}">
-                <a16:creationId xmlns:a16="http://schemas.microsoft.com/office/drawing/2014/main" id="{42B021F0-E2AB-0CF0-B307-02686C5871C4}"/>
-              </a:ext>
-            </a:extLst>
-          </p:cNvPr>
-          <p:cNvSpPr/>
-          <p:nvPr/>
-        </p:nvSpPr>
-        <p:spPr>
-          <a:xfrm>
-            <a:off x="7653528" y="2628900"/>
-            <a:ext cx="978408" cy="1961388"/>
-          </a:xfrm>
-          <a:prstGeom prst="rect">
-            <a:avLst/>
-          </a:prstGeom>
-        </p:spPr>
-        <p:style>
-          <a:lnRef idx="2">
-            <a:schemeClr val="accent1">
-              <a:shade val="15000"/>
-            </a:schemeClr>
-          </a:lnRef>
-          <a:fillRef idx="1">
-            <a:schemeClr val="accent1"/>
-          </a:fillRef>
-          <a:effectRef idx="0">
-            <a:schemeClr val="accent1"/>
-          </a:effectRef>
-          <a:fontRef idx="minor">
-            <a:schemeClr val="lt1"/>
-          </a:fontRef>
-        </p:style>
-        <p:txBody>
-          <a:bodyPr rtlCol="0" anchor="ctr"/>
-          <a:lstStyle/>
-          <a:p>
-            <a:pPr algn="ctr"/>
-            <a:r>
-              <a:rPr lang="en-US" sz="1100" dirty="0"/>
-              <a:t>Appropriate Summations</a:t>
-            </a:r>
-          </a:p>
-        </p:txBody>
-      </p:sp>
-      <p:sp>
-        <p:nvSpPr>
-          <p:cNvPr id="7" name="Rectangle 6">
-            <a:extLst>
-              <a:ext uri="{FF2B5EF4-FFF2-40B4-BE49-F238E27FC236}">
-                <a16:creationId xmlns:a16="http://schemas.microsoft.com/office/drawing/2014/main" id="{9BA42286-B363-DF76-BC64-BF5571AAC905}"/>
-              </a:ext>
-            </a:extLst>
-          </p:cNvPr>
-          <p:cNvSpPr/>
-          <p:nvPr/>
-        </p:nvSpPr>
-        <p:spPr>
-          <a:xfrm>
-            <a:off x="6603492" y="3141155"/>
-            <a:ext cx="557784" cy="411480"/>
-          </a:xfrm>
-          <a:prstGeom prst="rect">
-            <a:avLst/>
-          </a:prstGeom>
-        </p:spPr>
-        <p:style>
-          <a:lnRef idx="2">
-            <a:schemeClr val="accent1">
-              <a:shade val="15000"/>
-            </a:schemeClr>
-          </a:lnRef>
-          <a:fillRef idx="1">
-            <a:schemeClr val="accent1"/>
-          </a:fillRef>
-          <a:effectRef idx="0">
-            <a:schemeClr val="accent1"/>
-          </a:effectRef>
-          <a:fontRef idx="minor">
-            <a:schemeClr val="lt1"/>
-          </a:fontRef>
-        </p:style>
-        <p:txBody>
-          <a:bodyPr rtlCol="0" anchor="ctr"/>
-          <a:lstStyle/>
-          <a:p>
-            <a:pPr algn="ctr"/>
-            <a:r>
-              <a:rPr lang="en-US" dirty="0"/>
-              <a:t>PID</a:t>
-            </a:r>
-          </a:p>
-        </p:txBody>
-      </p:sp>
-      <p:sp>
-        <p:nvSpPr>
-          <p:cNvPr id="8" name="Rectangle 7">
-            <a:extLst>
-              <a:ext uri="{FF2B5EF4-FFF2-40B4-BE49-F238E27FC236}">
-                <a16:creationId xmlns:a16="http://schemas.microsoft.com/office/drawing/2014/main" id="{AC0C3396-95CA-30DB-097B-5B426018D2E5}"/>
-              </a:ext>
-            </a:extLst>
-          </p:cNvPr>
-          <p:cNvSpPr/>
-          <p:nvPr/>
-        </p:nvSpPr>
-        <p:spPr>
-          <a:xfrm>
-            <a:off x="6597396" y="3666553"/>
-            <a:ext cx="557784" cy="411480"/>
-          </a:xfrm>
-          <a:prstGeom prst="rect">
-            <a:avLst/>
-          </a:prstGeom>
-        </p:spPr>
-        <p:style>
-          <a:lnRef idx="2">
-            <a:schemeClr val="accent1">
-              <a:shade val="15000"/>
-            </a:schemeClr>
-          </a:lnRef>
-          <a:fillRef idx="1">
-            <a:schemeClr val="accent1"/>
-          </a:fillRef>
-          <a:effectRef idx="0">
-            <a:schemeClr val="accent1"/>
-          </a:effectRef>
-          <a:fontRef idx="minor">
-            <a:schemeClr val="lt1"/>
-          </a:fontRef>
-        </p:style>
-        <p:txBody>
-          <a:bodyPr rtlCol="0" anchor="ctr"/>
-          <a:lstStyle/>
-          <a:p>
-            <a:pPr algn="ctr"/>
-            <a:r>
-              <a:rPr lang="en-US" dirty="0"/>
-              <a:t>PID</a:t>
-            </a:r>
-          </a:p>
-        </p:txBody>
-      </p:sp>
-      <p:sp>
-        <p:nvSpPr>
-          <p:cNvPr id="9" name="Rectangle 8">
-            <a:extLst>
-              <a:ext uri="{FF2B5EF4-FFF2-40B4-BE49-F238E27FC236}">
-                <a16:creationId xmlns:a16="http://schemas.microsoft.com/office/drawing/2014/main" id="{6814009D-8479-7D79-6A41-0C4A09EDF22D}"/>
-              </a:ext>
-            </a:extLst>
-          </p:cNvPr>
-          <p:cNvSpPr/>
-          <p:nvPr/>
-        </p:nvSpPr>
-        <p:spPr>
-          <a:xfrm>
-            <a:off x="6597396" y="4175760"/>
-            <a:ext cx="557784" cy="411480"/>
-          </a:xfrm>
-          <a:prstGeom prst="rect">
-            <a:avLst/>
-          </a:prstGeom>
-        </p:spPr>
-        <p:style>
-          <a:lnRef idx="2">
-            <a:schemeClr val="accent1">
-              <a:shade val="15000"/>
-            </a:schemeClr>
-          </a:lnRef>
-          <a:fillRef idx="1">
-            <a:schemeClr val="accent1"/>
-          </a:fillRef>
-          <a:effectRef idx="0">
-            <a:schemeClr val="accent1"/>
-          </a:effectRef>
-          <a:fontRef idx="minor">
-            <a:schemeClr val="lt1"/>
-          </a:fontRef>
-        </p:style>
-        <p:txBody>
-          <a:bodyPr rtlCol="0" anchor="ctr"/>
-          <a:lstStyle/>
-          <a:p>
-            <a:pPr algn="ctr"/>
-            <a:r>
-              <a:rPr lang="en-US" dirty="0"/>
-              <a:t>PID</a:t>
-            </a:r>
-          </a:p>
-        </p:txBody>
-      </p:sp>
-      <p:sp>
-        <p:nvSpPr>
-          <p:cNvPr id="10" name="Rectangle 9">
-            <a:extLst>
-              <a:ext uri="{FF2B5EF4-FFF2-40B4-BE49-F238E27FC236}">
-                <a16:creationId xmlns:a16="http://schemas.microsoft.com/office/drawing/2014/main" id="{116CF671-FC1E-0E5D-609A-4F9F459290D1}"/>
-              </a:ext>
-            </a:extLst>
-          </p:cNvPr>
-          <p:cNvSpPr/>
-          <p:nvPr/>
-        </p:nvSpPr>
-        <p:spPr>
-          <a:xfrm>
-            <a:off x="5001006" y="3132202"/>
-            <a:ext cx="557784" cy="411480"/>
-          </a:xfrm>
-          <a:prstGeom prst="rect">
-            <a:avLst/>
-          </a:prstGeom>
-        </p:spPr>
-        <p:style>
-          <a:lnRef idx="2">
-            <a:schemeClr val="accent1">
-              <a:shade val="15000"/>
-            </a:schemeClr>
-          </a:lnRef>
-          <a:fillRef idx="1">
-            <a:schemeClr val="accent1"/>
-          </a:fillRef>
-          <a:effectRef idx="0">
-            <a:schemeClr val="accent1"/>
-          </a:effectRef>
-          <a:fontRef idx="minor">
-            <a:schemeClr val="lt1"/>
-          </a:fontRef>
-        </p:style>
-        <p:txBody>
-          <a:bodyPr rtlCol="0" anchor="ctr"/>
-          <a:lstStyle/>
-          <a:p>
-            <a:pPr algn="ctr"/>
-            <a:r>
-              <a:rPr lang="en-US" dirty="0"/>
-              <a:t>PID</a:t>
-            </a:r>
-          </a:p>
-        </p:txBody>
-      </p:sp>
-      <p:sp>
-        <p:nvSpPr>
-          <p:cNvPr id="11" name="Rectangle 10">
-            <a:extLst>
-              <a:ext uri="{FF2B5EF4-FFF2-40B4-BE49-F238E27FC236}">
-                <a16:creationId xmlns:a16="http://schemas.microsoft.com/office/drawing/2014/main" id="{E46CB958-0718-F993-3D55-6CA6D80DAF69}"/>
-              </a:ext>
-            </a:extLst>
-          </p:cNvPr>
-          <p:cNvSpPr/>
-          <p:nvPr/>
-        </p:nvSpPr>
-        <p:spPr>
-          <a:xfrm>
-            <a:off x="5001006" y="2619756"/>
-            <a:ext cx="557784" cy="411480"/>
-          </a:xfrm>
-          <a:prstGeom prst="rect">
-            <a:avLst/>
-          </a:prstGeom>
-        </p:spPr>
-        <p:style>
-          <a:lnRef idx="2">
-            <a:schemeClr val="accent1">
-              <a:shade val="15000"/>
-            </a:schemeClr>
-          </a:lnRef>
-          <a:fillRef idx="1">
-            <a:schemeClr val="accent1"/>
-          </a:fillRef>
-          <a:effectRef idx="0">
-            <a:schemeClr val="accent1"/>
-          </a:effectRef>
-          <a:fontRef idx="minor">
-            <a:schemeClr val="lt1"/>
-          </a:fontRef>
-        </p:style>
-        <p:txBody>
-          <a:bodyPr rtlCol="0" anchor="ctr"/>
-          <a:lstStyle/>
-          <a:p>
-            <a:pPr algn="ctr"/>
-            <a:r>
-              <a:rPr lang="en-US" dirty="0"/>
-              <a:t>PID</a:t>
-            </a:r>
-          </a:p>
-        </p:txBody>
-      </p:sp>
-      <p:sp>
-        <p:nvSpPr>
-          <p:cNvPr id="12" name="Rectangle 11">
-            <a:extLst>
-              <a:ext uri="{FF2B5EF4-FFF2-40B4-BE49-F238E27FC236}">
-                <a16:creationId xmlns:a16="http://schemas.microsoft.com/office/drawing/2014/main" id="{A29F5EC1-148D-7645-877C-B08CCD53AD73}"/>
-              </a:ext>
-            </a:extLst>
-          </p:cNvPr>
-          <p:cNvSpPr/>
-          <p:nvPr/>
-        </p:nvSpPr>
-        <p:spPr>
-          <a:xfrm>
-            <a:off x="9123426" y="2619756"/>
-            <a:ext cx="649986" cy="423672"/>
-          </a:xfrm>
-          <a:prstGeom prst="rect">
-            <a:avLst/>
-          </a:prstGeom>
-        </p:spPr>
-        <p:style>
-          <a:lnRef idx="2">
-            <a:schemeClr val="accent1">
-              <a:shade val="15000"/>
-            </a:schemeClr>
-          </a:lnRef>
-          <a:fillRef idx="1">
-            <a:schemeClr val="accent1"/>
-          </a:fillRef>
-          <a:effectRef idx="0">
-            <a:schemeClr val="accent1"/>
-          </a:effectRef>
-          <a:fontRef idx="minor">
-            <a:schemeClr val="lt1"/>
-          </a:fontRef>
-        </p:style>
-        <p:txBody>
-          <a:bodyPr rtlCol="0" anchor="ctr"/>
-          <a:lstStyle/>
-          <a:p>
-            <a:pPr algn="ctr"/>
-            <a:r>
-              <a:rPr lang="en-US" sz="1000" dirty="0"/>
-              <a:t>Duty Cycle to PWM</a:t>
-            </a:r>
-          </a:p>
-        </p:txBody>
-      </p:sp>
-      <p:sp>
-        <p:nvSpPr>
-          <p:cNvPr id="13" name="Rectangle 12">
-            <a:extLst>
-              <a:ext uri="{FF2B5EF4-FFF2-40B4-BE49-F238E27FC236}">
-                <a16:creationId xmlns:a16="http://schemas.microsoft.com/office/drawing/2014/main" id="{B568F542-76CD-9630-A7BF-6626FB79C6BA}"/>
-              </a:ext>
-            </a:extLst>
-          </p:cNvPr>
-          <p:cNvSpPr/>
-          <p:nvPr/>
-        </p:nvSpPr>
-        <p:spPr>
-          <a:xfrm>
-            <a:off x="9123426" y="3128963"/>
-            <a:ext cx="649986" cy="423672"/>
-          </a:xfrm>
-          <a:prstGeom prst="rect">
-            <a:avLst/>
-          </a:prstGeom>
-        </p:spPr>
-        <p:style>
-          <a:lnRef idx="2">
-            <a:schemeClr val="accent1">
-              <a:shade val="15000"/>
-            </a:schemeClr>
-          </a:lnRef>
-          <a:fillRef idx="1">
-            <a:schemeClr val="accent1"/>
-          </a:fillRef>
-          <a:effectRef idx="0">
-            <a:schemeClr val="accent1"/>
-          </a:effectRef>
-          <a:fontRef idx="minor">
-            <a:schemeClr val="lt1"/>
-          </a:fontRef>
-        </p:style>
-        <p:txBody>
-          <a:bodyPr rtlCol="0" anchor="ctr"/>
-          <a:lstStyle/>
-          <a:p>
-            <a:pPr algn="ctr"/>
-            <a:r>
-              <a:rPr lang="en-US" sz="1000" dirty="0"/>
-              <a:t>Duty Cycle to PWM</a:t>
-            </a:r>
-          </a:p>
-        </p:txBody>
-      </p:sp>
-      <p:sp>
-        <p:nvSpPr>
-          <p:cNvPr id="14" name="Rectangle 13">
-            <a:extLst>
-              <a:ext uri="{FF2B5EF4-FFF2-40B4-BE49-F238E27FC236}">
-                <a16:creationId xmlns:a16="http://schemas.microsoft.com/office/drawing/2014/main" id="{BAD11D63-B2EC-E092-9D15-D884265425FD}"/>
-              </a:ext>
-            </a:extLst>
-          </p:cNvPr>
-          <p:cNvSpPr/>
-          <p:nvPr/>
-        </p:nvSpPr>
-        <p:spPr>
-          <a:xfrm>
-            <a:off x="9124188" y="3654361"/>
-            <a:ext cx="649986" cy="423672"/>
-          </a:xfrm>
-          <a:prstGeom prst="rect">
-            <a:avLst/>
-          </a:prstGeom>
-        </p:spPr>
-        <p:style>
-          <a:lnRef idx="2">
-            <a:schemeClr val="accent1">
-              <a:shade val="15000"/>
-            </a:schemeClr>
-          </a:lnRef>
-          <a:fillRef idx="1">
-            <a:schemeClr val="accent1"/>
-          </a:fillRef>
-          <a:effectRef idx="0">
-            <a:schemeClr val="accent1"/>
-          </a:effectRef>
-          <a:fontRef idx="minor">
-            <a:schemeClr val="lt1"/>
-          </a:fontRef>
-        </p:style>
-        <p:txBody>
-          <a:bodyPr rtlCol="0" anchor="ctr"/>
-          <a:lstStyle/>
-          <a:p>
-            <a:pPr algn="ctr"/>
-            <a:r>
-              <a:rPr lang="en-US" sz="1000" dirty="0"/>
-              <a:t>Duty Cycle to PWM</a:t>
-            </a:r>
-          </a:p>
-        </p:txBody>
-      </p:sp>
-      <p:sp>
-        <p:nvSpPr>
-          <p:cNvPr id="15" name="Rectangle 14">
-            <a:extLst>
-              <a:ext uri="{FF2B5EF4-FFF2-40B4-BE49-F238E27FC236}">
-                <a16:creationId xmlns:a16="http://schemas.microsoft.com/office/drawing/2014/main" id="{7778E790-C610-C76F-CE0F-6436D04F655B}"/>
-              </a:ext>
-            </a:extLst>
-          </p:cNvPr>
-          <p:cNvSpPr/>
-          <p:nvPr/>
-        </p:nvSpPr>
-        <p:spPr>
-          <a:xfrm>
-            <a:off x="9124188" y="4163568"/>
-            <a:ext cx="649986" cy="423672"/>
-          </a:xfrm>
-          <a:prstGeom prst="rect">
-            <a:avLst/>
-          </a:prstGeom>
-        </p:spPr>
-        <p:style>
-          <a:lnRef idx="2">
-            <a:schemeClr val="accent1">
-              <a:shade val="15000"/>
-            </a:schemeClr>
-          </a:lnRef>
-          <a:fillRef idx="1">
-            <a:schemeClr val="accent1"/>
-          </a:fillRef>
-          <a:effectRef idx="0">
-            <a:schemeClr val="accent1"/>
-          </a:effectRef>
-          <a:fontRef idx="minor">
-            <a:schemeClr val="lt1"/>
-          </a:fontRef>
-        </p:style>
-        <p:txBody>
-          <a:bodyPr rtlCol="0" anchor="ctr"/>
-          <a:lstStyle/>
-          <a:p>
-            <a:pPr algn="ctr"/>
-            <a:r>
-              <a:rPr lang="en-US" sz="1000" dirty="0"/>
-              <a:t>Duty Cycle to PWM</a:t>
-            </a:r>
-          </a:p>
-        </p:txBody>
-      </p:sp>
-      <p:sp>
-        <p:nvSpPr>
-          <p:cNvPr id="16" name="Rectangle 15">
-            <a:extLst>
-              <a:ext uri="{FF2B5EF4-FFF2-40B4-BE49-F238E27FC236}">
-                <a16:creationId xmlns:a16="http://schemas.microsoft.com/office/drawing/2014/main" id="{B36CE7DF-1DFC-873C-D8BC-636ECF66942A}"/>
-              </a:ext>
-            </a:extLst>
-          </p:cNvPr>
-          <p:cNvSpPr/>
-          <p:nvPr/>
-        </p:nvSpPr>
-        <p:spPr>
-          <a:xfrm>
-            <a:off x="10264902" y="2628900"/>
-            <a:ext cx="978408" cy="1961388"/>
-          </a:xfrm>
-          <a:prstGeom prst="rect">
-            <a:avLst/>
-          </a:prstGeom>
-        </p:spPr>
-        <p:style>
-          <a:lnRef idx="2">
-            <a:schemeClr val="accent1">
-              <a:shade val="15000"/>
-            </a:schemeClr>
-          </a:lnRef>
-          <a:fillRef idx="1">
-            <a:schemeClr val="accent1"/>
-          </a:fillRef>
-          <a:effectRef idx="0">
-            <a:schemeClr val="accent1"/>
-          </a:effectRef>
-          <a:fontRef idx="minor">
-            <a:schemeClr val="lt1"/>
-          </a:fontRef>
-        </p:style>
-        <p:txBody>
-          <a:bodyPr rtlCol="0" anchor="ctr"/>
-          <a:lstStyle/>
-          <a:p>
-            <a:pPr algn="ctr"/>
-            <a:r>
-              <a:rPr lang="en-US" sz="1100" dirty="0"/>
-              <a:t>Drone</a:t>
-            </a:r>
-          </a:p>
-        </p:txBody>
-      </p:sp>
-      <p:grpSp>
-        <p:nvGrpSpPr>
-          <p:cNvPr id="21" name="Group 20">
-            <a:extLst>
-              <a:ext uri="{FF2B5EF4-FFF2-40B4-BE49-F238E27FC236}">
-                <a16:creationId xmlns:a16="http://schemas.microsoft.com/office/drawing/2014/main" id="{B40A2BBF-75F9-7C12-1DE7-CEE4392DEABE}"/>
-              </a:ext>
-            </a:extLst>
-          </p:cNvPr>
-          <p:cNvGrpSpPr/>
-          <p:nvPr/>
-        </p:nvGrpSpPr>
-        <p:grpSpPr>
-          <a:xfrm>
-            <a:off x="6037326" y="2674528"/>
-            <a:ext cx="393192" cy="399140"/>
-            <a:chOff x="5422392" y="1652778"/>
-            <a:chExt cx="393192" cy="399140"/>
-          </a:xfrm>
-        </p:grpSpPr>
-        <p:sp>
-          <p:nvSpPr>
-            <p:cNvPr id="18" name="Flowchart: Connector 17">
-              <a:extLst>
-                <a:ext uri="{FF2B5EF4-FFF2-40B4-BE49-F238E27FC236}">
-                  <a16:creationId xmlns:a16="http://schemas.microsoft.com/office/drawing/2014/main" id="{252EE999-1C7C-7A72-DB29-13369B4F7AF6}"/>
-                </a:ext>
-              </a:extLst>
-            </p:cNvPr>
-            <p:cNvSpPr/>
-            <p:nvPr/>
-          </p:nvSpPr>
-          <p:spPr>
-            <a:xfrm>
-              <a:off x="5495544" y="1652778"/>
-              <a:ext cx="320040" cy="315468"/>
-            </a:xfrm>
-            <a:prstGeom prst="flowChartConnector">
-              <a:avLst/>
-            </a:prstGeom>
-            <a:solidFill>
-              <a:schemeClr val="bg1"/>
-            </a:solidFill>
-          </p:spPr>
-          <p:style>
-            <a:lnRef idx="2">
-              <a:schemeClr val="accent1">
-                <a:shade val="15000"/>
-              </a:schemeClr>
-            </a:lnRef>
-            <a:fillRef idx="1">
-              <a:schemeClr val="accent1"/>
-            </a:fillRef>
-            <a:effectRef idx="0">
-              <a:schemeClr val="accent1"/>
-            </a:effectRef>
-            <a:fontRef idx="minor">
-              <a:schemeClr val="lt1"/>
-            </a:fontRef>
-          </p:style>
-          <p:txBody>
-            <a:bodyPr rtlCol="0" anchor="ctr"/>
-            <a:lstStyle/>
-            <a:p>
-              <a:pPr algn="ctr"/>
-              <a:endParaRPr lang="en-US" dirty="0">
-                <a:solidFill>
-                  <a:schemeClr val="tx1"/>
-                </a:solidFill>
-              </a:endParaRPr>
-            </a:p>
-          </p:txBody>
-        </p:sp>
-        <p:sp>
-          <p:nvSpPr>
-            <p:cNvPr id="19" name="TextBox 18">
-              <a:extLst>
-                <a:ext uri="{FF2B5EF4-FFF2-40B4-BE49-F238E27FC236}">
-                  <a16:creationId xmlns:a16="http://schemas.microsoft.com/office/drawing/2014/main" id="{A47DEA48-6236-12E5-2A2B-7FBA1AC6666B}"/>
-                </a:ext>
-              </a:extLst>
-            </p:cNvPr>
-            <p:cNvSpPr txBox="1"/>
-            <p:nvPr/>
-          </p:nvSpPr>
-          <p:spPr>
-            <a:xfrm>
-              <a:off x="5422392" y="1679707"/>
-              <a:ext cx="237744" cy="261610"/>
-            </a:xfrm>
-            <a:prstGeom prst="rect">
-              <a:avLst/>
-            </a:prstGeom>
-            <a:noFill/>
-          </p:spPr>
-          <p:txBody>
-            <a:bodyPr wrap="square" rtlCol="0">
-              <a:spAutoFit/>
-            </a:bodyPr>
-            <a:lstStyle/>
-            <a:p>
-              <a:r>
-                <a:rPr lang="en-US" sz="1050" dirty="0"/>
-                <a:t>+</a:t>
-              </a:r>
-            </a:p>
-          </p:txBody>
-        </p:sp>
-        <p:sp>
-          <p:nvSpPr>
-            <p:cNvPr id="20" name="TextBox 19">
-              <a:extLst>
-                <a:ext uri="{FF2B5EF4-FFF2-40B4-BE49-F238E27FC236}">
-                  <a16:creationId xmlns:a16="http://schemas.microsoft.com/office/drawing/2014/main" id="{33DD7D0D-E84C-1D2A-3CB8-F503B4919B5C}"/>
-                </a:ext>
-              </a:extLst>
-            </p:cNvPr>
-            <p:cNvSpPr txBox="1"/>
-            <p:nvPr/>
-          </p:nvSpPr>
-          <p:spPr>
-            <a:xfrm>
-              <a:off x="5518404" y="1713364"/>
-              <a:ext cx="237744" cy="338554"/>
-            </a:xfrm>
-            <a:prstGeom prst="rect">
-              <a:avLst/>
-            </a:prstGeom>
-            <a:noFill/>
-          </p:spPr>
-          <p:txBody>
-            <a:bodyPr wrap="square" rtlCol="0">
-              <a:spAutoFit/>
-            </a:bodyPr>
-            <a:lstStyle/>
-            <a:p>
-              <a:r>
-                <a:rPr lang="en-US" sz="1600" dirty="0"/>
-                <a:t>-</a:t>
-              </a:r>
-              <a:endParaRPr lang="en-US" sz="1050" dirty="0"/>
-            </a:p>
-          </p:txBody>
-        </p:sp>
-      </p:grpSp>
-      <p:cxnSp>
-        <p:nvCxnSpPr>
-          <p:cNvPr id="27" name="Straight Arrow Connector 26">
-            <a:extLst>
-              <a:ext uri="{FF2B5EF4-FFF2-40B4-BE49-F238E27FC236}">
-                <a16:creationId xmlns:a16="http://schemas.microsoft.com/office/drawing/2014/main" id="{6213CD43-11A7-8DAB-8C92-1310D08021DB}"/>
-              </a:ext>
-            </a:extLst>
-          </p:cNvPr>
-          <p:cNvCxnSpPr>
-            <a:cxnSpLocks/>
-            <a:stCxn id="11" idx="3"/>
-            <a:endCxn id="18" idx="2"/>
-          </p:cNvCxnSpPr>
-          <p:nvPr/>
-        </p:nvCxnSpPr>
-        <p:spPr>
-          <a:xfrm>
-            <a:off x="5558790" y="2825496"/>
-            <a:ext cx="551688" cy="6766"/>
-          </a:xfrm>
-          <a:prstGeom prst="straightConnector1">
-            <a:avLst/>
-          </a:prstGeom>
-          <a:ln>
-            <a:tailEnd type="triangle"/>
-          </a:ln>
-        </p:spPr>
-        <p:style>
-          <a:lnRef idx="2">
-            <a:schemeClr val="accent1"/>
-          </a:lnRef>
-          <a:fillRef idx="0">
-            <a:schemeClr val="accent1"/>
-          </a:fillRef>
-          <a:effectRef idx="1">
-            <a:schemeClr val="accent1"/>
-          </a:effectRef>
-          <a:fontRef idx="minor">
-            <a:schemeClr val="tx1"/>
-          </a:fontRef>
-        </p:style>
-      </p:cxnSp>
-      <p:cxnSp>
-        <p:nvCxnSpPr>
-          <p:cNvPr id="32" name="Straight Arrow Connector 31">
-            <a:extLst>
-              <a:ext uri="{FF2B5EF4-FFF2-40B4-BE49-F238E27FC236}">
-                <a16:creationId xmlns:a16="http://schemas.microsoft.com/office/drawing/2014/main" id="{D3641EEA-A38E-0A3D-B148-B5F2C6051AA8}"/>
-              </a:ext>
-            </a:extLst>
-          </p:cNvPr>
-          <p:cNvCxnSpPr>
-            <a:cxnSpLocks/>
-            <a:stCxn id="18" idx="6"/>
-            <a:endCxn id="3" idx="1"/>
-          </p:cNvCxnSpPr>
-          <p:nvPr/>
-        </p:nvCxnSpPr>
-        <p:spPr>
-          <a:xfrm>
-            <a:off x="6430518" y="2832262"/>
-            <a:ext cx="166878" cy="5426"/>
-          </a:xfrm>
-          <a:prstGeom prst="straightConnector1">
-            <a:avLst/>
-          </a:prstGeom>
-          <a:ln>
-            <a:tailEnd type="triangle"/>
-          </a:ln>
-        </p:spPr>
-        <p:style>
-          <a:lnRef idx="2">
-            <a:schemeClr val="accent1"/>
-          </a:lnRef>
-          <a:fillRef idx="0">
-            <a:schemeClr val="accent1"/>
-          </a:fillRef>
-          <a:effectRef idx="1">
-            <a:schemeClr val="accent1"/>
-          </a:effectRef>
-          <a:fontRef idx="minor">
-            <a:schemeClr val="tx1"/>
-          </a:fontRef>
-        </p:style>
-      </p:cxnSp>
-      <p:cxnSp>
-        <p:nvCxnSpPr>
-          <p:cNvPr id="35" name="Straight Arrow Connector 34">
-            <a:extLst>
-              <a:ext uri="{FF2B5EF4-FFF2-40B4-BE49-F238E27FC236}">
-                <a16:creationId xmlns:a16="http://schemas.microsoft.com/office/drawing/2014/main" id="{6F3368D1-F2EB-DF8A-491F-2321998ED38F}"/>
-              </a:ext>
-            </a:extLst>
-          </p:cNvPr>
-          <p:cNvCxnSpPr>
-            <a:cxnSpLocks/>
-            <a:stCxn id="3" idx="3"/>
-          </p:cNvCxnSpPr>
-          <p:nvPr/>
-        </p:nvCxnSpPr>
-        <p:spPr>
-          <a:xfrm>
-            <a:off x="7155180" y="2837688"/>
-            <a:ext cx="498348" cy="0"/>
-          </a:xfrm>
-          <a:prstGeom prst="straightConnector1">
-            <a:avLst/>
-          </a:prstGeom>
-          <a:ln>
-            <a:tailEnd type="triangle"/>
-          </a:ln>
-        </p:spPr>
-        <p:style>
-          <a:lnRef idx="2">
-            <a:schemeClr val="accent1"/>
-          </a:lnRef>
-          <a:fillRef idx="0">
-            <a:schemeClr val="accent1"/>
-          </a:fillRef>
-          <a:effectRef idx="1">
-            <a:schemeClr val="accent1"/>
-          </a:effectRef>
-          <a:fontRef idx="minor">
-            <a:schemeClr val="tx1"/>
-          </a:fontRef>
-        </p:style>
-      </p:cxnSp>
-      <p:cxnSp>
-        <p:nvCxnSpPr>
-          <p:cNvPr id="38" name="Straight Arrow Connector 37">
-            <a:extLst>
-              <a:ext uri="{FF2B5EF4-FFF2-40B4-BE49-F238E27FC236}">
-                <a16:creationId xmlns:a16="http://schemas.microsoft.com/office/drawing/2014/main" id="{7D1FBBB2-1AC6-916E-DEE2-667C77285361}"/>
-              </a:ext>
-            </a:extLst>
-          </p:cNvPr>
-          <p:cNvCxnSpPr>
-            <a:stCxn id="7" idx="3"/>
-          </p:cNvCxnSpPr>
-          <p:nvPr/>
-        </p:nvCxnSpPr>
-        <p:spPr>
-          <a:xfrm>
-            <a:off x="7161276" y="3346895"/>
-            <a:ext cx="492252" cy="0"/>
-          </a:xfrm>
-          <a:prstGeom prst="straightConnector1">
-            <a:avLst/>
-          </a:prstGeom>
-          <a:ln>
-            <a:tailEnd type="triangle"/>
-          </a:ln>
-        </p:spPr>
-        <p:style>
-          <a:lnRef idx="2">
-            <a:schemeClr val="accent1"/>
-          </a:lnRef>
-          <a:fillRef idx="0">
-            <a:schemeClr val="accent1"/>
-          </a:fillRef>
-          <a:effectRef idx="1">
-            <a:schemeClr val="accent1"/>
-          </a:effectRef>
-          <a:fontRef idx="minor">
-            <a:schemeClr val="tx1"/>
-          </a:fontRef>
-        </p:style>
-      </p:cxnSp>
-      <p:cxnSp>
-        <p:nvCxnSpPr>
-          <p:cNvPr id="40" name="Straight Arrow Connector 39">
-            <a:extLst>
-              <a:ext uri="{FF2B5EF4-FFF2-40B4-BE49-F238E27FC236}">
-                <a16:creationId xmlns:a16="http://schemas.microsoft.com/office/drawing/2014/main" id="{246B04CE-2D0D-CF8B-044F-E3A483C510C3}"/>
-              </a:ext>
-            </a:extLst>
-          </p:cNvPr>
-          <p:cNvCxnSpPr>
-            <a:stCxn id="8" idx="3"/>
-          </p:cNvCxnSpPr>
-          <p:nvPr/>
-        </p:nvCxnSpPr>
-        <p:spPr>
-          <a:xfrm flipV="1">
-            <a:off x="7155180" y="3866197"/>
-            <a:ext cx="498348" cy="6096"/>
-          </a:xfrm>
-          <a:prstGeom prst="straightConnector1">
-            <a:avLst/>
-          </a:prstGeom>
-          <a:ln>
-            <a:tailEnd type="triangle"/>
-          </a:ln>
-        </p:spPr>
-        <p:style>
-          <a:lnRef idx="2">
-            <a:schemeClr val="accent1"/>
-          </a:lnRef>
-          <a:fillRef idx="0">
-            <a:schemeClr val="accent1"/>
-          </a:fillRef>
-          <a:effectRef idx="1">
-            <a:schemeClr val="accent1"/>
-          </a:effectRef>
-          <a:fontRef idx="minor">
-            <a:schemeClr val="tx1"/>
-          </a:fontRef>
-        </p:style>
-      </p:cxnSp>
-      <p:cxnSp>
-        <p:nvCxnSpPr>
-          <p:cNvPr id="42" name="Straight Arrow Connector 41">
-            <a:extLst>
-              <a:ext uri="{FF2B5EF4-FFF2-40B4-BE49-F238E27FC236}">
-                <a16:creationId xmlns:a16="http://schemas.microsoft.com/office/drawing/2014/main" id="{E69BF800-CA24-EF3D-9B8E-973946EDB905}"/>
-              </a:ext>
-            </a:extLst>
-          </p:cNvPr>
-          <p:cNvCxnSpPr>
-            <a:stCxn id="9" idx="3"/>
-          </p:cNvCxnSpPr>
-          <p:nvPr/>
-        </p:nvCxnSpPr>
-        <p:spPr>
-          <a:xfrm flipV="1">
-            <a:off x="7155180" y="4375404"/>
-            <a:ext cx="498348" cy="6096"/>
-          </a:xfrm>
-          <a:prstGeom prst="straightConnector1">
-            <a:avLst/>
-          </a:prstGeom>
-          <a:ln>
-            <a:tailEnd type="triangle"/>
-          </a:ln>
-        </p:spPr>
-        <p:style>
-          <a:lnRef idx="2">
-            <a:schemeClr val="accent1"/>
-          </a:lnRef>
-          <a:fillRef idx="0">
-            <a:schemeClr val="accent1"/>
-          </a:fillRef>
-          <a:effectRef idx="1">
-            <a:schemeClr val="accent1"/>
-          </a:effectRef>
-          <a:fontRef idx="minor">
-            <a:schemeClr val="tx1"/>
-          </a:fontRef>
-        </p:style>
-      </p:cxnSp>
-      <p:grpSp>
-        <p:nvGrpSpPr>
-          <p:cNvPr id="43" name="Group 42">
-            <a:extLst>
-              <a:ext uri="{FF2B5EF4-FFF2-40B4-BE49-F238E27FC236}">
-                <a16:creationId xmlns:a16="http://schemas.microsoft.com/office/drawing/2014/main" id="{C589BF6D-1890-4D0E-ABBF-5CD79865BD60}"/>
-              </a:ext>
-            </a:extLst>
-          </p:cNvPr>
-          <p:cNvGrpSpPr/>
-          <p:nvPr/>
-        </p:nvGrpSpPr>
-        <p:grpSpPr>
-          <a:xfrm>
-            <a:off x="5656326" y="3185117"/>
-            <a:ext cx="393192" cy="399140"/>
-            <a:chOff x="5422392" y="1652778"/>
-            <a:chExt cx="393192" cy="399140"/>
-          </a:xfrm>
-        </p:grpSpPr>
-        <p:sp>
-          <p:nvSpPr>
-            <p:cNvPr id="44" name="Flowchart: Connector 43">
-              <a:extLst>
-                <a:ext uri="{FF2B5EF4-FFF2-40B4-BE49-F238E27FC236}">
-                  <a16:creationId xmlns:a16="http://schemas.microsoft.com/office/drawing/2014/main" id="{591B1A51-1F9C-4804-AE43-EC2DD43BF6EB}"/>
-                </a:ext>
-              </a:extLst>
-            </p:cNvPr>
-            <p:cNvSpPr/>
-            <p:nvPr/>
-          </p:nvSpPr>
-          <p:spPr>
-            <a:xfrm>
-              <a:off x="5495544" y="1652778"/>
-              <a:ext cx="320040" cy="315468"/>
-            </a:xfrm>
-            <a:prstGeom prst="flowChartConnector">
-              <a:avLst/>
-            </a:prstGeom>
-            <a:solidFill>
-              <a:schemeClr val="bg1"/>
-            </a:solidFill>
-          </p:spPr>
-          <p:style>
-            <a:lnRef idx="2">
-              <a:schemeClr val="accent1">
-                <a:shade val="15000"/>
-              </a:schemeClr>
-            </a:lnRef>
-            <a:fillRef idx="1">
-              <a:schemeClr val="accent1"/>
-            </a:fillRef>
-            <a:effectRef idx="0">
-              <a:schemeClr val="accent1"/>
-            </a:effectRef>
-            <a:fontRef idx="minor">
-              <a:schemeClr val="lt1"/>
-            </a:fontRef>
-          </p:style>
-          <p:txBody>
-            <a:bodyPr rtlCol="0" anchor="ctr"/>
-            <a:lstStyle/>
-            <a:p>
-              <a:pPr algn="ctr"/>
-              <a:endParaRPr lang="en-US" dirty="0">
-                <a:solidFill>
-                  <a:schemeClr val="tx1"/>
-                </a:solidFill>
-              </a:endParaRPr>
-            </a:p>
-          </p:txBody>
-        </p:sp>
-        <p:sp>
-          <p:nvSpPr>
-            <p:cNvPr id="45" name="TextBox 44">
-              <a:extLst>
-                <a:ext uri="{FF2B5EF4-FFF2-40B4-BE49-F238E27FC236}">
-                  <a16:creationId xmlns:a16="http://schemas.microsoft.com/office/drawing/2014/main" id="{868E05A8-7BA3-3D38-240B-A1B8D776EA31}"/>
-                </a:ext>
-              </a:extLst>
-            </p:cNvPr>
-            <p:cNvSpPr txBox="1"/>
-            <p:nvPr/>
-          </p:nvSpPr>
-          <p:spPr>
-            <a:xfrm>
-              <a:off x="5422392" y="1679707"/>
-              <a:ext cx="237744" cy="261610"/>
-            </a:xfrm>
-            <a:prstGeom prst="rect">
-              <a:avLst/>
-            </a:prstGeom>
-            <a:noFill/>
-          </p:spPr>
-          <p:txBody>
-            <a:bodyPr wrap="square" rtlCol="0">
-              <a:spAutoFit/>
-            </a:bodyPr>
-            <a:lstStyle/>
-            <a:p>
-              <a:r>
-                <a:rPr lang="en-US" sz="1050" dirty="0"/>
-                <a:t>+</a:t>
-              </a:r>
-            </a:p>
-          </p:txBody>
-        </p:sp>
-        <p:sp>
-          <p:nvSpPr>
-            <p:cNvPr id="46" name="TextBox 45">
-              <a:extLst>
-                <a:ext uri="{FF2B5EF4-FFF2-40B4-BE49-F238E27FC236}">
-                  <a16:creationId xmlns:a16="http://schemas.microsoft.com/office/drawing/2014/main" id="{6FC1B34B-7989-BD6B-8FB4-FACBB6741F72}"/>
-                </a:ext>
-              </a:extLst>
-            </p:cNvPr>
-            <p:cNvSpPr txBox="1"/>
-            <p:nvPr/>
-          </p:nvSpPr>
-          <p:spPr>
-            <a:xfrm>
-              <a:off x="5518404" y="1713364"/>
-              <a:ext cx="237744" cy="338554"/>
-            </a:xfrm>
-            <a:prstGeom prst="rect">
-              <a:avLst/>
-            </a:prstGeom>
-            <a:noFill/>
-          </p:spPr>
-          <p:txBody>
-            <a:bodyPr wrap="square" rtlCol="0">
-              <a:spAutoFit/>
-            </a:bodyPr>
-            <a:lstStyle/>
-            <a:p>
-              <a:r>
-                <a:rPr lang="en-US" sz="1600" dirty="0"/>
-                <a:t>-</a:t>
-              </a:r>
-              <a:endParaRPr lang="en-US" sz="1050" dirty="0"/>
-            </a:p>
-          </p:txBody>
-        </p:sp>
-      </p:grpSp>
-      <p:cxnSp>
-        <p:nvCxnSpPr>
-          <p:cNvPr id="47" name="Straight Arrow Connector 46">
-            <a:extLst>
-              <a:ext uri="{FF2B5EF4-FFF2-40B4-BE49-F238E27FC236}">
-                <a16:creationId xmlns:a16="http://schemas.microsoft.com/office/drawing/2014/main" id="{9F729FC1-2BEF-D985-89CB-E0C3B81AFD1B}"/>
-              </a:ext>
-            </a:extLst>
-          </p:cNvPr>
-          <p:cNvCxnSpPr>
-            <a:cxnSpLocks/>
-            <a:stCxn id="10" idx="3"/>
-            <a:endCxn id="44" idx="2"/>
-          </p:cNvCxnSpPr>
-          <p:nvPr/>
-        </p:nvCxnSpPr>
-        <p:spPr>
-          <a:xfrm>
-            <a:off x="5558790" y="3337942"/>
-            <a:ext cx="170688" cy="4909"/>
-          </a:xfrm>
-          <a:prstGeom prst="straightConnector1">
-            <a:avLst/>
-          </a:prstGeom>
-          <a:ln>
-            <a:tailEnd type="triangle"/>
-          </a:ln>
-        </p:spPr>
-        <p:style>
-          <a:lnRef idx="2">
-            <a:schemeClr val="accent1"/>
-          </a:lnRef>
-          <a:fillRef idx="0">
-            <a:schemeClr val="accent1"/>
-          </a:fillRef>
-          <a:effectRef idx="1">
-            <a:schemeClr val="accent1"/>
-          </a:effectRef>
-          <a:fontRef idx="minor">
-            <a:schemeClr val="tx1"/>
-          </a:fontRef>
-        </p:style>
-      </p:cxnSp>
-      <p:cxnSp>
-        <p:nvCxnSpPr>
-          <p:cNvPr id="48" name="Straight Arrow Connector 47">
-            <a:extLst>
-              <a:ext uri="{FF2B5EF4-FFF2-40B4-BE49-F238E27FC236}">
-                <a16:creationId xmlns:a16="http://schemas.microsoft.com/office/drawing/2014/main" id="{B9BF8628-0F4A-726F-6107-3BB8A5382AE3}"/>
-              </a:ext>
-            </a:extLst>
-          </p:cNvPr>
-          <p:cNvCxnSpPr>
-            <a:cxnSpLocks/>
-            <a:stCxn id="44" idx="6"/>
-            <a:endCxn id="7" idx="1"/>
-          </p:cNvCxnSpPr>
-          <p:nvPr/>
-        </p:nvCxnSpPr>
-        <p:spPr>
-          <a:xfrm>
-            <a:off x="6049518" y="3342851"/>
-            <a:ext cx="553974" cy="4044"/>
-          </a:xfrm>
-          <a:prstGeom prst="straightConnector1">
-            <a:avLst/>
-          </a:prstGeom>
-          <a:ln>
-            <a:tailEnd type="triangle"/>
-          </a:ln>
-        </p:spPr>
-        <p:style>
-          <a:lnRef idx="2">
-            <a:schemeClr val="accent1"/>
-          </a:lnRef>
-          <a:fillRef idx="0">
-            <a:schemeClr val="accent1"/>
-          </a:fillRef>
-          <a:effectRef idx="1">
-            <a:schemeClr val="accent1"/>
-          </a:effectRef>
-          <a:fontRef idx="minor">
-            <a:schemeClr val="tx1"/>
-          </a:fontRef>
-        </p:style>
-      </p:cxnSp>
-      <p:grpSp>
-        <p:nvGrpSpPr>
-          <p:cNvPr id="51" name="Group 50">
-            <a:extLst>
-              <a:ext uri="{FF2B5EF4-FFF2-40B4-BE49-F238E27FC236}">
-                <a16:creationId xmlns:a16="http://schemas.microsoft.com/office/drawing/2014/main" id="{571BB130-248D-34BF-BC9E-1A604A1B495E}"/>
-              </a:ext>
-            </a:extLst>
-          </p:cNvPr>
-          <p:cNvGrpSpPr/>
-          <p:nvPr/>
-        </p:nvGrpSpPr>
-        <p:grpSpPr>
-          <a:xfrm>
-            <a:off x="5285994" y="3709445"/>
-            <a:ext cx="393192" cy="399140"/>
-            <a:chOff x="5422392" y="1652778"/>
-            <a:chExt cx="393192" cy="399140"/>
-          </a:xfrm>
-        </p:grpSpPr>
-        <p:sp>
-          <p:nvSpPr>
-            <p:cNvPr id="52" name="Flowchart: Connector 51">
-              <a:extLst>
-                <a:ext uri="{FF2B5EF4-FFF2-40B4-BE49-F238E27FC236}">
-                  <a16:creationId xmlns:a16="http://schemas.microsoft.com/office/drawing/2014/main" id="{D44C6F84-180E-E2F5-A88A-5DD2108E242B}"/>
-                </a:ext>
-              </a:extLst>
-            </p:cNvPr>
-            <p:cNvSpPr/>
-            <p:nvPr/>
-          </p:nvSpPr>
-          <p:spPr>
-            <a:xfrm>
-              <a:off x="5495544" y="1652778"/>
-              <a:ext cx="320040" cy="315468"/>
-            </a:xfrm>
-            <a:prstGeom prst="flowChartConnector">
-              <a:avLst/>
-            </a:prstGeom>
-            <a:solidFill>
-              <a:schemeClr val="bg1"/>
-            </a:solidFill>
-          </p:spPr>
-          <p:style>
-            <a:lnRef idx="2">
-              <a:schemeClr val="accent1">
-                <a:shade val="15000"/>
-              </a:schemeClr>
-            </a:lnRef>
-            <a:fillRef idx="1">
-              <a:schemeClr val="accent1"/>
-            </a:fillRef>
-            <a:effectRef idx="0">
-              <a:schemeClr val="accent1"/>
-            </a:effectRef>
-            <a:fontRef idx="minor">
-              <a:schemeClr val="lt1"/>
-            </a:fontRef>
-          </p:style>
-          <p:txBody>
-            <a:bodyPr rtlCol="0" anchor="ctr"/>
-            <a:lstStyle/>
-            <a:p>
-              <a:pPr algn="ctr"/>
-              <a:endParaRPr lang="en-US" dirty="0">
-                <a:solidFill>
-                  <a:schemeClr val="tx1"/>
-                </a:solidFill>
-              </a:endParaRPr>
-            </a:p>
-          </p:txBody>
-        </p:sp>
-        <p:sp>
-          <p:nvSpPr>
-            <p:cNvPr id="53" name="TextBox 52">
-              <a:extLst>
-                <a:ext uri="{FF2B5EF4-FFF2-40B4-BE49-F238E27FC236}">
-                  <a16:creationId xmlns:a16="http://schemas.microsoft.com/office/drawing/2014/main" id="{F0E544C7-EF5C-E45F-E1FB-387207A7E75B}"/>
-                </a:ext>
-              </a:extLst>
-            </p:cNvPr>
-            <p:cNvSpPr txBox="1"/>
-            <p:nvPr/>
-          </p:nvSpPr>
-          <p:spPr>
-            <a:xfrm>
-              <a:off x="5422392" y="1679707"/>
-              <a:ext cx="237744" cy="261610"/>
-            </a:xfrm>
-            <a:prstGeom prst="rect">
-              <a:avLst/>
-            </a:prstGeom>
-            <a:noFill/>
-          </p:spPr>
-          <p:txBody>
-            <a:bodyPr wrap="square" rtlCol="0">
-              <a:spAutoFit/>
-            </a:bodyPr>
-            <a:lstStyle/>
-            <a:p>
-              <a:r>
-                <a:rPr lang="en-US" sz="1050" dirty="0"/>
-                <a:t>+</a:t>
-              </a:r>
-            </a:p>
-          </p:txBody>
-        </p:sp>
-        <p:sp>
-          <p:nvSpPr>
-            <p:cNvPr id="54" name="TextBox 53">
-              <a:extLst>
-                <a:ext uri="{FF2B5EF4-FFF2-40B4-BE49-F238E27FC236}">
-                  <a16:creationId xmlns:a16="http://schemas.microsoft.com/office/drawing/2014/main" id="{AE578948-0331-C566-7215-E6340684560A}"/>
-                </a:ext>
-              </a:extLst>
-            </p:cNvPr>
-            <p:cNvSpPr txBox="1"/>
-            <p:nvPr/>
-          </p:nvSpPr>
-          <p:spPr>
-            <a:xfrm>
-              <a:off x="5518404" y="1713364"/>
-              <a:ext cx="237744" cy="338554"/>
-            </a:xfrm>
-            <a:prstGeom prst="rect">
-              <a:avLst/>
-            </a:prstGeom>
-            <a:noFill/>
-          </p:spPr>
-          <p:txBody>
-            <a:bodyPr wrap="square" rtlCol="0">
-              <a:spAutoFit/>
-            </a:bodyPr>
-            <a:lstStyle/>
-            <a:p>
-              <a:r>
-                <a:rPr lang="en-US" sz="1600" dirty="0"/>
-                <a:t>-</a:t>
-              </a:r>
-              <a:endParaRPr lang="en-US" sz="1050" dirty="0"/>
-            </a:p>
-          </p:txBody>
-        </p:sp>
-      </p:grpSp>
-      <p:cxnSp>
-        <p:nvCxnSpPr>
-          <p:cNvPr id="55" name="Straight Arrow Connector 54">
-            <a:extLst>
-              <a:ext uri="{FF2B5EF4-FFF2-40B4-BE49-F238E27FC236}">
-                <a16:creationId xmlns:a16="http://schemas.microsoft.com/office/drawing/2014/main" id="{3967BFBE-4F2E-9B63-146D-22ED72E3ABC2}"/>
-              </a:ext>
-            </a:extLst>
-          </p:cNvPr>
-          <p:cNvCxnSpPr>
-            <a:cxnSpLocks/>
-            <a:stCxn id="65" idx="3"/>
-            <a:endCxn id="52" idx="2"/>
-          </p:cNvCxnSpPr>
-          <p:nvPr/>
-        </p:nvCxnSpPr>
-        <p:spPr>
-          <a:xfrm>
-            <a:off x="4706112" y="3860101"/>
-            <a:ext cx="653034" cy="7078"/>
-          </a:xfrm>
-          <a:prstGeom prst="straightConnector1">
-            <a:avLst/>
-          </a:prstGeom>
-          <a:ln>
-            <a:tailEnd type="triangle"/>
-          </a:ln>
-        </p:spPr>
-        <p:style>
-          <a:lnRef idx="2">
-            <a:schemeClr val="accent1"/>
-          </a:lnRef>
-          <a:fillRef idx="0">
-            <a:schemeClr val="accent1"/>
-          </a:fillRef>
-          <a:effectRef idx="1">
-            <a:schemeClr val="accent1"/>
-          </a:effectRef>
-          <a:fontRef idx="minor">
-            <a:schemeClr val="tx1"/>
-          </a:fontRef>
-        </p:style>
-      </p:cxnSp>
-      <p:cxnSp>
-        <p:nvCxnSpPr>
-          <p:cNvPr id="56" name="Straight Arrow Connector 55">
-            <a:extLst>
-              <a:ext uri="{FF2B5EF4-FFF2-40B4-BE49-F238E27FC236}">
-                <a16:creationId xmlns:a16="http://schemas.microsoft.com/office/drawing/2014/main" id="{647FFE0F-F2C8-4F4F-F19C-5109F5FA26EE}"/>
-              </a:ext>
-            </a:extLst>
-          </p:cNvPr>
-          <p:cNvCxnSpPr>
-            <a:cxnSpLocks/>
-            <a:stCxn id="52" idx="6"/>
-            <a:endCxn id="8" idx="1"/>
-          </p:cNvCxnSpPr>
-          <p:nvPr/>
-        </p:nvCxnSpPr>
-        <p:spPr>
-          <a:xfrm>
-            <a:off x="5679186" y="3867179"/>
-            <a:ext cx="918210" cy="5114"/>
-          </a:xfrm>
-          <a:prstGeom prst="straightConnector1">
-            <a:avLst/>
-          </a:prstGeom>
-          <a:ln>
-            <a:tailEnd type="triangle"/>
-          </a:ln>
-        </p:spPr>
-        <p:style>
-          <a:lnRef idx="2">
-            <a:schemeClr val="accent1"/>
-          </a:lnRef>
-          <a:fillRef idx="0">
-            <a:schemeClr val="accent1"/>
-          </a:fillRef>
-          <a:effectRef idx="1">
-            <a:schemeClr val="accent1"/>
-          </a:effectRef>
-          <a:fontRef idx="minor">
-            <a:schemeClr val="tx1"/>
-          </a:fontRef>
-        </p:style>
-      </p:cxnSp>
-      <p:grpSp>
-        <p:nvGrpSpPr>
-          <p:cNvPr id="58" name="Group 57">
-            <a:extLst>
-              <a:ext uri="{FF2B5EF4-FFF2-40B4-BE49-F238E27FC236}">
-                <a16:creationId xmlns:a16="http://schemas.microsoft.com/office/drawing/2014/main" id="{A71DC8F1-6ABC-F53F-0488-CB1F9F7E3B1D}"/>
-              </a:ext>
-            </a:extLst>
-          </p:cNvPr>
-          <p:cNvGrpSpPr/>
-          <p:nvPr/>
-        </p:nvGrpSpPr>
-        <p:grpSpPr>
-          <a:xfrm>
-            <a:off x="4893945" y="4213864"/>
-            <a:ext cx="393192" cy="399140"/>
-            <a:chOff x="5422392" y="1652778"/>
-            <a:chExt cx="393192" cy="399140"/>
-          </a:xfrm>
-        </p:grpSpPr>
-        <p:sp>
-          <p:nvSpPr>
-            <p:cNvPr id="59" name="Flowchart: Connector 58">
-              <a:extLst>
-                <a:ext uri="{FF2B5EF4-FFF2-40B4-BE49-F238E27FC236}">
-                  <a16:creationId xmlns:a16="http://schemas.microsoft.com/office/drawing/2014/main" id="{910A7200-0521-499C-E58D-C1F12F2A42DF}"/>
-                </a:ext>
-              </a:extLst>
-            </p:cNvPr>
-            <p:cNvSpPr/>
-            <p:nvPr/>
-          </p:nvSpPr>
-          <p:spPr>
-            <a:xfrm>
-              <a:off x="5495544" y="1652778"/>
-              <a:ext cx="320040" cy="315468"/>
-            </a:xfrm>
-            <a:prstGeom prst="flowChartConnector">
-              <a:avLst/>
-            </a:prstGeom>
-            <a:solidFill>
-              <a:schemeClr val="bg1"/>
-            </a:solidFill>
-          </p:spPr>
-          <p:style>
-            <a:lnRef idx="2">
-              <a:schemeClr val="accent1">
-                <a:shade val="15000"/>
-              </a:schemeClr>
-            </a:lnRef>
-            <a:fillRef idx="1">
-              <a:schemeClr val="accent1"/>
-            </a:fillRef>
-            <a:effectRef idx="0">
-              <a:schemeClr val="accent1"/>
-            </a:effectRef>
-            <a:fontRef idx="minor">
-              <a:schemeClr val="lt1"/>
-            </a:fontRef>
-          </p:style>
-          <p:txBody>
-            <a:bodyPr rtlCol="0" anchor="ctr"/>
-            <a:lstStyle/>
-            <a:p>
-              <a:pPr algn="ctr"/>
-              <a:endParaRPr lang="en-US" dirty="0">
-                <a:solidFill>
-                  <a:schemeClr val="tx1"/>
-                </a:solidFill>
-              </a:endParaRPr>
-            </a:p>
-          </p:txBody>
-        </p:sp>
-        <p:sp>
-          <p:nvSpPr>
-            <p:cNvPr id="60" name="TextBox 59">
-              <a:extLst>
-                <a:ext uri="{FF2B5EF4-FFF2-40B4-BE49-F238E27FC236}">
-                  <a16:creationId xmlns:a16="http://schemas.microsoft.com/office/drawing/2014/main" id="{623C2115-AAD2-E1C0-BFE3-B71CC032443B}"/>
-                </a:ext>
-              </a:extLst>
-            </p:cNvPr>
-            <p:cNvSpPr txBox="1"/>
-            <p:nvPr/>
-          </p:nvSpPr>
-          <p:spPr>
-            <a:xfrm>
-              <a:off x="5422392" y="1679707"/>
-              <a:ext cx="237744" cy="261610"/>
-            </a:xfrm>
-            <a:prstGeom prst="rect">
-              <a:avLst/>
-            </a:prstGeom>
-            <a:noFill/>
-          </p:spPr>
-          <p:txBody>
-            <a:bodyPr wrap="square" rtlCol="0">
-              <a:spAutoFit/>
-            </a:bodyPr>
-            <a:lstStyle/>
-            <a:p>
-              <a:r>
-                <a:rPr lang="en-US" sz="1050" dirty="0"/>
-                <a:t>+</a:t>
-              </a:r>
-            </a:p>
-          </p:txBody>
-        </p:sp>
-        <p:sp>
-          <p:nvSpPr>
-            <p:cNvPr id="61" name="TextBox 60">
-              <a:extLst>
-                <a:ext uri="{FF2B5EF4-FFF2-40B4-BE49-F238E27FC236}">
-                  <a16:creationId xmlns:a16="http://schemas.microsoft.com/office/drawing/2014/main" id="{07B0C242-0C5B-36E5-957C-8546BEC58F0D}"/>
-                </a:ext>
-              </a:extLst>
-            </p:cNvPr>
-            <p:cNvSpPr txBox="1"/>
-            <p:nvPr/>
-          </p:nvSpPr>
-          <p:spPr>
-            <a:xfrm>
-              <a:off x="5518404" y="1713364"/>
-              <a:ext cx="237744" cy="338554"/>
-            </a:xfrm>
-            <a:prstGeom prst="rect">
-              <a:avLst/>
-            </a:prstGeom>
-            <a:noFill/>
-          </p:spPr>
-          <p:txBody>
-            <a:bodyPr wrap="square" rtlCol="0">
-              <a:spAutoFit/>
-            </a:bodyPr>
-            <a:lstStyle/>
-            <a:p>
-              <a:r>
-                <a:rPr lang="en-US" sz="1600" dirty="0"/>
-                <a:t>-</a:t>
-              </a:r>
-              <a:endParaRPr lang="en-US" sz="1050" dirty="0"/>
-            </a:p>
-          </p:txBody>
-        </p:sp>
-      </p:grpSp>
-      <p:cxnSp>
-        <p:nvCxnSpPr>
-          <p:cNvPr id="62" name="Straight Arrow Connector 61">
-            <a:extLst>
-              <a:ext uri="{FF2B5EF4-FFF2-40B4-BE49-F238E27FC236}">
-                <a16:creationId xmlns:a16="http://schemas.microsoft.com/office/drawing/2014/main" id="{64A61392-C77A-55C5-A87B-3B5085F712DE}"/>
-              </a:ext>
-            </a:extLst>
-          </p:cNvPr>
-          <p:cNvCxnSpPr>
-            <a:cxnSpLocks/>
-            <a:stCxn id="68" idx="3"/>
-            <a:endCxn id="59" idx="2"/>
-          </p:cNvCxnSpPr>
-          <p:nvPr/>
-        </p:nvCxnSpPr>
-        <p:spPr>
-          <a:xfrm>
-            <a:off x="4721733" y="4369308"/>
-            <a:ext cx="245364" cy="2290"/>
-          </a:xfrm>
-          <a:prstGeom prst="straightConnector1">
-            <a:avLst/>
-          </a:prstGeom>
-          <a:ln>
-            <a:tailEnd type="triangle"/>
-          </a:ln>
-        </p:spPr>
-        <p:style>
-          <a:lnRef idx="2">
-            <a:schemeClr val="accent1"/>
-          </a:lnRef>
-          <a:fillRef idx="0">
-            <a:schemeClr val="accent1"/>
-          </a:fillRef>
-          <a:effectRef idx="1">
-            <a:schemeClr val="accent1"/>
-          </a:effectRef>
-          <a:fontRef idx="minor">
-            <a:schemeClr val="tx1"/>
-          </a:fontRef>
-        </p:style>
-      </p:cxnSp>
-      <p:cxnSp>
-        <p:nvCxnSpPr>
-          <p:cNvPr id="63" name="Straight Arrow Connector 62">
-            <a:extLst>
-              <a:ext uri="{FF2B5EF4-FFF2-40B4-BE49-F238E27FC236}">
-                <a16:creationId xmlns:a16="http://schemas.microsoft.com/office/drawing/2014/main" id="{4F6606D8-A1B4-0396-08B0-F44AF9AF84A2}"/>
-              </a:ext>
-            </a:extLst>
-          </p:cNvPr>
-          <p:cNvCxnSpPr>
-            <a:cxnSpLocks/>
-            <a:stCxn id="59" idx="6"/>
-            <a:endCxn id="9" idx="1"/>
-          </p:cNvCxnSpPr>
-          <p:nvPr/>
-        </p:nvCxnSpPr>
-        <p:spPr>
-          <a:xfrm>
-            <a:off x="5287137" y="4371598"/>
-            <a:ext cx="1310259" cy="9902"/>
-          </a:xfrm>
-          <a:prstGeom prst="straightConnector1">
-            <a:avLst/>
-          </a:prstGeom>
-          <a:ln>
-            <a:tailEnd type="triangle"/>
-          </a:ln>
-        </p:spPr>
-        <p:style>
-          <a:lnRef idx="2">
-            <a:schemeClr val="accent1"/>
-          </a:lnRef>
-          <a:fillRef idx="0">
-            <a:schemeClr val="accent1"/>
-          </a:fillRef>
-          <a:effectRef idx="1">
-            <a:schemeClr val="accent1"/>
-          </a:effectRef>
-          <a:fontRef idx="minor">
-            <a:schemeClr val="tx1"/>
-          </a:fontRef>
-        </p:style>
-      </p:cxnSp>
-      <p:sp>
-        <p:nvSpPr>
-          <p:cNvPr id="65" name="Rectangle 64">
-            <a:extLst>
-              <a:ext uri="{FF2B5EF4-FFF2-40B4-BE49-F238E27FC236}">
-                <a16:creationId xmlns:a16="http://schemas.microsoft.com/office/drawing/2014/main" id="{8FB02A05-7524-896B-238B-688AD16B3BC0}"/>
-              </a:ext>
-            </a:extLst>
-          </p:cNvPr>
-          <p:cNvSpPr/>
-          <p:nvPr/>
-        </p:nvSpPr>
-        <p:spPr>
-          <a:xfrm>
-            <a:off x="3995928" y="3654361"/>
-            <a:ext cx="710184" cy="411480"/>
-          </a:xfrm>
-          <a:prstGeom prst="rect">
-            <a:avLst/>
-          </a:prstGeom>
-        </p:spPr>
-        <p:style>
-          <a:lnRef idx="2">
-            <a:schemeClr val="accent1">
-              <a:shade val="15000"/>
-            </a:schemeClr>
-          </a:lnRef>
-          <a:fillRef idx="1">
-            <a:schemeClr val="accent1"/>
-          </a:fillRef>
-          <a:effectRef idx="0">
-            <a:schemeClr val="accent1"/>
-          </a:effectRef>
-          <a:fontRef idx="minor">
-            <a:schemeClr val="lt1"/>
-          </a:fontRef>
-        </p:style>
-        <p:txBody>
-          <a:bodyPr rtlCol="0" anchor="ctr"/>
-          <a:lstStyle/>
-          <a:p>
-            <a:pPr algn="ctr"/>
-            <a:r>
-              <a:rPr lang="en-US" sz="1000" dirty="0"/>
-              <a:t>Desired Yaw</a:t>
-            </a:r>
-          </a:p>
-        </p:txBody>
-      </p:sp>
-      <p:sp>
-        <p:nvSpPr>
-          <p:cNvPr id="68" name="Rectangle 67">
-            <a:extLst>
-              <a:ext uri="{FF2B5EF4-FFF2-40B4-BE49-F238E27FC236}">
-                <a16:creationId xmlns:a16="http://schemas.microsoft.com/office/drawing/2014/main" id="{FB347E85-1E53-CB1C-F81D-CDD7EE376199}"/>
-              </a:ext>
-            </a:extLst>
-          </p:cNvPr>
-          <p:cNvSpPr/>
-          <p:nvPr/>
-        </p:nvSpPr>
-        <p:spPr>
-          <a:xfrm>
-            <a:off x="4011549" y="4163568"/>
-            <a:ext cx="710184" cy="411480"/>
-          </a:xfrm>
-          <a:prstGeom prst="rect">
-            <a:avLst/>
-          </a:prstGeom>
-        </p:spPr>
-        <p:style>
-          <a:lnRef idx="2">
-            <a:schemeClr val="accent1">
-              <a:shade val="15000"/>
-            </a:schemeClr>
-          </a:lnRef>
-          <a:fillRef idx="1">
-            <a:schemeClr val="accent1"/>
-          </a:fillRef>
-          <a:effectRef idx="0">
-            <a:schemeClr val="accent1"/>
-          </a:effectRef>
-          <a:fontRef idx="minor">
-            <a:schemeClr val="lt1"/>
-          </a:fontRef>
-        </p:style>
-        <p:txBody>
-          <a:bodyPr rtlCol="0" anchor="ctr"/>
-          <a:lstStyle/>
-          <a:p>
-            <a:pPr algn="ctr"/>
-            <a:r>
-              <a:rPr lang="en-US" sz="1000" dirty="0"/>
-              <a:t>Desired Elevation</a:t>
-            </a:r>
-          </a:p>
-        </p:txBody>
-      </p:sp>
-      <p:cxnSp>
-        <p:nvCxnSpPr>
-          <p:cNvPr id="72" name="Connector: Elbow 71">
-            <a:extLst>
-              <a:ext uri="{FF2B5EF4-FFF2-40B4-BE49-F238E27FC236}">
-                <a16:creationId xmlns:a16="http://schemas.microsoft.com/office/drawing/2014/main" id="{AECA16D5-B584-BF8B-7529-778FE4A3F5B7}"/>
-              </a:ext>
-            </a:extLst>
-          </p:cNvPr>
-          <p:cNvCxnSpPr>
-            <a:cxnSpLocks/>
-            <a:stCxn id="16" idx="2"/>
-          </p:cNvCxnSpPr>
-          <p:nvPr/>
-        </p:nvCxnSpPr>
-        <p:spPr>
-          <a:xfrm rot="5400000" flipH="1">
-            <a:off x="7717416" y="1553598"/>
-            <a:ext cx="1589772" cy="4483608"/>
-          </a:xfrm>
-          <a:prstGeom prst="bentConnector4">
-            <a:avLst>
-              <a:gd name="adj1" fmla="val -14379"/>
-              <a:gd name="adj2" fmla="val 99915"/>
-            </a:avLst>
-          </a:prstGeom>
-          <a:ln>
-            <a:tailEnd type="triangle"/>
-          </a:ln>
-        </p:spPr>
-        <p:style>
-          <a:lnRef idx="2">
-            <a:schemeClr val="accent1"/>
-          </a:lnRef>
-          <a:fillRef idx="0">
-            <a:schemeClr val="accent1"/>
-          </a:fillRef>
-          <a:effectRef idx="1">
-            <a:schemeClr val="accent1"/>
-          </a:effectRef>
-          <a:fontRef idx="minor">
-            <a:schemeClr val="tx1"/>
-          </a:fontRef>
-        </p:style>
-      </p:cxnSp>
-      <p:cxnSp>
-        <p:nvCxnSpPr>
-          <p:cNvPr id="86" name="Connector: Elbow 85">
-            <a:extLst>
-              <a:ext uri="{FF2B5EF4-FFF2-40B4-BE49-F238E27FC236}">
-                <a16:creationId xmlns:a16="http://schemas.microsoft.com/office/drawing/2014/main" id="{05EA2E2D-468B-D52E-198C-CF85D9003A2E}"/>
-              </a:ext>
-            </a:extLst>
-          </p:cNvPr>
-          <p:cNvCxnSpPr>
-            <a:cxnSpLocks/>
-          </p:cNvCxnSpPr>
-          <p:nvPr/>
-        </p:nvCxnSpPr>
-        <p:spPr>
-          <a:xfrm rot="16200000" flipV="1">
-            <a:off x="5429383" y="3971222"/>
-            <a:ext cx="1301232" cy="380999"/>
-          </a:xfrm>
-          <a:prstGeom prst="bentConnector3">
-            <a:avLst>
-              <a:gd name="adj1" fmla="val -596"/>
-            </a:avLst>
-          </a:prstGeom>
-          <a:ln>
-            <a:tailEnd type="triangle"/>
-          </a:ln>
-        </p:spPr>
-        <p:style>
-          <a:lnRef idx="2">
-            <a:schemeClr val="accent1"/>
-          </a:lnRef>
-          <a:fillRef idx="0">
-            <a:schemeClr val="accent1"/>
-          </a:fillRef>
-          <a:effectRef idx="1">
-            <a:schemeClr val="accent1"/>
-          </a:effectRef>
-          <a:fontRef idx="minor">
-            <a:schemeClr val="tx1"/>
-          </a:fontRef>
-        </p:style>
-      </p:cxnSp>
-      <p:cxnSp>
-        <p:nvCxnSpPr>
-          <p:cNvPr id="91" name="Connector: Elbow 90">
-            <a:extLst>
-              <a:ext uri="{FF2B5EF4-FFF2-40B4-BE49-F238E27FC236}">
-                <a16:creationId xmlns:a16="http://schemas.microsoft.com/office/drawing/2014/main" id="{2F6B9A5F-24CF-FFD9-32B1-7706B6165BE6}"/>
-              </a:ext>
-            </a:extLst>
-          </p:cNvPr>
-          <p:cNvCxnSpPr>
-            <a:cxnSpLocks/>
-          </p:cNvCxnSpPr>
-          <p:nvPr/>
-        </p:nvCxnSpPr>
-        <p:spPr>
-          <a:xfrm rot="16200000" flipV="1">
-            <a:off x="5309366" y="4232206"/>
-            <a:ext cx="782312" cy="377952"/>
-          </a:xfrm>
-          <a:prstGeom prst="bentConnector3">
-            <a:avLst>
-              <a:gd name="adj1" fmla="val -260"/>
-            </a:avLst>
-          </a:prstGeom>
-          <a:ln>
-            <a:tailEnd type="triangle"/>
-          </a:ln>
-        </p:spPr>
-        <p:style>
-          <a:lnRef idx="2">
-            <a:schemeClr val="accent1"/>
-          </a:lnRef>
-          <a:fillRef idx="0">
-            <a:schemeClr val="accent1"/>
-          </a:fillRef>
-          <a:effectRef idx="1">
-            <a:schemeClr val="accent1"/>
-          </a:effectRef>
-          <a:fontRef idx="minor">
-            <a:schemeClr val="tx1"/>
-          </a:fontRef>
-        </p:style>
-      </p:cxnSp>
-      <p:cxnSp>
-        <p:nvCxnSpPr>
-          <p:cNvPr id="95" name="Connector: Elbow 94">
-            <a:extLst>
-              <a:ext uri="{FF2B5EF4-FFF2-40B4-BE49-F238E27FC236}">
-                <a16:creationId xmlns:a16="http://schemas.microsoft.com/office/drawing/2014/main" id="{DCC3044C-18F6-146C-1956-923C302D5BD8}"/>
-              </a:ext>
-            </a:extLst>
-          </p:cNvPr>
-          <p:cNvCxnSpPr>
-            <a:cxnSpLocks/>
-          </p:cNvCxnSpPr>
-          <p:nvPr/>
-        </p:nvCxnSpPr>
-        <p:spPr>
-          <a:xfrm rot="10800000">
-            <a:off x="5123312" y="4533260"/>
-            <a:ext cx="395855" cy="284191"/>
-          </a:xfrm>
-          <a:prstGeom prst="bentConnector3">
-            <a:avLst>
-              <a:gd name="adj1" fmla="val 100819"/>
-            </a:avLst>
-          </a:prstGeom>
-          <a:ln>
-            <a:tailEnd type="triangle"/>
-          </a:ln>
-        </p:spPr>
-        <p:style>
-          <a:lnRef idx="2">
-            <a:schemeClr val="accent1"/>
-          </a:lnRef>
-          <a:fillRef idx="0">
-            <a:schemeClr val="accent1"/>
-          </a:fillRef>
-          <a:effectRef idx="1">
-            <a:schemeClr val="accent1"/>
-          </a:effectRef>
-          <a:fontRef idx="minor">
-            <a:schemeClr val="tx1"/>
-          </a:fontRef>
-        </p:style>
-      </p:cxnSp>
-      <p:sp>
-        <p:nvSpPr>
-          <p:cNvPr id="102" name="Rectangle 101">
-            <a:extLst>
-              <a:ext uri="{FF2B5EF4-FFF2-40B4-BE49-F238E27FC236}">
-                <a16:creationId xmlns:a16="http://schemas.microsoft.com/office/drawing/2014/main" id="{411D6702-13C5-3B14-80F7-4EA8C74DCF00}"/>
-              </a:ext>
-            </a:extLst>
-          </p:cNvPr>
-          <p:cNvSpPr/>
-          <p:nvPr/>
-        </p:nvSpPr>
-        <p:spPr>
-          <a:xfrm>
-            <a:off x="389954" y="2794776"/>
-            <a:ext cx="854584" cy="411480"/>
-          </a:xfrm>
-          <a:prstGeom prst="rect">
-            <a:avLst/>
-          </a:prstGeom>
-        </p:spPr>
-        <p:style>
-          <a:lnRef idx="2">
-            <a:schemeClr val="accent1">
-              <a:shade val="15000"/>
-            </a:schemeClr>
-          </a:lnRef>
-          <a:fillRef idx="1">
-            <a:schemeClr val="accent1"/>
-          </a:fillRef>
-          <a:effectRef idx="0">
-            <a:schemeClr val="accent1"/>
-          </a:effectRef>
-          <a:fontRef idx="minor">
-            <a:schemeClr val="lt1"/>
-          </a:fontRef>
-        </p:style>
-        <p:txBody>
-          <a:bodyPr rtlCol="0" anchor="ctr"/>
-          <a:lstStyle/>
-          <a:p>
-            <a:pPr algn="ctr"/>
-            <a:r>
-              <a:rPr lang="en-US" sz="1000" dirty="0"/>
-              <a:t>Desired XY Position</a:t>
-            </a:r>
-          </a:p>
-        </p:txBody>
-      </p:sp>
-      <p:sp>
-        <p:nvSpPr>
-          <p:cNvPr id="103" name="Rectangle 102">
-            <a:extLst>
-              <a:ext uri="{FF2B5EF4-FFF2-40B4-BE49-F238E27FC236}">
-                <a16:creationId xmlns:a16="http://schemas.microsoft.com/office/drawing/2014/main" id="{8C20C2E6-ECF4-7E23-E4D7-0089D28723AF}"/>
-              </a:ext>
-            </a:extLst>
-          </p:cNvPr>
-          <p:cNvSpPr/>
-          <p:nvPr/>
-        </p:nvSpPr>
-        <p:spPr>
-          <a:xfrm>
-            <a:off x="1608392" y="2585391"/>
-            <a:ext cx="1041273" cy="830249"/>
-          </a:xfrm>
-          <a:prstGeom prst="rect">
-            <a:avLst/>
-          </a:prstGeom>
-        </p:spPr>
-        <p:style>
-          <a:lnRef idx="2">
-            <a:schemeClr val="accent1">
-              <a:shade val="15000"/>
-            </a:schemeClr>
-          </a:lnRef>
-          <a:fillRef idx="1">
-            <a:schemeClr val="accent1"/>
-          </a:fillRef>
-          <a:effectRef idx="0">
-            <a:schemeClr val="accent1"/>
-          </a:effectRef>
-          <a:fontRef idx="minor">
-            <a:schemeClr val="lt1"/>
-          </a:fontRef>
-        </p:style>
-        <p:txBody>
-          <a:bodyPr rtlCol="0" anchor="ctr"/>
-          <a:lstStyle/>
-          <a:p>
-            <a:pPr algn="ctr"/>
-            <a:r>
-              <a:rPr lang="en-US" sz="1100" dirty="0"/>
-              <a:t>Conversions (If Necessary)</a:t>
-            </a:r>
-          </a:p>
-        </p:txBody>
-      </p:sp>
-      <p:grpSp>
-        <p:nvGrpSpPr>
-          <p:cNvPr id="111" name="Group 110">
-            <a:extLst>
-              <a:ext uri="{FF2B5EF4-FFF2-40B4-BE49-F238E27FC236}">
-                <a16:creationId xmlns:a16="http://schemas.microsoft.com/office/drawing/2014/main" id="{29285013-55DC-CB40-8D2F-005D369EE96D}"/>
-              </a:ext>
-            </a:extLst>
-          </p:cNvPr>
-          <p:cNvGrpSpPr/>
-          <p:nvPr/>
-        </p:nvGrpSpPr>
-        <p:grpSpPr>
-          <a:xfrm>
-            <a:off x="3376041" y="2652116"/>
-            <a:ext cx="393192" cy="399140"/>
-            <a:chOff x="5422392" y="1652778"/>
-            <a:chExt cx="393192" cy="399140"/>
-          </a:xfrm>
-        </p:grpSpPr>
-        <p:sp>
-          <p:nvSpPr>
-            <p:cNvPr id="112" name="Flowchart: Connector 111">
-              <a:extLst>
-                <a:ext uri="{FF2B5EF4-FFF2-40B4-BE49-F238E27FC236}">
-                  <a16:creationId xmlns:a16="http://schemas.microsoft.com/office/drawing/2014/main" id="{6743DC4A-ADBC-E421-249D-F028AF6BFADC}"/>
-                </a:ext>
-              </a:extLst>
-            </p:cNvPr>
-            <p:cNvSpPr/>
-            <p:nvPr/>
-          </p:nvSpPr>
-          <p:spPr>
-            <a:xfrm>
-              <a:off x="5495544" y="1652778"/>
-              <a:ext cx="320040" cy="315468"/>
-            </a:xfrm>
-            <a:prstGeom prst="flowChartConnector">
-              <a:avLst/>
-            </a:prstGeom>
-            <a:solidFill>
-              <a:schemeClr val="bg1"/>
-            </a:solidFill>
-          </p:spPr>
-          <p:style>
-            <a:lnRef idx="2">
-              <a:schemeClr val="accent1">
-                <a:shade val="15000"/>
-              </a:schemeClr>
-            </a:lnRef>
-            <a:fillRef idx="1">
-              <a:schemeClr val="accent1"/>
-            </a:fillRef>
-            <a:effectRef idx="0">
-              <a:schemeClr val="accent1"/>
-            </a:effectRef>
-            <a:fontRef idx="minor">
-              <a:schemeClr val="lt1"/>
-            </a:fontRef>
-          </p:style>
-          <p:txBody>
-            <a:bodyPr rtlCol="0" anchor="ctr"/>
-            <a:lstStyle/>
-            <a:p>
-              <a:pPr algn="ctr"/>
-              <a:endParaRPr lang="en-US" dirty="0">
-                <a:solidFill>
-                  <a:schemeClr val="tx1"/>
-                </a:solidFill>
-              </a:endParaRPr>
-            </a:p>
-          </p:txBody>
-        </p:sp>
-        <p:sp>
-          <p:nvSpPr>
-            <p:cNvPr id="113" name="TextBox 112">
-              <a:extLst>
-                <a:ext uri="{FF2B5EF4-FFF2-40B4-BE49-F238E27FC236}">
-                  <a16:creationId xmlns:a16="http://schemas.microsoft.com/office/drawing/2014/main" id="{B38EAC4B-2737-F97D-CEDB-F73ADFD52158}"/>
-                </a:ext>
-              </a:extLst>
-            </p:cNvPr>
-            <p:cNvSpPr txBox="1"/>
-            <p:nvPr/>
-          </p:nvSpPr>
-          <p:spPr>
-            <a:xfrm>
-              <a:off x="5422392" y="1679707"/>
-              <a:ext cx="237744" cy="261610"/>
-            </a:xfrm>
-            <a:prstGeom prst="rect">
-              <a:avLst/>
-            </a:prstGeom>
-            <a:noFill/>
-          </p:spPr>
-          <p:txBody>
-            <a:bodyPr wrap="square" rtlCol="0">
-              <a:spAutoFit/>
-            </a:bodyPr>
-            <a:lstStyle/>
-            <a:p>
-              <a:r>
-                <a:rPr lang="en-US" sz="1050" dirty="0"/>
-                <a:t>+</a:t>
-              </a:r>
-            </a:p>
-          </p:txBody>
-        </p:sp>
-        <p:sp>
-          <p:nvSpPr>
-            <p:cNvPr id="114" name="TextBox 113">
-              <a:extLst>
-                <a:ext uri="{FF2B5EF4-FFF2-40B4-BE49-F238E27FC236}">
-                  <a16:creationId xmlns:a16="http://schemas.microsoft.com/office/drawing/2014/main" id="{9F05655E-72CA-C63B-0AF3-A67D5D3E2E48}"/>
-                </a:ext>
-              </a:extLst>
-            </p:cNvPr>
-            <p:cNvSpPr txBox="1"/>
-            <p:nvPr/>
-          </p:nvSpPr>
-          <p:spPr>
-            <a:xfrm>
-              <a:off x="5518404" y="1713364"/>
-              <a:ext cx="237744" cy="338554"/>
-            </a:xfrm>
-            <a:prstGeom prst="rect">
-              <a:avLst/>
-            </a:prstGeom>
-            <a:noFill/>
-          </p:spPr>
-          <p:txBody>
-            <a:bodyPr wrap="square" rtlCol="0">
-              <a:spAutoFit/>
-            </a:bodyPr>
-            <a:lstStyle/>
-            <a:p>
-              <a:r>
-                <a:rPr lang="en-US" sz="1600" dirty="0"/>
-                <a:t>-</a:t>
-              </a:r>
-              <a:endParaRPr lang="en-US" sz="1050" dirty="0"/>
-            </a:p>
-          </p:txBody>
-        </p:sp>
-      </p:grpSp>
-      <p:cxnSp>
-        <p:nvCxnSpPr>
-          <p:cNvPr id="115" name="Straight Arrow Connector 114">
-            <a:extLst>
-              <a:ext uri="{FF2B5EF4-FFF2-40B4-BE49-F238E27FC236}">
-                <a16:creationId xmlns:a16="http://schemas.microsoft.com/office/drawing/2014/main" id="{2B0C02DD-AB4D-018D-F43E-B42DFA7027E0}"/>
-              </a:ext>
-            </a:extLst>
-          </p:cNvPr>
-          <p:cNvCxnSpPr>
-            <a:cxnSpLocks/>
-            <a:endCxn id="112" idx="2"/>
-          </p:cNvCxnSpPr>
-          <p:nvPr/>
-        </p:nvCxnSpPr>
-        <p:spPr>
-          <a:xfrm>
-            <a:off x="2649665" y="2809850"/>
-            <a:ext cx="799528" cy="0"/>
-          </a:xfrm>
-          <a:prstGeom prst="straightConnector1">
-            <a:avLst/>
-          </a:prstGeom>
-          <a:ln>
-            <a:tailEnd type="triangle"/>
-          </a:ln>
-        </p:spPr>
-        <p:style>
-          <a:lnRef idx="2">
-            <a:schemeClr val="accent1"/>
-          </a:lnRef>
-          <a:fillRef idx="0">
-            <a:schemeClr val="accent1"/>
-          </a:fillRef>
-          <a:effectRef idx="1">
-            <a:schemeClr val="accent1"/>
-          </a:effectRef>
-          <a:fontRef idx="minor">
-            <a:schemeClr val="tx1"/>
-          </a:fontRef>
-        </p:style>
-      </p:cxnSp>
-      <p:cxnSp>
-        <p:nvCxnSpPr>
-          <p:cNvPr id="116" name="Straight Arrow Connector 115">
-            <a:extLst>
-              <a:ext uri="{FF2B5EF4-FFF2-40B4-BE49-F238E27FC236}">
-                <a16:creationId xmlns:a16="http://schemas.microsoft.com/office/drawing/2014/main" id="{BF6E34C0-2B3E-3895-DB22-FD5E9C22EFC1}"/>
-              </a:ext>
-            </a:extLst>
-          </p:cNvPr>
-          <p:cNvCxnSpPr>
-            <a:cxnSpLocks/>
-            <a:stCxn id="112" idx="6"/>
-            <a:endCxn id="11" idx="1"/>
-          </p:cNvCxnSpPr>
-          <p:nvPr/>
-        </p:nvCxnSpPr>
-        <p:spPr>
-          <a:xfrm>
-            <a:off x="3769233" y="2809850"/>
-            <a:ext cx="1231773" cy="15646"/>
-          </a:xfrm>
-          <a:prstGeom prst="straightConnector1">
-            <a:avLst/>
-          </a:prstGeom>
-          <a:ln>
-            <a:tailEnd type="triangle"/>
-          </a:ln>
-        </p:spPr>
-        <p:style>
-          <a:lnRef idx="2">
-            <a:schemeClr val="accent1"/>
-          </a:lnRef>
-          <a:fillRef idx="0">
-            <a:schemeClr val="accent1"/>
-          </a:fillRef>
-          <a:effectRef idx="1">
-            <a:schemeClr val="accent1"/>
-          </a:effectRef>
-          <a:fontRef idx="minor">
-            <a:schemeClr val="tx1"/>
-          </a:fontRef>
-        </p:style>
-      </p:cxnSp>
-      <p:cxnSp>
-        <p:nvCxnSpPr>
-          <p:cNvPr id="117" name="Connector: Elbow 116">
-            <a:extLst>
-              <a:ext uri="{FF2B5EF4-FFF2-40B4-BE49-F238E27FC236}">
-                <a16:creationId xmlns:a16="http://schemas.microsoft.com/office/drawing/2014/main" id="{44833A9C-90BA-09AA-671E-8E3D7E0ADEA8}"/>
-              </a:ext>
-            </a:extLst>
-          </p:cNvPr>
-          <p:cNvCxnSpPr>
-            <a:cxnSpLocks/>
-          </p:cNvCxnSpPr>
-          <p:nvPr/>
-        </p:nvCxnSpPr>
-        <p:spPr>
-          <a:xfrm rot="16200000" flipV="1">
-            <a:off x="3442845" y="3145216"/>
-            <a:ext cx="1833492" cy="1500755"/>
-          </a:xfrm>
-          <a:prstGeom prst="bentConnector3">
-            <a:avLst>
-              <a:gd name="adj1" fmla="val 128"/>
-            </a:avLst>
-          </a:prstGeom>
-          <a:ln>
-            <a:tailEnd type="triangle"/>
-          </a:ln>
-        </p:spPr>
-        <p:style>
-          <a:lnRef idx="2">
-            <a:schemeClr val="accent1"/>
-          </a:lnRef>
-          <a:fillRef idx="0">
-            <a:schemeClr val="accent1"/>
-          </a:fillRef>
-          <a:effectRef idx="1">
-            <a:schemeClr val="accent1"/>
-          </a:effectRef>
-          <a:fontRef idx="minor">
-            <a:schemeClr val="tx1"/>
-          </a:fontRef>
-        </p:style>
-      </p:cxnSp>
-      <p:grpSp>
-        <p:nvGrpSpPr>
-          <p:cNvPr id="126" name="Group 125">
-            <a:extLst>
-              <a:ext uri="{FF2B5EF4-FFF2-40B4-BE49-F238E27FC236}">
-                <a16:creationId xmlns:a16="http://schemas.microsoft.com/office/drawing/2014/main" id="{ADC304AC-11E0-C964-FFF3-9B06DCB9BD8B}"/>
-              </a:ext>
-            </a:extLst>
-          </p:cNvPr>
-          <p:cNvGrpSpPr/>
-          <p:nvPr/>
-        </p:nvGrpSpPr>
-        <p:grpSpPr>
-          <a:xfrm>
-            <a:off x="3036568" y="3173194"/>
-            <a:ext cx="393192" cy="399140"/>
-            <a:chOff x="5422392" y="1652778"/>
-            <a:chExt cx="393192" cy="399140"/>
-          </a:xfrm>
-        </p:grpSpPr>
-        <p:sp>
-          <p:nvSpPr>
-            <p:cNvPr id="127" name="Flowchart: Connector 126">
-              <a:extLst>
-                <a:ext uri="{FF2B5EF4-FFF2-40B4-BE49-F238E27FC236}">
-                  <a16:creationId xmlns:a16="http://schemas.microsoft.com/office/drawing/2014/main" id="{BFA27087-48A7-D879-F14E-049D7E5D6715}"/>
-                </a:ext>
-              </a:extLst>
-            </p:cNvPr>
-            <p:cNvSpPr/>
-            <p:nvPr/>
-          </p:nvSpPr>
-          <p:spPr>
-            <a:xfrm>
-              <a:off x="5495544" y="1652778"/>
-              <a:ext cx="320040" cy="315468"/>
-            </a:xfrm>
-            <a:prstGeom prst="flowChartConnector">
-              <a:avLst/>
-            </a:prstGeom>
-            <a:solidFill>
-              <a:schemeClr val="bg1"/>
-            </a:solidFill>
-          </p:spPr>
-          <p:style>
-            <a:lnRef idx="2">
-              <a:schemeClr val="accent1">
-                <a:shade val="15000"/>
-              </a:schemeClr>
-            </a:lnRef>
-            <a:fillRef idx="1">
-              <a:schemeClr val="accent1"/>
-            </a:fillRef>
-            <a:effectRef idx="0">
-              <a:schemeClr val="accent1"/>
-            </a:effectRef>
-            <a:fontRef idx="minor">
-              <a:schemeClr val="lt1"/>
-            </a:fontRef>
-          </p:style>
-          <p:txBody>
-            <a:bodyPr rtlCol="0" anchor="ctr"/>
-            <a:lstStyle/>
-            <a:p>
-              <a:pPr algn="ctr"/>
-              <a:endParaRPr lang="en-US" dirty="0">
-                <a:solidFill>
-                  <a:schemeClr val="tx1"/>
-                </a:solidFill>
-              </a:endParaRPr>
-            </a:p>
-          </p:txBody>
-        </p:sp>
-        <p:sp>
-          <p:nvSpPr>
-            <p:cNvPr id="128" name="TextBox 127">
-              <a:extLst>
-                <a:ext uri="{FF2B5EF4-FFF2-40B4-BE49-F238E27FC236}">
-                  <a16:creationId xmlns:a16="http://schemas.microsoft.com/office/drawing/2014/main" id="{4963F74E-F375-6EC2-4720-97A10283DE33}"/>
-                </a:ext>
-              </a:extLst>
-            </p:cNvPr>
-            <p:cNvSpPr txBox="1"/>
-            <p:nvPr/>
-          </p:nvSpPr>
-          <p:spPr>
-            <a:xfrm>
-              <a:off x="5422392" y="1679707"/>
-              <a:ext cx="237744" cy="261610"/>
-            </a:xfrm>
-            <a:prstGeom prst="rect">
-              <a:avLst/>
-            </a:prstGeom>
-            <a:noFill/>
-          </p:spPr>
-          <p:txBody>
-            <a:bodyPr wrap="square" rtlCol="0">
-              <a:spAutoFit/>
-            </a:bodyPr>
-            <a:lstStyle/>
-            <a:p>
-              <a:r>
-                <a:rPr lang="en-US" sz="1050" dirty="0"/>
-                <a:t>+</a:t>
-              </a:r>
-            </a:p>
-          </p:txBody>
-        </p:sp>
-        <p:sp>
-          <p:nvSpPr>
-            <p:cNvPr id="129" name="TextBox 128">
-              <a:extLst>
-                <a:ext uri="{FF2B5EF4-FFF2-40B4-BE49-F238E27FC236}">
-                  <a16:creationId xmlns:a16="http://schemas.microsoft.com/office/drawing/2014/main" id="{FEAB68CB-52DE-6342-676F-F2021A668C65}"/>
-                </a:ext>
-              </a:extLst>
-            </p:cNvPr>
-            <p:cNvSpPr txBox="1"/>
-            <p:nvPr/>
-          </p:nvSpPr>
-          <p:spPr>
-            <a:xfrm>
-              <a:off x="5518404" y="1713364"/>
-              <a:ext cx="237744" cy="338554"/>
-            </a:xfrm>
-            <a:prstGeom prst="rect">
-              <a:avLst/>
-            </a:prstGeom>
-            <a:noFill/>
-          </p:spPr>
-          <p:txBody>
-            <a:bodyPr wrap="square" rtlCol="0">
-              <a:spAutoFit/>
-            </a:bodyPr>
-            <a:lstStyle/>
-            <a:p>
-              <a:r>
-                <a:rPr lang="en-US" sz="1600" dirty="0"/>
-                <a:t>-</a:t>
-              </a:r>
-              <a:endParaRPr lang="en-US" sz="1050" dirty="0"/>
-            </a:p>
-          </p:txBody>
-        </p:sp>
-      </p:grpSp>
-      <p:cxnSp>
-        <p:nvCxnSpPr>
-          <p:cNvPr id="130" name="Straight Arrow Connector 129">
-            <a:extLst>
-              <a:ext uri="{FF2B5EF4-FFF2-40B4-BE49-F238E27FC236}">
-                <a16:creationId xmlns:a16="http://schemas.microsoft.com/office/drawing/2014/main" id="{0215D43B-2D6E-D4B5-6776-E9666218BFFD}"/>
-              </a:ext>
-            </a:extLst>
-          </p:cNvPr>
-          <p:cNvCxnSpPr>
-            <a:cxnSpLocks/>
-            <a:endCxn id="127" idx="2"/>
-          </p:cNvCxnSpPr>
-          <p:nvPr/>
-        </p:nvCxnSpPr>
-        <p:spPr>
-          <a:xfrm>
-            <a:off x="2683759" y="3330928"/>
-            <a:ext cx="425961" cy="0"/>
-          </a:xfrm>
-          <a:prstGeom prst="straightConnector1">
-            <a:avLst/>
-          </a:prstGeom>
-          <a:ln>
-            <a:tailEnd type="triangle"/>
-          </a:ln>
-        </p:spPr>
-        <p:style>
-          <a:lnRef idx="2">
-            <a:schemeClr val="accent1"/>
-          </a:lnRef>
-          <a:fillRef idx="0">
-            <a:schemeClr val="accent1"/>
-          </a:fillRef>
-          <a:effectRef idx="1">
-            <a:schemeClr val="accent1"/>
-          </a:effectRef>
-          <a:fontRef idx="minor">
-            <a:schemeClr val="tx1"/>
-          </a:fontRef>
-        </p:style>
-      </p:cxnSp>
-      <p:cxnSp>
-        <p:nvCxnSpPr>
-          <p:cNvPr id="131" name="Straight Arrow Connector 130">
-            <a:extLst>
-              <a:ext uri="{FF2B5EF4-FFF2-40B4-BE49-F238E27FC236}">
-                <a16:creationId xmlns:a16="http://schemas.microsoft.com/office/drawing/2014/main" id="{8A0B8A40-4C5D-C8CE-DC82-C0E282621C44}"/>
-              </a:ext>
-            </a:extLst>
-          </p:cNvPr>
-          <p:cNvCxnSpPr>
-            <a:cxnSpLocks/>
-            <a:stCxn id="127" idx="6"/>
-            <a:endCxn id="10" idx="1"/>
-          </p:cNvCxnSpPr>
-          <p:nvPr/>
-        </p:nvCxnSpPr>
-        <p:spPr>
-          <a:xfrm>
-            <a:off x="3429760" y="3330928"/>
-            <a:ext cx="1571246" cy="7014"/>
-          </a:xfrm>
-          <a:prstGeom prst="straightConnector1">
-            <a:avLst/>
-          </a:prstGeom>
-          <a:ln>
-            <a:tailEnd type="triangle"/>
-          </a:ln>
-        </p:spPr>
-        <p:style>
-          <a:lnRef idx="2">
-            <a:schemeClr val="accent1"/>
-          </a:lnRef>
-          <a:fillRef idx="0">
-            <a:schemeClr val="accent1"/>
-          </a:fillRef>
-          <a:effectRef idx="1">
-            <a:schemeClr val="accent1"/>
-          </a:effectRef>
-          <a:fontRef idx="minor">
-            <a:schemeClr val="tx1"/>
-          </a:fontRef>
-        </p:style>
-      </p:cxnSp>
-      <p:cxnSp>
-        <p:nvCxnSpPr>
-          <p:cNvPr id="132" name="Connector: Elbow 131">
-            <a:extLst>
-              <a:ext uri="{FF2B5EF4-FFF2-40B4-BE49-F238E27FC236}">
-                <a16:creationId xmlns:a16="http://schemas.microsoft.com/office/drawing/2014/main" id="{014548B0-2609-41C9-3EC0-60DEA407706D}"/>
-              </a:ext>
-            </a:extLst>
-          </p:cNvPr>
-          <p:cNvCxnSpPr>
-            <a:cxnSpLocks/>
-          </p:cNvCxnSpPr>
-          <p:nvPr/>
-        </p:nvCxnSpPr>
-        <p:spPr>
-          <a:xfrm rot="16200000" flipV="1">
-            <a:off x="2809625" y="3959299"/>
-            <a:ext cx="1301232" cy="380999"/>
-          </a:xfrm>
-          <a:prstGeom prst="bentConnector3">
-            <a:avLst>
-              <a:gd name="adj1" fmla="val -596"/>
-            </a:avLst>
-          </a:prstGeom>
-          <a:ln>
-            <a:tailEnd type="triangle"/>
-          </a:ln>
-        </p:spPr>
-        <p:style>
-          <a:lnRef idx="2">
-            <a:schemeClr val="accent1"/>
-          </a:lnRef>
-          <a:fillRef idx="0">
-            <a:schemeClr val="accent1"/>
-          </a:fillRef>
-          <a:effectRef idx="1">
-            <a:schemeClr val="accent1"/>
-          </a:effectRef>
-          <a:fontRef idx="minor">
-            <a:schemeClr val="tx1"/>
-          </a:fontRef>
-        </p:style>
-      </p:cxnSp>
-      <p:cxnSp>
-        <p:nvCxnSpPr>
-          <p:cNvPr id="139" name="Straight Arrow Connector 138">
-            <a:extLst>
-              <a:ext uri="{FF2B5EF4-FFF2-40B4-BE49-F238E27FC236}">
-                <a16:creationId xmlns:a16="http://schemas.microsoft.com/office/drawing/2014/main" id="{04DA9057-AED1-AD9A-6021-5F482DE02754}"/>
-              </a:ext>
-            </a:extLst>
-          </p:cNvPr>
-          <p:cNvCxnSpPr>
-            <a:cxnSpLocks/>
-            <a:stCxn id="102" idx="3"/>
-            <a:endCxn id="103" idx="1"/>
-          </p:cNvCxnSpPr>
-          <p:nvPr/>
-        </p:nvCxnSpPr>
-        <p:spPr>
-          <a:xfrm>
-            <a:off x="1244538" y="3000516"/>
-            <a:ext cx="363854" cy="0"/>
-          </a:xfrm>
-          <a:prstGeom prst="straightConnector1">
-            <a:avLst/>
-          </a:prstGeom>
-          <a:ln>
-            <a:tailEnd type="triangle"/>
-          </a:ln>
-        </p:spPr>
-        <p:style>
-          <a:lnRef idx="2">
-            <a:schemeClr val="accent1"/>
-          </a:lnRef>
-          <a:fillRef idx="0">
-            <a:schemeClr val="accent1"/>
-          </a:fillRef>
-          <a:effectRef idx="1">
-            <a:schemeClr val="accent1"/>
-          </a:effectRef>
-          <a:fontRef idx="minor">
-            <a:schemeClr val="tx1"/>
-          </a:fontRef>
-        </p:style>
-      </p:cxnSp>
-      <p:sp>
-        <p:nvSpPr>
-          <p:cNvPr id="141" name="Title 1">
-            <a:extLst>
-              <a:ext uri="{FF2B5EF4-FFF2-40B4-BE49-F238E27FC236}">
-                <a16:creationId xmlns:a16="http://schemas.microsoft.com/office/drawing/2014/main" id="{70053456-76EA-3943-CC3C-074D80E0EE69}"/>
-              </a:ext>
-            </a:extLst>
-          </p:cNvPr>
-          <p:cNvSpPr>
-            <a:spLocks noGrp="1"/>
-          </p:cNvSpPr>
-          <p:nvPr>
-            <p:ph type="title"/>
-          </p:nvPr>
-        </p:nvSpPr>
-        <p:spPr>
-          <a:xfrm>
-            <a:off x="838200" y="365125"/>
-            <a:ext cx="10515600" cy="1325563"/>
-          </a:xfrm>
-        </p:spPr>
-        <p:txBody>
-          <a:bodyPr/>
-          <a:lstStyle/>
-          <a:p>
-            <a:pPr algn="ctr"/>
-            <a:r>
-              <a:rPr lang="en-US" dirty="0"/>
-              <a:t>Overview</a:t>
-            </a:r>
-          </a:p>
-        </p:txBody>
-      </p:sp>
-      <p:cxnSp>
-        <p:nvCxnSpPr>
-          <p:cNvPr id="142" name="Straight Arrow Connector 141">
-            <a:extLst>
-              <a:ext uri="{FF2B5EF4-FFF2-40B4-BE49-F238E27FC236}">
-                <a16:creationId xmlns:a16="http://schemas.microsoft.com/office/drawing/2014/main" id="{AA5094AE-A712-7231-9389-E797B7E1BF5A}"/>
-              </a:ext>
-            </a:extLst>
-          </p:cNvPr>
-          <p:cNvCxnSpPr>
-            <a:cxnSpLocks/>
-            <a:endCxn id="12" idx="1"/>
-          </p:cNvCxnSpPr>
-          <p:nvPr/>
-        </p:nvCxnSpPr>
-        <p:spPr>
-          <a:xfrm flipV="1">
-            <a:off x="8631936" y="2831592"/>
-            <a:ext cx="491490" cy="670"/>
-          </a:xfrm>
-          <a:prstGeom prst="straightConnector1">
-            <a:avLst/>
-          </a:prstGeom>
-          <a:ln>
-            <a:tailEnd type="triangle"/>
-          </a:ln>
-        </p:spPr>
-        <p:style>
-          <a:lnRef idx="2">
-            <a:schemeClr val="accent1"/>
-          </a:lnRef>
-          <a:fillRef idx="0">
-            <a:schemeClr val="accent1"/>
-          </a:fillRef>
-          <a:effectRef idx="1">
-            <a:schemeClr val="accent1"/>
-          </a:effectRef>
-          <a:fontRef idx="minor">
-            <a:schemeClr val="tx1"/>
-          </a:fontRef>
-        </p:style>
-      </p:cxnSp>
-      <p:cxnSp>
-        <p:nvCxnSpPr>
-          <p:cNvPr id="144" name="Straight Arrow Connector 143">
-            <a:extLst>
-              <a:ext uri="{FF2B5EF4-FFF2-40B4-BE49-F238E27FC236}">
-                <a16:creationId xmlns:a16="http://schemas.microsoft.com/office/drawing/2014/main" id="{2DDA7981-11BC-0B8B-20AD-943BCF3B730E}"/>
-              </a:ext>
-            </a:extLst>
-          </p:cNvPr>
-          <p:cNvCxnSpPr>
-            <a:cxnSpLocks/>
-          </p:cNvCxnSpPr>
-          <p:nvPr/>
-        </p:nvCxnSpPr>
-        <p:spPr>
-          <a:xfrm flipV="1">
-            <a:off x="9769220" y="2841482"/>
-            <a:ext cx="491490" cy="670"/>
-          </a:xfrm>
-          <a:prstGeom prst="straightConnector1">
-            <a:avLst/>
-          </a:prstGeom>
-          <a:ln>
-            <a:tailEnd type="triangle"/>
-          </a:ln>
-        </p:spPr>
-        <p:style>
-          <a:lnRef idx="2">
-            <a:schemeClr val="accent1"/>
-          </a:lnRef>
-          <a:fillRef idx="0">
-            <a:schemeClr val="accent1"/>
-          </a:fillRef>
-          <a:effectRef idx="1">
-            <a:schemeClr val="accent1"/>
-          </a:effectRef>
-          <a:fontRef idx="minor">
-            <a:schemeClr val="tx1"/>
-          </a:fontRef>
-        </p:style>
-      </p:cxnSp>
-      <p:cxnSp>
-        <p:nvCxnSpPr>
-          <p:cNvPr id="146" name="Straight Arrow Connector 145">
-            <a:extLst>
-              <a:ext uri="{FF2B5EF4-FFF2-40B4-BE49-F238E27FC236}">
-                <a16:creationId xmlns:a16="http://schemas.microsoft.com/office/drawing/2014/main" id="{1B1C07E1-7E77-C8C6-BE83-8C424E658BA9}"/>
-              </a:ext>
-            </a:extLst>
-          </p:cNvPr>
-          <p:cNvCxnSpPr>
-            <a:cxnSpLocks/>
-          </p:cNvCxnSpPr>
-          <p:nvPr/>
-        </p:nvCxnSpPr>
-        <p:spPr>
-          <a:xfrm flipV="1">
-            <a:off x="8631936" y="3347837"/>
-            <a:ext cx="491490" cy="670"/>
-          </a:xfrm>
-          <a:prstGeom prst="straightConnector1">
-            <a:avLst/>
-          </a:prstGeom>
-          <a:ln>
-            <a:tailEnd type="triangle"/>
-          </a:ln>
-        </p:spPr>
-        <p:style>
-          <a:lnRef idx="2">
-            <a:schemeClr val="accent1"/>
-          </a:lnRef>
-          <a:fillRef idx="0">
-            <a:schemeClr val="accent1"/>
-          </a:fillRef>
-          <a:effectRef idx="1">
-            <a:schemeClr val="accent1"/>
-          </a:effectRef>
-          <a:fontRef idx="minor">
-            <a:schemeClr val="tx1"/>
-          </a:fontRef>
-        </p:style>
-      </p:cxnSp>
-      <p:cxnSp>
-        <p:nvCxnSpPr>
-          <p:cNvPr id="147" name="Straight Arrow Connector 146">
-            <a:extLst>
-              <a:ext uri="{FF2B5EF4-FFF2-40B4-BE49-F238E27FC236}">
-                <a16:creationId xmlns:a16="http://schemas.microsoft.com/office/drawing/2014/main" id="{1704B7C7-A94B-AAD4-748F-8CA933E63DA1}"/>
-              </a:ext>
-            </a:extLst>
-          </p:cNvPr>
-          <p:cNvCxnSpPr>
-            <a:cxnSpLocks/>
-          </p:cNvCxnSpPr>
-          <p:nvPr/>
-        </p:nvCxnSpPr>
-        <p:spPr>
-          <a:xfrm flipV="1">
-            <a:off x="9769220" y="3357727"/>
-            <a:ext cx="491490" cy="670"/>
-          </a:xfrm>
-          <a:prstGeom prst="straightConnector1">
-            <a:avLst/>
-          </a:prstGeom>
-          <a:ln>
-            <a:tailEnd type="triangle"/>
-          </a:ln>
-        </p:spPr>
-        <p:style>
-          <a:lnRef idx="2">
-            <a:schemeClr val="accent1"/>
-          </a:lnRef>
-          <a:fillRef idx="0">
-            <a:schemeClr val="accent1"/>
-          </a:fillRef>
-          <a:effectRef idx="1">
-            <a:schemeClr val="accent1"/>
-          </a:effectRef>
-          <a:fontRef idx="minor">
-            <a:schemeClr val="tx1"/>
-          </a:fontRef>
-        </p:style>
-      </p:cxnSp>
-      <p:cxnSp>
-        <p:nvCxnSpPr>
-          <p:cNvPr id="148" name="Straight Arrow Connector 147">
-            <a:extLst>
-              <a:ext uri="{FF2B5EF4-FFF2-40B4-BE49-F238E27FC236}">
-                <a16:creationId xmlns:a16="http://schemas.microsoft.com/office/drawing/2014/main" id="{EDDFFA7E-B640-A6F1-45D4-EA5A25FE28B1}"/>
-              </a:ext>
-            </a:extLst>
-          </p:cNvPr>
-          <p:cNvCxnSpPr>
-            <a:cxnSpLocks/>
-          </p:cNvCxnSpPr>
-          <p:nvPr/>
-        </p:nvCxnSpPr>
-        <p:spPr>
-          <a:xfrm flipV="1">
-            <a:off x="8631936" y="3852472"/>
-            <a:ext cx="491490" cy="670"/>
-          </a:xfrm>
-          <a:prstGeom prst="straightConnector1">
-            <a:avLst/>
-          </a:prstGeom>
-          <a:ln>
-            <a:tailEnd type="triangle"/>
-          </a:ln>
-        </p:spPr>
-        <p:style>
-          <a:lnRef idx="2">
-            <a:schemeClr val="accent1"/>
-          </a:lnRef>
-          <a:fillRef idx="0">
-            <a:schemeClr val="accent1"/>
-          </a:fillRef>
-          <a:effectRef idx="1">
-            <a:schemeClr val="accent1"/>
-          </a:effectRef>
-          <a:fontRef idx="minor">
-            <a:schemeClr val="tx1"/>
-          </a:fontRef>
-        </p:style>
-      </p:cxnSp>
-      <p:cxnSp>
-        <p:nvCxnSpPr>
-          <p:cNvPr id="149" name="Straight Arrow Connector 148">
-            <a:extLst>
-              <a:ext uri="{FF2B5EF4-FFF2-40B4-BE49-F238E27FC236}">
-                <a16:creationId xmlns:a16="http://schemas.microsoft.com/office/drawing/2014/main" id="{D50DBAAA-74F3-6472-E687-FE65F89D6E7E}"/>
-              </a:ext>
-            </a:extLst>
-          </p:cNvPr>
-          <p:cNvCxnSpPr>
-            <a:cxnSpLocks/>
-          </p:cNvCxnSpPr>
-          <p:nvPr/>
-        </p:nvCxnSpPr>
-        <p:spPr>
-          <a:xfrm flipV="1">
-            <a:off x="9769220" y="3862362"/>
-            <a:ext cx="491490" cy="670"/>
-          </a:xfrm>
-          <a:prstGeom prst="straightConnector1">
-            <a:avLst/>
-          </a:prstGeom>
-          <a:ln>
-            <a:tailEnd type="triangle"/>
-          </a:ln>
-        </p:spPr>
-        <p:style>
-          <a:lnRef idx="2">
-            <a:schemeClr val="accent1"/>
-          </a:lnRef>
-          <a:fillRef idx="0">
-            <a:schemeClr val="accent1"/>
-          </a:fillRef>
-          <a:effectRef idx="1">
-            <a:schemeClr val="accent1"/>
-          </a:effectRef>
-          <a:fontRef idx="minor">
-            <a:schemeClr val="tx1"/>
-          </a:fontRef>
-        </p:style>
-      </p:cxnSp>
-      <p:cxnSp>
-        <p:nvCxnSpPr>
-          <p:cNvPr id="150" name="Straight Arrow Connector 149">
-            <a:extLst>
-              <a:ext uri="{FF2B5EF4-FFF2-40B4-BE49-F238E27FC236}">
-                <a16:creationId xmlns:a16="http://schemas.microsoft.com/office/drawing/2014/main" id="{68B876D4-1E4C-0FD1-AF73-6C4E09BF4E61}"/>
-              </a:ext>
-            </a:extLst>
-          </p:cNvPr>
-          <p:cNvCxnSpPr>
-            <a:cxnSpLocks/>
-          </p:cNvCxnSpPr>
-          <p:nvPr/>
-        </p:nvCxnSpPr>
-        <p:spPr>
-          <a:xfrm flipV="1">
-            <a:off x="8631936" y="4368717"/>
-            <a:ext cx="491490" cy="670"/>
-          </a:xfrm>
-          <a:prstGeom prst="straightConnector1">
-            <a:avLst/>
-          </a:prstGeom>
-          <a:ln>
-            <a:tailEnd type="triangle"/>
-          </a:ln>
-        </p:spPr>
-        <p:style>
-          <a:lnRef idx="2">
-            <a:schemeClr val="accent1"/>
-          </a:lnRef>
-          <a:fillRef idx="0">
-            <a:schemeClr val="accent1"/>
-          </a:fillRef>
-          <a:effectRef idx="1">
-            <a:schemeClr val="accent1"/>
-          </a:effectRef>
-          <a:fontRef idx="minor">
-            <a:schemeClr val="tx1"/>
-          </a:fontRef>
-        </p:style>
-      </p:cxnSp>
-      <p:cxnSp>
-        <p:nvCxnSpPr>
-          <p:cNvPr id="151" name="Straight Arrow Connector 150">
-            <a:extLst>
-              <a:ext uri="{FF2B5EF4-FFF2-40B4-BE49-F238E27FC236}">
-                <a16:creationId xmlns:a16="http://schemas.microsoft.com/office/drawing/2014/main" id="{EA3204A2-FA1B-DE7B-FAB2-AE0B9A1414B9}"/>
-              </a:ext>
-            </a:extLst>
-          </p:cNvPr>
-          <p:cNvCxnSpPr>
-            <a:cxnSpLocks/>
-          </p:cNvCxnSpPr>
-          <p:nvPr/>
-        </p:nvCxnSpPr>
-        <p:spPr>
-          <a:xfrm flipV="1">
-            <a:off x="9769220" y="4378607"/>
-            <a:ext cx="491490" cy="670"/>
-          </a:xfrm>
-          <a:prstGeom prst="straightConnector1">
-            <a:avLst/>
-          </a:prstGeom>
-          <a:ln>
-            <a:tailEnd type="triangle"/>
-          </a:ln>
-        </p:spPr>
-        <p:style>
-          <a:lnRef idx="2">
-            <a:schemeClr val="accent1"/>
-          </a:lnRef>
-          <a:fillRef idx="0">
-            <a:schemeClr val="accent1"/>
-          </a:fillRef>
-          <a:effectRef idx="1">
-            <a:schemeClr val="accent1"/>
-          </a:effectRef>
-          <a:fontRef idx="minor">
-            <a:schemeClr val="tx1"/>
-          </a:fontRef>
-        </p:style>
-      </p:cxnSp>
-      <p:sp>
-        <p:nvSpPr>
-          <p:cNvPr id="152" name="TextBox 151">
-            <a:extLst>
-              <a:ext uri="{FF2B5EF4-FFF2-40B4-BE49-F238E27FC236}">
-                <a16:creationId xmlns:a16="http://schemas.microsoft.com/office/drawing/2014/main" id="{A8069555-1591-6672-747E-4DCBAFF0C1FE}"/>
-              </a:ext>
-            </a:extLst>
-          </p:cNvPr>
-          <p:cNvSpPr txBox="1"/>
-          <p:nvPr/>
-        </p:nvSpPr>
-        <p:spPr>
-          <a:xfrm>
-            <a:off x="8602980" y="2339092"/>
-            <a:ext cx="552070" cy="507831"/>
-          </a:xfrm>
-          <a:prstGeom prst="rect">
-            <a:avLst/>
-          </a:prstGeom>
-          <a:noFill/>
-        </p:spPr>
-        <p:txBody>
-          <a:bodyPr wrap="square" rtlCol="0">
-            <a:spAutoFit/>
-          </a:bodyPr>
-          <a:lstStyle/>
-          <a:p>
-            <a:r>
-              <a:rPr lang="en-US" sz="900" dirty="0"/>
-              <a:t>Motor PWM Values</a:t>
-            </a:r>
-          </a:p>
-        </p:txBody>
-      </p:sp>
-      <p:sp>
-        <p:nvSpPr>
-          <p:cNvPr id="153" name="TextBox 152">
-            <a:extLst>
-              <a:ext uri="{FF2B5EF4-FFF2-40B4-BE49-F238E27FC236}">
-                <a16:creationId xmlns:a16="http://schemas.microsoft.com/office/drawing/2014/main" id="{AB57F696-517B-2209-5073-4E1BC2E10EA3}"/>
-              </a:ext>
-            </a:extLst>
-          </p:cNvPr>
-          <p:cNvSpPr txBox="1"/>
-          <p:nvPr/>
-        </p:nvSpPr>
-        <p:spPr>
-          <a:xfrm>
-            <a:off x="6963822" y="4843440"/>
-            <a:ext cx="3827718" cy="230832"/>
-          </a:xfrm>
-          <a:prstGeom prst="rect">
-            <a:avLst/>
-          </a:prstGeom>
-          <a:noFill/>
-        </p:spPr>
-        <p:txBody>
-          <a:bodyPr wrap="square" rtlCol="0">
-            <a:spAutoFit/>
-          </a:bodyPr>
-          <a:lstStyle/>
-          <a:p>
-            <a:r>
-              <a:rPr lang="en-US" sz="900" dirty="0"/>
-              <a:t>Sensor Feedback (May need to operations with these when feeding back)</a:t>
-            </a:r>
-          </a:p>
-        </p:txBody>
-      </p:sp>
-      <p:sp>
-        <p:nvSpPr>
-          <p:cNvPr id="154" name="TextBox 153">
-            <a:extLst>
-              <a:ext uri="{FF2B5EF4-FFF2-40B4-BE49-F238E27FC236}">
-                <a16:creationId xmlns:a16="http://schemas.microsoft.com/office/drawing/2014/main" id="{48BB7206-DB55-EF8C-E128-23F53EF41C5B}"/>
-              </a:ext>
-            </a:extLst>
-          </p:cNvPr>
-          <p:cNvSpPr txBox="1"/>
-          <p:nvPr/>
-        </p:nvSpPr>
-        <p:spPr>
-          <a:xfrm>
-            <a:off x="2594133" y="2592026"/>
-            <a:ext cx="866490" cy="230832"/>
-          </a:xfrm>
-          <a:prstGeom prst="rect">
-            <a:avLst/>
-          </a:prstGeom>
-          <a:noFill/>
-        </p:spPr>
-        <p:txBody>
-          <a:bodyPr wrap="square" rtlCol="0">
-            <a:spAutoFit/>
-          </a:bodyPr>
-          <a:lstStyle/>
-          <a:p>
-            <a:r>
-              <a:rPr lang="en-US" sz="900" dirty="0"/>
-              <a:t>Desired Pitch</a:t>
-            </a:r>
-          </a:p>
-        </p:txBody>
-      </p:sp>
-      <p:sp>
-        <p:nvSpPr>
-          <p:cNvPr id="155" name="TextBox 154">
-            <a:extLst>
-              <a:ext uri="{FF2B5EF4-FFF2-40B4-BE49-F238E27FC236}">
-                <a16:creationId xmlns:a16="http://schemas.microsoft.com/office/drawing/2014/main" id="{C39DF2C8-D6D2-FEB1-3A73-AEFC70AC5636}"/>
-              </a:ext>
-            </a:extLst>
-          </p:cNvPr>
-          <p:cNvSpPr txBox="1"/>
-          <p:nvPr/>
-        </p:nvSpPr>
-        <p:spPr>
-          <a:xfrm>
-            <a:off x="2636331" y="2961389"/>
-            <a:ext cx="633410" cy="369332"/>
-          </a:xfrm>
-          <a:prstGeom prst="rect">
-            <a:avLst/>
-          </a:prstGeom>
-          <a:noFill/>
-        </p:spPr>
-        <p:txBody>
-          <a:bodyPr wrap="square" rtlCol="0">
-            <a:spAutoFit/>
-          </a:bodyPr>
-          <a:lstStyle/>
-          <a:p>
-            <a:r>
-              <a:rPr lang="en-US" sz="900" dirty="0"/>
-              <a:t>Desired Roll</a:t>
-            </a:r>
-          </a:p>
-        </p:txBody>
-      </p:sp>
-    </p:spTree>
-    <p:extLst>
-      <p:ext uri="{BB962C8B-B14F-4D97-AF65-F5344CB8AC3E}">
-        <p14:creationId xmlns:p14="http://schemas.microsoft.com/office/powerpoint/2010/main" val="1343786567"/>
-      </p:ext>
-    </p:extLst>
-  </p:cSld>
-  <p:clrMapOvr>
-    <a:masterClrMapping/>
-  </p:clrMapOvr>
-</p:sld>
-</file>
-
-<file path=ppt/slides/slide3.xml><?xml version="1.0" encoding="utf-8"?>
-<p:sld xmlns:a="http://schemas.openxmlformats.org/drawingml/2006/main" xmlns:r="http://schemas.openxmlformats.org/officeDocument/2006/relationships" xmlns:p="http://schemas.openxmlformats.org/presentationml/2006/main">
-  <p:cSld>
-    <p:spTree>
-      <p:nvGrpSpPr>
-        <p:cNvPr id="1" name=""/>
-        <p:cNvGrpSpPr/>
-        <p:nvPr/>
-      </p:nvGrpSpPr>
-      <p:grpSpPr>
-        <a:xfrm>
-          <a:off x="0" y="0"/>
-          <a:ext cx="0" cy="0"/>
-          <a:chOff x="0" y="0"/>
-          <a:chExt cx="0" cy="0"/>
-        </a:xfrm>
-      </p:grpSpPr>
-      <p:sp>
-        <p:nvSpPr>
-          <p:cNvPr id="2" name="Title 1">
-            <a:extLst>
-              <a:ext uri="{FF2B5EF4-FFF2-40B4-BE49-F238E27FC236}">
-                <a16:creationId xmlns:a16="http://schemas.microsoft.com/office/drawing/2014/main" id="{EC24E606-9007-D956-678B-3A4FAE5CBD8C}"/>
-              </a:ext>
-            </a:extLst>
-          </p:cNvPr>
-          <p:cNvSpPr>
-            <a:spLocks noGrp="1"/>
-          </p:cNvSpPr>
-          <p:nvPr>
-            <p:ph type="title"/>
-          </p:nvPr>
-        </p:nvSpPr>
-        <p:spPr/>
-        <p:txBody>
-          <a:bodyPr/>
-          <a:lstStyle/>
-          <a:p>
-            <a:r>
-              <a:rPr lang="en-US" dirty="0"/>
-              <a:t>PID Variables</a:t>
-            </a:r>
-          </a:p>
-        </p:txBody>
-      </p:sp>
-      <p:sp>
-        <p:nvSpPr>
-          <p:cNvPr id="3" name="Content Placeholder 2">
-            <a:extLst>
-              <a:ext uri="{FF2B5EF4-FFF2-40B4-BE49-F238E27FC236}">
-                <a16:creationId xmlns:a16="http://schemas.microsoft.com/office/drawing/2014/main" id="{6D5E60D6-9EBD-1A61-B20C-576B5403A52F}"/>
-              </a:ext>
-            </a:extLst>
-          </p:cNvPr>
-          <p:cNvSpPr>
-            <a:spLocks noGrp="1"/>
-          </p:cNvSpPr>
-          <p:nvPr>
-            <p:ph idx="1"/>
-          </p:nvPr>
-        </p:nvSpPr>
-        <p:spPr/>
-        <p:txBody>
-          <a:bodyPr>
-            <a:normAutofit/>
-          </a:bodyPr>
-          <a:lstStyle/>
-          <a:p>
-            <a:r>
-              <a:rPr lang="en-US" sz="2000" dirty="0"/>
-              <a:t>e[]</a:t>
-            </a:r>
-          </a:p>
-          <a:p>
-            <a:pPr lvl="1"/>
-            <a:r>
-              <a:rPr lang="en-US" sz="1800" dirty="0"/>
-              <a:t>Array of size ??? holding error values from sampled sensor values.</a:t>
-            </a:r>
-          </a:p>
-          <a:p>
-            <a:pPr lvl="1"/>
-            <a:r>
-              <a:rPr lang="en-US" sz="1800" dirty="0"/>
-              <a:t>Most recent value is held at the end(?)</a:t>
-            </a:r>
-          </a:p>
-          <a:p>
-            <a:r>
-              <a:rPr lang="en-US" sz="2000" dirty="0"/>
-              <a:t>P, I, and D</a:t>
-            </a:r>
-          </a:p>
-          <a:p>
-            <a:pPr lvl="1"/>
-            <a:r>
-              <a:rPr lang="en-US" sz="1800" dirty="0"/>
-              <a:t>Gain values for each part of the PID controller.</a:t>
-            </a:r>
-          </a:p>
-          <a:p>
-            <a:r>
-              <a:rPr lang="en-US" sz="2000" dirty="0"/>
-              <a:t>sum</a:t>
-            </a:r>
-          </a:p>
-          <a:p>
-            <a:pPr lvl="1"/>
-            <a:r>
-              <a:rPr lang="en-US" sz="1800" dirty="0"/>
-              <a:t>“Integration” of e[] (see “Integral Details” slide) </a:t>
-            </a:r>
-          </a:p>
-          <a:p>
-            <a:r>
-              <a:rPr lang="en-US" sz="2000" dirty="0"/>
-              <a:t>slope</a:t>
-            </a:r>
-          </a:p>
-          <a:p>
-            <a:pPr lvl="1"/>
-            <a:r>
-              <a:rPr lang="en-US" sz="1600" dirty="0"/>
-              <a:t>“</a:t>
-            </a:r>
-            <a:r>
-              <a:rPr lang="en-US" sz="1800" dirty="0"/>
-              <a:t>Derivative” of e[] (see “Derivative Details” slide)</a:t>
-            </a:r>
-          </a:p>
-          <a:p>
-            <a:r>
-              <a:rPr lang="en-US" sz="2000" dirty="0" err="1"/>
-              <a:t>dutyCycle</a:t>
-            </a:r>
-            <a:endParaRPr lang="en-US" sz="2000" dirty="0"/>
-          </a:p>
-          <a:p>
-            <a:pPr lvl="1"/>
-            <a:r>
-              <a:rPr lang="en-US" sz="1800" dirty="0"/>
-              <a:t>Final output: gives the Duty Cycle of the PWM signal that needs to be generated (valued from 0 to 100)</a:t>
-            </a:r>
-          </a:p>
-          <a:p>
-            <a:pPr lvl="1"/>
-            <a:endParaRPr lang="en-US" sz="1800" dirty="0"/>
-          </a:p>
-        </p:txBody>
-      </p:sp>
-      <p:sp>
-        <p:nvSpPr>
-          <p:cNvPr id="5" name="Rectangle 4">
-            <a:extLst>
-              <a:ext uri="{FF2B5EF4-FFF2-40B4-BE49-F238E27FC236}">
-                <a16:creationId xmlns:a16="http://schemas.microsoft.com/office/drawing/2014/main" id="{265F00E9-D735-AF04-2D61-94F65B36D51C}"/>
-              </a:ext>
-            </a:extLst>
-          </p:cNvPr>
-          <p:cNvSpPr/>
-          <p:nvPr/>
-        </p:nvSpPr>
-        <p:spPr>
-          <a:xfrm>
-            <a:off x="10796016" y="822166"/>
-            <a:ext cx="557784" cy="411480"/>
-          </a:xfrm>
-          <a:prstGeom prst="rect">
-            <a:avLst/>
-          </a:prstGeom>
-        </p:spPr>
-        <p:style>
-          <a:lnRef idx="2">
-            <a:schemeClr val="accent1">
-              <a:shade val="15000"/>
-            </a:schemeClr>
-          </a:lnRef>
-          <a:fillRef idx="1">
-            <a:schemeClr val="accent1"/>
-          </a:fillRef>
-          <a:effectRef idx="0">
-            <a:schemeClr val="accent1"/>
-          </a:effectRef>
-          <a:fontRef idx="minor">
-            <a:schemeClr val="lt1"/>
-          </a:fontRef>
-        </p:style>
-        <p:txBody>
-          <a:bodyPr rtlCol="0" anchor="ctr"/>
-          <a:lstStyle/>
-          <a:p>
-            <a:pPr algn="ctr"/>
-            <a:r>
-              <a:rPr lang="en-US" dirty="0"/>
-              <a:t>PID</a:t>
-            </a:r>
-          </a:p>
-        </p:txBody>
-      </p:sp>
-    </p:spTree>
-    <p:extLst>
-      <p:ext uri="{BB962C8B-B14F-4D97-AF65-F5344CB8AC3E}">
-        <p14:creationId xmlns:p14="http://schemas.microsoft.com/office/powerpoint/2010/main" val="4271143265"/>
-      </p:ext>
-    </p:extLst>
-  </p:cSld>
-  <p:clrMapOvr>
-    <a:masterClrMapping/>
-  </p:clrMapOvr>
-</p:sld>
-</file>
-
-<file path=ppt/slides/slide4.xml><?xml version="1.0" encoding="utf-8"?>
-<p:sld xmlns:a="http://schemas.openxmlformats.org/drawingml/2006/main" xmlns:r="http://schemas.openxmlformats.org/officeDocument/2006/relationships" xmlns:p="http://schemas.openxmlformats.org/presentationml/2006/main">
-  <p:cSld>
-    <p:spTree>
-      <p:nvGrpSpPr>
-        <p:cNvPr id="1" name=""/>
-        <p:cNvGrpSpPr/>
-        <p:nvPr/>
-      </p:nvGrpSpPr>
-      <p:grpSpPr>
-        <a:xfrm>
-          <a:off x="0" y="0"/>
-          <a:ext cx="0" cy="0"/>
-          <a:chOff x="0" y="0"/>
-          <a:chExt cx="0" cy="0"/>
-        </a:xfrm>
-      </p:grpSpPr>
-      <p:sp>
-        <p:nvSpPr>
-          <p:cNvPr id="2" name="Title 1">
-            <a:extLst>
-              <a:ext uri="{FF2B5EF4-FFF2-40B4-BE49-F238E27FC236}">
-                <a16:creationId xmlns:a16="http://schemas.microsoft.com/office/drawing/2014/main" id="{EC24E606-9007-D956-678B-3A4FAE5CBD8C}"/>
-              </a:ext>
-            </a:extLst>
-          </p:cNvPr>
-          <p:cNvSpPr>
-            <a:spLocks noGrp="1"/>
-          </p:cNvSpPr>
-          <p:nvPr>
-            <p:ph type="title"/>
-          </p:nvPr>
-        </p:nvSpPr>
-        <p:spPr/>
-        <p:txBody>
-          <a:bodyPr/>
-          <a:lstStyle/>
-          <a:p>
-            <a:r>
-              <a:rPr lang="en-US" dirty="0"/>
-              <a:t>Duty Cycle Calculation</a:t>
-            </a:r>
-          </a:p>
-        </p:txBody>
-      </p:sp>
-      <p:sp>
-        <p:nvSpPr>
-          <p:cNvPr id="3" name="Content Placeholder 2">
-            <a:extLst>
-              <a:ext uri="{FF2B5EF4-FFF2-40B4-BE49-F238E27FC236}">
-                <a16:creationId xmlns:a16="http://schemas.microsoft.com/office/drawing/2014/main" id="{6D5E60D6-9EBD-1A61-B20C-576B5403A52F}"/>
-              </a:ext>
-            </a:extLst>
-          </p:cNvPr>
-          <p:cNvSpPr>
-            <a:spLocks noGrp="1"/>
-          </p:cNvSpPr>
-          <p:nvPr>
-            <p:ph idx="1"/>
-          </p:nvPr>
-        </p:nvSpPr>
-        <p:spPr/>
-        <p:txBody>
-          <a:bodyPr/>
-          <a:lstStyle/>
-          <a:p>
-            <a:pPr marL="0" indent="0" algn="ctr">
-              <a:buNone/>
-            </a:pPr>
-            <a:r>
-              <a:rPr lang="en-US" dirty="0" err="1"/>
-              <a:t>dutyCycle</a:t>
-            </a:r>
-            <a:r>
-              <a:rPr lang="en-US" dirty="0"/>
-              <a:t> = P*e[last] + I*sum – D*slope</a:t>
-            </a:r>
-          </a:p>
-          <a:p>
-            <a:pPr marL="0" indent="0" algn="ctr">
-              <a:buNone/>
-            </a:pPr>
-            <a:endParaRPr lang="en-US" dirty="0"/>
-          </a:p>
-          <a:p>
-            <a:pPr marL="0" indent="0">
-              <a:buNone/>
-            </a:pPr>
-            <a:r>
-              <a:rPr lang="en-US" dirty="0"/>
-              <a:t>if(</a:t>
-            </a:r>
-            <a:r>
-              <a:rPr lang="en-US" dirty="0" err="1"/>
-              <a:t>dutyCycle</a:t>
-            </a:r>
-            <a:r>
-              <a:rPr lang="en-US" dirty="0"/>
-              <a:t> &gt; 100) {</a:t>
-            </a:r>
-          </a:p>
-          <a:p>
-            <a:pPr marL="0" indent="0">
-              <a:buNone/>
-            </a:pPr>
-            <a:r>
-              <a:rPr lang="en-US" dirty="0"/>
-              <a:t>	</a:t>
-            </a:r>
-            <a:r>
-              <a:rPr lang="en-US" dirty="0" err="1"/>
-              <a:t>dutyCycle</a:t>
-            </a:r>
-            <a:r>
-              <a:rPr lang="en-US" dirty="0"/>
-              <a:t> = 100;</a:t>
-            </a:r>
-          </a:p>
-          <a:p>
-            <a:pPr marL="0" indent="0">
-              <a:buNone/>
-            </a:pPr>
-            <a:r>
-              <a:rPr lang="en-US" dirty="0"/>
-              <a:t>}</a:t>
-            </a:r>
-          </a:p>
-        </p:txBody>
-      </p:sp>
-      <p:sp>
-        <p:nvSpPr>
-          <p:cNvPr id="4" name="Rectangle 3">
-            <a:extLst>
-              <a:ext uri="{FF2B5EF4-FFF2-40B4-BE49-F238E27FC236}">
-                <a16:creationId xmlns:a16="http://schemas.microsoft.com/office/drawing/2014/main" id="{B5F9794C-4384-8E46-2553-7DAD372C7E89}"/>
-              </a:ext>
-            </a:extLst>
-          </p:cNvPr>
-          <p:cNvSpPr/>
-          <p:nvPr/>
-        </p:nvSpPr>
-        <p:spPr>
-          <a:xfrm>
-            <a:off x="10796016" y="822166"/>
-            <a:ext cx="557784" cy="411480"/>
-          </a:xfrm>
-          <a:prstGeom prst="rect">
-            <a:avLst/>
-          </a:prstGeom>
-        </p:spPr>
-        <p:style>
-          <a:lnRef idx="2">
-            <a:schemeClr val="accent1">
-              <a:shade val="15000"/>
-            </a:schemeClr>
-          </a:lnRef>
-          <a:fillRef idx="1">
-            <a:schemeClr val="accent1"/>
-          </a:fillRef>
-          <a:effectRef idx="0">
-            <a:schemeClr val="accent1"/>
-          </a:effectRef>
-          <a:fontRef idx="minor">
-            <a:schemeClr val="lt1"/>
-          </a:fontRef>
-        </p:style>
-        <p:txBody>
-          <a:bodyPr rtlCol="0" anchor="ctr"/>
-          <a:lstStyle/>
-          <a:p>
-            <a:pPr algn="ctr"/>
-            <a:r>
-              <a:rPr lang="en-US" dirty="0"/>
-              <a:t>PID</a:t>
-            </a:r>
-          </a:p>
-        </p:txBody>
-      </p:sp>
-    </p:spTree>
-    <p:extLst>
-      <p:ext uri="{BB962C8B-B14F-4D97-AF65-F5344CB8AC3E}">
-        <p14:creationId xmlns:p14="http://schemas.microsoft.com/office/powerpoint/2010/main" val="3399213682"/>
-      </p:ext>
-    </p:extLst>
-  </p:cSld>
-  <p:clrMapOvr>
-    <a:masterClrMapping/>
-  </p:clrMapOvr>
-</p:sld>
-</file>
-
-<file path=ppt/slides/slide5.xml><?xml version="1.0" encoding="utf-8"?>
-<p:sld xmlns:a="http://schemas.openxmlformats.org/drawingml/2006/main" xmlns:r="http://schemas.openxmlformats.org/officeDocument/2006/relationships" xmlns:p="http://schemas.openxmlformats.org/presentationml/2006/main">
-  <p:cSld>
-    <p:spTree>
-      <p:nvGrpSpPr>
-        <p:cNvPr id="1" name=""/>
-        <p:cNvGrpSpPr/>
-        <p:nvPr/>
-      </p:nvGrpSpPr>
-      <p:grpSpPr>
-        <a:xfrm>
-          <a:off x="0" y="0"/>
-          <a:ext cx="0" cy="0"/>
-          <a:chOff x="0" y="0"/>
-          <a:chExt cx="0" cy="0"/>
-        </a:xfrm>
-      </p:grpSpPr>
-      <p:sp>
-        <p:nvSpPr>
-          <p:cNvPr id="2" name="Title 1">
-            <a:extLst>
-              <a:ext uri="{FF2B5EF4-FFF2-40B4-BE49-F238E27FC236}">
-                <a16:creationId xmlns:a16="http://schemas.microsoft.com/office/drawing/2014/main" id="{EC24E606-9007-D956-678B-3A4FAE5CBD8C}"/>
-              </a:ext>
-            </a:extLst>
-          </p:cNvPr>
-          <p:cNvSpPr>
-            <a:spLocks noGrp="1"/>
-          </p:cNvSpPr>
-          <p:nvPr>
-            <p:ph type="title"/>
-          </p:nvPr>
-        </p:nvSpPr>
-        <p:spPr/>
-        <p:txBody>
-          <a:bodyPr/>
-          <a:lstStyle/>
-          <a:p>
-            <a:r>
-              <a:rPr lang="en-US" dirty="0"/>
-              <a:t>Integral Details</a:t>
-            </a:r>
-          </a:p>
-        </p:txBody>
-      </p:sp>
-      <p:sp>
-        <p:nvSpPr>
-          <p:cNvPr id="3" name="Content Placeholder 2">
-            <a:extLst>
-              <a:ext uri="{FF2B5EF4-FFF2-40B4-BE49-F238E27FC236}">
-                <a16:creationId xmlns:a16="http://schemas.microsoft.com/office/drawing/2014/main" id="{6D5E60D6-9EBD-1A61-B20C-576B5403A52F}"/>
-              </a:ext>
-            </a:extLst>
-          </p:cNvPr>
-          <p:cNvSpPr>
-            <a:spLocks noGrp="1"/>
-          </p:cNvSpPr>
-          <p:nvPr>
-            <p:ph idx="1"/>
-          </p:nvPr>
-        </p:nvSpPr>
-        <p:spPr/>
-        <p:txBody>
-          <a:bodyPr/>
-          <a:lstStyle/>
-          <a:p>
-            <a:r>
-              <a:rPr lang="en-US" dirty="0"/>
-              <a:t>sum will keep track of the integration so far.</a:t>
-            </a:r>
-          </a:p>
-          <a:p>
-            <a:r>
-              <a:rPr lang="en-US" dirty="0"/>
-              <a:t>for each new sample:</a:t>
-            </a:r>
-          </a:p>
-          <a:p>
-            <a:pPr lvl="1"/>
-            <a:r>
-              <a:rPr lang="en-US" dirty="0"/>
-              <a:t>sum += e[last] //assuming the most recent element is in the last position</a:t>
-            </a:r>
-          </a:p>
-          <a:p>
-            <a:r>
-              <a:rPr lang="en-US" dirty="0"/>
-              <a:t>Additional operations needed to correct overshoot (see “Overshoot Correction”)</a:t>
-            </a:r>
-          </a:p>
-        </p:txBody>
-      </p:sp>
-      <p:sp>
-        <p:nvSpPr>
-          <p:cNvPr id="4" name="Rectangle 3">
-            <a:extLst>
-              <a:ext uri="{FF2B5EF4-FFF2-40B4-BE49-F238E27FC236}">
-                <a16:creationId xmlns:a16="http://schemas.microsoft.com/office/drawing/2014/main" id="{D73BAE20-D9A2-DD2C-9C19-F846D4D58876}"/>
-              </a:ext>
-            </a:extLst>
-          </p:cNvPr>
-          <p:cNvSpPr/>
-          <p:nvPr/>
-        </p:nvSpPr>
-        <p:spPr>
-          <a:xfrm>
-            <a:off x="10796016" y="822166"/>
-            <a:ext cx="557784" cy="411480"/>
-          </a:xfrm>
-          <a:prstGeom prst="rect">
-            <a:avLst/>
-          </a:prstGeom>
-        </p:spPr>
-        <p:style>
-          <a:lnRef idx="2">
-            <a:schemeClr val="accent1">
-              <a:shade val="15000"/>
-            </a:schemeClr>
-          </a:lnRef>
-          <a:fillRef idx="1">
-            <a:schemeClr val="accent1"/>
-          </a:fillRef>
-          <a:effectRef idx="0">
-            <a:schemeClr val="accent1"/>
-          </a:effectRef>
-          <a:fontRef idx="minor">
-            <a:schemeClr val="lt1"/>
-          </a:fontRef>
-        </p:style>
-        <p:txBody>
-          <a:bodyPr rtlCol="0" anchor="ctr"/>
-          <a:lstStyle/>
-          <a:p>
-            <a:pPr algn="ctr"/>
-            <a:r>
-              <a:rPr lang="en-US" dirty="0"/>
-              <a:t>PID</a:t>
-            </a:r>
-          </a:p>
-        </p:txBody>
-      </p:sp>
-    </p:spTree>
-    <p:extLst>
-      <p:ext uri="{BB962C8B-B14F-4D97-AF65-F5344CB8AC3E}">
-        <p14:creationId xmlns:p14="http://schemas.microsoft.com/office/powerpoint/2010/main" val="3688677983"/>
-      </p:ext>
-    </p:extLst>
-  </p:cSld>
-  <p:clrMapOvr>
-    <a:masterClrMapping/>
-  </p:clrMapOvr>
-</p:sld>
-</file>
-
-<file path=ppt/slides/slide6.xml><?xml version="1.0" encoding="utf-8"?>
-<p:sld xmlns:a="http://schemas.openxmlformats.org/drawingml/2006/main" xmlns:r="http://schemas.openxmlformats.org/officeDocument/2006/relationships" xmlns:p="http://schemas.openxmlformats.org/presentationml/2006/main">
-  <p:cSld>
-    <p:spTree>
-      <p:nvGrpSpPr>
-        <p:cNvPr id="1" name=""/>
-        <p:cNvGrpSpPr/>
-        <p:nvPr/>
-      </p:nvGrpSpPr>
-      <p:grpSpPr>
-        <a:xfrm>
-          <a:off x="0" y="0"/>
-          <a:ext cx="0" cy="0"/>
-          <a:chOff x="0" y="0"/>
-          <a:chExt cx="0" cy="0"/>
-        </a:xfrm>
-      </p:grpSpPr>
-      <p:sp>
-        <p:nvSpPr>
-          <p:cNvPr id="2" name="Title 1">
-            <a:extLst>
-              <a:ext uri="{FF2B5EF4-FFF2-40B4-BE49-F238E27FC236}">
-                <a16:creationId xmlns:a16="http://schemas.microsoft.com/office/drawing/2014/main" id="{EC24E606-9007-D956-678B-3A4FAE5CBD8C}"/>
-              </a:ext>
-            </a:extLst>
-          </p:cNvPr>
-          <p:cNvSpPr>
-            <a:spLocks noGrp="1"/>
-          </p:cNvSpPr>
-          <p:nvPr>
-            <p:ph type="title"/>
-          </p:nvPr>
-        </p:nvSpPr>
-        <p:spPr/>
-        <p:txBody>
-          <a:bodyPr/>
-          <a:lstStyle/>
-          <a:p>
-            <a:r>
-              <a:rPr lang="en-US" dirty="0"/>
-              <a:t>Derivative Details</a:t>
-            </a:r>
-          </a:p>
-        </p:txBody>
-      </p:sp>
-      <p:sp>
-        <p:nvSpPr>
-          <p:cNvPr id="3" name="Content Placeholder 2">
-            <a:extLst>
-              <a:ext uri="{FF2B5EF4-FFF2-40B4-BE49-F238E27FC236}">
-                <a16:creationId xmlns:a16="http://schemas.microsoft.com/office/drawing/2014/main" id="{6D5E60D6-9EBD-1A61-B20C-576B5403A52F}"/>
-              </a:ext>
-            </a:extLst>
-          </p:cNvPr>
-          <p:cNvSpPr>
-            <a:spLocks noGrp="1"/>
-          </p:cNvSpPr>
-          <p:nvPr>
-            <p:ph idx="1"/>
-          </p:nvPr>
-        </p:nvSpPr>
-        <p:spPr/>
-        <p:txBody>
-          <a:bodyPr>
-            <a:normAutofit lnSpcReduction="10000"/>
-          </a:bodyPr>
-          <a:lstStyle/>
-          <a:p>
-            <a:r>
-              <a:rPr lang="en-US" dirty="0"/>
-              <a:t>2 Options to solve for slope (2 is probably best)</a:t>
-            </a:r>
-          </a:p>
-          <a:p>
-            <a:pPr marL="514350" indent="-514350">
-              <a:buFont typeface="+mj-lt"/>
-              <a:buAutoNum type="arabicPeriod"/>
-            </a:pPr>
-            <a:r>
-              <a:rPr lang="en-US" dirty="0"/>
-              <a:t>(most recent e) – (2</a:t>
-            </a:r>
-            <a:r>
-              <a:rPr lang="en-US" baseline="30000" dirty="0"/>
-              <a:t>nd</a:t>
-            </a:r>
-            <a:r>
-              <a:rPr lang="en-US" dirty="0"/>
-              <a:t> most recent e)</a:t>
-            </a:r>
-          </a:p>
-          <a:p>
-            <a:pPr lvl="1"/>
-            <a:r>
-              <a:rPr lang="en-US" dirty="0"/>
-              <a:t>Pros:</a:t>
-            </a:r>
-          </a:p>
-          <a:p>
-            <a:pPr lvl="2"/>
-            <a:r>
-              <a:rPr lang="en-US" dirty="0"/>
-              <a:t>More responsive</a:t>
-            </a:r>
-          </a:p>
-          <a:p>
-            <a:pPr lvl="1"/>
-            <a:r>
-              <a:rPr lang="en-US" dirty="0"/>
-              <a:t>Cons:</a:t>
-            </a:r>
-          </a:p>
-          <a:p>
-            <a:pPr lvl="2"/>
-            <a:r>
-              <a:rPr lang="en-US" dirty="0"/>
-              <a:t>Noise can really mess stuff up, and can also be twitchy</a:t>
-            </a:r>
-          </a:p>
-          <a:p>
-            <a:pPr marL="514350" indent="-514350">
-              <a:buFont typeface="+mj-lt"/>
-              <a:buAutoNum type="arabicPeriod"/>
-            </a:pPr>
-            <a:r>
-              <a:rPr lang="en-US" dirty="0"/>
-              <a:t>(average of N most recent or e[]) – (average of the next N of e[])</a:t>
-            </a:r>
-          </a:p>
-          <a:p>
-            <a:pPr lvl="1"/>
-            <a:r>
-              <a:rPr lang="en-US" dirty="0"/>
-              <a:t>Pros:</a:t>
-            </a:r>
-          </a:p>
-          <a:p>
-            <a:pPr lvl="2"/>
-            <a:r>
-              <a:rPr lang="en-US" dirty="0"/>
-              <a:t>Resists noise effects</a:t>
-            </a:r>
-          </a:p>
-          <a:p>
-            <a:pPr lvl="1"/>
-            <a:r>
-              <a:rPr lang="en-US" dirty="0"/>
-              <a:t>Cons:</a:t>
-            </a:r>
-          </a:p>
-          <a:p>
-            <a:pPr lvl="2"/>
-            <a:r>
-              <a:rPr lang="en-US" dirty="0"/>
-              <a:t>Slower response</a:t>
-            </a:r>
-          </a:p>
-        </p:txBody>
-      </p:sp>
-      <p:sp>
-        <p:nvSpPr>
-          <p:cNvPr id="4" name="Rectangle 3">
-            <a:extLst>
-              <a:ext uri="{FF2B5EF4-FFF2-40B4-BE49-F238E27FC236}">
-                <a16:creationId xmlns:a16="http://schemas.microsoft.com/office/drawing/2014/main" id="{D93762C4-0E9A-8A85-6E79-6E66DE4A72A5}"/>
-              </a:ext>
-            </a:extLst>
-          </p:cNvPr>
-          <p:cNvSpPr/>
-          <p:nvPr/>
-        </p:nvSpPr>
-        <p:spPr>
-          <a:xfrm>
-            <a:off x="10796016" y="822166"/>
-            <a:ext cx="557784" cy="411480"/>
-          </a:xfrm>
-          <a:prstGeom prst="rect">
-            <a:avLst/>
-          </a:prstGeom>
-        </p:spPr>
-        <p:style>
-          <a:lnRef idx="2">
-            <a:schemeClr val="accent1">
-              <a:shade val="15000"/>
-            </a:schemeClr>
-          </a:lnRef>
-          <a:fillRef idx="1">
-            <a:schemeClr val="accent1"/>
-          </a:fillRef>
-          <a:effectRef idx="0">
-            <a:schemeClr val="accent1"/>
-          </a:effectRef>
-          <a:fontRef idx="minor">
-            <a:schemeClr val="lt1"/>
-          </a:fontRef>
-        </p:style>
-        <p:txBody>
-          <a:bodyPr rtlCol="0" anchor="ctr"/>
-          <a:lstStyle/>
-          <a:p>
-            <a:pPr algn="ctr"/>
-            <a:r>
-              <a:rPr lang="en-US" dirty="0"/>
-              <a:t>PID</a:t>
-            </a:r>
-          </a:p>
-        </p:txBody>
-      </p:sp>
-    </p:spTree>
-    <p:extLst>
-      <p:ext uri="{BB962C8B-B14F-4D97-AF65-F5344CB8AC3E}">
-        <p14:creationId xmlns:p14="http://schemas.microsoft.com/office/powerpoint/2010/main" val="9716602"/>
-      </p:ext>
-    </p:extLst>
-  </p:cSld>
-  <p:clrMapOvr>
-    <a:masterClrMapping/>
-  </p:clrMapOvr>
-</p:sld>
-</file>
-
-<file path=ppt/slides/slide7.xml><?xml version="1.0" encoding="utf-8"?>
-<p:sld xmlns:a="http://schemas.openxmlformats.org/drawingml/2006/main" xmlns:r="http://schemas.openxmlformats.org/officeDocument/2006/relationships" xmlns:p="http://schemas.openxmlformats.org/presentationml/2006/main">
-  <p:cSld>
-    <p:spTree>
-      <p:nvGrpSpPr>
-        <p:cNvPr id="1" name=""/>
-        <p:cNvGrpSpPr/>
-        <p:nvPr/>
-      </p:nvGrpSpPr>
-      <p:grpSpPr>
-        <a:xfrm>
-          <a:off x="0" y="0"/>
-          <a:ext cx="0" cy="0"/>
-          <a:chOff x="0" y="0"/>
-          <a:chExt cx="0" cy="0"/>
-        </a:xfrm>
-      </p:grpSpPr>
-      <p:sp>
-        <p:nvSpPr>
-          <p:cNvPr id="2" name="Title 1">
-            <a:extLst>
-              <a:ext uri="{FF2B5EF4-FFF2-40B4-BE49-F238E27FC236}">
-                <a16:creationId xmlns:a16="http://schemas.microsoft.com/office/drawing/2014/main" id="{EC24E606-9007-D956-678B-3A4FAE5CBD8C}"/>
-              </a:ext>
-            </a:extLst>
-          </p:cNvPr>
-          <p:cNvSpPr>
-            <a:spLocks noGrp="1"/>
-          </p:cNvSpPr>
-          <p:nvPr>
-            <p:ph type="title"/>
-          </p:nvPr>
-        </p:nvSpPr>
-        <p:spPr/>
-        <p:txBody>
-          <a:bodyPr/>
-          <a:lstStyle/>
-          <a:p>
-            <a:r>
-              <a:rPr lang="en-US" dirty="0"/>
-              <a:t>Overshoot Correction</a:t>
-            </a:r>
-          </a:p>
-        </p:txBody>
-      </p:sp>
-      <p:sp>
-        <p:nvSpPr>
-          <p:cNvPr id="3" name="Content Placeholder 2">
-            <a:extLst>
-              <a:ext uri="{FF2B5EF4-FFF2-40B4-BE49-F238E27FC236}">
-                <a16:creationId xmlns:a16="http://schemas.microsoft.com/office/drawing/2014/main" id="{6D5E60D6-9EBD-1A61-B20C-576B5403A52F}"/>
-              </a:ext>
-            </a:extLst>
-          </p:cNvPr>
-          <p:cNvSpPr>
-            <a:spLocks noGrp="1"/>
-          </p:cNvSpPr>
-          <p:nvPr>
-            <p:ph idx="1"/>
-          </p:nvPr>
-        </p:nvSpPr>
-        <p:spPr/>
-        <p:txBody>
-          <a:bodyPr/>
-          <a:lstStyle/>
-          <a:p>
-            <a:r>
-              <a:rPr lang="en-US" dirty="0"/>
-              <a:t>Need to cap sum to some value.</a:t>
-            </a:r>
-          </a:p>
-          <a:p>
-            <a:r>
-              <a:rPr lang="en-US" dirty="0"/>
-              <a:t>100 would work but we could probably cap it at a smaller value.</a:t>
-            </a:r>
-          </a:p>
-        </p:txBody>
-      </p:sp>
-      <p:sp>
-        <p:nvSpPr>
-          <p:cNvPr id="4" name="Rectangle 3">
-            <a:extLst>
-              <a:ext uri="{FF2B5EF4-FFF2-40B4-BE49-F238E27FC236}">
-                <a16:creationId xmlns:a16="http://schemas.microsoft.com/office/drawing/2014/main" id="{B6299D0C-4F8A-C496-A5FA-66C0641BA50A}"/>
-              </a:ext>
-            </a:extLst>
-          </p:cNvPr>
-          <p:cNvSpPr/>
-          <p:nvPr/>
-        </p:nvSpPr>
-        <p:spPr>
-          <a:xfrm>
-            <a:off x="10796016" y="822166"/>
-            <a:ext cx="557784" cy="411480"/>
-          </a:xfrm>
-          <a:prstGeom prst="rect">
-            <a:avLst/>
-          </a:prstGeom>
-        </p:spPr>
-        <p:style>
-          <a:lnRef idx="2">
-            <a:schemeClr val="accent1">
-              <a:shade val="15000"/>
-            </a:schemeClr>
-          </a:lnRef>
-          <a:fillRef idx="1">
-            <a:schemeClr val="accent1"/>
-          </a:fillRef>
-          <a:effectRef idx="0">
-            <a:schemeClr val="accent1"/>
-          </a:effectRef>
-          <a:fontRef idx="minor">
-            <a:schemeClr val="lt1"/>
-          </a:fontRef>
-        </p:style>
-        <p:txBody>
-          <a:bodyPr rtlCol="0" anchor="ctr"/>
-          <a:lstStyle/>
-          <a:p>
-            <a:pPr algn="ctr"/>
-            <a:r>
-              <a:rPr lang="en-US" dirty="0"/>
-              <a:t>PID</a:t>
-            </a:r>
-          </a:p>
-        </p:txBody>
-      </p:sp>
-    </p:spTree>
-    <p:extLst>
-      <p:ext uri="{BB962C8B-B14F-4D97-AF65-F5344CB8AC3E}">
-        <p14:creationId xmlns:p14="http://schemas.microsoft.com/office/powerpoint/2010/main" val="92075563"/>
-      </p:ext>
-    </p:extLst>
-  </p:cSld>
-  <p:clrMapOvr>
-    <a:masterClrMapping/>
-  </p:clrMapOvr>
-</p:sld>
-</file>
-
-<file path=ppt/slides/slide8.xml><?xml version="1.0" encoding="utf-8"?>
-<p:sld xmlns:a="http://schemas.openxmlformats.org/drawingml/2006/main" xmlns:r="http://schemas.openxmlformats.org/officeDocument/2006/relationships" xmlns:p="http://schemas.openxmlformats.org/presentationml/2006/main">
-  <p:cSld>
-    <p:spTree>
-      <p:nvGrpSpPr>
-        <p:cNvPr id="1" name=""/>
-        <p:cNvGrpSpPr/>
-        <p:nvPr/>
-      </p:nvGrpSpPr>
-      <p:grpSpPr>
-        <a:xfrm>
-          <a:off x="0" y="0"/>
-          <a:ext cx="0" cy="0"/>
-          <a:chOff x="0" y="0"/>
-          <a:chExt cx="0" cy="0"/>
-        </a:xfrm>
-      </p:grpSpPr>
-      <p:sp>
-        <p:nvSpPr>
-          <p:cNvPr id="2" name="Title 1">
-            <a:extLst>
-              <a:ext uri="{FF2B5EF4-FFF2-40B4-BE49-F238E27FC236}">
-                <a16:creationId xmlns:a16="http://schemas.microsoft.com/office/drawing/2014/main" id="{EC24E606-9007-D956-678B-3A4FAE5CBD8C}"/>
-              </a:ext>
-            </a:extLst>
-          </p:cNvPr>
-          <p:cNvSpPr>
-            <a:spLocks noGrp="1"/>
-          </p:cNvSpPr>
-          <p:nvPr>
-            <p:ph type="title"/>
-          </p:nvPr>
-        </p:nvSpPr>
-        <p:spPr/>
-        <p:txBody>
-          <a:bodyPr/>
-          <a:lstStyle/>
-          <a:p>
-            <a:pPr algn="ctr"/>
-            <a:r>
-              <a:rPr lang="en-US" dirty="0"/>
-              <a:t>Appropriate Summations</a:t>
-            </a:r>
-          </a:p>
-        </p:txBody>
-      </p:sp>
-      <p:sp>
-        <p:nvSpPr>
-          <p:cNvPr id="3" name="Content Placeholder 2">
-            <a:extLst>
-              <a:ext uri="{FF2B5EF4-FFF2-40B4-BE49-F238E27FC236}">
-                <a16:creationId xmlns:a16="http://schemas.microsoft.com/office/drawing/2014/main" id="{6D5E60D6-9EBD-1A61-B20C-576B5403A52F}"/>
-              </a:ext>
-            </a:extLst>
-          </p:cNvPr>
-          <p:cNvSpPr>
-            <a:spLocks noGrp="1"/>
-          </p:cNvSpPr>
-          <p:nvPr>
-            <p:ph idx="1"/>
-          </p:nvPr>
-        </p:nvSpPr>
-        <p:spPr/>
-        <p:txBody>
-          <a:bodyPr/>
-          <a:lstStyle/>
-          <a:p>
-            <a:pPr marL="0" indent="0" algn="ctr">
-              <a:buNone/>
-            </a:pPr>
-            <a:r>
-              <a:rPr lang="en-US" dirty="0" err="1"/>
-              <a:t>M</a:t>
-            </a:r>
-            <a:r>
-              <a:rPr lang="en-US" baseline="-25000" dirty="0" err="1"/>
-              <a:t>fr</a:t>
-            </a:r>
-            <a:r>
-              <a:rPr lang="en-US" dirty="0"/>
-              <a:t> = a*Thrust + b*Yaw + b*Pitch + b*Roll</a:t>
-            </a:r>
-          </a:p>
-          <a:p>
-            <a:pPr marL="0" indent="0" algn="ctr">
-              <a:buNone/>
-            </a:pPr>
-            <a:r>
-              <a:rPr lang="en-US" dirty="0" err="1"/>
-              <a:t>M</a:t>
-            </a:r>
-            <a:r>
-              <a:rPr lang="en-US" baseline="-25000" dirty="0" err="1"/>
-              <a:t>fl</a:t>
-            </a:r>
-            <a:r>
-              <a:rPr lang="en-US" dirty="0"/>
-              <a:t> = a*Thrust - b*Yaw + b*Pitch - b*Roll</a:t>
-            </a:r>
-          </a:p>
-          <a:p>
-            <a:pPr marL="0" indent="0" algn="ctr">
-              <a:buNone/>
-            </a:pPr>
-            <a:r>
-              <a:rPr lang="en-US" dirty="0" err="1"/>
-              <a:t>M</a:t>
-            </a:r>
-            <a:r>
-              <a:rPr lang="en-US" baseline="-25000" dirty="0" err="1"/>
-              <a:t>br</a:t>
-            </a:r>
-            <a:r>
-              <a:rPr lang="en-US" dirty="0"/>
-              <a:t> = a*Thrust - b*Yaw - b*Pitch + b*Roll</a:t>
-            </a:r>
-          </a:p>
-          <a:p>
-            <a:pPr marL="0" indent="0" algn="ctr">
-              <a:buNone/>
-            </a:pPr>
-            <a:r>
-              <a:rPr lang="en-US" dirty="0" err="1"/>
-              <a:t>M</a:t>
-            </a:r>
-            <a:r>
-              <a:rPr lang="en-US" baseline="-25000" dirty="0" err="1"/>
-              <a:t>bl</a:t>
-            </a:r>
-            <a:r>
-              <a:rPr lang="en-US" dirty="0"/>
-              <a:t> = a*Thrust + b*Yaw - b*Pitch - b*Roll</a:t>
-            </a:r>
-          </a:p>
-          <a:p>
-            <a:pPr marL="0" indent="0" algn="ctr">
-              <a:buNone/>
-            </a:pPr>
-            <a:endParaRPr lang="en-US" dirty="0"/>
-          </a:p>
-          <a:p>
-            <a:pPr marL="0" indent="0">
-              <a:buNone/>
-            </a:pPr>
-            <a:r>
-              <a:rPr lang="en-US" dirty="0"/>
-              <a:t>Note: a+3b = 1</a:t>
-            </a:r>
-          </a:p>
-          <a:p>
-            <a:pPr marL="0" indent="0">
-              <a:buNone/>
-            </a:pPr>
-            <a:r>
-              <a:rPr lang="en-US" dirty="0"/>
-              <a:t>This should keep the final Duty Cycle values between 0 and 100</a:t>
-            </a:r>
-          </a:p>
-          <a:p>
-            <a:pPr marL="0" indent="0" algn="ctr">
-              <a:buNone/>
-            </a:pPr>
-            <a:endParaRPr lang="en-US" dirty="0"/>
-          </a:p>
-          <a:p>
-            <a:pPr marL="0" indent="0" algn="ctr">
-              <a:buNone/>
-            </a:pPr>
-            <a:endParaRPr lang="en-US" dirty="0"/>
-          </a:p>
-        </p:txBody>
-      </p:sp>
-      <p:sp>
-        <p:nvSpPr>
-          <p:cNvPr id="4" name="Rectangle 3">
-            <a:extLst>
-              <a:ext uri="{FF2B5EF4-FFF2-40B4-BE49-F238E27FC236}">
-                <a16:creationId xmlns:a16="http://schemas.microsoft.com/office/drawing/2014/main" id="{1BEF1A3B-3AC3-E83A-4355-90EFAFAABFA0}"/>
-              </a:ext>
-            </a:extLst>
-          </p:cNvPr>
-          <p:cNvSpPr/>
-          <p:nvPr/>
-        </p:nvSpPr>
-        <p:spPr>
-          <a:xfrm>
-            <a:off x="10375392" y="365125"/>
-            <a:ext cx="978408" cy="1961388"/>
-          </a:xfrm>
-          <a:prstGeom prst="rect">
-            <a:avLst/>
-          </a:prstGeom>
-        </p:spPr>
-        <p:style>
-          <a:lnRef idx="2">
-            <a:schemeClr val="accent1">
-              <a:shade val="15000"/>
-            </a:schemeClr>
-          </a:lnRef>
-          <a:fillRef idx="1">
-            <a:schemeClr val="accent1"/>
-          </a:fillRef>
-          <a:effectRef idx="0">
-            <a:schemeClr val="accent1"/>
-          </a:effectRef>
-          <a:fontRef idx="minor">
-            <a:schemeClr val="lt1"/>
-          </a:fontRef>
-        </p:style>
-        <p:txBody>
-          <a:bodyPr rtlCol="0" anchor="ctr"/>
-          <a:lstStyle/>
-          <a:p>
-            <a:pPr algn="ctr"/>
-            <a:r>
-              <a:rPr lang="en-US" sz="1100" dirty="0"/>
-              <a:t>Appropriate Summations</a:t>
-            </a:r>
-          </a:p>
-        </p:txBody>
-      </p:sp>
-    </p:spTree>
-    <p:extLst>
-      <p:ext uri="{BB962C8B-B14F-4D97-AF65-F5344CB8AC3E}">
-        <p14:creationId xmlns:p14="http://schemas.microsoft.com/office/powerpoint/2010/main" val="3786574737"/>
-      </p:ext>
-    </p:extLst>
-  </p:cSld>
-  <p:clrMapOvr>
-    <a:masterClrMapping/>
-  </p:clrMapOvr>
-</p:sld>
-</file>
-
-<file path=ppt/slides/slide9.xml><?xml version="1.0" encoding="utf-8"?>
+<file path=ppt/slides/slide10.xml><?xml version="1.0" encoding="utf-8"?>
 <p:sld xmlns:a="http://schemas.openxmlformats.org/drawingml/2006/main" xmlns:r="http://schemas.openxmlformats.org/officeDocument/2006/relationships" xmlns:p="http://schemas.openxmlformats.org/presentationml/2006/main">
   <p:cSld>
     <p:spTree>
@@ -9135,6 +4846,5020 @@
     <p:extLst>
       <p:ext uri="{BB962C8B-B14F-4D97-AF65-F5344CB8AC3E}">
         <p14:creationId xmlns:p14="http://schemas.microsoft.com/office/powerpoint/2010/main" val="787159320"/>
+      </p:ext>
+    </p:extLst>
+  </p:cSld>
+  <p:clrMapOvr>
+    <a:masterClrMapping/>
+  </p:clrMapOvr>
+</p:sld>
+</file>
+
+<file path=ppt/slides/slide2.xml><?xml version="1.0" encoding="utf-8"?>
+<p:sld xmlns:a="http://schemas.openxmlformats.org/drawingml/2006/main" xmlns:r="http://schemas.openxmlformats.org/officeDocument/2006/relationships" xmlns:p="http://schemas.openxmlformats.org/presentationml/2006/main">
+  <p:cSld>
+    <p:spTree>
+      <p:nvGrpSpPr>
+        <p:cNvPr id="1" name=""/>
+        <p:cNvGrpSpPr/>
+        <p:nvPr/>
+      </p:nvGrpSpPr>
+      <p:grpSpPr>
+        <a:xfrm>
+          <a:off x="0" y="0"/>
+          <a:ext cx="0" cy="0"/>
+          <a:chOff x="0" y="0"/>
+          <a:chExt cx="0" cy="0"/>
+        </a:xfrm>
+      </p:grpSpPr>
+      <p:sp>
+        <p:nvSpPr>
+          <p:cNvPr id="3" name="Rectangle 2">
+            <a:extLst>
+              <a:ext uri="{FF2B5EF4-FFF2-40B4-BE49-F238E27FC236}">
+                <a16:creationId xmlns:a16="http://schemas.microsoft.com/office/drawing/2014/main" id="{3B1FF5EB-2BC9-C328-43F3-F3AD2B2D8C7C}"/>
+              </a:ext>
+            </a:extLst>
+          </p:cNvPr>
+          <p:cNvSpPr/>
+          <p:nvPr/>
+        </p:nvSpPr>
+        <p:spPr>
+          <a:xfrm>
+            <a:off x="6597396" y="2631948"/>
+            <a:ext cx="557784" cy="411480"/>
+          </a:xfrm>
+          <a:prstGeom prst="rect">
+            <a:avLst/>
+          </a:prstGeom>
+        </p:spPr>
+        <p:style>
+          <a:lnRef idx="2">
+            <a:schemeClr val="accent1">
+              <a:shade val="15000"/>
+            </a:schemeClr>
+          </a:lnRef>
+          <a:fillRef idx="1">
+            <a:schemeClr val="accent1"/>
+          </a:fillRef>
+          <a:effectRef idx="0">
+            <a:schemeClr val="accent1"/>
+          </a:effectRef>
+          <a:fontRef idx="minor">
+            <a:schemeClr val="lt1"/>
+          </a:fontRef>
+        </p:style>
+        <p:txBody>
+          <a:bodyPr rtlCol="0" anchor="ctr"/>
+          <a:lstStyle/>
+          <a:p>
+            <a:pPr algn="ctr"/>
+            <a:r>
+              <a:rPr lang="en-US" dirty="0"/>
+              <a:t>PID</a:t>
+            </a:r>
+          </a:p>
+        </p:txBody>
+      </p:sp>
+      <p:sp>
+        <p:nvSpPr>
+          <p:cNvPr id="6" name="Rectangle 5">
+            <a:extLst>
+              <a:ext uri="{FF2B5EF4-FFF2-40B4-BE49-F238E27FC236}">
+                <a16:creationId xmlns:a16="http://schemas.microsoft.com/office/drawing/2014/main" id="{42B021F0-E2AB-0CF0-B307-02686C5871C4}"/>
+              </a:ext>
+            </a:extLst>
+          </p:cNvPr>
+          <p:cNvSpPr/>
+          <p:nvPr/>
+        </p:nvSpPr>
+        <p:spPr>
+          <a:xfrm>
+            <a:off x="7653528" y="2628900"/>
+            <a:ext cx="978408" cy="1961388"/>
+          </a:xfrm>
+          <a:prstGeom prst="rect">
+            <a:avLst/>
+          </a:prstGeom>
+        </p:spPr>
+        <p:style>
+          <a:lnRef idx="2">
+            <a:schemeClr val="accent1">
+              <a:shade val="15000"/>
+            </a:schemeClr>
+          </a:lnRef>
+          <a:fillRef idx="1">
+            <a:schemeClr val="accent1"/>
+          </a:fillRef>
+          <a:effectRef idx="0">
+            <a:schemeClr val="accent1"/>
+          </a:effectRef>
+          <a:fontRef idx="minor">
+            <a:schemeClr val="lt1"/>
+          </a:fontRef>
+        </p:style>
+        <p:txBody>
+          <a:bodyPr rtlCol="0" anchor="ctr"/>
+          <a:lstStyle/>
+          <a:p>
+            <a:pPr algn="ctr"/>
+            <a:r>
+              <a:rPr lang="en-US" sz="1100" dirty="0"/>
+              <a:t>Appropriate Summations</a:t>
+            </a:r>
+          </a:p>
+        </p:txBody>
+      </p:sp>
+      <p:sp>
+        <p:nvSpPr>
+          <p:cNvPr id="7" name="Rectangle 6">
+            <a:extLst>
+              <a:ext uri="{FF2B5EF4-FFF2-40B4-BE49-F238E27FC236}">
+                <a16:creationId xmlns:a16="http://schemas.microsoft.com/office/drawing/2014/main" id="{9BA42286-B363-DF76-BC64-BF5571AAC905}"/>
+              </a:ext>
+            </a:extLst>
+          </p:cNvPr>
+          <p:cNvSpPr/>
+          <p:nvPr/>
+        </p:nvSpPr>
+        <p:spPr>
+          <a:xfrm>
+            <a:off x="6603492" y="3141155"/>
+            <a:ext cx="557784" cy="411480"/>
+          </a:xfrm>
+          <a:prstGeom prst="rect">
+            <a:avLst/>
+          </a:prstGeom>
+        </p:spPr>
+        <p:style>
+          <a:lnRef idx="2">
+            <a:schemeClr val="accent1">
+              <a:shade val="15000"/>
+            </a:schemeClr>
+          </a:lnRef>
+          <a:fillRef idx="1">
+            <a:schemeClr val="accent1"/>
+          </a:fillRef>
+          <a:effectRef idx="0">
+            <a:schemeClr val="accent1"/>
+          </a:effectRef>
+          <a:fontRef idx="minor">
+            <a:schemeClr val="lt1"/>
+          </a:fontRef>
+        </p:style>
+        <p:txBody>
+          <a:bodyPr rtlCol="0" anchor="ctr"/>
+          <a:lstStyle/>
+          <a:p>
+            <a:pPr algn="ctr"/>
+            <a:r>
+              <a:rPr lang="en-US" dirty="0"/>
+              <a:t>PID</a:t>
+            </a:r>
+          </a:p>
+        </p:txBody>
+      </p:sp>
+      <p:sp>
+        <p:nvSpPr>
+          <p:cNvPr id="8" name="Rectangle 7">
+            <a:extLst>
+              <a:ext uri="{FF2B5EF4-FFF2-40B4-BE49-F238E27FC236}">
+                <a16:creationId xmlns:a16="http://schemas.microsoft.com/office/drawing/2014/main" id="{AC0C3396-95CA-30DB-097B-5B426018D2E5}"/>
+              </a:ext>
+            </a:extLst>
+          </p:cNvPr>
+          <p:cNvSpPr/>
+          <p:nvPr/>
+        </p:nvSpPr>
+        <p:spPr>
+          <a:xfrm>
+            <a:off x="6597396" y="3666553"/>
+            <a:ext cx="557784" cy="411480"/>
+          </a:xfrm>
+          <a:prstGeom prst="rect">
+            <a:avLst/>
+          </a:prstGeom>
+        </p:spPr>
+        <p:style>
+          <a:lnRef idx="2">
+            <a:schemeClr val="accent1">
+              <a:shade val="15000"/>
+            </a:schemeClr>
+          </a:lnRef>
+          <a:fillRef idx="1">
+            <a:schemeClr val="accent1"/>
+          </a:fillRef>
+          <a:effectRef idx="0">
+            <a:schemeClr val="accent1"/>
+          </a:effectRef>
+          <a:fontRef idx="minor">
+            <a:schemeClr val="lt1"/>
+          </a:fontRef>
+        </p:style>
+        <p:txBody>
+          <a:bodyPr rtlCol="0" anchor="ctr"/>
+          <a:lstStyle/>
+          <a:p>
+            <a:pPr algn="ctr"/>
+            <a:r>
+              <a:rPr lang="en-US" dirty="0"/>
+              <a:t>PID</a:t>
+            </a:r>
+          </a:p>
+        </p:txBody>
+      </p:sp>
+      <p:sp>
+        <p:nvSpPr>
+          <p:cNvPr id="9" name="Rectangle 8">
+            <a:extLst>
+              <a:ext uri="{FF2B5EF4-FFF2-40B4-BE49-F238E27FC236}">
+                <a16:creationId xmlns:a16="http://schemas.microsoft.com/office/drawing/2014/main" id="{6814009D-8479-7D79-6A41-0C4A09EDF22D}"/>
+              </a:ext>
+            </a:extLst>
+          </p:cNvPr>
+          <p:cNvSpPr/>
+          <p:nvPr/>
+        </p:nvSpPr>
+        <p:spPr>
+          <a:xfrm>
+            <a:off x="6597396" y="4175760"/>
+            <a:ext cx="557784" cy="411480"/>
+          </a:xfrm>
+          <a:prstGeom prst="rect">
+            <a:avLst/>
+          </a:prstGeom>
+        </p:spPr>
+        <p:style>
+          <a:lnRef idx="2">
+            <a:schemeClr val="accent1">
+              <a:shade val="15000"/>
+            </a:schemeClr>
+          </a:lnRef>
+          <a:fillRef idx="1">
+            <a:schemeClr val="accent1"/>
+          </a:fillRef>
+          <a:effectRef idx="0">
+            <a:schemeClr val="accent1"/>
+          </a:effectRef>
+          <a:fontRef idx="minor">
+            <a:schemeClr val="lt1"/>
+          </a:fontRef>
+        </p:style>
+        <p:txBody>
+          <a:bodyPr rtlCol="0" anchor="ctr"/>
+          <a:lstStyle/>
+          <a:p>
+            <a:pPr algn="ctr"/>
+            <a:r>
+              <a:rPr lang="en-US" dirty="0"/>
+              <a:t>PID</a:t>
+            </a:r>
+          </a:p>
+        </p:txBody>
+      </p:sp>
+      <p:sp>
+        <p:nvSpPr>
+          <p:cNvPr id="10" name="Rectangle 9">
+            <a:extLst>
+              <a:ext uri="{FF2B5EF4-FFF2-40B4-BE49-F238E27FC236}">
+                <a16:creationId xmlns:a16="http://schemas.microsoft.com/office/drawing/2014/main" id="{116CF671-FC1E-0E5D-609A-4F9F459290D1}"/>
+              </a:ext>
+            </a:extLst>
+          </p:cNvPr>
+          <p:cNvSpPr/>
+          <p:nvPr/>
+        </p:nvSpPr>
+        <p:spPr>
+          <a:xfrm>
+            <a:off x="5001006" y="3132202"/>
+            <a:ext cx="557784" cy="411480"/>
+          </a:xfrm>
+          <a:prstGeom prst="rect">
+            <a:avLst/>
+          </a:prstGeom>
+        </p:spPr>
+        <p:style>
+          <a:lnRef idx="2">
+            <a:schemeClr val="accent1">
+              <a:shade val="15000"/>
+            </a:schemeClr>
+          </a:lnRef>
+          <a:fillRef idx="1">
+            <a:schemeClr val="accent1"/>
+          </a:fillRef>
+          <a:effectRef idx="0">
+            <a:schemeClr val="accent1"/>
+          </a:effectRef>
+          <a:fontRef idx="minor">
+            <a:schemeClr val="lt1"/>
+          </a:fontRef>
+        </p:style>
+        <p:txBody>
+          <a:bodyPr rtlCol="0" anchor="ctr"/>
+          <a:lstStyle/>
+          <a:p>
+            <a:pPr algn="ctr"/>
+            <a:r>
+              <a:rPr lang="en-US" dirty="0"/>
+              <a:t>PID</a:t>
+            </a:r>
+          </a:p>
+        </p:txBody>
+      </p:sp>
+      <p:sp>
+        <p:nvSpPr>
+          <p:cNvPr id="11" name="Rectangle 10">
+            <a:extLst>
+              <a:ext uri="{FF2B5EF4-FFF2-40B4-BE49-F238E27FC236}">
+                <a16:creationId xmlns:a16="http://schemas.microsoft.com/office/drawing/2014/main" id="{E46CB958-0718-F993-3D55-6CA6D80DAF69}"/>
+              </a:ext>
+            </a:extLst>
+          </p:cNvPr>
+          <p:cNvSpPr/>
+          <p:nvPr/>
+        </p:nvSpPr>
+        <p:spPr>
+          <a:xfrm>
+            <a:off x="5001006" y="2619756"/>
+            <a:ext cx="557784" cy="411480"/>
+          </a:xfrm>
+          <a:prstGeom prst="rect">
+            <a:avLst/>
+          </a:prstGeom>
+        </p:spPr>
+        <p:style>
+          <a:lnRef idx="2">
+            <a:schemeClr val="accent1">
+              <a:shade val="15000"/>
+            </a:schemeClr>
+          </a:lnRef>
+          <a:fillRef idx="1">
+            <a:schemeClr val="accent1"/>
+          </a:fillRef>
+          <a:effectRef idx="0">
+            <a:schemeClr val="accent1"/>
+          </a:effectRef>
+          <a:fontRef idx="minor">
+            <a:schemeClr val="lt1"/>
+          </a:fontRef>
+        </p:style>
+        <p:txBody>
+          <a:bodyPr rtlCol="0" anchor="ctr"/>
+          <a:lstStyle/>
+          <a:p>
+            <a:pPr algn="ctr"/>
+            <a:r>
+              <a:rPr lang="en-US" dirty="0"/>
+              <a:t>PID</a:t>
+            </a:r>
+          </a:p>
+        </p:txBody>
+      </p:sp>
+      <p:sp>
+        <p:nvSpPr>
+          <p:cNvPr id="12" name="Rectangle 11">
+            <a:extLst>
+              <a:ext uri="{FF2B5EF4-FFF2-40B4-BE49-F238E27FC236}">
+                <a16:creationId xmlns:a16="http://schemas.microsoft.com/office/drawing/2014/main" id="{A29F5EC1-148D-7645-877C-B08CCD53AD73}"/>
+              </a:ext>
+            </a:extLst>
+          </p:cNvPr>
+          <p:cNvSpPr/>
+          <p:nvPr/>
+        </p:nvSpPr>
+        <p:spPr>
+          <a:xfrm>
+            <a:off x="9123426" y="2619756"/>
+            <a:ext cx="649986" cy="423672"/>
+          </a:xfrm>
+          <a:prstGeom prst="rect">
+            <a:avLst/>
+          </a:prstGeom>
+        </p:spPr>
+        <p:style>
+          <a:lnRef idx="2">
+            <a:schemeClr val="accent1">
+              <a:shade val="15000"/>
+            </a:schemeClr>
+          </a:lnRef>
+          <a:fillRef idx="1">
+            <a:schemeClr val="accent1"/>
+          </a:fillRef>
+          <a:effectRef idx="0">
+            <a:schemeClr val="accent1"/>
+          </a:effectRef>
+          <a:fontRef idx="minor">
+            <a:schemeClr val="lt1"/>
+          </a:fontRef>
+        </p:style>
+        <p:txBody>
+          <a:bodyPr rtlCol="0" anchor="ctr"/>
+          <a:lstStyle/>
+          <a:p>
+            <a:pPr algn="ctr"/>
+            <a:r>
+              <a:rPr lang="en-US" sz="1000" dirty="0"/>
+              <a:t>Duty Cycle to PWM</a:t>
+            </a:r>
+          </a:p>
+        </p:txBody>
+      </p:sp>
+      <p:sp>
+        <p:nvSpPr>
+          <p:cNvPr id="13" name="Rectangle 12">
+            <a:extLst>
+              <a:ext uri="{FF2B5EF4-FFF2-40B4-BE49-F238E27FC236}">
+                <a16:creationId xmlns:a16="http://schemas.microsoft.com/office/drawing/2014/main" id="{B568F542-76CD-9630-A7BF-6626FB79C6BA}"/>
+              </a:ext>
+            </a:extLst>
+          </p:cNvPr>
+          <p:cNvSpPr/>
+          <p:nvPr/>
+        </p:nvSpPr>
+        <p:spPr>
+          <a:xfrm>
+            <a:off x="9123426" y="3128963"/>
+            <a:ext cx="649986" cy="423672"/>
+          </a:xfrm>
+          <a:prstGeom prst="rect">
+            <a:avLst/>
+          </a:prstGeom>
+        </p:spPr>
+        <p:style>
+          <a:lnRef idx="2">
+            <a:schemeClr val="accent1">
+              <a:shade val="15000"/>
+            </a:schemeClr>
+          </a:lnRef>
+          <a:fillRef idx="1">
+            <a:schemeClr val="accent1"/>
+          </a:fillRef>
+          <a:effectRef idx="0">
+            <a:schemeClr val="accent1"/>
+          </a:effectRef>
+          <a:fontRef idx="minor">
+            <a:schemeClr val="lt1"/>
+          </a:fontRef>
+        </p:style>
+        <p:txBody>
+          <a:bodyPr rtlCol="0" anchor="ctr"/>
+          <a:lstStyle/>
+          <a:p>
+            <a:pPr algn="ctr"/>
+            <a:r>
+              <a:rPr lang="en-US" sz="1000" dirty="0"/>
+              <a:t>Duty Cycle to PWM</a:t>
+            </a:r>
+          </a:p>
+        </p:txBody>
+      </p:sp>
+      <p:sp>
+        <p:nvSpPr>
+          <p:cNvPr id="14" name="Rectangle 13">
+            <a:extLst>
+              <a:ext uri="{FF2B5EF4-FFF2-40B4-BE49-F238E27FC236}">
+                <a16:creationId xmlns:a16="http://schemas.microsoft.com/office/drawing/2014/main" id="{BAD11D63-B2EC-E092-9D15-D884265425FD}"/>
+              </a:ext>
+            </a:extLst>
+          </p:cNvPr>
+          <p:cNvSpPr/>
+          <p:nvPr/>
+        </p:nvSpPr>
+        <p:spPr>
+          <a:xfrm>
+            <a:off x="9124188" y="3654361"/>
+            <a:ext cx="649986" cy="423672"/>
+          </a:xfrm>
+          <a:prstGeom prst="rect">
+            <a:avLst/>
+          </a:prstGeom>
+        </p:spPr>
+        <p:style>
+          <a:lnRef idx="2">
+            <a:schemeClr val="accent1">
+              <a:shade val="15000"/>
+            </a:schemeClr>
+          </a:lnRef>
+          <a:fillRef idx="1">
+            <a:schemeClr val="accent1"/>
+          </a:fillRef>
+          <a:effectRef idx="0">
+            <a:schemeClr val="accent1"/>
+          </a:effectRef>
+          <a:fontRef idx="minor">
+            <a:schemeClr val="lt1"/>
+          </a:fontRef>
+        </p:style>
+        <p:txBody>
+          <a:bodyPr rtlCol="0" anchor="ctr"/>
+          <a:lstStyle/>
+          <a:p>
+            <a:pPr algn="ctr"/>
+            <a:r>
+              <a:rPr lang="en-US" sz="1000" dirty="0"/>
+              <a:t>Duty Cycle to PWM</a:t>
+            </a:r>
+          </a:p>
+        </p:txBody>
+      </p:sp>
+      <p:sp>
+        <p:nvSpPr>
+          <p:cNvPr id="15" name="Rectangle 14">
+            <a:extLst>
+              <a:ext uri="{FF2B5EF4-FFF2-40B4-BE49-F238E27FC236}">
+                <a16:creationId xmlns:a16="http://schemas.microsoft.com/office/drawing/2014/main" id="{7778E790-C610-C76F-CE0F-6436D04F655B}"/>
+              </a:ext>
+            </a:extLst>
+          </p:cNvPr>
+          <p:cNvSpPr/>
+          <p:nvPr/>
+        </p:nvSpPr>
+        <p:spPr>
+          <a:xfrm>
+            <a:off x="9124188" y="4163568"/>
+            <a:ext cx="649986" cy="423672"/>
+          </a:xfrm>
+          <a:prstGeom prst="rect">
+            <a:avLst/>
+          </a:prstGeom>
+        </p:spPr>
+        <p:style>
+          <a:lnRef idx="2">
+            <a:schemeClr val="accent1">
+              <a:shade val="15000"/>
+            </a:schemeClr>
+          </a:lnRef>
+          <a:fillRef idx="1">
+            <a:schemeClr val="accent1"/>
+          </a:fillRef>
+          <a:effectRef idx="0">
+            <a:schemeClr val="accent1"/>
+          </a:effectRef>
+          <a:fontRef idx="minor">
+            <a:schemeClr val="lt1"/>
+          </a:fontRef>
+        </p:style>
+        <p:txBody>
+          <a:bodyPr rtlCol="0" anchor="ctr"/>
+          <a:lstStyle/>
+          <a:p>
+            <a:pPr algn="ctr"/>
+            <a:r>
+              <a:rPr lang="en-US" sz="1000" dirty="0"/>
+              <a:t>Duty Cycle to PWM</a:t>
+            </a:r>
+          </a:p>
+        </p:txBody>
+      </p:sp>
+      <p:sp>
+        <p:nvSpPr>
+          <p:cNvPr id="16" name="Rectangle 15">
+            <a:extLst>
+              <a:ext uri="{FF2B5EF4-FFF2-40B4-BE49-F238E27FC236}">
+                <a16:creationId xmlns:a16="http://schemas.microsoft.com/office/drawing/2014/main" id="{B36CE7DF-1DFC-873C-D8BC-636ECF66942A}"/>
+              </a:ext>
+            </a:extLst>
+          </p:cNvPr>
+          <p:cNvSpPr/>
+          <p:nvPr/>
+        </p:nvSpPr>
+        <p:spPr>
+          <a:xfrm>
+            <a:off x="10264902" y="2628900"/>
+            <a:ext cx="978408" cy="1961388"/>
+          </a:xfrm>
+          <a:prstGeom prst="rect">
+            <a:avLst/>
+          </a:prstGeom>
+        </p:spPr>
+        <p:style>
+          <a:lnRef idx="2">
+            <a:schemeClr val="accent1">
+              <a:shade val="15000"/>
+            </a:schemeClr>
+          </a:lnRef>
+          <a:fillRef idx="1">
+            <a:schemeClr val="accent1"/>
+          </a:fillRef>
+          <a:effectRef idx="0">
+            <a:schemeClr val="accent1"/>
+          </a:effectRef>
+          <a:fontRef idx="minor">
+            <a:schemeClr val="lt1"/>
+          </a:fontRef>
+        </p:style>
+        <p:txBody>
+          <a:bodyPr rtlCol="0" anchor="ctr"/>
+          <a:lstStyle/>
+          <a:p>
+            <a:pPr algn="ctr"/>
+            <a:r>
+              <a:rPr lang="en-US" sz="1100" dirty="0"/>
+              <a:t>Drone</a:t>
+            </a:r>
+          </a:p>
+        </p:txBody>
+      </p:sp>
+      <p:grpSp>
+        <p:nvGrpSpPr>
+          <p:cNvPr id="21" name="Group 20">
+            <a:extLst>
+              <a:ext uri="{FF2B5EF4-FFF2-40B4-BE49-F238E27FC236}">
+                <a16:creationId xmlns:a16="http://schemas.microsoft.com/office/drawing/2014/main" id="{B40A2BBF-75F9-7C12-1DE7-CEE4392DEABE}"/>
+              </a:ext>
+            </a:extLst>
+          </p:cNvPr>
+          <p:cNvGrpSpPr/>
+          <p:nvPr/>
+        </p:nvGrpSpPr>
+        <p:grpSpPr>
+          <a:xfrm>
+            <a:off x="6037326" y="2674528"/>
+            <a:ext cx="393192" cy="399140"/>
+            <a:chOff x="5422392" y="1652778"/>
+            <a:chExt cx="393192" cy="399140"/>
+          </a:xfrm>
+        </p:grpSpPr>
+        <p:sp>
+          <p:nvSpPr>
+            <p:cNvPr id="18" name="Flowchart: Connector 17">
+              <a:extLst>
+                <a:ext uri="{FF2B5EF4-FFF2-40B4-BE49-F238E27FC236}">
+                  <a16:creationId xmlns:a16="http://schemas.microsoft.com/office/drawing/2014/main" id="{252EE999-1C7C-7A72-DB29-13369B4F7AF6}"/>
+                </a:ext>
+              </a:extLst>
+            </p:cNvPr>
+            <p:cNvSpPr/>
+            <p:nvPr/>
+          </p:nvSpPr>
+          <p:spPr>
+            <a:xfrm>
+              <a:off x="5495544" y="1652778"/>
+              <a:ext cx="320040" cy="315468"/>
+            </a:xfrm>
+            <a:prstGeom prst="flowChartConnector">
+              <a:avLst/>
+            </a:prstGeom>
+            <a:solidFill>
+              <a:schemeClr val="bg1"/>
+            </a:solidFill>
+          </p:spPr>
+          <p:style>
+            <a:lnRef idx="2">
+              <a:schemeClr val="accent1">
+                <a:shade val="15000"/>
+              </a:schemeClr>
+            </a:lnRef>
+            <a:fillRef idx="1">
+              <a:schemeClr val="accent1"/>
+            </a:fillRef>
+            <a:effectRef idx="0">
+              <a:schemeClr val="accent1"/>
+            </a:effectRef>
+            <a:fontRef idx="minor">
+              <a:schemeClr val="lt1"/>
+            </a:fontRef>
+          </p:style>
+          <p:txBody>
+            <a:bodyPr rtlCol="0" anchor="ctr"/>
+            <a:lstStyle/>
+            <a:p>
+              <a:pPr algn="ctr"/>
+              <a:endParaRPr lang="en-US" dirty="0">
+                <a:solidFill>
+                  <a:schemeClr val="tx1"/>
+                </a:solidFill>
+              </a:endParaRPr>
+            </a:p>
+          </p:txBody>
+        </p:sp>
+        <p:sp>
+          <p:nvSpPr>
+            <p:cNvPr id="19" name="TextBox 18">
+              <a:extLst>
+                <a:ext uri="{FF2B5EF4-FFF2-40B4-BE49-F238E27FC236}">
+                  <a16:creationId xmlns:a16="http://schemas.microsoft.com/office/drawing/2014/main" id="{A47DEA48-6236-12E5-2A2B-7FBA1AC6666B}"/>
+                </a:ext>
+              </a:extLst>
+            </p:cNvPr>
+            <p:cNvSpPr txBox="1"/>
+            <p:nvPr/>
+          </p:nvSpPr>
+          <p:spPr>
+            <a:xfrm>
+              <a:off x="5422392" y="1679707"/>
+              <a:ext cx="237744" cy="261610"/>
+            </a:xfrm>
+            <a:prstGeom prst="rect">
+              <a:avLst/>
+            </a:prstGeom>
+            <a:noFill/>
+          </p:spPr>
+          <p:txBody>
+            <a:bodyPr wrap="square" rtlCol="0">
+              <a:spAutoFit/>
+            </a:bodyPr>
+            <a:lstStyle/>
+            <a:p>
+              <a:r>
+                <a:rPr lang="en-US" sz="1050" dirty="0"/>
+                <a:t>+</a:t>
+              </a:r>
+            </a:p>
+          </p:txBody>
+        </p:sp>
+        <p:sp>
+          <p:nvSpPr>
+            <p:cNvPr id="20" name="TextBox 19">
+              <a:extLst>
+                <a:ext uri="{FF2B5EF4-FFF2-40B4-BE49-F238E27FC236}">
+                  <a16:creationId xmlns:a16="http://schemas.microsoft.com/office/drawing/2014/main" id="{33DD7D0D-E84C-1D2A-3CB8-F503B4919B5C}"/>
+                </a:ext>
+              </a:extLst>
+            </p:cNvPr>
+            <p:cNvSpPr txBox="1"/>
+            <p:nvPr/>
+          </p:nvSpPr>
+          <p:spPr>
+            <a:xfrm>
+              <a:off x="5518404" y="1713364"/>
+              <a:ext cx="237744" cy="338554"/>
+            </a:xfrm>
+            <a:prstGeom prst="rect">
+              <a:avLst/>
+            </a:prstGeom>
+            <a:noFill/>
+          </p:spPr>
+          <p:txBody>
+            <a:bodyPr wrap="square" rtlCol="0">
+              <a:spAutoFit/>
+            </a:bodyPr>
+            <a:lstStyle/>
+            <a:p>
+              <a:r>
+                <a:rPr lang="en-US" sz="1600" dirty="0"/>
+                <a:t>-</a:t>
+              </a:r>
+              <a:endParaRPr lang="en-US" sz="1050" dirty="0"/>
+            </a:p>
+          </p:txBody>
+        </p:sp>
+      </p:grpSp>
+      <p:cxnSp>
+        <p:nvCxnSpPr>
+          <p:cNvPr id="27" name="Straight Arrow Connector 26">
+            <a:extLst>
+              <a:ext uri="{FF2B5EF4-FFF2-40B4-BE49-F238E27FC236}">
+                <a16:creationId xmlns:a16="http://schemas.microsoft.com/office/drawing/2014/main" id="{6213CD43-11A7-8DAB-8C92-1310D08021DB}"/>
+              </a:ext>
+            </a:extLst>
+          </p:cNvPr>
+          <p:cNvCxnSpPr>
+            <a:cxnSpLocks/>
+            <a:stCxn id="11" idx="3"/>
+            <a:endCxn id="18" idx="2"/>
+          </p:cNvCxnSpPr>
+          <p:nvPr/>
+        </p:nvCxnSpPr>
+        <p:spPr>
+          <a:xfrm>
+            <a:off x="5558790" y="2825496"/>
+            <a:ext cx="551688" cy="6766"/>
+          </a:xfrm>
+          <a:prstGeom prst="straightConnector1">
+            <a:avLst/>
+          </a:prstGeom>
+          <a:ln>
+            <a:tailEnd type="triangle"/>
+          </a:ln>
+        </p:spPr>
+        <p:style>
+          <a:lnRef idx="2">
+            <a:schemeClr val="accent1"/>
+          </a:lnRef>
+          <a:fillRef idx="0">
+            <a:schemeClr val="accent1"/>
+          </a:fillRef>
+          <a:effectRef idx="1">
+            <a:schemeClr val="accent1"/>
+          </a:effectRef>
+          <a:fontRef idx="minor">
+            <a:schemeClr val="tx1"/>
+          </a:fontRef>
+        </p:style>
+      </p:cxnSp>
+      <p:cxnSp>
+        <p:nvCxnSpPr>
+          <p:cNvPr id="32" name="Straight Arrow Connector 31">
+            <a:extLst>
+              <a:ext uri="{FF2B5EF4-FFF2-40B4-BE49-F238E27FC236}">
+                <a16:creationId xmlns:a16="http://schemas.microsoft.com/office/drawing/2014/main" id="{D3641EEA-A38E-0A3D-B148-B5F2C6051AA8}"/>
+              </a:ext>
+            </a:extLst>
+          </p:cNvPr>
+          <p:cNvCxnSpPr>
+            <a:cxnSpLocks/>
+            <a:stCxn id="18" idx="6"/>
+            <a:endCxn id="3" idx="1"/>
+          </p:cNvCxnSpPr>
+          <p:nvPr/>
+        </p:nvCxnSpPr>
+        <p:spPr>
+          <a:xfrm>
+            <a:off x="6430518" y="2832262"/>
+            <a:ext cx="166878" cy="5426"/>
+          </a:xfrm>
+          <a:prstGeom prst="straightConnector1">
+            <a:avLst/>
+          </a:prstGeom>
+          <a:ln>
+            <a:tailEnd type="triangle"/>
+          </a:ln>
+        </p:spPr>
+        <p:style>
+          <a:lnRef idx="2">
+            <a:schemeClr val="accent1"/>
+          </a:lnRef>
+          <a:fillRef idx="0">
+            <a:schemeClr val="accent1"/>
+          </a:fillRef>
+          <a:effectRef idx="1">
+            <a:schemeClr val="accent1"/>
+          </a:effectRef>
+          <a:fontRef idx="minor">
+            <a:schemeClr val="tx1"/>
+          </a:fontRef>
+        </p:style>
+      </p:cxnSp>
+      <p:cxnSp>
+        <p:nvCxnSpPr>
+          <p:cNvPr id="35" name="Straight Arrow Connector 34">
+            <a:extLst>
+              <a:ext uri="{FF2B5EF4-FFF2-40B4-BE49-F238E27FC236}">
+                <a16:creationId xmlns:a16="http://schemas.microsoft.com/office/drawing/2014/main" id="{6F3368D1-F2EB-DF8A-491F-2321998ED38F}"/>
+              </a:ext>
+            </a:extLst>
+          </p:cNvPr>
+          <p:cNvCxnSpPr>
+            <a:cxnSpLocks/>
+            <a:stCxn id="3" idx="3"/>
+          </p:cNvCxnSpPr>
+          <p:nvPr/>
+        </p:nvCxnSpPr>
+        <p:spPr>
+          <a:xfrm>
+            <a:off x="7155180" y="2837688"/>
+            <a:ext cx="498348" cy="0"/>
+          </a:xfrm>
+          <a:prstGeom prst="straightConnector1">
+            <a:avLst/>
+          </a:prstGeom>
+          <a:ln>
+            <a:tailEnd type="triangle"/>
+          </a:ln>
+        </p:spPr>
+        <p:style>
+          <a:lnRef idx="2">
+            <a:schemeClr val="accent1"/>
+          </a:lnRef>
+          <a:fillRef idx="0">
+            <a:schemeClr val="accent1"/>
+          </a:fillRef>
+          <a:effectRef idx="1">
+            <a:schemeClr val="accent1"/>
+          </a:effectRef>
+          <a:fontRef idx="minor">
+            <a:schemeClr val="tx1"/>
+          </a:fontRef>
+        </p:style>
+      </p:cxnSp>
+      <p:cxnSp>
+        <p:nvCxnSpPr>
+          <p:cNvPr id="38" name="Straight Arrow Connector 37">
+            <a:extLst>
+              <a:ext uri="{FF2B5EF4-FFF2-40B4-BE49-F238E27FC236}">
+                <a16:creationId xmlns:a16="http://schemas.microsoft.com/office/drawing/2014/main" id="{7D1FBBB2-1AC6-916E-DEE2-667C77285361}"/>
+              </a:ext>
+            </a:extLst>
+          </p:cNvPr>
+          <p:cNvCxnSpPr>
+            <a:stCxn id="7" idx="3"/>
+          </p:cNvCxnSpPr>
+          <p:nvPr/>
+        </p:nvCxnSpPr>
+        <p:spPr>
+          <a:xfrm>
+            <a:off x="7161276" y="3346895"/>
+            <a:ext cx="492252" cy="0"/>
+          </a:xfrm>
+          <a:prstGeom prst="straightConnector1">
+            <a:avLst/>
+          </a:prstGeom>
+          <a:ln>
+            <a:tailEnd type="triangle"/>
+          </a:ln>
+        </p:spPr>
+        <p:style>
+          <a:lnRef idx="2">
+            <a:schemeClr val="accent1"/>
+          </a:lnRef>
+          <a:fillRef idx="0">
+            <a:schemeClr val="accent1"/>
+          </a:fillRef>
+          <a:effectRef idx="1">
+            <a:schemeClr val="accent1"/>
+          </a:effectRef>
+          <a:fontRef idx="minor">
+            <a:schemeClr val="tx1"/>
+          </a:fontRef>
+        </p:style>
+      </p:cxnSp>
+      <p:cxnSp>
+        <p:nvCxnSpPr>
+          <p:cNvPr id="40" name="Straight Arrow Connector 39">
+            <a:extLst>
+              <a:ext uri="{FF2B5EF4-FFF2-40B4-BE49-F238E27FC236}">
+                <a16:creationId xmlns:a16="http://schemas.microsoft.com/office/drawing/2014/main" id="{246B04CE-2D0D-CF8B-044F-E3A483C510C3}"/>
+              </a:ext>
+            </a:extLst>
+          </p:cNvPr>
+          <p:cNvCxnSpPr>
+            <a:stCxn id="8" idx="3"/>
+          </p:cNvCxnSpPr>
+          <p:nvPr/>
+        </p:nvCxnSpPr>
+        <p:spPr>
+          <a:xfrm flipV="1">
+            <a:off x="7155180" y="3866197"/>
+            <a:ext cx="498348" cy="6096"/>
+          </a:xfrm>
+          <a:prstGeom prst="straightConnector1">
+            <a:avLst/>
+          </a:prstGeom>
+          <a:ln>
+            <a:tailEnd type="triangle"/>
+          </a:ln>
+        </p:spPr>
+        <p:style>
+          <a:lnRef idx="2">
+            <a:schemeClr val="accent1"/>
+          </a:lnRef>
+          <a:fillRef idx="0">
+            <a:schemeClr val="accent1"/>
+          </a:fillRef>
+          <a:effectRef idx="1">
+            <a:schemeClr val="accent1"/>
+          </a:effectRef>
+          <a:fontRef idx="minor">
+            <a:schemeClr val="tx1"/>
+          </a:fontRef>
+        </p:style>
+      </p:cxnSp>
+      <p:cxnSp>
+        <p:nvCxnSpPr>
+          <p:cNvPr id="42" name="Straight Arrow Connector 41">
+            <a:extLst>
+              <a:ext uri="{FF2B5EF4-FFF2-40B4-BE49-F238E27FC236}">
+                <a16:creationId xmlns:a16="http://schemas.microsoft.com/office/drawing/2014/main" id="{E69BF800-CA24-EF3D-9B8E-973946EDB905}"/>
+              </a:ext>
+            </a:extLst>
+          </p:cNvPr>
+          <p:cNvCxnSpPr>
+            <a:stCxn id="9" idx="3"/>
+          </p:cNvCxnSpPr>
+          <p:nvPr/>
+        </p:nvCxnSpPr>
+        <p:spPr>
+          <a:xfrm flipV="1">
+            <a:off x="7155180" y="4375404"/>
+            <a:ext cx="498348" cy="6096"/>
+          </a:xfrm>
+          <a:prstGeom prst="straightConnector1">
+            <a:avLst/>
+          </a:prstGeom>
+          <a:ln>
+            <a:tailEnd type="triangle"/>
+          </a:ln>
+        </p:spPr>
+        <p:style>
+          <a:lnRef idx="2">
+            <a:schemeClr val="accent1"/>
+          </a:lnRef>
+          <a:fillRef idx="0">
+            <a:schemeClr val="accent1"/>
+          </a:fillRef>
+          <a:effectRef idx="1">
+            <a:schemeClr val="accent1"/>
+          </a:effectRef>
+          <a:fontRef idx="minor">
+            <a:schemeClr val="tx1"/>
+          </a:fontRef>
+        </p:style>
+      </p:cxnSp>
+      <p:grpSp>
+        <p:nvGrpSpPr>
+          <p:cNvPr id="43" name="Group 42">
+            <a:extLst>
+              <a:ext uri="{FF2B5EF4-FFF2-40B4-BE49-F238E27FC236}">
+                <a16:creationId xmlns:a16="http://schemas.microsoft.com/office/drawing/2014/main" id="{C589BF6D-1890-4D0E-ABBF-5CD79865BD60}"/>
+              </a:ext>
+            </a:extLst>
+          </p:cNvPr>
+          <p:cNvGrpSpPr/>
+          <p:nvPr/>
+        </p:nvGrpSpPr>
+        <p:grpSpPr>
+          <a:xfrm>
+            <a:off x="5656326" y="3185117"/>
+            <a:ext cx="393192" cy="399140"/>
+            <a:chOff x="5422392" y="1652778"/>
+            <a:chExt cx="393192" cy="399140"/>
+          </a:xfrm>
+        </p:grpSpPr>
+        <p:sp>
+          <p:nvSpPr>
+            <p:cNvPr id="44" name="Flowchart: Connector 43">
+              <a:extLst>
+                <a:ext uri="{FF2B5EF4-FFF2-40B4-BE49-F238E27FC236}">
+                  <a16:creationId xmlns:a16="http://schemas.microsoft.com/office/drawing/2014/main" id="{591B1A51-1F9C-4804-AE43-EC2DD43BF6EB}"/>
+                </a:ext>
+              </a:extLst>
+            </p:cNvPr>
+            <p:cNvSpPr/>
+            <p:nvPr/>
+          </p:nvSpPr>
+          <p:spPr>
+            <a:xfrm>
+              <a:off x="5495544" y="1652778"/>
+              <a:ext cx="320040" cy="315468"/>
+            </a:xfrm>
+            <a:prstGeom prst="flowChartConnector">
+              <a:avLst/>
+            </a:prstGeom>
+            <a:solidFill>
+              <a:schemeClr val="bg1"/>
+            </a:solidFill>
+          </p:spPr>
+          <p:style>
+            <a:lnRef idx="2">
+              <a:schemeClr val="accent1">
+                <a:shade val="15000"/>
+              </a:schemeClr>
+            </a:lnRef>
+            <a:fillRef idx="1">
+              <a:schemeClr val="accent1"/>
+            </a:fillRef>
+            <a:effectRef idx="0">
+              <a:schemeClr val="accent1"/>
+            </a:effectRef>
+            <a:fontRef idx="minor">
+              <a:schemeClr val="lt1"/>
+            </a:fontRef>
+          </p:style>
+          <p:txBody>
+            <a:bodyPr rtlCol="0" anchor="ctr"/>
+            <a:lstStyle/>
+            <a:p>
+              <a:pPr algn="ctr"/>
+              <a:endParaRPr lang="en-US" dirty="0">
+                <a:solidFill>
+                  <a:schemeClr val="tx1"/>
+                </a:solidFill>
+              </a:endParaRPr>
+            </a:p>
+          </p:txBody>
+        </p:sp>
+        <p:sp>
+          <p:nvSpPr>
+            <p:cNvPr id="45" name="TextBox 44">
+              <a:extLst>
+                <a:ext uri="{FF2B5EF4-FFF2-40B4-BE49-F238E27FC236}">
+                  <a16:creationId xmlns:a16="http://schemas.microsoft.com/office/drawing/2014/main" id="{868E05A8-7BA3-3D38-240B-A1B8D776EA31}"/>
+                </a:ext>
+              </a:extLst>
+            </p:cNvPr>
+            <p:cNvSpPr txBox="1"/>
+            <p:nvPr/>
+          </p:nvSpPr>
+          <p:spPr>
+            <a:xfrm>
+              <a:off x="5422392" y="1679707"/>
+              <a:ext cx="237744" cy="261610"/>
+            </a:xfrm>
+            <a:prstGeom prst="rect">
+              <a:avLst/>
+            </a:prstGeom>
+            <a:noFill/>
+          </p:spPr>
+          <p:txBody>
+            <a:bodyPr wrap="square" rtlCol="0">
+              <a:spAutoFit/>
+            </a:bodyPr>
+            <a:lstStyle/>
+            <a:p>
+              <a:r>
+                <a:rPr lang="en-US" sz="1050" dirty="0"/>
+                <a:t>+</a:t>
+              </a:r>
+            </a:p>
+          </p:txBody>
+        </p:sp>
+        <p:sp>
+          <p:nvSpPr>
+            <p:cNvPr id="46" name="TextBox 45">
+              <a:extLst>
+                <a:ext uri="{FF2B5EF4-FFF2-40B4-BE49-F238E27FC236}">
+                  <a16:creationId xmlns:a16="http://schemas.microsoft.com/office/drawing/2014/main" id="{6FC1B34B-7989-BD6B-8FB4-FACBB6741F72}"/>
+                </a:ext>
+              </a:extLst>
+            </p:cNvPr>
+            <p:cNvSpPr txBox="1"/>
+            <p:nvPr/>
+          </p:nvSpPr>
+          <p:spPr>
+            <a:xfrm>
+              <a:off x="5518404" y="1713364"/>
+              <a:ext cx="237744" cy="338554"/>
+            </a:xfrm>
+            <a:prstGeom prst="rect">
+              <a:avLst/>
+            </a:prstGeom>
+            <a:noFill/>
+          </p:spPr>
+          <p:txBody>
+            <a:bodyPr wrap="square" rtlCol="0">
+              <a:spAutoFit/>
+            </a:bodyPr>
+            <a:lstStyle/>
+            <a:p>
+              <a:r>
+                <a:rPr lang="en-US" sz="1600" dirty="0"/>
+                <a:t>-</a:t>
+              </a:r>
+              <a:endParaRPr lang="en-US" sz="1050" dirty="0"/>
+            </a:p>
+          </p:txBody>
+        </p:sp>
+      </p:grpSp>
+      <p:cxnSp>
+        <p:nvCxnSpPr>
+          <p:cNvPr id="47" name="Straight Arrow Connector 46">
+            <a:extLst>
+              <a:ext uri="{FF2B5EF4-FFF2-40B4-BE49-F238E27FC236}">
+                <a16:creationId xmlns:a16="http://schemas.microsoft.com/office/drawing/2014/main" id="{9F729FC1-2BEF-D985-89CB-E0C3B81AFD1B}"/>
+              </a:ext>
+            </a:extLst>
+          </p:cNvPr>
+          <p:cNvCxnSpPr>
+            <a:cxnSpLocks/>
+            <a:stCxn id="10" idx="3"/>
+            <a:endCxn id="44" idx="2"/>
+          </p:cNvCxnSpPr>
+          <p:nvPr/>
+        </p:nvCxnSpPr>
+        <p:spPr>
+          <a:xfrm>
+            <a:off x="5558790" y="3337942"/>
+            <a:ext cx="170688" cy="4909"/>
+          </a:xfrm>
+          <a:prstGeom prst="straightConnector1">
+            <a:avLst/>
+          </a:prstGeom>
+          <a:ln>
+            <a:tailEnd type="triangle"/>
+          </a:ln>
+        </p:spPr>
+        <p:style>
+          <a:lnRef idx="2">
+            <a:schemeClr val="accent1"/>
+          </a:lnRef>
+          <a:fillRef idx="0">
+            <a:schemeClr val="accent1"/>
+          </a:fillRef>
+          <a:effectRef idx="1">
+            <a:schemeClr val="accent1"/>
+          </a:effectRef>
+          <a:fontRef idx="minor">
+            <a:schemeClr val="tx1"/>
+          </a:fontRef>
+        </p:style>
+      </p:cxnSp>
+      <p:cxnSp>
+        <p:nvCxnSpPr>
+          <p:cNvPr id="48" name="Straight Arrow Connector 47">
+            <a:extLst>
+              <a:ext uri="{FF2B5EF4-FFF2-40B4-BE49-F238E27FC236}">
+                <a16:creationId xmlns:a16="http://schemas.microsoft.com/office/drawing/2014/main" id="{B9BF8628-0F4A-726F-6107-3BB8A5382AE3}"/>
+              </a:ext>
+            </a:extLst>
+          </p:cNvPr>
+          <p:cNvCxnSpPr>
+            <a:cxnSpLocks/>
+            <a:stCxn id="44" idx="6"/>
+            <a:endCxn id="7" idx="1"/>
+          </p:cNvCxnSpPr>
+          <p:nvPr/>
+        </p:nvCxnSpPr>
+        <p:spPr>
+          <a:xfrm>
+            <a:off x="6049518" y="3342851"/>
+            <a:ext cx="553974" cy="4044"/>
+          </a:xfrm>
+          <a:prstGeom prst="straightConnector1">
+            <a:avLst/>
+          </a:prstGeom>
+          <a:ln>
+            <a:tailEnd type="triangle"/>
+          </a:ln>
+        </p:spPr>
+        <p:style>
+          <a:lnRef idx="2">
+            <a:schemeClr val="accent1"/>
+          </a:lnRef>
+          <a:fillRef idx="0">
+            <a:schemeClr val="accent1"/>
+          </a:fillRef>
+          <a:effectRef idx="1">
+            <a:schemeClr val="accent1"/>
+          </a:effectRef>
+          <a:fontRef idx="minor">
+            <a:schemeClr val="tx1"/>
+          </a:fontRef>
+        </p:style>
+      </p:cxnSp>
+      <p:grpSp>
+        <p:nvGrpSpPr>
+          <p:cNvPr id="51" name="Group 50">
+            <a:extLst>
+              <a:ext uri="{FF2B5EF4-FFF2-40B4-BE49-F238E27FC236}">
+                <a16:creationId xmlns:a16="http://schemas.microsoft.com/office/drawing/2014/main" id="{571BB130-248D-34BF-BC9E-1A604A1B495E}"/>
+              </a:ext>
+            </a:extLst>
+          </p:cNvPr>
+          <p:cNvGrpSpPr/>
+          <p:nvPr/>
+        </p:nvGrpSpPr>
+        <p:grpSpPr>
+          <a:xfrm>
+            <a:off x="5285994" y="3709445"/>
+            <a:ext cx="393192" cy="399140"/>
+            <a:chOff x="5422392" y="1652778"/>
+            <a:chExt cx="393192" cy="399140"/>
+          </a:xfrm>
+        </p:grpSpPr>
+        <p:sp>
+          <p:nvSpPr>
+            <p:cNvPr id="52" name="Flowchart: Connector 51">
+              <a:extLst>
+                <a:ext uri="{FF2B5EF4-FFF2-40B4-BE49-F238E27FC236}">
+                  <a16:creationId xmlns:a16="http://schemas.microsoft.com/office/drawing/2014/main" id="{D44C6F84-180E-E2F5-A88A-5DD2108E242B}"/>
+                </a:ext>
+              </a:extLst>
+            </p:cNvPr>
+            <p:cNvSpPr/>
+            <p:nvPr/>
+          </p:nvSpPr>
+          <p:spPr>
+            <a:xfrm>
+              <a:off x="5495544" y="1652778"/>
+              <a:ext cx="320040" cy="315468"/>
+            </a:xfrm>
+            <a:prstGeom prst="flowChartConnector">
+              <a:avLst/>
+            </a:prstGeom>
+            <a:solidFill>
+              <a:schemeClr val="bg1"/>
+            </a:solidFill>
+          </p:spPr>
+          <p:style>
+            <a:lnRef idx="2">
+              <a:schemeClr val="accent1">
+                <a:shade val="15000"/>
+              </a:schemeClr>
+            </a:lnRef>
+            <a:fillRef idx="1">
+              <a:schemeClr val="accent1"/>
+            </a:fillRef>
+            <a:effectRef idx="0">
+              <a:schemeClr val="accent1"/>
+            </a:effectRef>
+            <a:fontRef idx="minor">
+              <a:schemeClr val="lt1"/>
+            </a:fontRef>
+          </p:style>
+          <p:txBody>
+            <a:bodyPr rtlCol="0" anchor="ctr"/>
+            <a:lstStyle/>
+            <a:p>
+              <a:pPr algn="ctr"/>
+              <a:endParaRPr lang="en-US" dirty="0">
+                <a:solidFill>
+                  <a:schemeClr val="tx1"/>
+                </a:solidFill>
+              </a:endParaRPr>
+            </a:p>
+          </p:txBody>
+        </p:sp>
+        <p:sp>
+          <p:nvSpPr>
+            <p:cNvPr id="53" name="TextBox 52">
+              <a:extLst>
+                <a:ext uri="{FF2B5EF4-FFF2-40B4-BE49-F238E27FC236}">
+                  <a16:creationId xmlns:a16="http://schemas.microsoft.com/office/drawing/2014/main" id="{F0E544C7-EF5C-E45F-E1FB-387207A7E75B}"/>
+                </a:ext>
+              </a:extLst>
+            </p:cNvPr>
+            <p:cNvSpPr txBox="1"/>
+            <p:nvPr/>
+          </p:nvSpPr>
+          <p:spPr>
+            <a:xfrm>
+              <a:off x="5422392" y="1679707"/>
+              <a:ext cx="237744" cy="261610"/>
+            </a:xfrm>
+            <a:prstGeom prst="rect">
+              <a:avLst/>
+            </a:prstGeom>
+            <a:noFill/>
+          </p:spPr>
+          <p:txBody>
+            <a:bodyPr wrap="square" rtlCol="0">
+              <a:spAutoFit/>
+            </a:bodyPr>
+            <a:lstStyle/>
+            <a:p>
+              <a:r>
+                <a:rPr lang="en-US" sz="1050" dirty="0"/>
+                <a:t>+</a:t>
+              </a:r>
+            </a:p>
+          </p:txBody>
+        </p:sp>
+        <p:sp>
+          <p:nvSpPr>
+            <p:cNvPr id="54" name="TextBox 53">
+              <a:extLst>
+                <a:ext uri="{FF2B5EF4-FFF2-40B4-BE49-F238E27FC236}">
+                  <a16:creationId xmlns:a16="http://schemas.microsoft.com/office/drawing/2014/main" id="{AE578948-0331-C566-7215-E6340684560A}"/>
+                </a:ext>
+              </a:extLst>
+            </p:cNvPr>
+            <p:cNvSpPr txBox="1"/>
+            <p:nvPr/>
+          </p:nvSpPr>
+          <p:spPr>
+            <a:xfrm>
+              <a:off x="5518404" y="1713364"/>
+              <a:ext cx="237744" cy="338554"/>
+            </a:xfrm>
+            <a:prstGeom prst="rect">
+              <a:avLst/>
+            </a:prstGeom>
+            <a:noFill/>
+          </p:spPr>
+          <p:txBody>
+            <a:bodyPr wrap="square" rtlCol="0">
+              <a:spAutoFit/>
+            </a:bodyPr>
+            <a:lstStyle/>
+            <a:p>
+              <a:r>
+                <a:rPr lang="en-US" sz="1600" dirty="0"/>
+                <a:t>-</a:t>
+              </a:r>
+              <a:endParaRPr lang="en-US" sz="1050" dirty="0"/>
+            </a:p>
+          </p:txBody>
+        </p:sp>
+      </p:grpSp>
+      <p:cxnSp>
+        <p:nvCxnSpPr>
+          <p:cNvPr id="55" name="Straight Arrow Connector 54">
+            <a:extLst>
+              <a:ext uri="{FF2B5EF4-FFF2-40B4-BE49-F238E27FC236}">
+                <a16:creationId xmlns:a16="http://schemas.microsoft.com/office/drawing/2014/main" id="{3967BFBE-4F2E-9B63-146D-22ED72E3ABC2}"/>
+              </a:ext>
+            </a:extLst>
+          </p:cNvPr>
+          <p:cNvCxnSpPr>
+            <a:cxnSpLocks/>
+            <a:stCxn id="65" idx="3"/>
+            <a:endCxn id="52" idx="2"/>
+          </p:cNvCxnSpPr>
+          <p:nvPr/>
+        </p:nvCxnSpPr>
+        <p:spPr>
+          <a:xfrm>
+            <a:off x="4706112" y="3860101"/>
+            <a:ext cx="653034" cy="7078"/>
+          </a:xfrm>
+          <a:prstGeom prst="straightConnector1">
+            <a:avLst/>
+          </a:prstGeom>
+          <a:ln>
+            <a:tailEnd type="triangle"/>
+          </a:ln>
+        </p:spPr>
+        <p:style>
+          <a:lnRef idx="2">
+            <a:schemeClr val="accent1"/>
+          </a:lnRef>
+          <a:fillRef idx="0">
+            <a:schemeClr val="accent1"/>
+          </a:fillRef>
+          <a:effectRef idx="1">
+            <a:schemeClr val="accent1"/>
+          </a:effectRef>
+          <a:fontRef idx="minor">
+            <a:schemeClr val="tx1"/>
+          </a:fontRef>
+        </p:style>
+      </p:cxnSp>
+      <p:cxnSp>
+        <p:nvCxnSpPr>
+          <p:cNvPr id="56" name="Straight Arrow Connector 55">
+            <a:extLst>
+              <a:ext uri="{FF2B5EF4-FFF2-40B4-BE49-F238E27FC236}">
+                <a16:creationId xmlns:a16="http://schemas.microsoft.com/office/drawing/2014/main" id="{647FFE0F-F2C8-4F4F-F19C-5109F5FA26EE}"/>
+              </a:ext>
+            </a:extLst>
+          </p:cNvPr>
+          <p:cNvCxnSpPr>
+            <a:cxnSpLocks/>
+            <a:stCxn id="52" idx="6"/>
+            <a:endCxn id="8" idx="1"/>
+          </p:cNvCxnSpPr>
+          <p:nvPr/>
+        </p:nvCxnSpPr>
+        <p:spPr>
+          <a:xfrm>
+            <a:off x="5679186" y="3867179"/>
+            <a:ext cx="918210" cy="5114"/>
+          </a:xfrm>
+          <a:prstGeom prst="straightConnector1">
+            <a:avLst/>
+          </a:prstGeom>
+          <a:ln>
+            <a:tailEnd type="triangle"/>
+          </a:ln>
+        </p:spPr>
+        <p:style>
+          <a:lnRef idx="2">
+            <a:schemeClr val="accent1"/>
+          </a:lnRef>
+          <a:fillRef idx="0">
+            <a:schemeClr val="accent1"/>
+          </a:fillRef>
+          <a:effectRef idx="1">
+            <a:schemeClr val="accent1"/>
+          </a:effectRef>
+          <a:fontRef idx="minor">
+            <a:schemeClr val="tx1"/>
+          </a:fontRef>
+        </p:style>
+      </p:cxnSp>
+      <p:grpSp>
+        <p:nvGrpSpPr>
+          <p:cNvPr id="58" name="Group 57">
+            <a:extLst>
+              <a:ext uri="{FF2B5EF4-FFF2-40B4-BE49-F238E27FC236}">
+                <a16:creationId xmlns:a16="http://schemas.microsoft.com/office/drawing/2014/main" id="{A71DC8F1-6ABC-F53F-0488-CB1F9F7E3B1D}"/>
+              </a:ext>
+            </a:extLst>
+          </p:cNvPr>
+          <p:cNvGrpSpPr/>
+          <p:nvPr/>
+        </p:nvGrpSpPr>
+        <p:grpSpPr>
+          <a:xfrm>
+            <a:off x="4893945" y="4213864"/>
+            <a:ext cx="393192" cy="399140"/>
+            <a:chOff x="5422392" y="1652778"/>
+            <a:chExt cx="393192" cy="399140"/>
+          </a:xfrm>
+        </p:grpSpPr>
+        <p:sp>
+          <p:nvSpPr>
+            <p:cNvPr id="59" name="Flowchart: Connector 58">
+              <a:extLst>
+                <a:ext uri="{FF2B5EF4-FFF2-40B4-BE49-F238E27FC236}">
+                  <a16:creationId xmlns:a16="http://schemas.microsoft.com/office/drawing/2014/main" id="{910A7200-0521-499C-E58D-C1F12F2A42DF}"/>
+                </a:ext>
+              </a:extLst>
+            </p:cNvPr>
+            <p:cNvSpPr/>
+            <p:nvPr/>
+          </p:nvSpPr>
+          <p:spPr>
+            <a:xfrm>
+              <a:off x="5495544" y="1652778"/>
+              <a:ext cx="320040" cy="315468"/>
+            </a:xfrm>
+            <a:prstGeom prst="flowChartConnector">
+              <a:avLst/>
+            </a:prstGeom>
+            <a:solidFill>
+              <a:schemeClr val="bg1"/>
+            </a:solidFill>
+          </p:spPr>
+          <p:style>
+            <a:lnRef idx="2">
+              <a:schemeClr val="accent1">
+                <a:shade val="15000"/>
+              </a:schemeClr>
+            </a:lnRef>
+            <a:fillRef idx="1">
+              <a:schemeClr val="accent1"/>
+            </a:fillRef>
+            <a:effectRef idx="0">
+              <a:schemeClr val="accent1"/>
+            </a:effectRef>
+            <a:fontRef idx="minor">
+              <a:schemeClr val="lt1"/>
+            </a:fontRef>
+          </p:style>
+          <p:txBody>
+            <a:bodyPr rtlCol="0" anchor="ctr"/>
+            <a:lstStyle/>
+            <a:p>
+              <a:pPr algn="ctr"/>
+              <a:endParaRPr lang="en-US" dirty="0">
+                <a:solidFill>
+                  <a:schemeClr val="tx1"/>
+                </a:solidFill>
+              </a:endParaRPr>
+            </a:p>
+          </p:txBody>
+        </p:sp>
+        <p:sp>
+          <p:nvSpPr>
+            <p:cNvPr id="60" name="TextBox 59">
+              <a:extLst>
+                <a:ext uri="{FF2B5EF4-FFF2-40B4-BE49-F238E27FC236}">
+                  <a16:creationId xmlns:a16="http://schemas.microsoft.com/office/drawing/2014/main" id="{623C2115-AAD2-E1C0-BFE3-B71CC032443B}"/>
+                </a:ext>
+              </a:extLst>
+            </p:cNvPr>
+            <p:cNvSpPr txBox="1"/>
+            <p:nvPr/>
+          </p:nvSpPr>
+          <p:spPr>
+            <a:xfrm>
+              <a:off x="5422392" y="1679707"/>
+              <a:ext cx="237744" cy="261610"/>
+            </a:xfrm>
+            <a:prstGeom prst="rect">
+              <a:avLst/>
+            </a:prstGeom>
+            <a:noFill/>
+          </p:spPr>
+          <p:txBody>
+            <a:bodyPr wrap="square" rtlCol="0">
+              <a:spAutoFit/>
+            </a:bodyPr>
+            <a:lstStyle/>
+            <a:p>
+              <a:r>
+                <a:rPr lang="en-US" sz="1050" dirty="0"/>
+                <a:t>+</a:t>
+              </a:r>
+            </a:p>
+          </p:txBody>
+        </p:sp>
+        <p:sp>
+          <p:nvSpPr>
+            <p:cNvPr id="61" name="TextBox 60">
+              <a:extLst>
+                <a:ext uri="{FF2B5EF4-FFF2-40B4-BE49-F238E27FC236}">
+                  <a16:creationId xmlns:a16="http://schemas.microsoft.com/office/drawing/2014/main" id="{07B0C242-0C5B-36E5-957C-8546BEC58F0D}"/>
+                </a:ext>
+              </a:extLst>
+            </p:cNvPr>
+            <p:cNvSpPr txBox="1"/>
+            <p:nvPr/>
+          </p:nvSpPr>
+          <p:spPr>
+            <a:xfrm>
+              <a:off x="5518404" y="1713364"/>
+              <a:ext cx="237744" cy="338554"/>
+            </a:xfrm>
+            <a:prstGeom prst="rect">
+              <a:avLst/>
+            </a:prstGeom>
+            <a:noFill/>
+          </p:spPr>
+          <p:txBody>
+            <a:bodyPr wrap="square" rtlCol="0">
+              <a:spAutoFit/>
+            </a:bodyPr>
+            <a:lstStyle/>
+            <a:p>
+              <a:r>
+                <a:rPr lang="en-US" sz="1600" dirty="0"/>
+                <a:t>-</a:t>
+              </a:r>
+              <a:endParaRPr lang="en-US" sz="1050" dirty="0"/>
+            </a:p>
+          </p:txBody>
+        </p:sp>
+      </p:grpSp>
+      <p:cxnSp>
+        <p:nvCxnSpPr>
+          <p:cNvPr id="62" name="Straight Arrow Connector 61">
+            <a:extLst>
+              <a:ext uri="{FF2B5EF4-FFF2-40B4-BE49-F238E27FC236}">
+                <a16:creationId xmlns:a16="http://schemas.microsoft.com/office/drawing/2014/main" id="{64A61392-C77A-55C5-A87B-3B5085F712DE}"/>
+              </a:ext>
+            </a:extLst>
+          </p:cNvPr>
+          <p:cNvCxnSpPr>
+            <a:cxnSpLocks/>
+            <a:stCxn id="68" idx="3"/>
+            <a:endCxn id="59" idx="2"/>
+          </p:cNvCxnSpPr>
+          <p:nvPr/>
+        </p:nvCxnSpPr>
+        <p:spPr>
+          <a:xfrm>
+            <a:off x="4721733" y="4369308"/>
+            <a:ext cx="245364" cy="2290"/>
+          </a:xfrm>
+          <a:prstGeom prst="straightConnector1">
+            <a:avLst/>
+          </a:prstGeom>
+          <a:ln>
+            <a:tailEnd type="triangle"/>
+          </a:ln>
+        </p:spPr>
+        <p:style>
+          <a:lnRef idx="2">
+            <a:schemeClr val="accent1"/>
+          </a:lnRef>
+          <a:fillRef idx="0">
+            <a:schemeClr val="accent1"/>
+          </a:fillRef>
+          <a:effectRef idx="1">
+            <a:schemeClr val="accent1"/>
+          </a:effectRef>
+          <a:fontRef idx="minor">
+            <a:schemeClr val="tx1"/>
+          </a:fontRef>
+        </p:style>
+      </p:cxnSp>
+      <p:cxnSp>
+        <p:nvCxnSpPr>
+          <p:cNvPr id="63" name="Straight Arrow Connector 62">
+            <a:extLst>
+              <a:ext uri="{FF2B5EF4-FFF2-40B4-BE49-F238E27FC236}">
+                <a16:creationId xmlns:a16="http://schemas.microsoft.com/office/drawing/2014/main" id="{4F6606D8-A1B4-0396-08B0-F44AF9AF84A2}"/>
+              </a:ext>
+            </a:extLst>
+          </p:cNvPr>
+          <p:cNvCxnSpPr>
+            <a:cxnSpLocks/>
+            <a:stCxn id="59" idx="6"/>
+            <a:endCxn id="9" idx="1"/>
+          </p:cNvCxnSpPr>
+          <p:nvPr/>
+        </p:nvCxnSpPr>
+        <p:spPr>
+          <a:xfrm>
+            <a:off x="5287137" y="4371598"/>
+            <a:ext cx="1310259" cy="9902"/>
+          </a:xfrm>
+          <a:prstGeom prst="straightConnector1">
+            <a:avLst/>
+          </a:prstGeom>
+          <a:ln>
+            <a:tailEnd type="triangle"/>
+          </a:ln>
+        </p:spPr>
+        <p:style>
+          <a:lnRef idx="2">
+            <a:schemeClr val="accent1"/>
+          </a:lnRef>
+          <a:fillRef idx="0">
+            <a:schemeClr val="accent1"/>
+          </a:fillRef>
+          <a:effectRef idx="1">
+            <a:schemeClr val="accent1"/>
+          </a:effectRef>
+          <a:fontRef idx="minor">
+            <a:schemeClr val="tx1"/>
+          </a:fontRef>
+        </p:style>
+      </p:cxnSp>
+      <p:sp>
+        <p:nvSpPr>
+          <p:cNvPr id="65" name="Rectangle 64">
+            <a:extLst>
+              <a:ext uri="{FF2B5EF4-FFF2-40B4-BE49-F238E27FC236}">
+                <a16:creationId xmlns:a16="http://schemas.microsoft.com/office/drawing/2014/main" id="{8FB02A05-7524-896B-238B-688AD16B3BC0}"/>
+              </a:ext>
+            </a:extLst>
+          </p:cNvPr>
+          <p:cNvSpPr/>
+          <p:nvPr/>
+        </p:nvSpPr>
+        <p:spPr>
+          <a:xfrm>
+            <a:off x="3995928" y="3654361"/>
+            <a:ext cx="710184" cy="411480"/>
+          </a:xfrm>
+          <a:prstGeom prst="rect">
+            <a:avLst/>
+          </a:prstGeom>
+        </p:spPr>
+        <p:style>
+          <a:lnRef idx="2">
+            <a:schemeClr val="accent1">
+              <a:shade val="15000"/>
+            </a:schemeClr>
+          </a:lnRef>
+          <a:fillRef idx="1">
+            <a:schemeClr val="accent1"/>
+          </a:fillRef>
+          <a:effectRef idx="0">
+            <a:schemeClr val="accent1"/>
+          </a:effectRef>
+          <a:fontRef idx="minor">
+            <a:schemeClr val="lt1"/>
+          </a:fontRef>
+        </p:style>
+        <p:txBody>
+          <a:bodyPr rtlCol="0" anchor="ctr"/>
+          <a:lstStyle/>
+          <a:p>
+            <a:pPr algn="ctr"/>
+            <a:r>
+              <a:rPr lang="en-US" sz="1000" dirty="0"/>
+              <a:t>Desired Yaw</a:t>
+            </a:r>
+          </a:p>
+        </p:txBody>
+      </p:sp>
+      <p:sp>
+        <p:nvSpPr>
+          <p:cNvPr id="68" name="Rectangle 67">
+            <a:extLst>
+              <a:ext uri="{FF2B5EF4-FFF2-40B4-BE49-F238E27FC236}">
+                <a16:creationId xmlns:a16="http://schemas.microsoft.com/office/drawing/2014/main" id="{FB347E85-1E53-CB1C-F81D-CDD7EE376199}"/>
+              </a:ext>
+            </a:extLst>
+          </p:cNvPr>
+          <p:cNvSpPr/>
+          <p:nvPr/>
+        </p:nvSpPr>
+        <p:spPr>
+          <a:xfrm>
+            <a:off x="4011549" y="4163568"/>
+            <a:ext cx="710184" cy="411480"/>
+          </a:xfrm>
+          <a:prstGeom prst="rect">
+            <a:avLst/>
+          </a:prstGeom>
+        </p:spPr>
+        <p:style>
+          <a:lnRef idx="2">
+            <a:schemeClr val="accent1">
+              <a:shade val="15000"/>
+            </a:schemeClr>
+          </a:lnRef>
+          <a:fillRef idx="1">
+            <a:schemeClr val="accent1"/>
+          </a:fillRef>
+          <a:effectRef idx="0">
+            <a:schemeClr val="accent1"/>
+          </a:effectRef>
+          <a:fontRef idx="minor">
+            <a:schemeClr val="lt1"/>
+          </a:fontRef>
+        </p:style>
+        <p:txBody>
+          <a:bodyPr rtlCol="0" anchor="ctr"/>
+          <a:lstStyle/>
+          <a:p>
+            <a:pPr algn="ctr"/>
+            <a:r>
+              <a:rPr lang="en-US" sz="1000" dirty="0"/>
+              <a:t>Desired Elevation</a:t>
+            </a:r>
+          </a:p>
+        </p:txBody>
+      </p:sp>
+      <p:cxnSp>
+        <p:nvCxnSpPr>
+          <p:cNvPr id="72" name="Connector: Elbow 71">
+            <a:extLst>
+              <a:ext uri="{FF2B5EF4-FFF2-40B4-BE49-F238E27FC236}">
+                <a16:creationId xmlns:a16="http://schemas.microsoft.com/office/drawing/2014/main" id="{AECA16D5-B584-BF8B-7529-778FE4A3F5B7}"/>
+              </a:ext>
+            </a:extLst>
+          </p:cNvPr>
+          <p:cNvCxnSpPr>
+            <a:cxnSpLocks/>
+            <a:stCxn id="16" idx="2"/>
+          </p:cNvCxnSpPr>
+          <p:nvPr/>
+        </p:nvCxnSpPr>
+        <p:spPr>
+          <a:xfrm rot="5400000" flipH="1">
+            <a:off x="7717416" y="1553598"/>
+            <a:ext cx="1589772" cy="4483608"/>
+          </a:xfrm>
+          <a:prstGeom prst="bentConnector4">
+            <a:avLst>
+              <a:gd name="adj1" fmla="val -14379"/>
+              <a:gd name="adj2" fmla="val 99915"/>
+            </a:avLst>
+          </a:prstGeom>
+          <a:ln>
+            <a:tailEnd type="triangle"/>
+          </a:ln>
+        </p:spPr>
+        <p:style>
+          <a:lnRef idx="2">
+            <a:schemeClr val="accent1"/>
+          </a:lnRef>
+          <a:fillRef idx="0">
+            <a:schemeClr val="accent1"/>
+          </a:fillRef>
+          <a:effectRef idx="1">
+            <a:schemeClr val="accent1"/>
+          </a:effectRef>
+          <a:fontRef idx="minor">
+            <a:schemeClr val="tx1"/>
+          </a:fontRef>
+        </p:style>
+      </p:cxnSp>
+      <p:cxnSp>
+        <p:nvCxnSpPr>
+          <p:cNvPr id="86" name="Connector: Elbow 85">
+            <a:extLst>
+              <a:ext uri="{FF2B5EF4-FFF2-40B4-BE49-F238E27FC236}">
+                <a16:creationId xmlns:a16="http://schemas.microsoft.com/office/drawing/2014/main" id="{05EA2E2D-468B-D52E-198C-CF85D9003A2E}"/>
+              </a:ext>
+            </a:extLst>
+          </p:cNvPr>
+          <p:cNvCxnSpPr>
+            <a:cxnSpLocks/>
+          </p:cNvCxnSpPr>
+          <p:nvPr/>
+        </p:nvCxnSpPr>
+        <p:spPr>
+          <a:xfrm rot="16200000" flipV="1">
+            <a:off x="5429383" y="3971222"/>
+            <a:ext cx="1301232" cy="380999"/>
+          </a:xfrm>
+          <a:prstGeom prst="bentConnector3">
+            <a:avLst>
+              <a:gd name="adj1" fmla="val -596"/>
+            </a:avLst>
+          </a:prstGeom>
+          <a:ln>
+            <a:tailEnd type="triangle"/>
+          </a:ln>
+        </p:spPr>
+        <p:style>
+          <a:lnRef idx="2">
+            <a:schemeClr val="accent1"/>
+          </a:lnRef>
+          <a:fillRef idx="0">
+            <a:schemeClr val="accent1"/>
+          </a:fillRef>
+          <a:effectRef idx="1">
+            <a:schemeClr val="accent1"/>
+          </a:effectRef>
+          <a:fontRef idx="minor">
+            <a:schemeClr val="tx1"/>
+          </a:fontRef>
+        </p:style>
+      </p:cxnSp>
+      <p:cxnSp>
+        <p:nvCxnSpPr>
+          <p:cNvPr id="91" name="Connector: Elbow 90">
+            <a:extLst>
+              <a:ext uri="{FF2B5EF4-FFF2-40B4-BE49-F238E27FC236}">
+                <a16:creationId xmlns:a16="http://schemas.microsoft.com/office/drawing/2014/main" id="{2F6B9A5F-24CF-FFD9-32B1-7706B6165BE6}"/>
+              </a:ext>
+            </a:extLst>
+          </p:cNvPr>
+          <p:cNvCxnSpPr>
+            <a:cxnSpLocks/>
+          </p:cNvCxnSpPr>
+          <p:nvPr/>
+        </p:nvCxnSpPr>
+        <p:spPr>
+          <a:xfrm rot="16200000" flipV="1">
+            <a:off x="5309366" y="4232206"/>
+            <a:ext cx="782312" cy="377952"/>
+          </a:xfrm>
+          <a:prstGeom prst="bentConnector3">
+            <a:avLst>
+              <a:gd name="adj1" fmla="val -260"/>
+            </a:avLst>
+          </a:prstGeom>
+          <a:ln>
+            <a:tailEnd type="triangle"/>
+          </a:ln>
+        </p:spPr>
+        <p:style>
+          <a:lnRef idx="2">
+            <a:schemeClr val="accent1"/>
+          </a:lnRef>
+          <a:fillRef idx="0">
+            <a:schemeClr val="accent1"/>
+          </a:fillRef>
+          <a:effectRef idx="1">
+            <a:schemeClr val="accent1"/>
+          </a:effectRef>
+          <a:fontRef idx="minor">
+            <a:schemeClr val="tx1"/>
+          </a:fontRef>
+        </p:style>
+      </p:cxnSp>
+      <p:cxnSp>
+        <p:nvCxnSpPr>
+          <p:cNvPr id="95" name="Connector: Elbow 94">
+            <a:extLst>
+              <a:ext uri="{FF2B5EF4-FFF2-40B4-BE49-F238E27FC236}">
+                <a16:creationId xmlns:a16="http://schemas.microsoft.com/office/drawing/2014/main" id="{DCC3044C-18F6-146C-1956-923C302D5BD8}"/>
+              </a:ext>
+            </a:extLst>
+          </p:cNvPr>
+          <p:cNvCxnSpPr>
+            <a:cxnSpLocks/>
+          </p:cNvCxnSpPr>
+          <p:nvPr/>
+        </p:nvCxnSpPr>
+        <p:spPr>
+          <a:xfrm rot="10800000">
+            <a:off x="5123312" y="4533260"/>
+            <a:ext cx="395855" cy="284191"/>
+          </a:xfrm>
+          <a:prstGeom prst="bentConnector3">
+            <a:avLst>
+              <a:gd name="adj1" fmla="val 100819"/>
+            </a:avLst>
+          </a:prstGeom>
+          <a:ln>
+            <a:tailEnd type="triangle"/>
+          </a:ln>
+        </p:spPr>
+        <p:style>
+          <a:lnRef idx="2">
+            <a:schemeClr val="accent1"/>
+          </a:lnRef>
+          <a:fillRef idx="0">
+            <a:schemeClr val="accent1"/>
+          </a:fillRef>
+          <a:effectRef idx="1">
+            <a:schemeClr val="accent1"/>
+          </a:effectRef>
+          <a:fontRef idx="minor">
+            <a:schemeClr val="tx1"/>
+          </a:fontRef>
+        </p:style>
+      </p:cxnSp>
+      <p:sp>
+        <p:nvSpPr>
+          <p:cNvPr id="102" name="Rectangle 101">
+            <a:extLst>
+              <a:ext uri="{FF2B5EF4-FFF2-40B4-BE49-F238E27FC236}">
+                <a16:creationId xmlns:a16="http://schemas.microsoft.com/office/drawing/2014/main" id="{411D6702-13C5-3B14-80F7-4EA8C74DCF00}"/>
+              </a:ext>
+            </a:extLst>
+          </p:cNvPr>
+          <p:cNvSpPr/>
+          <p:nvPr/>
+        </p:nvSpPr>
+        <p:spPr>
+          <a:xfrm>
+            <a:off x="389954" y="2794776"/>
+            <a:ext cx="854584" cy="411480"/>
+          </a:xfrm>
+          <a:prstGeom prst="rect">
+            <a:avLst/>
+          </a:prstGeom>
+        </p:spPr>
+        <p:style>
+          <a:lnRef idx="2">
+            <a:schemeClr val="accent1">
+              <a:shade val="15000"/>
+            </a:schemeClr>
+          </a:lnRef>
+          <a:fillRef idx="1">
+            <a:schemeClr val="accent1"/>
+          </a:fillRef>
+          <a:effectRef idx="0">
+            <a:schemeClr val="accent1"/>
+          </a:effectRef>
+          <a:fontRef idx="minor">
+            <a:schemeClr val="lt1"/>
+          </a:fontRef>
+        </p:style>
+        <p:txBody>
+          <a:bodyPr rtlCol="0" anchor="ctr"/>
+          <a:lstStyle/>
+          <a:p>
+            <a:pPr algn="ctr"/>
+            <a:r>
+              <a:rPr lang="en-US" sz="1000" dirty="0"/>
+              <a:t>Desired XY Position</a:t>
+            </a:r>
+          </a:p>
+        </p:txBody>
+      </p:sp>
+      <p:sp>
+        <p:nvSpPr>
+          <p:cNvPr id="103" name="Rectangle 102">
+            <a:extLst>
+              <a:ext uri="{FF2B5EF4-FFF2-40B4-BE49-F238E27FC236}">
+                <a16:creationId xmlns:a16="http://schemas.microsoft.com/office/drawing/2014/main" id="{8C20C2E6-ECF4-7E23-E4D7-0089D28723AF}"/>
+              </a:ext>
+            </a:extLst>
+          </p:cNvPr>
+          <p:cNvSpPr/>
+          <p:nvPr/>
+        </p:nvSpPr>
+        <p:spPr>
+          <a:xfrm>
+            <a:off x="1608392" y="2585391"/>
+            <a:ext cx="1041273" cy="830249"/>
+          </a:xfrm>
+          <a:prstGeom prst="rect">
+            <a:avLst/>
+          </a:prstGeom>
+        </p:spPr>
+        <p:style>
+          <a:lnRef idx="2">
+            <a:schemeClr val="accent1">
+              <a:shade val="15000"/>
+            </a:schemeClr>
+          </a:lnRef>
+          <a:fillRef idx="1">
+            <a:schemeClr val="accent1"/>
+          </a:fillRef>
+          <a:effectRef idx="0">
+            <a:schemeClr val="accent1"/>
+          </a:effectRef>
+          <a:fontRef idx="minor">
+            <a:schemeClr val="lt1"/>
+          </a:fontRef>
+        </p:style>
+        <p:txBody>
+          <a:bodyPr rtlCol="0" anchor="ctr"/>
+          <a:lstStyle/>
+          <a:p>
+            <a:pPr algn="ctr"/>
+            <a:r>
+              <a:rPr lang="en-US" sz="1100" dirty="0"/>
+              <a:t>Conversions (If Necessary)</a:t>
+            </a:r>
+          </a:p>
+        </p:txBody>
+      </p:sp>
+      <p:grpSp>
+        <p:nvGrpSpPr>
+          <p:cNvPr id="111" name="Group 110">
+            <a:extLst>
+              <a:ext uri="{FF2B5EF4-FFF2-40B4-BE49-F238E27FC236}">
+                <a16:creationId xmlns:a16="http://schemas.microsoft.com/office/drawing/2014/main" id="{29285013-55DC-CB40-8D2F-005D369EE96D}"/>
+              </a:ext>
+            </a:extLst>
+          </p:cNvPr>
+          <p:cNvGrpSpPr/>
+          <p:nvPr/>
+        </p:nvGrpSpPr>
+        <p:grpSpPr>
+          <a:xfrm>
+            <a:off x="3376041" y="2652116"/>
+            <a:ext cx="393192" cy="399140"/>
+            <a:chOff x="5422392" y="1652778"/>
+            <a:chExt cx="393192" cy="399140"/>
+          </a:xfrm>
+        </p:grpSpPr>
+        <p:sp>
+          <p:nvSpPr>
+            <p:cNvPr id="112" name="Flowchart: Connector 111">
+              <a:extLst>
+                <a:ext uri="{FF2B5EF4-FFF2-40B4-BE49-F238E27FC236}">
+                  <a16:creationId xmlns:a16="http://schemas.microsoft.com/office/drawing/2014/main" id="{6743DC4A-ADBC-E421-249D-F028AF6BFADC}"/>
+                </a:ext>
+              </a:extLst>
+            </p:cNvPr>
+            <p:cNvSpPr/>
+            <p:nvPr/>
+          </p:nvSpPr>
+          <p:spPr>
+            <a:xfrm>
+              <a:off x="5495544" y="1652778"/>
+              <a:ext cx="320040" cy="315468"/>
+            </a:xfrm>
+            <a:prstGeom prst="flowChartConnector">
+              <a:avLst/>
+            </a:prstGeom>
+            <a:solidFill>
+              <a:schemeClr val="bg1"/>
+            </a:solidFill>
+          </p:spPr>
+          <p:style>
+            <a:lnRef idx="2">
+              <a:schemeClr val="accent1">
+                <a:shade val="15000"/>
+              </a:schemeClr>
+            </a:lnRef>
+            <a:fillRef idx="1">
+              <a:schemeClr val="accent1"/>
+            </a:fillRef>
+            <a:effectRef idx="0">
+              <a:schemeClr val="accent1"/>
+            </a:effectRef>
+            <a:fontRef idx="minor">
+              <a:schemeClr val="lt1"/>
+            </a:fontRef>
+          </p:style>
+          <p:txBody>
+            <a:bodyPr rtlCol="0" anchor="ctr"/>
+            <a:lstStyle/>
+            <a:p>
+              <a:pPr algn="ctr"/>
+              <a:endParaRPr lang="en-US" dirty="0">
+                <a:solidFill>
+                  <a:schemeClr val="tx1"/>
+                </a:solidFill>
+              </a:endParaRPr>
+            </a:p>
+          </p:txBody>
+        </p:sp>
+        <p:sp>
+          <p:nvSpPr>
+            <p:cNvPr id="113" name="TextBox 112">
+              <a:extLst>
+                <a:ext uri="{FF2B5EF4-FFF2-40B4-BE49-F238E27FC236}">
+                  <a16:creationId xmlns:a16="http://schemas.microsoft.com/office/drawing/2014/main" id="{B38EAC4B-2737-F97D-CEDB-F73ADFD52158}"/>
+                </a:ext>
+              </a:extLst>
+            </p:cNvPr>
+            <p:cNvSpPr txBox="1"/>
+            <p:nvPr/>
+          </p:nvSpPr>
+          <p:spPr>
+            <a:xfrm>
+              <a:off x="5422392" y="1679707"/>
+              <a:ext cx="237744" cy="261610"/>
+            </a:xfrm>
+            <a:prstGeom prst="rect">
+              <a:avLst/>
+            </a:prstGeom>
+            <a:noFill/>
+          </p:spPr>
+          <p:txBody>
+            <a:bodyPr wrap="square" rtlCol="0">
+              <a:spAutoFit/>
+            </a:bodyPr>
+            <a:lstStyle/>
+            <a:p>
+              <a:r>
+                <a:rPr lang="en-US" sz="1050" dirty="0"/>
+                <a:t>+</a:t>
+              </a:r>
+            </a:p>
+          </p:txBody>
+        </p:sp>
+        <p:sp>
+          <p:nvSpPr>
+            <p:cNvPr id="114" name="TextBox 113">
+              <a:extLst>
+                <a:ext uri="{FF2B5EF4-FFF2-40B4-BE49-F238E27FC236}">
+                  <a16:creationId xmlns:a16="http://schemas.microsoft.com/office/drawing/2014/main" id="{9F05655E-72CA-C63B-0AF3-A67D5D3E2E48}"/>
+                </a:ext>
+              </a:extLst>
+            </p:cNvPr>
+            <p:cNvSpPr txBox="1"/>
+            <p:nvPr/>
+          </p:nvSpPr>
+          <p:spPr>
+            <a:xfrm>
+              <a:off x="5518404" y="1713364"/>
+              <a:ext cx="237744" cy="338554"/>
+            </a:xfrm>
+            <a:prstGeom prst="rect">
+              <a:avLst/>
+            </a:prstGeom>
+            <a:noFill/>
+          </p:spPr>
+          <p:txBody>
+            <a:bodyPr wrap="square" rtlCol="0">
+              <a:spAutoFit/>
+            </a:bodyPr>
+            <a:lstStyle/>
+            <a:p>
+              <a:r>
+                <a:rPr lang="en-US" sz="1600" dirty="0"/>
+                <a:t>-</a:t>
+              </a:r>
+              <a:endParaRPr lang="en-US" sz="1050" dirty="0"/>
+            </a:p>
+          </p:txBody>
+        </p:sp>
+      </p:grpSp>
+      <p:cxnSp>
+        <p:nvCxnSpPr>
+          <p:cNvPr id="115" name="Straight Arrow Connector 114">
+            <a:extLst>
+              <a:ext uri="{FF2B5EF4-FFF2-40B4-BE49-F238E27FC236}">
+                <a16:creationId xmlns:a16="http://schemas.microsoft.com/office/drawing/2014/main" id="{2B0C02DD-AB4D-018D-F43E-B42DFA7027E0}"/>
+              </a:ext>
+            </a:extLst>
+          </p:cNvPr>
+          <p:cNvCxnSpPr>
+            <a:cxnSpLocks/>
+            <a:endCxn id="112" idx="2"/>
+          </p:cNvCxnSpPr>
+          <p:nvPr/>
+        </p:nvCxnSpPr>
+        <p:spPr>
+          <a:xfrm>
+            <a:off x="2649665" y="2809850"/>
+            <a:ext cx="799528" cy="0"/>
+          </a:xfrm>
+          <a:prstGeom prst="straightConnector1">
+            <a:avLst/>
+          </a:prstGeom>
+          <a:ln>
+            <a:tailEnd type="triangle"/>
+          </a:ln>
+        </p:spPr>
+        <p:style>
+          <a:lnRef idx="2">
+            <a:schemeClr val="accent1"/>
+          </a:lnRef>
+          <a:fillRef idx="0">
+            <a:schemeClr val="accent1"/>
+          </a:fillRef>
+          <a:effectRef idx="1">
+            <a:schemeClr val="accent1"/>
+          </a:effectRef>
+          <a:fontRef idx="minor">
+            <a:schemeClr val="tx1"/>
+          </a:fontRef>
+        </p:style>
+      </p:cxnSp>
+      <p:cxnSp>
+        <p:nvCxnSpPr>
+          <p:cNvPr id="116" name="Straight Arrow Connector 115">
+            <a:extLst>
+              <a:ext uri="{FF2B5EF4-FFF2-40B4-BE49-F238E27FC236}">
+                <a16:creationId xmlns:a16="http://schemas.microsoft.com/office/drawing/2014/main" id="{BF6E34C0-2B3E-3895-DB22-FD5E9C22EFC1}"/>
+              </a:ext>
+            </a:extLst>
+          </p:cNvPr>
+          <p:cNvCxnSpPr>
+            <a:cxnSpLocks/>
+            <a:stCxn id="112" idx="6"/>
+            <a:endCxn id="11" idx="1"/>
+          </p:cNvCxnSpPr>
+          <p:nvPr/>
+        </p:nvCxnSpPr>
+        <p:spPr>
+          <a:xfrm>
+            <a:off x="3769233" y="2809850"/>
+            <a:ext cx="1231773" cy="15646"/>
+          </a:xfrm>
+          <a:prstGeom prst="straightConnector1">
+            <a:avLst/>
+          </a:prstGeom>
+          <a:ln>
+            <a:tailEnd type="triangle"/>
+          </a:ln>
+        </p:spPr>
+        <p:style>
+          <a:lnRef idx="2">
+            <a:schemeClr val="accent1"/>
+          </a:lnRef>
+          <a:fillRef idx="0">
+            <a:schemeClr val="accent1"/>
+          </a:fillRef>
+          <a:effectRef idx="1">
+            <a:schemeClr val="accent1"/>
+          </a:effectRef>
+          <a:fontRef idx="minor">
+            <a:schemeClr val="tx1"/>
+          </a:fontRef>
+        </p:style>
+      </p:cxnSp>
+      <p:cxnSp>
+        <p:nvCxnSpPr>
+          <p:cNvPr id="117" name="Connector: Elbow 116">
+            <a:extLst>
+              <a:ext uri="{FF2B5EF4-FFF2-40B4-BE49-F238E27FC236}">
+                <a16:creationId xmlns:a16="http://schemas.microsoft.com/office/drawing/2014/main" id="{44833A9C-90BA-09AA-671E-8E3D7E0ADEA8}"/>
+              </a:ext>
+            </a:extLst>
+          </p:cNvPr>
+          <p:cNvCxnSpPr>
+            <a:cxnSpLocks/>
+          </p:cNvCxnSpPr>
+          <p:nvPr/>
+        </p:nvCxnSpPr>
+        <p:spPr>
+          <a:xfrm rot="16200000" flipV="1">
+            <a:off x="3442845" y="3145216"/>
+            <a:ext cx="1833492" cy="1500755"/>
+          </a:xfrm>
+          <a:prstGeom prst="bentConnector3">
+            <a:avLst>
+              <a:gd name="adj1" fmla="val 128"/>
+            </a:avLst>
+          </a:prstGeom>
+          <a:ln>
+            <a:tailEnd type="triangle"/>
+          </a:ln>
+        </p:spPr>
+        <p:style>
+          <a:lnRef idx="2">
+            <a:schemeClr val="accent1"/>
+          </a:lnRef>
+          <a:fillRef idx="0">
+            <a:schemeClr val="accent1"/>
+          </a:fillRef>
+          <a:effectRef idx="1">
+            <a:schemeClr val="accent1"/>
+          </a:effectRef>
+          <a:fontRef idx="minor">
+            <a:schemeClr val="tx1"/>
+          </a:fontRef>
+        </p:style>
+      </p:cxnSp>
+      <p:grpSp>
+        <p:nvGrpSpPr>
+          <p:cNvPr id="126" name="Group 125">
+            <a:extLst>
+              <a:ext uri="{FF2B5EF4-FFF2-40B4-BE49-F238E27FC236}">
+                <a16:creationId xmlns:a16="http://schemas.microsoft.com/office/drawing/2014/main" id="{ADC304AC-11E0-C964-FFF3-9B06DCB9BD8B}"/>
+              </a:ext>
+            </a:extLst>
+          </p:cNvPr>
+          <p:cNvGrpSpPr/>
+          <p:nvPr/>
+        </p:nvGrpSpPr>
+        <p:grpSpPr>
+          <a:xfrm>
+            <a:off x="3036568" y="3173194"/>
+            <a:ext cx="393192" cy="399140"/>
+            <a:chOff x="5422392" y="1652778"/>
+            <a:chExt cx="393192" cy="399140"/>
+          </a:xfrm>
+        </p:grpSpPr>
+        <p:sp>
+          <p:nvSpPr>
+            <p:cNvPr id="127" name="Flowchart: Connector 126">
+              <a:extLst>
+                <a:ext uri="{FF2B5EF4-FFF2-40B4-BE49-F238E27FC236}">
+                  <a16:creationId xmlns:a16="http://schemas.microsoft.com/office/drawing/2014/main" id="{BFA27087-48A7-D879-F14E-049D7E5D6715}"/>
+                </a:ext>
+              </a:extLst>
+            </p:cNvPr>
+            <p:cNvSpPr/>
+            <p:nvPr/>
+          </p:nvSpPr>
+          <p:spPr>
+            <a:xfrm>
+              <a:off x="5495544" y="1652778"/>
+              <a:ext cx="320040" cy="315468"/>
+            </a:xfrm>
+            <a:prstGeom prst="flowChartConnector">
+              <a:avLst/>
+            </a:prstGeom>
+            <a:solidFill>
+              <a:schemeClr val="bg1"/>
+            </a:solidFill>
+          </p:spPr>
+          <p:style>
+            <a:lnRef idx="2">
+              <a:schemeClr val="accent1">
+                <a:shade val="15000"/>
+              </a:schemeClr>
+            </a:lnRef>
+            <a:fillRef idx="1">
+              <a:schemeClr val="accent1"/>
+            </a:fillRef>
+            <a:effectRef idx="0">
+              <a:schemeClr val="accent1"/>
+            </a:effectRef>
+            <a:fontRef idx="minor">
+              <a:schemeClr val="lt1"/>
+            </a:fontRef>
+          </p:style>
+          <p:txBody>
+            <a:bodyPr rtlCol="0" anchor="ctr"/>
+            <a:lstStyle/>
+            <a:p>
+              <a:pPr algn="ctr"/>
+              <a:endParaRPr lang="en-US" dirty="0">
+                <a:solidFill>
+                  <a:schemeClr val="tx1"/>
+                </a:solidFill>
+              </a:endParaRPr>
+            </a:p>
+          </p:txBody>
+        </p:sp>
+        <p:sp>
+          <p:nvSpPr>
+            <p:cNvPr id="128" name="TextBox 127">
+              <a:extLst>
+                <a:ext uri="{FF2B5EF4-FFF2-40B4-BE49-F238E27FC236}">
+                  <a16:creationId xmlns:a16="http://schemas.microsoft.com/office/drawing/2014/main" id="{4963F74E-F375-6EC2-4720-97A10283DE33}"/>
+                </a:ext>
+              </a:extLst>
+            </p:cNvPr>
+            <p:cNvSpPr txBox="1"/>
+            <p:nvPr/>
+          </p:nvSpPr>
+          <p:spPr>
+            <a:xfrm>
+              <a:off x="5422392" y="1679707"/>
+              <a:ext cx="237744" cy="261610"/>
+            </a:xfrm>
+            <a:prstGeom prst="rect">
+              <a:avLst/>
+            </a:prstGeom>
+            <a:noFill/>
+          </p:spPr>
+          <p:txBody>
+            <a:bodyPr wrap="square" rtlCol="0">
+              <a:spAutoFit/>
+            </a:bodyPr>
+            <a:lstStyle/>
+            <a:p>
+              <a:r>
+                <a:rPr lang="en-US" sz="1050" dirty="0"/>
+                <a:t>+</a:t>
+              </a:r>
+            </a:p>
+          </p:txBody>
+        </p:sp>
+        <p:sp>
+          <p:nvSpPr>
+            <p:cNvPr id="129" name="TextBox 128">
+              <a:extLst>
+                <a:ext uri="{FF2B5EF4-FFF2-40B4-BE49-F238E27FC236}">
+                  <a16:creationId xmlns:a16="http://schemas.microsoft.com/office/drawing/2014/main" id="{FEAB68CB-52DE-6342-676F-F2021A668C65}"/>
+                </a:ext>
+              </a:extLst>
+            </p:cNvPr>
+            <p:cNvSpPr txBox="1"/>
+            <p:nvPr/>
+          </p:nvSpPr>
+          <p:spPr>
+            <a:xfrm>
+              <a:off x="5518404" y="1713364"/>
+              <a:ext cx="237744" cy="338554"/>
+            </a:xfrm>
+            <a:prstGeom prst="rect">
+              <a:avLst/>
+            </a:prstGeom>
+            <a:noFill/>
+          </p:spPr>
+          <p:txBody>
+            <a:bodyPr wrap="square" rtlCol="0">
+              <a:spAutoFit/>
+            </a:bodyPr>
+            <a:lstStyle/>
+            <a:p>
+              <a:r>
+                <a:rPr lang="en-US" sz="1600" dirty="0"/>
+                <a:t>-</a:t>
+              </a:r>
+              <a:endParaRPr lang="en-US" sz="1050" dirty="0"/>
+            </a:p>
+          </p:txBody>
+        </p:sp>
+      </p:grpSp>
+      <p:cxnSp>
+        <p:nvCxnSpPr>
+          <p:cNvPr id="130" name="Straight Arrow Connector 129">
+            <a:extLst>
+              <a:ext uri="{FF2B5EF4-FFF2-40B4-BE49-F238E27FC236}">
+                <a16:creationId xmlns:a16="http://schemas.microsoft.com/office/drawing/2014/main" id="{0215D43B-2D6E-D4B5-6776-E9666218BFFD}"/>
+              </a:ext>
+            </a:extLst>
+          </p:cNvPr>
+          <p:cNvCxnSpPr>
+            <a:cxnSpLocks/>
+            <a:endCxn id="127" idx="2"/>
+          </p:cNvCxnSpPr>
+          <p:nvPr/>
+        </p:nvCxnSpPr>
+        <p:spPr>
+          <a:xfrm>
+            <a:off x="2683759" y="3330928"/>
+            <a:ext cx="425961" cy="0"/>
+          </a:xfrm>
+          <a:prstGeom prst="straightConnector1">
+            <a:avLst/>
+          </a:prstGeom>
+          <a:ln>
+            <a:tailEnd type="triangle"/>
+          </a:ln>
+        </p:spPr>
+        <p:style>
+          <a:lnRef idx="2">
+            <a:schemeClr val="accent1"/>
+          </a:lnRef>
+          <a:fillRef idx="0">
+            <a:schemeClr val="accent1"/>
+          </a:fillRef>
+          <a:effectRef idx="1">
+            <a:schemeClr val="accent1"/>
+          </a:effectRef>
+          <a:fontRef idx="minor">
+            <a:schemeClr val="tx1"/>
+          </a:fontRef>
+        </p:style>
+      </p:cxnSp>
+      <p:cxnSp>
+        <p:nvCxnSpPr>
+          <p:cNvPr id="131" name="Straight Arrow Connector 130">
+            <a:extLst>
+              <a:ext uri="{FF2B5EF4-FFF2-40B4-BE49-F238E27FC236}">
+                <a16:creationId xmlns:a16="http://schemas.microsoft.com/office/drawing/2014/main" id="{8A0B8A40-4C5D-C8CE-DC82-C0E282621C44}"/>
+              </a:ext>
+            </a:extLst>
+          </p:cNvPr>
+          <p:cNvCxnSpPr>
+            <a:cxnSpLocks/>
+            <a:stCxn id="127" idx="6"/>
+            <a:endCxn id="10" idx="1"/>
+          </p:cNvCxnSpPr>
+          <p:nvPr/>
+        </p:nvCxnSpPr>
+        <p:spPr>
+          <a:xfrm>
+            <a:off x="3429760" y="3330928"/>
+            <a:ext cx="1571246" cy="7014"/>
+          </a:xfrm>
+          <a:prstGeom prst="straightConnector1">
+            <a:avLst/>
+          </a:prstGeom>
+          <a:ln>
+            <a:tailEnd type="triangle"/>
+          </a:ln>
+        </p:spPr>
+        <p:style>
+          <a:lnRef idx="2">
+            <a:schemeClr val="accent1"/>
+          </a:lnRef>
+          <a:fillRef idx="0">
+            <a:schemeClr val="accent1"/>
+          </a:fillRef>
+          <a:effectRef idx="1">
+            <a:schemeClr val="accent1"/>
+          </a:effectRef>
+          <a:fontRef idx="minor">
+            <a:schemeClr val="tx1"/>
+          </a:fontRef>
+        </p:style>
+      </p:cxnSp>
+      <p:cxnSp>
+        <p:nvCxnSpPr>
+          <p:cNvPr id="132" name="Connector: Elbow 131">
+            <a:extLst>
+              <a:ext uri="{FF2B5EF4-FFF2-40B4-BE49-F238E27FC236}">
+                <a16:creationId xmlns:a16="http://schemas.microsoft.com/office/drawing/2014/main" id="{014548B0-2609-41C9-3EC0-60DEA407706D}"/>
+              </a:ext>
+            </a:extLst>
+          </p:cNvPr>
+          <p:cNvCxnSpPr>
+            <a:cxnSpLocks/>
+          </p:cNvCxnSpPr>
+          <p:nvPr/>
+        </p:nvCxnSpPr>
+        <p:spPr>
+          <a:xfrm rot="16200000" flipV="1">
+            <a:off x="2809625" y="3959299"/>
+            <a:ext cx="1301232" cy="380999"/>
+          </a:xfrm>
+          <a:prstGeom prst="bentConnector3">
+            <a:avLst>
+              <a:gd name="adj1" fmla="val -596"/>
+            </a:avLst>
+          </a:prstGeom>
+          <a:ln>
+            <a:tailEnd type="triangle"/>
+          </a:ln>
+        </p:spPr>
+        <p:style>
+          <a:lnRef idx="2">
+            <a:schemeClr val="accent1"/>
+          </a:lnRef>
+          <a:fillRef idx="0">
+            <a:schemeClr val="accent1"/>
+          </a:fillRef>
+          <a:effectRef idx="1">
+            <a:schemeClr val="accent1"/>
+          </a:effectRef>
+          <a:fontRef idx="minor">
+            <a:schemeClr val="tx1"/>
+          </a:fontRef>
+        </p:style>
+      </p:cxnSp>
+      <p:cxnSp>
+        <p:nvCxnSpPr>
+          <p:cNvPr id="139" name="Straight Arrow Connector 138">
+            <a:extLst>
+              <a:ext uri="{FF2B5EF4-FFF2-40B4-BE49-F238E27FC236}">
+                <a16:creationId xmlns:a16="http://schemas.microsoft.com/office/drawing/2014/main" id="{04DA9057-AED1-AD9A-6021-5F482DE02754}"/>
+              </a:ext>
+            </a:extLst>
+          </p:cNvPr>
+          <p:cNvCxnSpPr>
+            <a:cxnSpLocks/>
+            <a:stCxn id="102" idx="3"/>
+            <a:endCxn id="103" idx="1"/>
+          </p:cNvCxnSpPr>
+          <p:nvPr/>
+        </p:nvCxnSpPr>
+        <p:spPr>
+          <a:xfrm>
+            <a:off x="1244538" y="3000516"/>
+            <a:ext cx="363854" cy="0"/>
+          </a:xfrm>
+          <a:prstGeom prst="straightConnector1">
+            <a:avLst/>
+          </a:prstGeom>
+          <a:ln>
+            <a:tailEnd type="triangle"/>
+          </a:ln>
+        </p:spPr>
+        <p:style>
+          <a:lnRef idx="2">
+            <a:schemeClr val="accent1"/>
+          </a:lnRef>
+          <a:fillRef idx="0">
+            <a:schemeClr val="accent1"/>
+          </a:fillRef>
+          <a:effectRef idx="1">
+            <a:schemeClr val="accent1"/>
+          </a:effectRef>
+          <a:fontRef idx="minor">
+            <a:schemeClr val="tx1"/>
+          </a:fontRef>
+        </p:style>
+      </p:cxnSp>
+      <p:sp>
+        <p:nvSpPr>
+          <p:cNvPr id="141" name="Title 1">
+            <a:extLst>
+              <a:ext uri="{FF2B5EF4-FFF2-40B4-BE49-F238E27FC236}">
+                <a16:creationId xmlns:a16="http://schemas.microsoft.com/office/drawing/2014/main" id="{70053456-76EA-3943-CC3C-074D80E0EE69}"/>
+              </a:ext>
+            </a:extLst>
+          </p:cNvPr>
+          <p:cNvSpPr>
+            <a:spLocks noGrp="1"/>
+          </p:cNvSpPr>
+          <p:nvPr>
+            <p:ph type="title"/>
+          </p:nvPr>
+        </p:nvSpPr>
+        <p:spPr>
+          <a:xfrm>
+            <a:off x="838200" y="365125"/>
+            <a:ext cx="10515600" cy="1325563"/>
+          </a:xfrm>
+        </p:spPr>
+        <p:txBody>
+          <a:bodyPr/>
+          <a:lstStyle/>
+          <a:p>
+            <a:pPr algn="ctr"/>
+            <a:r>
+              <a:rPr lang="en-US" dirty="0"/>
+              <a:t>Overview</a:t>
+            </a:r>
+          </a:p>
+        </p:txBody>
+      </p:sp>
+      <p:cxnSp>
+        <p:nvCxnSpPr>
+          <p:cNvPr id="142" name="Straight Arrow Connector 141">
+            <a:extLst>
+              <a:ext uri="{FF2B5EF4-FFF2-40B4-BE49-F238E27FC236}">
+                <a16:creationId xmlns:a16="http://schemas.microsoft.com/office/drawing/2014/main" id="{AA5094AE-A712-7231-9389-E797B7E1BF5A}"/>
+              </a:ext>
+            </a:extLst>
+          </p:cNvPr>
+          <p:cNvCxnSpPr>
+            <a:cxnSpLocks/>
+            <a:endCxn id="12" idx="1"/>
+          </p:cNvCxnSpPr>
+          <p:nvPr/>
+        </p:nvCxnSpPr>
+        <p:spPr>
+          <a:xfrm flipV="1">
+            <a:off x="8631936" y="2831592"/>
+            <a:ext cx="491490" cy="670"/>
+          </a:xfrm>
+          <a:prstGeom prst="straightConnector1">
+            <a:avLst/>
+          </a:prstGeom>
+          <a:ln>
+            <a:tailEnd type="triangle"/>
+          </a:ln>
+        </p:spPr>
+        <p:style>
+          <a:lnRef idx="2">
+            <a:schemeClr val="accent1"/>
+          </a:lnRef>
+          <a:fillRef idx="0">
+            <a:schemeClr val="accent1"/>
+          </a:fillRef>
+          <a:effectRef idx="1">
+            <a:schemeClr val="accent1"/>
+          </a:effectRef>
+          <a:fontRef idx="minor">
+            <a:schemeClr val="tx1"/>
+          </a:fontRef>
+        </p:style>
+      </p:cxnSp>
+      <p:cxnSp>
+        <p:nvCxnSpPr>
+          <p:cNvPr id="144" name="Straight Arrow Connector 143">
+            <a:extLst>
+              <a:ext uri="{FF2B5EF4-FFF2-40B4-BE49-F238E27FC236}">
+                <a16:creationId xmlns:a16="http://schemas.microsoft.com/office/drawing/2014/main" id="{2DDA7981-11BC-0B8B-20AD-943BCF3B730E}"/>
+              </a:ext>
+            </a:extLst>
+          </p:cNvPr>
+          <p:cNvCxnSpPr>
+            <a:cxnSpLocks/>
+          </p:cNvCxnSpPr>
+          <p:nvPr/>
+        </p:nvCxnSpPr>
+        <p:spPr>
+          <a:xfrm flipV="1">
+            <a:off x="9769220" y="2841482"/>
+            <a:ext cx="491490" cy="670"/>
+          </a:xfrm>
+          <a:prstGeom prst="straightConnector1">
+            <a:avLst/>
+          </a:prstGeom>
+          <a:ln>
+            <a:tailEnd type="triangle"/>
+          </a:ln>
+        </p:spPr>
+        <p:style>
+          <a:lnRef idx="2">
+            <a:schemeClr val="accent1"/>
+          </a:lnRef>
+          <a:fillRef idx="0">
+            <a:schemeClr val="accent1"/>
+          </a:fillRef>
+          <a:effectRef idx="1">
+            <a:schemeClr val="accent1"/>
+          </a:effectRef>
+          <a:fontRef idx="minor">
+            <a:schemeClr val="tx1"/>
+          </a:fontRef>
+        </p:style>
+      </p:cxnSp>
+      <p:cxnSp>
+        <p:nvCxnSpPr>
+          <p:cNvPr id="146" name="Straight Arrow Connector 145">
+            <a:extLst>
+              <a:ext uri="{FF2B5EF4-FFF2-40B4-BE49-F238E27FC236}">
+                <a16:creationId xmlns:a16="http://schemas.microsoft.com/office/drawing/2014/main" id="{1B1C07E1-7E77-C8C6-BE83-8C424E658BA9}"/>
+              </a:ext>
+            </a:extLst>
+          </p:cNvPr>
+          <p:cNvCxnSpPr>
+            <a:cxnSpLocks/>
+          </p:cNvCxnSpPr>
+          <p:nvPr/>
+        </p:nvCxnSpPr>
+        <p:spPr>
+          <a:xfrm flipV="1">
+            <a:off x="8631936" y="3347837"/>
+            <a:ext cx="491490" cy="670"/>
+          </a:xfrm>
+          <a:prstGeom prst="straightConnector1">
+            <a:avLst/>
+          </a:prstGeom>
+          <a:ln>
+            <a:tailEnd type="triangle"/>
+          </a:ln>
+        </p:spPr>
+        <p:style>
+          <a:lnRef idx="2">
+            <a:schemeClr val="accent1"/>
+          </a:lnRef>
+          <a:fillRef idx="0">
+            <a:schemeClr val="accent1"/>
+          </a:fillRef>
+          <a:effectRef idx="1">
+            <a:schemeClr val="accent1"/>
+          </a:effectRef>
+          <a:fontRef idx="minor">
+            <a:schemeClr val="tx1"/>
+          </a:fontRef>
+        </p:style>
+      </p:cxnSp>
+      <p:cxnSp>
+        <p:nvCxnSpPr>
+          <p:cNvPr id="147" name="Straight Arrow Connector 146">
+            <a:extLst>
+              <a:ext uri="{FF2B5EF4-FFF2-40B4-BE49-F238E27FC236}">
+                <a16:creationId xmlns:a16="http://schemas.microsoft.com/office/drawing/2014/main" id="{1704B7C7-A94B-AAD4-748F-8CA933E63DA1}"/>
+              </a:ext>
+            </a:extLst>
+          </p:cNvPr>
+          <p:cNvCxnSpPr>
+            <a:cxnSpLocks/>
+          </p:cNvCxnSpPr>
+          <p:nvPr/>
+        </p:nvCxnSpPr>
+        <p:spPr>
+          <a:xfrm flipV="1">
+            <a:off x="9769220" y="3357727"/>
+            <a:ext cx="491490" cy="670"/>
+          </a:xfrm>
+          <a:prstGeom prst="straightConnector1">
+            <a:avLst/>
+          </a:prstGeom>
+          <a:ln>
+            <a:tailEnd type="triangle"/>
+          </a:ln>
+        </p:spPr>
+        <p:style>
+          <a:lnRef idx="2">
+            <a:schemeClr val="accent1"/>
+          </a:lnRef>
+          <a:fillRef idx="0">
+            <a:schemeClr val="accent1"/>
+          </a:fillRef>
+          <a:effectRef idx="1">
+            <a:schemeClr val="accent1"/>
+          </a:effectRef>
+          <a:fontRef idx="minor">
+            <a:schemeClr val="tx1"/>
+          </a:fontRef>
+        </p:style>
+      </p:cxnSp>
+      <p:cxnSp>
+        <p:nvCxnSpPr>
+          <p:cNvPr id="148" name="Straight Arrow Connector 147">
+            <a:extLst>
+              <a:ext uri="{FF2B5EF4-FFF2-40B4-BE49-F238E27FC236}">
+                <a16:creationId xmlns:a16="http://schemas.microsoft.com/office/drawing/2014/main" id="{EDDFFA7E-B640-A6F1-45D4-EA5A25FE28B1}"/>
+              </a:ext>
+            </a:extLst>
+          </p:cNvPr>
+          <p:cNvCxnSpPr>
+            <a:cxnSpLocks/>
+          </p:cNvCxnSpPr>
+          <p:nvPr/>
+        </p:nvCxnSpPr>
+        <p:spPr>
+          <a:xfrm flipV="1">
+            <a:off x="8631936" y="3852472"/>
+            <a:ext cx="491490" cy="670"/>
+          </a:xfrm>
+          <a:prstGeom prst="straightConnector1">
+            <a:avLst/>
+          </a:prstGeom>
+          <a:ln>
+            <a:tailEnd type="triangle"/>
+          </a:ln>
+        </p:spPr>
+        <p:style>
+          <a:lnRef idx="2">
+            <a:schemeClr val="accent1"/>
+          </a:lnRef>
+          <a:fillRef idx="0">
+            <a:schemeClr val="accent1"/>
+          </a:fillRef>
+          <a:effectRef idx="1">
+            <a:schemeClr val="accent1"/>
+          </a:effectRef>
+          <a:fontRef idx="minor">
+            <a:schemeClr val="tx1"/>
+          </a:fontRef>
+        </p:style>
+      </p:cxnSp>
+      <p:cxnSp>
+        <p:nvCxnSpPr>
+          <p:cNvPr id="149" name="Straight Arrow Connector 148">
+            <a:extLst>
+              <a:ext uri="{FF2B5EF4-FFF2-40B4-BE49-F238E27FC236}">
+                <a16:creationId xmlns:a16="http://schemas.microsoft.com/office/drawing/2014/main" id="{D50DBAAA-74F3-6472-E687-FE65F89D6E7E}"/>
+              </a:ext>
+            </a:extLst>
+          </p:cNvPr>
+          <p:cNvCxnSpPr>
+            <a:cxnSpLocks/>
+          </p:cNvCxnSpPr>
+          <p:nvPr/>
+        </p:nvCxnSpPr>
+        <p:spPr>
+          <a:xfrm flipV="1">
+            <a:off x="9769220" y="3862362"/>
+            <a:ext cx="491490" cy="670"/>
+          </a:xfrm>
+          <a:prstGeom prst="straightConnector1">
+            <a:avLst/>
+          </a:prstGeom>
+          <a:ln>
+            <a:tailEnd type="triangle"/>
+          </a:ln>
+        </p:spPr>
+        <p:style>
+          <a:lnRef idx="2">
+            <a:schemeClr val="accent1"/>
+          </a:lnRef>
+          <a:fillRef idx="0">
+            <a:schemeClr val="accent1"/>
+          </a:fillRef>
+          <a:effectRef idx="1">
+            <a:schemeClr val="accent1"/>
+          </a:effectRef>
+          <a:fontRef idx="minor">
+            <a:schemeClr val="tx1"/>
+          </a:fontRef>
+        </p:style>
+      </p:cxnSp>
+      <p:cxnSp>
+        <p:nvCxnSpPr>
+          <p:cNvPr id="150" name="Straight Arrow Connector 149">
+            <a:extLst>
+              <a:ext uri="{FF2B5EF4-FFF2-40B4-BE49-F238E27FC236}">
+                <a16:creationId xmlns:a16="http://schemas.microsoft.com/office/drawing/2014/main" id="{68B876D4-1E4C-0FD1-AF73-6C4E09BF4E61}"/>
+              </a:ext>
+            </a:extLst>
+          </p:cNvPr>
+          <p:cNvCxnSpPr>
+            <a:cxnSpLocks/>
+          </p:cNvCxnSpPr>
+          <p:nvPr/>
+        </p:nvCxnSpPr>
+        <p:spPr>
+          <a:xfrm flipV="1">
+            <a:off x="8631936" y="4368717"/>
+            <a:ext cx="491490" cy="670"/>
+          </a:xfrm>
+          <a:prstGeom prst="straightConnector1">
+            <a:avLst/>
+          </a:prstGeom>
+          <a:ln>
+            <a:tailEnd type="triangle"/>
+          </a:ln>
+        </p:spPr>
+        <p:style>
+          <a:lnRef idx="2">
+            <a:schemeClr val="accent1"/>
+          </a:lnRef>
+          <a:fillRef idx="0">
+            <a:schemeClr val="accent1"/>
+          </a:fillRef>
+          <a:effectRef idx="1">
+            <a:schemeClr val="accent1"/>
+          </a:effectRef>
+          <a:fontRef idx="minor">
+            <a:schemeClr val="tx1"/>
+          </a:fontRef>
+        </p:style>
+      </p:cxnSp>
+      <p:cxnSp>
+        <p:nvCxnSpPr>
+          <p:cNvPr id="151" name="Straight Arrow Connector 150">
+            <a:extLst>
+              <a:ext uri="{FF2B5EF4-FFF2-40B4-BE49-F238E27FC236}">
+                <a16:creationId xmlns:a16="http://schemas.microsoft.com/office/drawing/2014/main" id="{EA3204A2-FA1B-DE7B-FAB2-AE0B9A1414B9}"/>
+              </a:ext>
+            </a:extLst>
+          </p:cNvPr>
+          <p:cNvCxnSpPr>
+            <a:cxnSpLocks/>
+          </p:cNvCxnSpPr>
+          <p:nvPr/>
+        </p:nvCxnSpPr>
+        <p:spPr>
+          <a:xfrm flipV="1">
+            <a:off x="9769220" y="4378607"/>
+            <a:ext cx="491490" cy="670"/>
+          </a:xfrm>
+          <a:prstGeom prst="straightConnector1">
+            <a:avLst/>
+          </a:prstGeom>
+          <a:ln>
+            <a:tailEnd type="triangle"/>
+          </a:ln>
+        </p:spPr>
+        <p:style>
+          <a:lnRef idx="2">
+            <a:schemeClr val="accent1"/>
+          </a:lnRef>
+          <a:fillRef idx="0">
+            <a:schemeClr val="accent1"/>
+          </a:fillRef>
+          <a:effectRef idx="1">
+            <a:schemeClr val="accent1"/>
+          </a:effectRef>
+          <a:fontRef idx="minor">
+            <a:schemeClr val="tx1"/>
+          </a:fontRef>
+        </p:style>
+      </p:cxnSp>
+      <p:sp>
+        <p:nvSpPr>
+          <p:cNvPr id="152" name="TextBox 151">
+            <a:extLst>
+              <a:ext uri="{FF2B5EF4-FFF2-40B4-BE49-F238E27FC236}">
+                <a16:creationId xmlns:a16="http://schemas.microsoft.com/office/drawing/2014/main" id="{A8069555-1591-6672-747E-4DCBAFF0C1FE}"/>
+              </a:ext>
+            </a:extLst>
+          </p:cNvPr>
+          <p:cNvSpPr txBox="1"/>
+          <p:nvPr/>
+        </p:nvSpPr>
+        <p:spPr>
+          <a:xfrm>
+            <a:off x="8602980" y="2339092"/>
+            <a:ext cx="552070" cy="507831"/>
+          </a:xfrm>
+          <a:prstGeom prst="rect">
+            <a:avLst/>
+          </a:prstGeom>
+          <a:noFill/>
+        </p:spPr>
+        <p:txBody>
+          <a:bodyPr wrap="square" rtlCol="0">
+            <a:spAutoFit/>
+          </a:bodyPr>
+          <a:lstStyle/>
+          <a:p>
+            <a:r>
+              <a:rPr lang="en-US" sz="900" dirty="0"/>
+              <a:t>Motor PWM Values</a:t>
+            </a:r>
+          </a:p>
+        </p:txBody>
+      </p:sp>
+      <p:sp>
+        <p:nvSpPr>
+          <p:cNvPr id="153" name="TextBox 152">
+            <a:extLst>
+              <a:ext uri="{FF2B5EF4-FFF2-40B4-BE49-F238E27FC236}">
+                <a16:creationId xmlns:a16="http://schemas.microsoft.com/office/drawing/2014/main" id="{AB57F696-517B-2209-5073-4E1BC2E10EA3}"/>
+              </a:ext>
+            </a:extLst>
+          </p:cNvPr>
+          <p:cNvSpPr txBox="1"/>
+          <p:nvPr/>
+        </p:nvSpPr>
+        <p:spPr>
+          <a:xfrm>
+            <a:off x="6963822" y="4843440"/>
+            <a:ext cx="3827718" cy="230832"/>
+          </a:xfrm>
+          <a:prstGeom prst="rect">
+            <a:avLst/>
+          </a:prstGeom>
+          <a:noFill/>
+        </p:spPr>
+        <p:txBody>
+          <a:bodyPr wrap="square" rtlCol="0">
+            <a:spAutoFit/>
+          </a:bodyPr>
+          <a:lstStyle/>
+          <a:p>
+            <a:r>
+              <a:rPr lang="en-US" sz="900" dirty="0"/>
+              <a:t>Sensor Feedback (May need to operations with these when feeding back)</a:t>
+            </a:r>
+          </a:p>
+        </p:txBody>
+      </p:sp>
+      <p:sp>
+        <p:nvSpPr>
+          <p:cNvPr id="154" name="TextBox 153">
+            <a:extLst>
+              <a:ext uri="{FF2B5EF4-FFF2-40B4-BE49-F238E27FC236}">
+                <a16:creationId xmlns:a16="http://schemas.microsoft.com/office/drawing/2014/main" id="{48BB7206-DB55-EF8C-E128-23F53EF41C5B}"/>
+              </a:ext>
+            </a:extLst>
+          </p:cNvPr>
+          <p:cNvSpPr txBox="1"/>
+          <p:nvPr/>
+        </p:nvSpPr>
+        <p:spPr>
+          <a:xfrm>
+            <a:off x="2594133" y="2592026"/>
+            <a:ext cx="866490" cy="230832"/>
+          </a:xfrm>
+          <a:prstGeom prst="rect">
+            <a:avLst/>
+          </a:prstGeom>
+          <a:noFill/>
+        </p:spPr>
+        <p:txBody>
+          <a:bodyPr wrap="square" rtlCol="0">
+            <a:spAutoFit/>
+          </a:bodyPr>
+          <a:lstStyle/>
+          <a:p>
+            <a:r>
+              <a:rPr lang="en-US" sz="900" dirty="0"/>
+              <a:t>Desired Pitch</a:t>
+            </a:r>
+          </a:p>
+        </p:txBody>
+      </p:sp>
+      <p:sp>
+        <p:nvSpPr>
+          <p:cNvPr id="155" name="TextBox 154">
+            <a:extLst>
+              <a:ext uri="{FF2B5EF4-FFF2-40B4-BE49-F238E27FC236}">
+                <a16:creationId xmlns:a16="http://schemas.microsoft.com/office/drawing/2014/main" id="{C39DF2C8-D6D2-FEB1-3A73-AEFC70AC5636}"/>
+              </a:ext>
+            </a:extLst>
+          </p:cNvPr>
+          <p:cNvSpPr txBox="1"/>
+          <p:nvPr/>
+        </p:nvSpPr>
+        <p:spPr>
+          <a:xfrm>
+            <a:off x="2636331" y="2961389"/>
+            <a:ext cx="633410" cy="369332"/>
+          </a:xfrm>
+          <a:prstGeom prst="rect">
+            <a:avLst/>
+          </a:prstGeom>
+          <a:noFill/>
+        </p:spPr>
+        <p:txBody>
+          <a:bodyPr wrap="square" rtlCol="0">
+            <a:spAutoFit/>
+          </a:bodyPr>
+          <a:lstStyle/>
+          <a:p>
+            <a:r>
+              <a:rPr lang="en-US" sz="900" dirty="0"/>
+              <a:t>Desired Roll</a:t>
+            </a:r>
+          </a:p>
+        </p:txBody>
+      </p:sp>
+    </p:spTree>
+    <p:extLst>
+      <p:ext uri="{BB962C8B-B14F-4D97-AF65-F5344CB8AC3E}">
+        <p14:creationId xmlns:p14="http://schemas.microsoft.com/office/powerpoint/2010/main" val="1343786567"/>
+      </p:ext>
+    </p:extLst>
+  </p:cSld>
+  <p:clrMapOvr>
+    <a:masterClrMapping/>
+  </p:clrMapOvr>
+</p:sld>
+</file>
+
+<file path=ppt/slides/slide3.xml><?xml version="1.0" encoding="utf-8"?>
+<p:sld xmlns:a="http://schemas.openxmlformats.org/drawingml/2006/main" xmlns:r="http://schemas.openxmlformats.org/officeDocument/2006/relationships" xmlns:p="http://schemas.openxmlformats.org/presentationml/2006/main">
+  <p:cSld>
+    <p:spTree>
+      <p:nvGrpSpPr>
+        <p:cNvPr id="1" name=""/>
+        <p:cNvGrpSpPr/>
+        <p:nvPr/>
+      </p:nvGrpSpPr>
+      <p:grpSpPr>
+        <a:xfrm>
+          <a:off x="0" y="0"/>
+          <a:ext cx="0" cy="0"/>
+          <a:chOff x="0" y="0"/>
+          <a:chExt cx="0" cy="0"/>
+        </a:xfrm>
+      </p:grpSpPr>
+      <p:sp>
+        <p:nvSpPr>
+          <p:cNvPr id="2" name="Title 1">
+            <a:extLst>
+              <a:ext uri="{FF2B5EF4-FFF2-40B4-BE49-F238E27FC236}">
+                <a16:creationId xmlns:a16="http://schemas.microsoft.com/office/drawing/2014/main" id="{EC24E606-9007-D956-678B-3A4FAE5CBD8C}"/>
+              </a:ext>
+            </a:extLst>
+          </p:cNvPr>
+          <p:cNvSpPr>
+            <a:spLocks noGrp="1"/>
+          </p:cNvSpPr>
+          <p:nvPr>
+            <p:ph type="title"/>
+          </p:nvPr>
+        </p:nvSpPr>
+        <p:spPr/>
+        <p:txBody>
+          <a:bodyPr/>
+          <a:lstStyle/>
+          <a:p>
+            <a:r>
+              <a:rPr lang="en-US" dirty="0"/>
+              <a:t>PID Variables</a:t>
+            </a:r>
+          </a:p>
+        </p:txBody>
+      </p:sp>
+      <p:sp>
+        <p:nvSpPr>
+          <p:cNvPr id="3" name="Content Placeholder 2">
+            <a:extLst>
+              <a:ext uri="{FF2B5EF4-FFF2-40B4-BE49-F238E27FC236}">
+                <a16:creationId xmlns:a16="http://schemas.microsoft.com/office/drawing/2014/main" id="{6D5E60D6-9EBD-1A61-B20C-576B5403A52F}"/>
+              </a:ext>
+            </a:extLst>
+          </p:cNvPr>
+          <p:cNvSpPr>
+            <a:spLocks noGrp="1"/>
+          </p:cNvSpPr>
+          <p:nvPr>
+            <p:ph idx="1"/>
+          </p:nvPr>
+        </p:nvSpPr>
+        <p:spPr/>
+        <p:txBody>
+          <a:bodyPr>
+            <a:normAutofit/>
+          </a:bodyPr>
+          <a:lstStyle/>
+          <a:p>
+            <a:r>
+              <a:rPr lang="en-US" sz="2000" dirty="0"/>
+              <a:t>e[]</a:t>
+            </a:r>
+          </a:p>
+          <a:p>
+            <a:pPr lvl="1"/>
+            <a:r>
+              <a:rPr lang="en-US" sz="1800" dirty="0"/>
+              <a:t>Array of size ??? holding error values from sampled sensor values.</a:t>
+            </a:r>
+          </a:p>
+          <a:p>
+            <a:pPr lvl="1"/>
+            <a:r>
+              <a:rPr lang="en-US" sz="1800" dirty="0"/>
+              <a:t>Most recent value is held at the end(?)</a:t>
+            </a:r>
+          </a:p>
+          <a:p>
+            <a:r>
+              <a:rPr lang="en-US" sz="2000" dirty="0"/>
+              <a:t>P, I, and D</a:t>
+            </a:r>
+          </a:p>
+          <a:p>
+            <a:pPr lvl="1"/>
+            <a:r>
+              <a:rPr lang="en-US" sz="1800" dirty="0"/>
+              <a:t>Gain values for each part of the PID controller.</a:t>
+            </a:r>
+          </a:p>
+          <a:p>
+            <a:r>
+              <a:rPr lang="en-US" sz="2000" dirty="0"/>
+              <a:t>sum</a:t>
+            </a:r>
+          </a:p>
+          <a:p>
+            <a:pPr lvl="1"/>
+            <a:r>
+              <a:rPr lang="en-US" sz="1800" dirty="0"/>
+              <a:t>“Integration” of e[] (see “Integral Details” slide) </a:t>
+            </a:r>
+          </a:p>
+          <a:p>
+            <a:r>
+              <a:rPr lang="en-US" sz="2000" dirty="0"/>
+              <a:t>slope</a:t>
+            </a:r>
+          </a:p>
+          <a:p>
+            <a:pPr lvl="1"/>
+            <a:r>
+              <a:rPr lang="en-US" sz="1600" dirty="0"/>
+              <a:t>“</a:t>
+            </a:r>
+            <a:r>
+              <a:rPr lang="en-US" sz="1800" dirty="0"/>
+              <a:t>Derivative” of e[] (see “Derivative Details” slide)</a:t>
+            </a:r>
+          </a:p>
+          <a:p>
+            <a:r>
+              <a:rPr lang="en-US" sz="2000" dirty="0" err="1"/>
+              <a:t>dutyCycle</a:t>
+            </a:r>
+            <a:endParaRPr lang="en-US" sz="2000" dirty="0"/>
+          </a:p>
+          <a:p>
+            <a:pPr lvl="1"/>
+            <a:r>
+              <a:rPr lang="en-US" sz="1800" dirty="0"/>
+              <a:t>Final output: gives the Duty Cycle of the PWM signal that needs to be generated (valued from 0 to 100)</a:t>
+            </a:r>
+          </a:p>
+          <a:p>
+            <a:pPr lvl="1"/>
+            <a:endParaRPr lang="en-US" sz="1800" dirty="0"/>
+          </a:p>
+        </p:txBody>
+      </p:sp>
+      <p:sp>
+        <p:nvSpPr>
+          <p:cNvPr id="5" name="Rectangle 4">
+            <a:extLst>
+              <a:ext uri="{FF2B5EF4-FFF2-40B4-BE49-F238E27FC236}">
+                <a16:creationId xmlns:a16="http://schemas.microsoft.com/office/drawing/2014/main" id="{265F00E9-D735-AF04-2D61-94F65B36D51C}"/>
+              </a:ext>
+            </a:extLst>
+          </p:cNvPr>
+          <p:cNvSpPr/>
+          <p:nvPr/>
+        </p:nvSpPr>
+        <p:spPr>
+          <a:xfrm>
+            <a:off x="10796016" y="822166"/>
+            <a:ext cx="557784" cy="411480"/>
+          </a:xfrm>
+          <a:prstGeom prst="rect">
+            <a:avLst/>
+          </a:prstGeom>
+        </p:spPr>
+        <p:style>
+          <a:lnRef idx="2">
+            <a:schemeClr val="accent1">
+              <a:shade val="15000"/>
+            </a:schemeClr>
+          </a:lnRef>
+          <a:fillRef idx="1">
+            <a:schemeClr val="accent1"/>
+          </a:fillRef>
+          <a:effectRef idx="0">
+            <a:schemeClr val="accent1"/>
+          </a:effectRef>
+          <a:fontRef idx="minor">
+            <a:schemeClr val="lt1"/>
+          </a:fontRef>
+        </p:style>
+        <p:txBody>
+          <a:bodyPr rtlCol="0" anchor="ctr"/>
+          <a:lstStyle/>
+          <a:p>
+            <a:pPr algn="ctr"/>
+            <a:r>
+              <a:rPr lang="en-US" dirty="0"/>
+              <a:t>PID</a:t>
+            </a:r>
+          </a:p>
+        </p:txBody>
+      </p:sp>
+    </p:spTree>
+    <p:extLst>
+      <p:ext uri="{BB962C8B-B14F-4D97-AF65-F5344CB8AC3E}">
+        <p14:creationId xmlns:p14="http://schemas.microsoft.com/office/powerpoint/2010/main" val="4271143265"/>
+      </p:ext>
+    </p:extLst>
+  </p:cSld>
+  <p:clrMapOvr>
+    <a:masterClrMapping/>
+  </p:clrMapOvr>
+</p:sld>
+</file>
+
+<file path=ppt/slides/slide4.xml><?xml version="1.0" encoding="utf-8"?>
+<p:sld xmlns:a="http://schemas.openxmlformats.org/drawingml/2006/main" xmlns:r="http://schemas.openxmlformats.org/officeDocument/2006/relationships" xmlns:p="http://schemas.openxmlformats.org/presentationml/2006/main">
+  <p:cSld>
+    <p:spTree>
+      <p:nvGrpSpPr>
+        <p:cNvPr id="1" name=""/>
+        <p:cNvGrpSpPr/>
+        <p:nvPr/>
+      </p:nvGrpSpPr>
+      <p:grpSpPr>
+        <a:xfrm>
+          <a:off x="0" y="0"/>
+          <a:ext cx="0" cy="0"/>
+          <a:chOff x="0" y="0"/>
+          <a:chExt cx="0" cy="0"/>
+        </a:xfrm>
+      </p:grpSpPr>
+      <p:sp>
+        <p:nvSpPr>
+          <p:cNvPr id="2" name="Title 1">
+            <a:extLst>
+              <a:ext uri="{FF2B5EF4-FFF2-40B4-BE49-F238E27FC236}">
+                <a16:creationId xmlns:a16="http://schemas.microsoft.com/office/drawing/2014/main" id="{EC24E606-9007-D956-678B-3A4FAE5CBD8C}"/>
+              </a:ext>
+            </a:extLst>
+          </p:cNvPr>
+          <p:cNvSpPr>
+            <a:spLocks noGrp="1"/>
+          </p:cNvSpPr>
+          <p:nvPr>
+            <p:ph type="title"/>
+          </p:nvPr>
+        </p:nvSpPr>
+        <p:spPr/>
+        <p:txBody>
+          <a:bodyPr/>
+          <a:lstStyle/>
+          <a:p>
+            <a:r>
+              <a:rPr lang="en-US" dirty="0"/>
+              <a:t>Duty Cycle Calculation</a:t>
+            </a:r>
+          </a:p>
+        </p:txBody>
+      </p:sp>
+      <p:sp>
+        <p:nvSpPr>
+          <p:cNvPr id="3" name="Content Placeholder 2">
+            <a:extLst>
+              <a:ext uri="{FF2B5EF4-FFF2-40B4-BE49-F238E27FC236}">
+                <a16:creationId xmlns:a16="http://schemas.microsoft.com/office/drawing/2014/main" id="{6D5E60D6-9EBD-1A61-B20C-576B5403A52F}"/>
+              </a:ext>
+            </a:extLst>
+          </p:cNvPr>
+          <p:cNvSpPr>
+            <a:spLocks noGrp="1"/>
+          </p:cNvSpPr>
+          <p:nvPr>
+            <p:ph idx="1"/>
+          </p:nvPr>
+        </p:nvSpPr>
+        <p:spPr/>
+        <p:txBody>
+          <a:bodyPr/>
+          <a:lstStyle/>
+          <a:p>
+            <a:pPr marL="0" indent="0" algn="ctr">
+              <a:buNone/>
+            </a:pPr>
+            <a:r>
+              <a:rPr lang="en-US" dirty="0" err="1"/>
+              <a:t>dutyCycle</a:t>
+            </a:r>
+            <a:r>
+              <a:rPr lang="en-US" dirty="0"/>
+              <a:t> = P*e[last] + I*sum – D*slope</a:t>
+            </a:r>
+          </a:p>
+          <a:p>
+            <a:pPr marL="0" indent="0" algn="ctr">
+              <a:buNone/>
+            </a:pPr>
+            <a:endParaRPr lang="en-US" dirty="0"/>
+          </a:p>
+          <a:p>
+            <a:pPr marL="0" indent="0">
+              <a:buNone/>
+            </a:pPr>
+            <a:r>
+              <a:rPr lang="en-US" dirty="0"/>
+              <a:t>if(</a:t>
+            </a:r>
+            <a:r>
+              <a:rPr lang="en-US" dirty="0" err="1"/>
+              <a:t>dutyCycle</a:t>
+            </a:r>
+            <a:r>
+              <a:rPr lang="en-US" dirty="0"/>
+              <a:t> &gt; 100) {</a:t>
+            </a:r>
+          </a:p>
+          <a:p>
+            <a:pPr marL="0" indent="0">
+              <a:buNone/>
+            </a:pPr>
+            <a:r>
+              <a:rPr lang="en-US" dirty="0"/>
+              <a:t>	</a:t>
+            </a:r>
+            <a:r>
+              <a:rPr lang="en-US" dirty="0" err="1"/>
+              <a:t>dutyCycle</a:t>
+            </a:r>
+            <a:r>
+              <a:rPr lang="en-US" dirty="0"/>
+              <a:t> = 100;</a:t>
+            </a:r>
+          </a:p>
+          <a:p>
+            <a:pPr marL="0" indent="0">
+              <a:buNone/>
+            </a:pPr>
+            <a:r>
+              <a:rPr lang="en-US" dirty="0"/>
+              <a:t>}</a:t>
+            </a:r>
+          </a:p>
+        </p:txBody>
+      </p:sp>
+      <p:sp>
+        <p:nvSpPr>
+          <p:cNvPr id="4" name="Rectangle 3">
+            <a:extLst>
+              <a:ext uri="{FF2B5EF4-FFF2-40B4-BE49-F238E27FC236}">
+                <a16:creationId xmlns:a16="http://schemas.microsoft.com/office/drawing/2014/main" id="{B5F9794C-4384-8E46-2553-7DAD372C7E89}"/>
+              </a:ext>
+            </a:extLst>
+          </p:cNvPr>
+          <p:cNvSpPr/>
+          <p:nvPr/>
+        </p:nvSpPr>
+        <p:spPr>
+          <a:xfrm>
+            <a:off x="10796016" y="822166"/>
+            <a:ext cx="557784" cy="411480"/>
+          </a:xfrm>
+          <a:prstGeom prst="rect">
+            <a:avLst/>
+          </a:prstGeom>
+        </p:spPr>
+        <p:style>
+          <a:lnRef idx="2">
+            <a:schemeClr val="accent1">
+              <a:shade val="15000"/>
+            </a:schemeClr>
+          </a:lnRef>
+          <a:fillRef idx="1">
+            <a:schemeClr val="accent1"/>
+          </a:fillRef>
+          <a:effectRef idx="0">
+            <a:schemeClr val="accent1"/>
+          </a:effectRef>
+          <a:fontRef idx="minor">
+            <a:schemeClr val="lt1"/>
+          </a:fontRef>
+        </p:style>
+        <p:txBody>
+          <a:bodyPr rtlCol="0" anchor="ctr"/>
+          <a:lstStyle/>
+          <a:p>
+            <a:pPr algn="ctr"/>
+            <a:r>
+              <a:rPr lang="en-US" dirty="0"/>
+              <a:t>PID</a:t>
+            </a:r>
+          </a:p>
+        </p:txBody>
+      </p:sp>
+    </p:spTree>
+    <p:extLst>
+      <p:ext uri="{BB962C8B-B14F-4D97-AF65-F5344CB8AC3E}">
+        <p14:creationId xmlns:p14="http://schemas.microsoft.com/office/powerpoint/2010/main" val="3399213682"/>
+      </p:ext>
+    </p:extLst>
+  </p:cSld>
+  <p:clrMapOvr>
+    <a:masterClrMapping/>
+  </p:clrMapOvr>
+</p:sld>
+</file>
+
+<file path=ppt/slides/slide5.xml><?xml version="1.0" encoding="utf-8"?>
+<p:sld xmlns:a="http://schemas.openxmlformats.org/drawingml/2006/main" xmlns:r="http://schemas.openxmlformats.org/officeDocument/2006/relationships" xmlns:p="http://schemas.openxmlformats.org/presentationml/2006/main">
+  <p:cSld>
+    <p:spTree>
+      <p:nvGrpSpPr>
+        <p:cNvPr id="1" name=""/>
+        <p:cNvGrpSpPr/>
+        <p:nvPr/>
+      </p:nvGrpSpPr>
+      <p:grpSpPr>
+        <a:xfrm>
+          <a:off x="0" y="0"/>
+          <a:ext cx="0" cy="0"/>
+          <a:chOff x="0" y="0"/>
+          <a:chExt cx="0" cy="0"/>
+        </a:xfrm>
+      </p:grpSpPr>
+      <p:sp>
+        <p:nvSpPr>
+          <p:cNvPr id="2" name="Title 1">
+            <a:extLst>
+              <a:ext uri="{FF2B5EF4-FFF2-40B4-BE49-F238E27FC236}">
+                <a16:creationId xmlns:a16="http://schemas.microsoft.com/office/drawing/2014/main" id="{EC24E606-9007-D956-678B-3A4FAE5CBD8C}"/>
+              </a:ext>
+            </a:extLst>
+          </p:cNvPr>
+          <p:cNvSpPr>
+            <a:spLocks noGrp="1"/>
+          </p:cNvSpPr>
+          <p:nvPr>
+            <p:ph type="title"/>
+          </p:nvPr>
+        </p:nvSpPr>
+        <p:spPr/>
+        <p:txBody>
+          <a:bodyPr/>
+          <a:lstStyle/>
+          <a:p>
+            <a:r>
+              <a:rPr lang="en-US" dirty="0"/>
+              <a:t>Integral Details</a:t>
+            </a:r>
+          </a:p>
+        </p:txBody>
+      </p:sp>
+      <p:sp>
+        <p:nvSpPr>
+          <p:cNvPr id="3" name="Content Placeholder 2">
+            <a:extLst>
+              <a:ext uri="{FF2B5EF4-FFF2-40B4-BE49-F238E27FC236}">
+                <a16:creationId xmlns:a16="http://schemas.microsoft.com/office/drawing/2014/main" id="{6D5E60D6-9EBD-1A61-B20C-576B5403A52F}"/>
+              </a:ext>
+            </a:extLst>
+          </p:cNvPr>
+          <p:cNvSpPr>
+            <a:spLocks noGrp="1"/>
+          </p:cNvSpPr>
+          <p:nvPr>
+            <p:ph idx="1"/>
+          </p:nvPr>
+        </p:nvSpPr>
+        <p:spPr/>
+        <p:txBody>
+          <a:bodyPr/>
+          <a:lstStyle/>
+          <a:p>
+            <a:r>
+              <a:rPr lang="en-US" dirty="0"/>
+              <a:t>sum will keep track of the integration so far.</a:t>
+            </a:r>
+          </a:p>
+          <a:p>
+            <a:r>
+              <a:rPr lang="en-US" dirty="0"/>
+              <a:t>for each new sample:</a:t>
+            </a:r>
+          </a:p>
+          <a:p>
+            <a:pPr lvl="1"/>
+            <a:r>
+              <a:rPr lang="en-US" dirty="0"/>
+              <a:t>sum += e[last] //assuming the most recent element is in the last position</a:t>
+            </a:r>
+          </a:p>
+          <a:p>
+            <a:r>
+              <a:rPr lang="en-US" dirty="0"/>
+              <a:t>Additional operations needed to correct overshoot (see “Overshoot Correction”)</a:t>
+            </a:r>
+          </a:p>
+        </p:txBody>
+      </p:sp>
+      <p:sp>
+        <p:nvSpPr>
+          <p:cNvPr id="4" name="Rectangle 3">
+            <a:extLst>
+              <a:ext uri="{FF2B5EF4-FFF2-40B4-BE49-F238E27FC236}">
+                <a16:creationId xmlns:a16="http://schemas.microsoft.com/office/drawing/2014/main" id="{D73BAE20-D9A2-DD2C-9C19-F846D4D58876}"/>
+              </a:ext>
+            </a:extLst>
+          </p:cNvPr>
+          <p:cNvSpPr/>
+          <p:nvPr/>
+        </p:nvSpPr>
+        <p:spPr>
+          <a:xfrm>
+            <a:off x="10796016" y="822166"/>
+            <a:ext cx="557784" cy="411480"/>
+          </a:xfrm>
+          <a:prstGeom prst="rect">
+            <a:avLst/>
+          </a:prstGeom>
+        </p:spPr>
+        <p:style>
+          <a:lnRef idx="2">
+            <a:schemeClr val="accent1">
+              <a:shade val="15000"/>
+            </a:schemeClr>
+          </a:lnRef>
+          <a:fillRef idx="1">
+            <a:schemeClr val="accent1"/>
+          </a:fillRef>
+          <a:effectRef idx="0">
+            <a:schemeClr val="accent1"/>
+          </a:effectRef>
+          <a:fontRef idx="minor">
+            <a:schemeClr val="lt1"/>
+          </a:fontRef>
+        </p:style>
+        <p:txBody>
+          <a:bodyPr rtlCol="0" anchor="ctr"/>
+          <a:lstStyle/>
+          <a:p>
+            <a:pPr algn="ctr"/>
+            <a:r>
+              <a:rPr lang="en-US" dirty="0"/>
+              <a:t>PID</a:t>
+            </a:r>
+          </a:p>
+        </p:txBody>
+      </p:sp>
+    </p:spTree>
+    <p:extLst>
+      <p:ext uri="{BB962C8B-B14F-4D97-AF65-F5344CB8AC3E}">
+        <p14:creationId xmlns:p14="http://schemas.microsoft.com/office/powerpoint/2010/main" val="3688677983"/>
+      </p:ext>
+    </p:extLst>
+  </p:cSld>
+  <p:clrMapOvr>
+    <a:masterClrMapping/>
+  </p:clrMapOvr>
+</p:sld>
+</file>
+
+<file path=ppt/slides/slide6.xml><?xml version="1.0" encoding="utf-8"?>
+<p:sld xmlns:a="http://schemas.openxmlformats.org/drawingml/2006/main" xmlns:r="http://schemas.openxmlformats.org/officeDocument/2006/relationships" xmlns:p="http://schemas.openxmlformats.org/presentationml/2006/main">
+  <p:cSld>
+    <p:spTree>
+      <p:nvGrpSpPr>
+        <p:cNvPr id="1" name=""/>
+        <p:cNvGrpSpPr/>
+        <p:nvPr/>
+      </p:nvGrpSpPr>
+      <p:grpSpPr>
+        <a:xfrm>
+          <a:off x="0" y="0"/>
+          <a:ext cx="0" cy="0"/>
+          <a:chOff x="0" y="0"/>
+          <a:chExt cx="0" cy="0"/>
+        </a:xfrm>
+      </p:grpSpPr>
+      <p:sp>
+        <p:nvSpPr>
+          <p:cNvPr id="2" name="Title 1">
+            <a:extLst>
+              <a:ext uri="{FF2B5EF4-FFF2-40B4-BE49-F238E27FC236}">
+                <a16:creationId xmlns:a16="http://schemas.microsoft.com/office/drawing/2014/main" id="{EC24E606-9007-D956-678B-3A4FAE5CBD8C}"/>
+              </a:ext>
+            </a:extLst>
+          </p:cNvPr>
+          <p:cNvSpPr>
+            <a:spLocks noGrp="1"/>
+          </p:cNvSpPr>
+          <p:nvPr>
+            <p:ph type="title"/>
+          </p:nvPr>
+        </p:nvSpPr>
+        <p:spPr/>
+        <p:txBody>
+          <a:bodyPr/>
+          <a:lstStyle/>
+          <a:p>
+            <a:r>
+              <a:rPr lang="en-US" dirty="0"/>
+              <a:t>Derivative Details</a:t>
+            </a:r>
+          </a:p>
+        </p:txBody>
+      </p:sp>
+      <p:sp>
+        <p:nvSpPr>
+          <p:cNvPr id="3" name="Content Placeholder 2">
+            <a:extLst>
+              <a:ext uri="{FF2B5EF4-FFF2-40B4-BE49-F238E27FC236}">
+                <a16:creationId xmlns:a16="http://schemas.microsoft.com/office/drawing/2014/main" id="{6D5E60D6-9EBD-1A61-B20C-576B5403A52F}"/>
+              </a:ext>
+            </a:extLst>
+          </p:cNvPr>
+          <p:cNvSpPr>
+            <a:spLocks noGrp="1"/>
+          </p:cNvSpPr>
+          <p:nvPr>
+            <p:ph idx="1"/>
+          </p:nvPr>
+        </p:nvSpPr>
+        <p:spPr/>
+        <p:txBody>
+          <a:bodyPr>
+            <a:normAutofit lnSpcReduction="10000"/>
+          </a:bodyPr>
+          <a:lstStyle/>
+          <a:p>
+            <a:r>
+              <a:rPr lang="en-US" dirty="0"/>
+              <a:t>2 Options to solve for slope (2 is probably best)</a:t>
+            </a:r>
+          </a:p>
+          <a:p>
+            <a:pPr marL="514350" indent="-514350">
+              <a:buFont typeface="+mj-lt"/>
+              <a:buAutoNum type="arabicPeriod"/>
+            </a:pPr>
+            <a:r>
+              <a:rPr lang="en-US" dirty="0"/>
+              <a:t>(most recent e) – (2</a:t>
+            </a:r>
+            <a:r>
+              <a:rPr lang="en-US" baseline="30000" dirty="0"/>
+              <a:t>nd</a:t>
+            </a:r>
+            <a:r>
+              <a:rPr lang="en-US" dirty="0"/>
+              <a:t> most recent e)</a:t>
+            </a:r>
+          </a:p>
+          <a:p>
+            <a:pPr lvl="1"/>
+            <a:r>
+              <a:rPr lang="en-US" dirty="0"/>
+              <a:t>Pros:</a:t>
+            </a:r>
+          </a:p>
+          <a:p>
+            <a:pPr lvl="2"/>
+            <a:r>
+              <a:rPr lang="en-US" dirty="0"/>
+              <a:t>More responsive</a:t>
+            </a:r>
+          </a:p>
+          <a:p>
+            <a:pPr lvl="1"/>
+            <a:r>
+              <a:rPr lang="en-US" dirty="0"/>
+              <a:t>Cons:</a:t>
+            </a:r>
+          </a:p>
+          <a:p>
+            <a:pPr lvl="2"/>
+            <a:r>
+              <a:rPr lang="en-US" dirty="0"/>
+              <a:t>Noise can really mess stuff up, and can also be twitchy</a:t>
+            </a:r>
+          </a:p>
+          <a:p>
+            <a:pPr marL="514350" indent="-514350">
+              <a:buFont typeface="+mj-lt"/>
+              <a:buAutoNum type="arabicPeriod"/>
+            </a:pPr>
+            <a:r>
+              <a:rPr lang="en-US" dirty="0"/>
+              <a:t>(average of N most recent or e[]) – (average of the next N of e[])</a:t>
+            </a:r>
+          </a:p>
+          <a:p>
+            <a:pPr lvl="1"/>
+            <a:r>
+              <a:rPr lang="en-US" dirty="0"/>
+              <a:t>Pros:</a:t>
+            </a:r>
+          </a:p>
+          <a:p>
+            <a:pPr lvl="2"/>
+            <a:r>
+              <a:rPr lang="en-US" dirty="0"/>
+              <a:t>Resists noise effects</a:t>
+            </a:r>
+          </a:p>
+          <a:p>
+            <a:pPr lvl="1"/>
+            <a:r>
+              <a:rPr lang="en-US" dirty="0"/>
+              <a:t>Cons:</a:t>
+            </a:r>
+          </a:p>
+          <a:p>
+            <a:pPr lvl="2"/>
+            <a:r>
+              <a:rPr lang="en-US" dirty="0"/>
+              <a:t>Slower response</a:t>
+            </a:r>
+          </a:p>
+        </p:txBody>
+      </p:sp>
+      <p:sp>
+        <p:nvSpPr>
+          <p:cNvPr id="4" name="Rectangle 3">
+            <a:extLst>
+              <a:ext uri="{FF2B5EF4-FFF2-40B4-BE49-F238E27FC236}">
+                <a16:creationId xmlns:a16="http://schemas.microsoft.com/office/drawing/2014/main" id="{D93762C4-0E9A-8A85-6E79-6E66DE4A72A5}"/>
+              </a:ext>
+            </a:extLst>
+          </p:cNvPr>
+          <p:cNvSpPr/>
+          <p:nvPr/>
+        </p:nvSpPr>
+        <p:spPr>
+          <a:xfrm>
+            <a:off x="10796016" y="822166"/>
+            <a:ext cx="557784" cy="411480"/>
+          </a:xfrm>
+          <a:prstGeom prst="rect">
+            <a:avLst/>
+          </a:prstGeom>
+        </p:spPr>
+        <p:style>
+          <a:lnRef idx="2">
+            <a:schemeClr val="accent1">
+              <a:shade val="15000"/>
+            </a:schemeClr>
+          </a:lnRef>
+          <a:fillRef idx="1">
+            <a:schemeClr val="accent1"/>
+          </a:fillRef>
+          <a:effectRef idx="0">
+            <a:schemeClr val="accent1"/>
+          </a:effectRef>
+          <a:fontRef idx="minor">
+            <a:schemeClr val="lt1"/>
+          </a:fontRef>
+        </p:style>
+        <p:txBody>
+          <a:bodyPr rtlCol="0" anchor="ctr"/>
+          <a:lstStyle/>
+          <a:p>
+            <a:pPr algn="ctr"/>
+            <a:r>
+              <a:rPr lang="en-US" dirty="0"/>
+              <a:t>PID</a:t>
+            </a:r>
+          </a:p>
+        </p:txBody>
+      </p:sp>
+    </p:spTree>
+    <p:extLst>
+      <p:ext uri="{BB962C8B-B14F-4D97-AF65-F5344CB8AC3E}">
+        <p14:creationId xmlns:p14="http://schemas.microsoft.com/office/powerpoint/2010/main" val="9716602"/>
+      </p:ext>
+    </p:extLst>
+  </p:cSld>
+  <p:clrMapOvr>
+    <a:masterClrMapping/>
+  </p:clrMapOvr>
+</p:sld>
+</file>
+
+<file path=ppt/slides/slide7.xml><?xml version="1.0" encoding="utf-8"?>
+<p:sld xmlns:a="http://schemas.openxmlformats.org/drawingml/2006/main" xmlns:r="http://schemas.openxmlformats.org/officeDocument/2006/relationships" xmlns:p="http://schemas.openxmlformats.org/presentationml/2006/main">
+  <p:cSld>
+    <p:spTree>
+      <p:nvGrpSpPr>
+        <p:cNvPr id="1" name=""/>
+        <p:cNvGrpSpPr/>
+        <p:nvPr/>
+      </p:nvGrpSpPr>
+      <p:grpSpPr>
+        <a:xfrm>
+          <a:off x="0" y="0"/>
+          <a:ext cx="0" cy="0"/>
+          <a:chOff x="0" y="0"/>
+          <a:chExt cx="0" cy="0"/>
+        </a:xfrm>
+      </p:grpSpPr>
+      <p:sp>
+        <p:nvSpPr>
+          <p:cNvPr id="2" name="Title 1">
+            <a:extLst>
+              <a:ext uri="{FF2B5EF4-FFF2-40B4-BE49-F238E27FC236}">
+                <a16:creationId xmlns:a16="http://schemas.microsoft.com/office/drawing/2014/main" id="{EC24E606-9007-D956-678B-3A4FAE5CBD8C}"/>
+              </a:ext>
+            </a:extLst>
+          </p:cNvPr>
+          <p:cNvSpPr>
+            <a:spLocks noGrp="1"/>
+          </p:cNvSpPr>
+          <p:nvPr>
+            <p:ph type="title"/>
+          </p:nvPr>
+        </p:nvSpPr>
+        <p:spPr/>
+        <p:txBody>
+          <a:bodyPr/>
+          <a:lstStyle/>
+          <a:p>
+            <a:r>
+              <a:rPr lang="en-US" dirty="0"/>
+              <a:t>MORE Derivative Details</a:t>
+            </a:r>
+          </a:p>
+        </p:txBody>
+      </p:sp>
+      <mc:AlternateContent xmlns:mc="http://schemas.openxmlformats.org/markup-compatibility/2006">
+        <mc:Choice xmlns:a14="http://schemas.microsoft.com/office/drawing/2010/main" Requires="a14">
+          <p:sp>
+            <p:nvSpPr>
+              <p:cNvPr id="3" name="Content Placeholder 2">
+                <a:extLst>
+                  <a:ext uri="{FF2B5EF4-FFF2-40B4-BE49-F238E27FC236}">
+                    <a16:creationId xmlns:a16="http://schemas.microsoft.com/office/drawing/2014/main" id="{6D5E60D6-9EBD-1A61-B20C-576B5403A52F}"/>
+                  </a:ext>
+                </a:extLst>
+              </p:cNvPr>
+              <p:cNvSpPr>
+                <a:spLocks noGrp="1"/>
+              </p:cNvSpPr>
+              <p:nvPr>
+                <p:ph idx="1"/>
+              </p:nvPr>
+            </p:nvSpPr>
+            <p:spPr/>
+            <p:txBody>
+              <a:bodyPr>
+                <a:normAutofit fontScale="92500"/>
+              </a:bodyPr>
+              <a:lstStyle/>
+              <a:p>
+                <a:r>
+                  <a:rPr lang="en-US" dirty="0"/>
+                  <a:t>Suppose we do option 2 with N = 2:</a:t>
+                </a:r>
+              </a:p>
+              <a:p>
+                <a:pPr marL="0" indent="0">
+                  <a:buNone/>
+                </a:pPr>
+                <a:r>
+                  <a:rPr lang="en-US" dirty="0"/>
+                  <a:t>Old : </a:t>
+                </a:r>
+              </a:p>
+              <a:p>
+                <a:pPr marL="0" indent="0">
+                  <a:buNone/>
+                </a:pPr>
+                <a14:m>
+                  <m:oMathPara xmlns:m="http://schemas.openxmlformats.org/officeDocument/2006/math">
+                    <m:oMathParaPr>
+                      <m:jc m:val="centerGroup"/>
+                    </m:oMathParaPr>
+                    <m:oMath xmlns:m="http://schemas.openxmlformats.org/officeDocument/2006/math">
+                      <m:f>
+                        <m:fPr>
+                          <m:ctrlPr>
+                            <a:rPr lang="en-US" i="1" smtClean="0">
+                              <a:latin typeface="Cambria Math" panose="02040503050406030204" pitchFamily="18" charset="0"/>
+                            </a:rPr>
+                          </m:ctrlPr>
+                        </m:fPr>
+                        <m:num>
+                          <m:r>
+                            <a:rPr lang="en-US" b="0" i="1" smtClean="0">
+                              <a:latin typeface="Cambria Math" panose="02040503050406030204" pitchFamily="18" charset="0"/>
+                            </a:rPr>
+                            <m:t>𝑎</m:t>
+                          </m:r>
+                          <m:r>
+                            <a:rPr lang="en-US" b="0" i="1" smtClean="0">
+                              <a:latin typeface="Cambria Math" panose="02040503050406030204" pitchFamily="18" charset="0"/>
+                            </a:rPr>
+                            <m:t>+</m:t>
+                          </m:r>
+                          <m:r>
+                            <a:rPr lang="en-US" b="0" i="1" smtClean="0">
+                              <a:latin typeface="Cambria Math" panose="02040503050406030204" pitchFamily="18" charset="0"/>
+                            </a:rPr>
+                            <m:t>𝑏</m:t>
+                          </m:r>
+                        </m:num>
+                        <m:den>
+                          <m:r>
+                            <a:rPr lang="en-US" b="0" i="1" smtClean="0">
+                              <a:latin typeface="Cambria Math" panose="02040503050406030204" pitchFamily="18" charset="0"/>
+                            </a:rPr>
+                            <m:t>2</m:t>
+                          </m:r>
+                        </m:den>
+                      </m:f>
+                      <m:r>
+                        <a:rPr lang="en-US" b="0" i="1" smtClean="0">
+                          <a:latin typeface="Cambria Math" panose="02040503050406030204" pitchFamily="18" charset="0"/>
+                        </a:rPr>
+                        <m:t>−</m:t>
+                      </m:r>
+                      <m:f>
+                        <m:fPr>
+                          <m:ctrlPr>
+                            <a:rPr lang="en-US" b="0" i="1" smtClean="0">
+                              <a:latin typeface="Cambria Math" panose="02040503050406030204" pitchFamily="18" charset="0"/>
+                            </a:rPr>
+                          </m:ctrlPr>
+                        </m:fPr>
+                        <m:num>
+                          <m:r>
+                            <a:rPr lang="en-US" b="0" i="1" smtClean="0">
+                              <a:latin typeface="Cambria Math" panose="02040503050406030204" pitchFamily="18" charset="0"/>
+                            </a:rPr>
+                            <m:t>𝑐</m:t>
+                          </m:r>
+                          <m:r>
+                            <a:rPr lang="en-US" b="0" i="1" smtClean="0">
+                              <a:latin typeface="Cambria Math" panose="02040503050406030204" pitchFamily="18" charset="0"/>
+                            </a:rPr>
+                            <m:t>+</m:t>
+                          </m:r>
+                          <m:r>
+                            <a:rPr lang="en-US" b="0" i="1" smtClean="0">
+                              <a:latin typeface="Cambria Math" panose="02040503050406030204" pitchFamily="18" charset="0"/>
+                            </a:rPr>
+                            <m:t>𝑑</m:t>
+                          </m:r>
+                        </m:num>
+                        <m:den>
+                          <m:r>
+                            <a:rPr lang="en-US" b="0" i="1" smtClean="0">
+                              <a:latin typeface="Cambria Math" panose="02040503050406030204" pitchFamily="18" charset="0"/>
+                            </a:rPr>
+                            <m:t>2</m:t>
+                          </m:r>
+                        </m:den>
+                      </m:f>
+                      <m:r>
+                        <a:rPr lang="en-US" b="0" i="1" smtClean="0">
+                          <a:latin typeface="Cambria Math" panose="02040503050406030204" pitchFamily="18" charset="0"/>
+                        </a:rPr>
+                        <m:t>=</m:t>
+                      </m:r>
+                      <m:f>
+                        <m:fPr>
+                          <m:ctrlPr>
+                            <a:rPr lang="en-US" b="0" i="1" smtClean="0">
+                              <a:latin typeface="Cambria Math" panose="02040503050406030204" pitchFamily="18" charset="0"/>
+                            </a:rPr>
+                          </m:ctrlPr>
+                        </m:fPr>
+                        <m:num>
+                          <m:r>
+                            <a:rPr lang="en-US" b="0" i="1" smtClean="0">
+                              <a:latin typeface="Cambria Math" panose="02040503050406030204" pitchFamily="18" charset="0"/>
+                            </a:rPr>
+                            <m:t>𝑎</m:t>
+                          </m:r>
+                          <m:r>
+                            <a:rPr lang="en-US" b="0" i="1" smtClean="0">
+                              <a:latin typeface="Cambria Math" panose="02040503050406030204" pitchFamily="18" charset="0"/>
+                            </a:rPr>
+                            <m:t>+</m:t>
+                          </m:r>
+                          <m:r>
+                            <a:rPr lang="en-US" b="0" i="1" smtClean="0">
+                              <a:latin typeface="Cambria Math" panose="02040503050406030204" pitchFamily="18" charset="0"/>
+                            </a:rPr>
+                            <m:t>𝑏</m:t>
+                          </m:r>
+                          <m:r>
+                            <a:rPr lang="en-US" b="0" i="1" smtClean="0">
+                              <a:latin typeface="Cambria Math" panose="02040503050406030204" pitchFamily="18" charset="0"/>
+                            </a:rPr>
+                            <m:t>−</m:t>
+                          </m:r>
+                          <m:r>
+                            <a:rPr lang="en-US" b="0" i="1" smtClean="0">
+                              <a:latin typeface="Cambria Math" panose="02040503050406030204" pitchFamily="18" charset="0"/>
+                            </a:rPr>
+                            <m:t>𝑐</m:t>
+                          </m:r>
+                          <m:r>
+                            <a:rPr lang="en-US" b="0" i="1" smtClean="0">
+                              <a:latin typeface="Cambria Math" panose="02040503050406030204" pitchFamily="18" charset="0"/>
+                            </a:rPr>
+                            <m:t>−</m:t>
+                          </m:r>
+                          <m:r>
+                            <a:rPr lang="en-US" b="0" i="1" smtClean="0">
+                              <a:latin typeface="Cambria Math" panose="02040503050406030204" pitchFamily="18" charset="0"/>
+                            </a:rPr>
+                            <m:t>𝑑</m:t>
+                          </m:r>
+                        </m:num>
+                        <m:den>
+                          <m:r>
+                            <a:rPr lang="en-US" b="0" i="1" smtClean="0">
+                              <a:latin typeface="Cambria Math" panose="02040503050406030204" pitchFamily="18" charset="0"/>
+                            </a:rPr>
+                            <m:t>2</m:t>
+                          </m:r>
+                        </m:den>
+                      </m:f>
+                    </m:oMath>
+                  </m:oMathPara>
+                </a14:m>
+                <a:endParaRPr lang="en-US" dirty="0"/>
+              </a:p>
+              <a:p>
+                <a:pPr marL="0" indent="0">
+                  <a:buNone/>
+                </a:pPr>
+                <a:r>
+                  <a:rPr lang="en-US" dirty="0"/>
+                  <a:t>Now, we shift in the new error, n:</a:t>
+                </a:r>
+              </a:p>
+              <a:p>
+                <a:pPr marL="0" indent="0">
+                  <a:buNone/>
+                </a:pPr>
+                <a14:m>
+                  <m:oMathPara xmlns:m="http://schemas.openxmlformats.org/officeDocument/2006/math">
+                    <m:oMathParaPr>
+                      <m:jc m:val="centerGroup"/>
+                    </m:oMathParaPr>
+                    <m:oMath xmlns:m="http://schemas.openxmlformats.org/officeDocument/2006/math">
+                      <m:f>
+                        <m:fPr>
+                          <m:ctrlPr>
+                            <a:rPr lang="en-US" b="0" i="1" smtClean="0">
+                              <a:latin typeface="Cambria Math" panose="02040503050406030204" pitchFamily="18" charset="0"/>
+                            </a:rPr>
+                          </m:ctrlPr>
+                        </m:fPr>
+                        <m:num>
+                          <m:r>
+                            <a:rPr lang="en-US" b="0" i="1" smtClean="0">
+                              <a:latin typeface="Cambria Math" panose="02040503050406030204" pitchFamily="18" charset="0"/>
+                            </a:rPr>
+                            <m:t>𝑛</m:t>
+                          </m:r>
+                          <m:r>
+                            <a:rPr lang="en-US" b="0" i="1" smtClean="0">
+                              <a:latin typeface="Cambria Math" panose="02040503050406030204" pitchFamily="18" charset="0"/>
+                            </a:rPr>
+                            <m:t>+</m:t>
+                          </m:r>
+                          <m:r>
+                            <a:rPr lang="en-US" b="0" i="1" smtClean="0">
+                              <a:latin typeface="Cambria Math" panose="02040503050406030204" pitchFamily="18" charset="0"/>
+                            </a:rPr>
+                            <m:t>𝑎</m:t>
+                          </m:r>
+                          <m:r>
+                            <a:rPr lang="en-US" b="0" i="1" smtClean="0">
+                              <a:latin typeface="Cambria Math" panose="02040503050406030204" pitchFamily="18" charset="0"/>
+                            </a:rPr>
+                            <m:t>−</m:t>
+                          </m:r>
+                          <m:r>
+                            <a:rPr lang="en-US" b="0" i="1" smtClean="0">
+                              <a:latin typeface="Cambria Math" panose="02040503050406030204" pitchFamily="18" charset="0"/>
+                            </a:rPr>
+                            <m:t>𝑏</m:t>
+                          </m:r>
+                          <m:r>
+                            <a:rPr lang="en-US" b="0" i="1" smtClean="0">
+                              <a:latin typeface="Cambria Math" panose="02040503050406030204" pitchFamily="18" charset="0"/>
+                            </a:rPr>
+                            <m:t>−</m:t>
+                          </m:r>
+                          <m:r>
+                            <a:rPr lang="en-US" b="0" i="1" smtClean="0">
+                              <a:latin typeface="Cambria Math" panose="02040503050406030204" pitchFamily="18" charset="0"/>
+                            </a:rPr>
+                            <m:t>𝑐</m:t>
+                          </m:r>
+                        </m:num>
+                        <m:den>
+                          <m:r>
+                            <a:rPr lang="en-US" b="0" i="1" smtClean="0">
+                              <a:latin typeface="Cambria Math" panose="02040503050406030204" pitchFamily="18" charset="0"/>
+                            </a:rPr>
+                            <m:t>2</m:t>
+                          </m:r>
+                        </m:den>
+                      </m:f>
+                      <m:r>
+                        <a:rPr lang="en-US" b="0" i="1" smtClean="0">
+                          <a:latin typeface="Cambria Math" panose="02040503050406030204" pitchFamily="18" charset="0"/>
+                        </a:rPr>
+                        <m:t> =</m:t>
+                      </m:r>
+                      <m:f>
+                        <m:fPr>
+                          <m:ctrlPr>
+                            <a:rPr lang="en-US" b="0" i="1" smtClean="0">
+                              <a:latin typeface="Cambria Math" panose="02040503050406030204" pitchFamily="18" charset="0"/>
+                            </a:rPr>
+                          </m:ctrlPr>
+                        </m:fPr>
+                        <m:num>
+                          <m:r>
+                            <a:rPr lang="en-US" b="0" i="1" smtClean="0">
+                              <a:latin typeface="Cambria Math" panose="02040503050406030204" pitchFamily="18" charset="0"/>
+                            </a:rPr>
+                            <m:t>𝑛</m:t>
+                          </m:r>
+                          <m:r>
+                            <a:rPr lang="en-US" b="0" i="1" smtClean="0">
+                              <a:latin typeface="Cambria Math" panose="02040503050406030204" pitchFamily="18" charset="0"/>
+                            </a:rPr>
+                            <m:t>+</m:t>
+                          </m:r>
+                          <m:r>
+                            <a:rPr lang="en-US" b="0" i="1" smtClean="0">
+                              <a:latin typeface="Cambria Math" panose="02040503050406030204" pitchFamily="18" charset="0"/>
+                            </a:rPr>
+                            <m:t>𝑎</m:t>
+                          </m:r>
+                          <m:r>
+                            <a:rPr lang="en-US" b="0" i="1" smtClean="0">
+                              <a:latin typeface="Cambria Math" panose="02040503050406030204" pitchFamily="18" charset="0"/>
+                            </a:rPr>
+                            <m:t>+</m:t>
+                          </m:r>
+                          <m:d>
+                            <m:dPr>
+                              <m:ctrlPr>
+                                <a:rPr lang="en-US" b="0" i="1" smtClean="0">
+                                  <a:latin typeface="Cambria Math" panose="02040503050406030204" pitchFamily="18" charset="0"/>
+                                </a:rPr>
+                              </m:ctrlPr>
+                            </m:dPr>
+                            <m:e>
+                              <m:r>
+                                <a:rPr lang="en-US" b="0" i="1" smtClean="0">
+                                  <a:latin typeface="Cambria Math" panose="02040503050406030204" pitchFamily="18" charset="0"/>
+                                </a:rPr>
+                                <m:t>𝑏</m:t>
+                              </m:r>
+                              <m:r>
+                                <a:rPr lang="en-US" b="0" i="1" smtClean="0">
+                                  <a:latin typeface="Cambria Math" panose="02040503050406030204" pitchFamily="18" charset="0"/>
+                                </a:rPr>
+                                <m:t>−2</m:t>
+                              </m:r>
+                              <m:r>
+                                <a:rPr lang="en-US" b="0" i="1" smtClean="0">
+                                  <a:latin typeface="Cambria Math" panose="02040503050406030204" pitchFamily="18" charset="0"/>
+                                </a:rPr>
+                                <m:t>𝑏</m:t>
+                              </m:r>
+                            </m:e>
+                          </m:d>
+                          <m:r>
+                            <a:rPr lang="en-US" b="0" i="1" smtClean="0">
+                              <a:latin typeface="Cambria Math" panose="02040503050406030204" pitchFamily="18" charset="0"/>
+                            </a:rPr>
+                            <m:t>−</m:t>
+                          </m:r>
+                          <m:r>
+                            <a:rPr lang="en-US" b="0" i="1" smtClean="0">
+                              <a:latin typeface="Cambria Math" panose="02040503050406030204" pitchFamily="18" charset="0"/>
+                            </a:rPr>
+                            <m:t>𝑐</m:t>
+                          </m:r>
+                          <m:r>
+                            <a:rPr lang="en-US" b="0" i="1" smtClean="0">
+                              <a:latin typeface="Cambria Math" panose="02040503050406030204" pitchFamily="18" charset="0"/>
+                            </a:rPr>
+                            <m:t>+(</m:t>
+                          </m:r>
+                          <m:r>
+                            <a:rPr lang="en-US" b="0" i="1" smtClean="0">
+                              <a:latin typeface="Cambria Math" panose="02040503050406030204" pitchFamily="18" charset="0"/>
+                            </a:rPr>
+                            <m:t>𝑑</m:t>
+                          </m:r>
+                          <m:r>
+                            <a:rPr lang="en-US" b="0" i="1" smtClean="0">
+                              <a:latin typeface="Cambria Math" panose="02040503050406030204" pitchFamily="18" charset="0"/>
+                            </a:rPr>
+                            <m:t>−</m:t>
+                          </m:r>
+                          <m:r>
+                            <a:rPr lang="en-US" b="0" i="1" smtClean="0">
+                              <a:latin typeface="Cambria Math" panose="02040503050406030204" pitchFamily="18" charset="0"/>
+                            </a:rPr>
+                            <m:t>𝑑</m:t>
+                          </m:r>
+                          <m:r>
+                            <a:rPr lang="en-US" b="0" i="1" smtClean="0">
+                              <a:latin typeface="Cambria Math" panose="02040503050406030204" pitchFamily="18" charset="0"/>
+                            </a:rPr>
+                            <m:t>)</m:t>
+                          </m:r>
+                        </m:num>
+                        <m:den>
+                          <m:r>
+                            <a:rPr lang="en-US" b="0" i="1" smtClean="0">
+                              <a:latin typeface="Cambria Math" panose="02040503050406030204" pitchFamily="18" charset="0"/>
+                            </a:rPr>
+                            <m:t>2</m:t>
+                          </m:r>
+                        </m:den>
+                      </m:f>
+                      <m:r>
+                        <a:rPr lang="en-US" b="0" i="1" smtClean="0">
+                          <a:latin typeface="Cambria Math" panose="02040503050406030204" pitchFamily="18" charset="0"/>
+                        </a:rPr>
+                        <m:t>=</m:t>
+                      </m:r>
+                      <m:f>
+                        <m:fPr>
+                          <m:ctrlPr>
+                            <a:rPr lang="en-US" b="0" i="1" smtClean="0">
+                              <a:latin typeface="Cambria Math" panose="02040503050406030204" pitchFamily="18" charset="0"/>
+                            </a:rPr>
+                          </m:ctrlPr>
+                        </m:fPr>
+                        <m:num>
+                          <m:r>
+                            <a:rPr lang="en-US" b="0" i="1" smtClean="0">
+                              <a:latin typeface="Cambria Math" panose="02040503050406030204" pitchFamily="18" charset="0"/>
+                            </a:rPr>
+                            <m:t>𝑛</m:t>
+                          </m:r>
+                          <m:r>
+                            <a:rPr lang="en-US" b="0" i="1" smtClean="0">
+                              <a:latin typeface="Cambria Math" panose="02040503050406030204" pitchFamily="18" charset="0"/>
+                            </a:rPr>
+                            <m:t>+</m:t>
+                          </m:r>
+                          <m:r>
+                            <a:rPr lang="en-US" b="0" i="1" smtClean="0">
+                              <a:latin typeface="Cambria Math" panose="02040503050406030204" pitchFamily="18" charset="0"/>
+                            </a:rPr>
+                            <m:t>𝑑</m:t>
+                          </m:r>
+                          <m:r>
+                            <a:rPr lang="en-US" b="0" i="1" smtClean="0">
+                              <a:latin typeface="Cambria Math" panose="02040503050406030204" pitchFamily="18" charset="0"/>
+                            </a:rPr>
+                            <m:t>−2</m:t>
+                          </m:r>
+                          <m:r>
+                            <a:rPr lang="en-US" b="0" i="1" smtClean="0">
+                              <a:latin typeface="Cambria Math" panose="02040503050406030204" pitchFamily="18" charset="0"/>
+                            </a:rPr>
+                            <m:t>𝑏</m:t>
+                          </m:r>
+                        </m:num>
+                        <m:den>
+                          <m:r>
+                            <a:rPr lang="en-US" b="0" i="1" smtClean="0">
+                              <a:latin typeface="Cambria Math" panose="02040503050406030204" pitchFamily="18" charset="0"/>
+                            </a:rPr>
+                            <m:t>2</m:t>
+                          </m:r>
+                        </m:den>
+                      </m:f>
+                      <m:r>
+                        <a:rPr lang="en-US" b="0" i="1" smtClean="0">
+                          <a:latin typeface="Cambria Math" panose="02040503050406030204" pitchFamily="18" charset="0"/>
+                        </a:rPr>
+                        <m:t>+</m:t>
+                      </m:r>
+                      <m:f>
+                        <m:fPr>
+                          <m:ctrlPr>
+                            <a:rPr lang="en-US" b="0" i="1" smtClean="0">
+                              <a:latin typeface="Cambria Math" panose="02040503050406030204" pitchFamily="18" charset="0"/>
+                            </a:rPr>
+                          </m:ctrlPr>
+                        </m:fPr>
+                        <m:num>
+                          <m:r>
+                            <a:rPr lang="en-US" b="0" i="1" smtClean="0">
+                              <a:latin typeface="Cambria Math" panose="02040503050406030204" pitchFamily="18" charset="0"/>
+                            </a:rPr>
+                            <m:t>𝑎</m:t>
+                          </m:r>
+                          <m:r>
+                            <a:rPr lang="en-US" b="0" i="1" smtClean="0">
+                              <a:latin typeface="Cambria Math" panose="02040503050406030204" pitchFamily="18" charset="0"/>
+                            </a:rPr>
+                            <m:t>+</m:t>
+                          </m:r>
+                          <m:r>
+                            <a:rPr lang="en-US" b="0" i="1" smtClean="0">
+                              <a:latin typeface="Cambria Math" panose="02040503050406030204" pitchFamily="18" charset="0"/>
+                            </a:rPr>
+                            <m:t>𝑏</m:t>
+                          </m:r>
+                          <m:r>
+                            <a:rPr lang="en-US" b="0" i="1" smtClean="0">
+                              <a:latin typeface="Cambria Math" panose="02040503050406030204" pitchFamily="18" charset="0"/>
+                            </a:rPr>
+                            <m:t>−</m:t>
+                          </m:r>
+                          <m:r>
+                            <a:rPr lang="en-US" b="0" i="1" smtClean="0">
+                              <a:latin typeface="Cambria Math" panose="02040503050406030204" pitchFamily="18" charset="0"/>
+                            </a:rPr>
+                            <m:t>𝑐</m:t>
+                          </m:r>
+                          <m:r>
+                            <a:rPr lang="en-US" b="0" i="1" smtClean="0">
+                              <a:latin typeface="Cambria Math" panose="02040503050406030204" pitchFamily="18" charset="0"/>
+                            </a:rPr>
+                            <m:t>−</m:t>
+                          </m:r>
+                          <m:r>
+                            <a:rPr lang="en-US" b="0" i="1" smtClean="0">
+                              <a:latin typeface="Cambria Math" panose="02040503050406030204" pitchFamily="18" charset="0"/>
+                            </a:rPr>
+                            <m:t>𝑑</m:t>
+                          </m:r>
+                        </m:num>
+                        <m:den>
+                          <m:r>
+                            <a:rPr lang="en-US" b="0" i="1" smtClean="0">
+                              <a:latin typeface="Cambria Math" panose="02040503050406030204" pitchFamily="18" charset="0"/>
+                            </a:rPr>
+                            <m:t>2</m:t>
+                          </m:r>
+                        </m:den>
+                      </m:f>
+                    </m:oMath>
+                  </m:oMathPara>
+                </a14:m>
+                <a:endParaRPr lang="en-US" dirty="0"/>
+              </a:p>
+              <a:p>
+                <a:pPr marL="0" indent="0">
+                  <a:buNone/>
+                </a:pPr>
+                <a:r>
+                  <a:rPr lang="en-US" dirty="0"/>
+                  <a:t>NOTE: I didn’t simplify the 2b, because the 2 coefficient will not change with the 2 in </a:t>
+                </a:r>
+                <a:r>
+                  <a:rPr lang="en-US"/>
+                  <a:t>the denominator.</a:t>
+                </a:r>
+                <a:endParaRPr lang="en-US" dirty="0"/>
+              </a:p>
+            </p:txBody>
+          </p:sp>
+        </mc:Choice>
+        <mc:Fallback>
+          <p:sp>
+            <p:nvSpPr>
+              <p:cNvPr id="3" name="Content Placeholder 2">
+                <a:extLst>
+                  <a:ext uri="{FF2B5EF4-FFF2-40B4-BE49-F238E27FC236}">
+                    <a16:creationId xmlns:a16="http://schemas.microsoft.com/office/drawing/2014/main" id="{6D5E60D6-9EBD-1A61-B20C-576B5403A52F}"/>
+                  </a:ext>
+                </a:extLst>
+              </p:cNvPr>
+              <p:cNvSpPr>
+                <a:spLocks noGrp="1" noRot="1" noChangeAspect="1" noMove="1" noResize="1" noEditPoints="1" noAdjustHandles="1" noChangeArrowheads="1" noChangeShapeType="1" noTextEdit="1"/>
+              </p:cNvSpPr>
+              <p:nvPr>
+                <p:ph idx="1"/>
+              </p:nvPr>
+            </p:nvSpPr>
+            <p:spPr>
+              <a:blipFill>
+                <a:blip r:embed="rId2"/>
+                <a:stretch>
+                  <a:fillRect l="-1043" t="-2101" b="-2381"/>
+                </a:stretch>
+              </a:blipFill>
+            </p:spPr>
+            <p:txBody>
+              <a:bodyPr/>
+              <a:lstStyle/>
+              <a:p>
+                <a:r>
+                  <a:rPr lang="en-US">
+                    <a:noFill/>
+                  </a:rPr>
+                  <a:t> </a:t>
+                </a:r>
+              </a:p>
+            </p:txBody>
+          </p:sp>
+        </mc:Fallback>
+      </mc:AlternateContent>
+      <p:sp>
+        <p:nvSpPr>
+          <p:cNvPr id="4" name="Rectangle 3">
+            <a:extLst>
+              <a:ext uri="{FF2B5EF4-FFF2-40B4-BE49-F238E27FC236}">
+                <a16:creationId xmlns:a16="http://schemas.microsoft.com/office/drawing/2014/main" id="{D93762C4-0E9A-8A85-6E79-6E66DE4A72A5}"/>
+              </a:ext>
+            </a:extLst>
+          </p:cNvPr>
+          <p:cNvSpPr/>
+          <p:nvPr/>
+        </p:nvSpPr>
+        <p:spPr>
+          <a:xfrm>
+            <a:off x="10796016" y="822166"/>
+            <a:ext cx="557784" cy="411480"/>
+          </a:xfrm>
+          <a:prstGeom prst="rect">
+            <a:avLst/>
+          </a:prstGeom>
+        </p:spPr>
+        <p:style>
+          <a:lnRef idx="2">
+            <a:schemeClr val="accent1">
+              <a:shade val="15000"/>
+            </a:schemeClr>
+          </a:lnRef>
+          <a:fillRef idx="1">
+            <a:schemeClr val="accent1"/>
+          </a:fillRef>
+          <a:effectRef idx="0">
+            <a:schemeClr val="accent1"/>
+          </a:effectRef>
+          <a:fontRef idx="minor">
+            <a:schemeClr val="lt1"/>
+          </a:fontRef>
+        </p:style>
+        <p:txBody>
+          <a:bodyPr rtlCol="0" anchor="ctr"/>
+          <a:lstStyle/>
+          <a:p>
+            <a:pPr algn="ctr"/>
+            <a:r>
+              <a:rPr lang="en-US" dirty="0"/>
+              <a:t>PID</a:t>
+            </a:r>
+          </a:p>
+        </p:txBody>
+      </p:sp>
+    </p:spTree>
+    <p:extLst>
+      <p:ext uri="{BB962C8B-B14F-4D97-AF65-F5344CB8AC3E}">
+        <p14:creationId xmlns:p14="http://schemas.microsoft.com/office/powerpoint/2010/main" val="2499484992"/>
+      </p:ext>
+    </p:extLst>
+  </p:cSld>
+  <p:clrMapOvr>
+    <a:masterClrMapping/>
+  </p:clrMapOvr>
+</p:sld>
+</file>
+
+<file path=ppt/slides/slide8.xml><?xml version="1.0" encoding="utf-8"?>
+<p:sld xmlns:a="http://schemas.openxmlformats.org/drawingml/2006/main" xmlns:r="http://schemas.openxmlformats.org/officeDocument/2006/relationships" xmlns:p="http://schemas.openxmlformats.org/presentationml/2006/main">
+  <p:cSld>
+    <p:spTree>
+      <p:nvGrpSpPr>
+        <p:cNvPr id="1" name=""/>
+        <p:cNvGrpSpPr/>
+        <p:nvPr/>
+      </p:nvGrpSpPr>
+      <p:grpSpPr>
+        <a:xfrm>
+          <a:off x="0" y="0"/>
+          <a:ext cx="0" cy="0"/>
+          <a:chOff x="0" y="0"/>
+          <a:chExt cx="0" cy="0"/>
+        </a:xfrm>
+      </p:grpSpPr>
+      <p:sp>
+        <p:nvSpPr>
+          <p:cNvPr id="2" name="Title 1">
+            <a:extLst>
+              <a:ext uri="{FF2B5EF4-FFF2-40B4-BE49-F238E27FC236}">
+                <a16:creationId xmlns:a16="http://schemas.microsoft.com/office/drawing/2014/main" id="{EC24E606-9007-D956-678B-3A4FAE5CBD8C}"/>
+              </a:ext>
+            </a:extLst>
+          </p:cNvPr>
+          <p:cNvSpPr>
+            <a:spLocks noGrp="1"/>
+          </p:cNvSpPr>
+          <p:nvPr>
+            <p:ph type="title"/>
+          </p:nvPr>
+        </p:nvSpPr>
+        <p:spPr/>
+        <p:txBody>
+          <a:bodyPr/>
+          <a:lstStyle/>
+          <a:p>
+            <a:r>
+              <a:rPr lang="en-US" dirty="0"/>
+              <a:t>Overshoot Correction</a:t>
+            </a:r>
+          </a:p>
+        </p:txBody>
+      </p:sp>
+      <p:sp>
+        <p:nvSpPr>
+          <p:cNvPr id="3" name="Content Placeholder 2">
+            <a:extLst>
+              <a:ext uri="{FF2B5EF4-FFF2-40B4-BE49-F238E27FC236}">
+                <a16:creationId xmlns:a16="http://schemas.microsoft.com/office/drawing/2014/main" id="{6D5E60D6-9EBD-1A61-B20C-576B5403A52F}"/>
+              </a:ext>
+            </a:extLst>
+          </p:cNvPr>
+          <p:cNvSpPr>
+            <a:spLocks noGrp="1"/>
+          </p:cNvSpPr>
+          <p:nvPr>
+            <p:ph idx="1"/>
+          </p:nvPr>
+        </p:nvSpPr>
+        <p:spPr/>
+        <p:txBody>
+          <a:bodyPr/>
+          <a:lstStyle/>
+          <a:p>
+            <a:r>
+              <a:rPr lang="en-US" dirty="0"/>
+              <a:t>Need to cap sum to some value.</a:t>
+            </a:r>
+          </a:p>
+          <a:p>
+            <a:r>
+              <a:rPr lang="en-US" dirty="0"/>
+              <a:t>100 would work but we could probably cap it at a smaller value.</a:t>
+            </a:r>
+          </a:p>
+        </p:txBody>
+      </p:sp>
+      <p:sp>
+        <p:nvSpPr>
+          <p:cNvPr id="4" name="Rectangle 3">
+            <a:extLst>
+              <a:ext uri="{FF2B5EF4-FFF2-40B4-BE49-F238E27FC236}">
+                <a16:creationId xmlns:a16="http://schemas.microsoft.com/office/drawing/2014/main" id="{B6299D0C-4F8A-C496-A5FA-66C0641BA50A}"/>
+              </a:ext>
+            </a:extLst>
+          </p:cNvPr>
+          <p:cNvSpPr/>
+          <p:nvPr/>
+        </p:nvSpPr>
+        <p:spPr>
+          <a:xfrm>
+            <a:off x="10796016" y="822166"/>
+            <a:ext cx="557784" cy="411480"/>
+          </a:xfrm>
+          <a:prstGeom prst="rect">
+            <a:avLst/>
+          </a:prstGeom>
+        </p:spPr>
+        <p:style>
+          <a:lnRef idx="2">
+            <a:schemeClr val="accent1">
+              <a:shade val="15000"/>
+            </a:schemeClr>
+          </a:lnRef>
+          <a:fillRef idx="1">
+            <a:schemeClr val="accent1"/>
+          </a:fillRef>
+          <a:effectRef idx="0">
+            <a:schemeClr val="accent1"/>
+          </a:effectRef>
+          <a:fontRef idx="minor">
+            <a:schemeClr val="lt1"/>
+          </a:fontRef>
+        </p:style>
+        <p:txBody>
+          <a:bodyPr rtlCol="0" anchor="ctr"/>
+          <a:lstStyle/>
+          <a:p>
+            <a:pPr algn="ctr"/>
+            <a:r>
+              <a:rPr lang="en-US" dirty="0"/>
+              <a:t>PID</a:t>
+            </a:r>
+          </a:p>
+        </p:txBody>
+      </p:sp>
+    </p:spTree>
+    <p:extLst>
+      <p:ext uri="{BB962C8B-B14F-4D97-AF65-F5344CB8AC3E}">
+        <p14:creationId xmlns:p14="http://schemas.microsoft.com/office/powerpoint/2010/main" val="92075563"/>
+      </p:ext>
+    </p:extLst>
+  </p:cSld>
+  <p:clrMapOvr>
+    <a:masterClrMapping/>
+  </p:clrMapOvr>
+</p:sld>
+</file>
+
+<file path=ppt/slides/slide9.xml><?xml version="1.0" encoding="utf-8"?>
+<p:sld xmlns:a="http://schemas.openxmlformats.org/drawingml/2006/main" xmlns:r="http://schemas.openxmlformats.org/officeDocument/2006/relationships" xmlns:p="http://schemas.openxmlformats.org/presentationml/2006/main">
+  <p:cSld>
+    <p:spTree>
+      <p:nvGrpSpPr>
+        <p:cNvPr id="1" name=""/>
+        <p:cNvGrpSpPr/>
+        <p:nvPr/>
+      </p:nvGrpSpPr>
+      <p:grpSpPr>
+        <a:xfrm>
+          <a:off x="0" y="0"/>
+          <a:ext cx="0" cy="0"/>
+          <a:chOff x="0" y="0"/>
+          <a:chExt cx="0" cy="0"/>
+        </a:xfrm>
+      </p:grpSpPr>
+      <p:sp>
+        <p:nvSpPr>
+          <p:cNvPr id="2" name="Title 1">
+            <a:extLst>
+              <a:ext uri="{FF2B5EF4-FFF2-40B4-BE49-F238E27FC236}">
+                <a16:creationId xmlns:a16="http://schemas.microsoft.com/office/drawing/2014/main" id="{EC24E606-9007-D956-678B-3A4FAE5CBD8C}"/>
+              </a:ext>
+            </a:extLst>
+          </p:cNvPr>
+          <p:cNvSpPr>
+            <a:spLocks noGrp="1"/>
+          </p:cNvSpPr>
+          <p:nvPr>
+            <p:ph type="title"/>
+          </p:nvPr>
+        </p:nvSpPr>
+        <p:spPr/>
+        <p:txBody>
+          <a:bodyPr/>
+          <a:lstStyle/>
+          <a:p>
+            <a:pPr algn="ctr"/>
+            <a:r>
+              <a:rPr lang="en-US" dirty="0"/>
+              <a:t>Appropriate Summations</a:t>
+            </a:r>
+          </a:p>
+        </p:txBody>
+      </p:sp>
+      <p:sp>
+        <p:nvSpPr>
+          <p:cNvPr id="3" name="Content Placeholder 2">
+            <a:extLst>
+              <a:ext uri="{FF2B5EF4-FFF2-40B4-BE49-F238E27FC236}">
+                <a16:creationId xmlns:a16="http://schemas.microsoft.com/office/drawing/2014/main" id="{6D5E60D6-9EBD-1A61-B20C-576B5403A52F}"/>
+              </a:ext>
+            </a:extLst>
+          </p:cNvPr>
+          <p:cNvSpPr>
+            <a:spLocks noGrp="1"/>
+          </p:cNvSpPr>
+          <p:nvPr>
+            <p:ph idx="1"/>
+          </p:nvPr>
+        </p:nvSpPr>
+        <p:spPr/>
+        <p:txBody>
+          <a:bodyPr/>
+          <a:lstStyle/>
+          <a:p>
+            <a:pPr marL="0" indent="0" algn="ctr">
+              <a:buNone/>
+            </a:pPr>
+            <a:r>
+              <a:rPr lang="en-US" dirty="0" err="1"/>
+              <a:t>M</a:t>
+            </a:r>
+            <a:r>
+              <a:rPr lang="en-US" baseline="-25000" dirty="0" err="1"/>
+              <a:t>fr</a:t>
+            </a:r>
+            <a:r>
+              <a:rPr lang="en-US" dirty="0"/>
+              <a:t> = a*Thrust + b*Yaw + b*Pitch + b*Roll</a:t>
+            </a:r>
+          </a:p>
+          <a:p>
+            <a:pPr marL="0" indent="0" algn="ctr">
+              <a:buNone/>
+            </a:pPr>
+            <a:r>
+              <a:rPr lang="en-US" dirty="0" err="1"/>
+              <a:t>M</a:t>
+            </a:r>
+            <a:r>
+              <a:rPr lang="en-US" baseline="-25000" dirty="0" err="1"/>
+              <a:t>fl</a:t>
+            </a:r>
+            <a:r>
+              <a:rPr lang="en-US" dirty="0"/>
+              <a:t> = a*Thrust - b*Yaw + b*Pitch - b*Roll</a:t>
+            </a:r>
+          </a:p>
+          <a:p>
+            <a:pPr marL="0" indent="0" algn="ctr">
+              <a:buNone/>
+            </a:pPr>
+            <a:r>
+              <a:rPr lang="en-US" dirty="0" err="1"/>
+              <a:t>M</a:t>
+            </a:r>
+            <a:r>
+              <a:rPr lang="en-US" baseline="-25000" dirty="0" err="1"/>
+              <a:t>br</a:t>
+            </a:r>
+            <a:r>
+              <a:rPr lang="en-US" dirty="0"/>
+              <a:t> = a*Thrust - b*Yaw - b*Pitch + b*Roll</a:t>
+            </a:r>
+          </a:p>
+          <a:p>
+            <a:pPr marL="0" indent="0" algn="ctr">
+              <a:buNone/>
+            </a:pPr>
+            <a:r>
+              <a:rPr lang="en-US" dirty="0" err="1"/>
+              <a:t>M</a:t>
+            </a:r>
+            <a:r>
+              <a:rPr lang="en-US" baseline="-25000" dirty="0" err="1"/>
+              <a:t>bl</a:t>
+            </a:r>
+            <a:r>
+              <a:rPr lang="en-US" dirty="0"/>
+              <a:t> = a*Thrust + b*Yaw - b*Pitch - b*Roll</a:t>
+            </a:r>
+          </a:p>
+          <a:p>
+            <a:pPr marL="0" indent="0" algn="ctr">
+              <a:buNone/>
+            </a:pPr>
+            <a:endParaRPr lang="en-US" dirty="0"/>
+          </a:p>
+          <a:p>
+            <a:pPr marL="0" indent="0">
+              <a:buNone/>
+            </a:pPr>
+            <a:r>
+              <a:rPr lang="en-US" dirty="0"/>
+              <a:t>Note: a+3b = 1</a:t>
+            </a:r>
+          </a:p>
+          <a:p>
+            <a:pPr marL="0" indent="0">
+              <a:buNone/>
+            </a:pPr>
+            <a:r>
+              <a:rPr lang="en-US" dirty="0"/>
+              <a:t>This should keep the final Duty Cycle values between 0 and 100</a:t>
+            </a:r>
+          </a:p>
+          <a:p>
+            <a:pPr marL="0" indent="0" algn="ctr">
+              <a:buNone/>
+            </a:pPr>
+            <a:endParaRPr lang="en-US" dirty="0"/>
+          </a:p>
+          <a:p>
+            <a:pPr marL="0" indent="0" algn="ctr">
+              <a:buNone/>
+            </a:pPr>
+            <a:endParaRPr lang="en-US" dirty="0"/>
+          </a:p>
+        </p:txBody>
+      </p:sp>
+      <p:sp>
+        <p:nvSpPr>
+          <p:cNvPr id="4" name="Rectangle 3">
+            <a:extLst>
+              <a:ext uri="{FF2B5EF4-FFF2-40B4-BE49-F238E27FC236}">
+                <a16:creationId xmlns:a16="http://schemas.microsoft.com/office/drawing/2014/main" id="{1BEF1A3B-3AC3-E83A-4355-90EFAFAABFA0}"/>
+              </a:ext>
+            </a:extLst>
+          </p:cNvPr>
+          <p:cNvSpPr/>
+          <p:nvPr/>
+        </p:nvSpPr>
+        <p:spPr>
+          <a:xfrm>
+            <a:off x="10375392" y="365125"/>
+            <a:ext cx="978408" cy="1961388"/>
+          </a:xfrm>
+          <a:prstGeom prst="rect">
+            <a:avLst/>
+          </a:prstGeom>
+        </p:spPr>
+        <p:style>
+          <a:lnRef idx="2">
+            <a:schemeClr val="accent1">
+              <a:shade val="15000"/>
+            </a:schemeClr>
+          </a:lnRef>
+          <a:fillRef idx="1">
+            <a:schemeClr val="accent1"/>
+          </a:fillRef>
+          <a:effectRef idx="0">
+            <a:schemeClr val="accent1"/>
+          </a:effectRef>
+          <a:fontRef idx="minor">
+            <a:schemeClr val="lt1"/>
+          </a:fontRef>
+        </p:style>
+        <p:txBody>
+          <a:bodyPr rtlCol="0" anchor="ctr"/>
+          <a:lstStyle/>
+          <a:p>
+            <a:pPr algn="ctr"/>
+            <a:r>
+              <a:rPr lang="en-US" sz="1100" dirty="0"/>
+              <a:t>Appropriate Summations</a:t>
+            </a:r>
+          </a:p>
+        </p:txBody>
+      </p:sp>
+    </p:spTree>
+    <p:extLst>
+      <p:ext uri="{BB962C8B-B14F-4D97-AF65-F5344CB8AC3E}">
+        <p14:creationId xmlns:p14="http://schemas.microsoft.com/office/powerpoint/2010/main" val="3786574737"/>
       </p:ext>
     </p:extLst>
   </p:cSld>

--- a/fall_2025/Mathematical Model/Flight Controls Mathematical Model.pptx
+++ b/fall_2025/Mathematical Model/Flight Controls Mathematical Model.pptx
@@ -926,10 +926,25 @@
   <pc:docChgLst>
     <pc:chgData name="Brady Schick" userId="b2b33ab7-3f5f-4057-91d3-3d23bb8ba623" providerId="ADAL" clId="{119C1645-25BF-4125-9DBD-47C0423EEB24}"/>
     <pc:docChg chg="custSel addSld modSld">
-      <pc:chgData name="Brady Schick" userId="b2b33ab7-3f5f-4057-91d3-3d23bb8ba623" providerId="ADAL" clId="{119C1645-25BF-4125-9DBD-47C0423EEB24}" dt="2025-09-26T15:26:38.097" v="381" actId="20577"/>
+      <pc:chgData name="Brady Schick" userId="b2b33ab7-3f5f-4057-91d3-3d23bb8ba623" providerId="ADAL" clId="{119C1645-25BF-4125-9DBD-47C0423EEB24}" dt="2025-10-02T19:15:47.384" v="673"/>
       <pc:docMkLst>
         <pc:docMk/>
       </pc:docMkLst>
+      <pc:sldChg chg="modSp mod">
+        <pc:chgData name="Brady Schick" userId="b2b33ab7-3f5f-4057-91d3-3d23bb8ba623" providerId="ADAL" clId="{119C1645-25BF-4125-9DBD-47C0423EEB24}" dt="2025-10-02T19:14:21.614" v="534" actId="6549"/>
+        <pc:sldMkLst>
+          <pc:docMk/>
+          <pc:sldMk cId="4271143265" sldId="257"/>
+        </pc:sldMkLst>
+        <pc:spChg chg="mod">
+          <ac:chgData name="Brady Schick" userId="b2b33ab7-3f5f-4057-91d3-3d23bb8ba623" providerId="ADAL" clId="{119C1645-25BF-4125-9DBD-47C0423EEB24}" dt="2025-10-02T19:14:21.614" v="534" actId="6549"/>
+          <ac:spMkLst>
+            <pc:docMk/>
+            <pc:sldMk cId="4271143265" sldId="257"/>
+            <ac:spMk id="3" creationId="{6D5E60D6-9EBD-1A61-B20C-576B5403A52F}"/>
+          </ac:spMkLst>
+        </pc:spChg>
+      </pc:sldChg>
       <pc:sldChg chg="modSp mod">
         <pc:chgData name="Brady Schick" userId="b2b33ab7-3f5f-4057-91d3-3d23bb8ba623" providerId="ADAL" clId="{119C1645-25BF-4125-9DBD-47C0423EEB24}" dt="2025-09-26T15:26:38.097" v="381" actId="20577"/>
         <pc:sldMkLst>
@@ -945,8 +960,53 @@
           </ac:spMkLst>
         </pc:spChg>
       </pc:sldChg>
+      <pc:sldChg chg="modSp mod">
+        <pc:chgData name="Brady Schick" userId="b2b33ab7-3f5f-4057-91d3-3d23bb8ba623" providerId="ADAL" clId="{119C1645-25BF-4125-9DBD-47C0423EEB24}" dt="2025-10-02T19:11:08.199" v="393" actId="20577"/>
+        <pc:sldMkLst>
+          <pc:docMk/>
+          <pc:sldMk cId="3399213682" sldId="264"/>
+        </pc:sldMkLst>
+        <pc:spChg chg="mod">
+          <ac:chgData name="Brady Schick" userId="b2b33ab7-3f5f-4057-91d3-3d23bb8ba623" providerId="ADAL" clId="{119C1645-25BF-4125-9DBD-47C0423EEB24}" dt="2025-10-02T19:11:08.199" v="393" actId="20577"/>
+          <ac:spMkLst>
+            <pc:docMk/>
+            <pc:sldMk cId="3399213682" sldId="264"/>
+            <ac:spMk id="3" creationId="{6D5E60D6-9EBD-1A61-B20C-576B5403A52F}"/>
+          </ac:spMkLst>
+        </pc:spChg>
+      </pc:sldChg>
+      <pc:sldChg chg="modSp mod">
+        <pc:chgData name="Brady Schick" userId="b2b33ab7-3f5f-4057-91d3-3d23bb8ba623" providerId="ADAL" clId="{119C1645-25BF-4125-9DBD-47C0423EEB24}" dt="2025-10-02T19:15:27.516" v="662" actId="20577"/>
+        <pc:sldMkLst>
+          <pc:docMk/>
+          <pc:sldMk cId="92075563" sldId="265"/>
+        </pc:sldMkLst>
+        <pc:spChg chg="mod">
+          <ac:chgData name="Brady Schick" userId="b2b33ab7-3f5f-4057-91d3-3d23bb8ba623" providerId="ADAL" clId="{119C1645-25BF-4125-9DBD-47C0423EEB24}" dt="2025-10-02T19:15:27.516" v="662" actId="20577"/>
+          <ac:spMkLst>
+            <pc:docMk/>
+            <pc:sldMk cId="92075563" sldId="265"/>
+            <ac:spMk id="3" creationId="{6D5E60D6-9EBD-1A61-B20C-576B5403A52F}"/>
+          </ac:spMkLst>
+        </pc:spChg>
+      </pc:sldChg>
+      <pc:sldChg chg="modSp mod">
+        <pc:chgData name="Brady Schick" userId="b2b33ab7-3f5f-4057-91d3-3d23bb8ba623" providerId="ADAL" clId="{119C1645-25BF-4125-9DBD-47C0423EEB24}" dt="2025-10-02T19:15:47.384" v="673"/>
+        <pc:sldMkLst>
+          <pc:docMk/>
+          <pc:sldMk cId="3786574737" sldId="267"/>
+        </pc:sldMkLst>
+        <pc:spChg chg="mod">
+          <ac:chgData name="Brady Schick" userId="b2b33ab7-3f5f-4057-91d3-3d23bb8ba623" providerId="ADAL" clId="{119C1645-25BF-4125-9DBD-47C0423EEB24}" dt="2025-10-02T19:15:47.384" v="673"/>
+          <ac:spMkLst>
+            <pc:docMk/>
+            <pc:sldMk cId="3786574737" sldId="267"/>
+            <ac:spMk id="3" creationId="{6D5E60D6-9EBD-1A61-B20C-576B5403A52F}"/>
+          </ac:spMkLst>
+        </pc:spChg>
+      </pc:sldChg>
       <pc:sldChg chg="modSp add mod">
-        <pc:chgData name="Brady Schick" userId="b2b33ab7-3f5f-4057-91d3-3d23bb8ba623" providerId="ADAL" clId="{119C1645-25BF-4125-9DBD-47C0423EEB24}" dt="2025-09-25T12:45:02.581" v="305" actId="20577"/>
+        <pc:chgData name="Brady Schick" userId="b2b33ab7-3f5f-4057-91d3-3d23bb8ba623" providerId="ADAL" clId="{119C1645-25BF-4125-9DBD-47C0423EEB24}" dt="2025-10-02T19:15:08.069" v="656" actId="20577"/>
         <pc:sldMkLst>
           <pc:docMk/>
           <pc:sldMk cId="2499484992" sldId="268"/>
@@ -960,7 +1020,7 @@
           </ac:spMkLst>
         </pc:spChg>
         <pc:spChg chg="mod">
-          <ac:chgData name="Brady Schick" userId="b2b33ab7-3f5f-4057-91d3-3d23bb8ba623" providerId="ADAL" clId="{119C1645-25BF-4125-9DBD-47C0423EEB24}" dt="2025-09-25T12:45:02.581" v="305" actId="20577"/>
+          <ac:chgData name="Brady Schick" userId="b2b33ab7-3f5f-4057-91d3-3d23bb8ba623" providerId="ADAL" clId="{119C1645-25BF-4125-9DBD-47C0423EEB24}" dt="2025-10-02T19:15:08.069" v="656" actId="20577"/>
           <ac:spMkLst>
             <pc:docMk/>
             <pc:sldMk cId="2499484992" sldId="268"/>
@@ -1364,7 +1424,7 @@
           <a:p>
             <a:fld id="{CCE55368-DE8C-481A-9FFC-45CFE5380273}" type="datetimeFigureOut">
               <a:rPr lang="en-US" smtClean="0"/>
-              <a:t>9/26/2025</a:t>
+              <a:t>10/2/2025</a:t>
             </a:fld>
             <a:endParaRPr lang="en-US"/>
           </a:p>
@@ -1562,7 +1622,7 @@
           <a:p>
             <a:fld id="{CCE55368-DE8C-481A-9FFC-45CFE5380273}" type="datetimeFigureOut">
               <a:rPr lang="en-US" smtClean="0"/>
-              <a:t>9/26/2025</a:t>
+              <a:t>10/2/2025</a:t>
             </a:fld>
             <a:endParaRPr lang="en-US"/>
           </a:p>
@@ -1770,7 +1830,7 @@
           <a:p>
             <a:fld id="{CCE55368-DE8C-481A-9FFC-45CFE5380273}" type="datetimeFigureOut">
               <a:rPr lang="en-US" smtClean="0"/>
-              <a:t>9/26/2025</a:t>
+              <a:t>10/2/2025</a:t>
             </a:fld>
             <a:endParaRPr lang="en-US"/>
           </a:p>
@@ -1968,7 +2028,7 @@
           <a:p>
             <a:fld id="{CCE55368-DE8C-481A-9FFC-45CFE5380273}" type="datetimeFigureOut">
               <a:rPr lang="en-US" smtClean="0"/>
-              <a:t>9/26/2025</a:t>
+              <a:t>10/2/2025</a:t>
             </a:fld>
             <a:endParaRPr lang="en-US"/>
           </a:p>
@@ -2243,7 +2303,7 @@
           <a:p>
             <a:fld id="{CCE55368-DE8C-481A-9FFC-45CFE5380273}" type="datetimeFigureOut">
               <a:rPr lang="en-US" smtClean="0"/>
-              <a:t>9/26/2025</a:t>
+              <a:t>10/2/2025</a:t>
             </a:fld>
             <a:endParaRPr lang="en-US"/>
           </a:p>
@@ -2508,7 +2568,7 @@
           <a:p>
             <a:fld id="{CCE55368-DE8C-481A-9FFC-45CFE5380273}" type="datetimeFigureOut">
               <a:rPr lang="en-US" smtClean="0"/>
-              <a:t>9/26/2025</a:t>
+              <a:t>10/2/2025</a:t>
             </a:fld>
             <a:endParaRPr lang="en-US"/>
           </a:p>
@@ -2920,7 +2980,7 @@
           <a:p>
             <a:fld id="{CCE55368-DE8C-481A-9FFC-45CFE5380273}" type="datetimeFigureOut">
               <a:rPr lang="en-US" smtClean="0"/>
-              <a:t>9/26/2025</a:t>
+              <a:t>10/2/2025</a:t>
             </a:fld>
             <a:endParaRPr lang="en-US"/>
           </a:p>
@@ -3061,7 +3121,7 @@
           <a:p>
             <a:fld id="{CCE55368-DE8C-481A-9FFC-45CFE5380273}" type="datetimeFigureOut">
               <a:rPr lang="en-US" smtClean="0"/>
-              <a:t>9/26/2025</a:t>
+              <a:t>10/2/2025</a:t>
             </a:fld>
             <a:endParaRPr lang="en-US"/>
           </a:p>
@@ -3174,7 +3234,7 @@
           <a:p>
             <a:fld id="{CCE55368-DE8C-481A-9FFC-45CFE5380273}" type="datetimeFigureOut">
               <a:rPr lang="en-US" smtClean="0"/>
-              <a:t>9/26/2025</a:t>
+              <a:t>10/2/2025</a:t>
             </a:fld>
             <a:endParaRPr lang="en-US"/>
           </a:p>
@@ -3485,7 +3545,7 @@
           <a:p>
             <a:fld id="{CCE55368-DE8C-481A-9FFC-45CFE5380273}" type="datetimeFigureOut">
               <a:rPr lang="en-US" smtClean="0"/>
-              <a:t>9/26/2025</a:t>
+              <a:t>10/2/2025</a:t>
             </a:fld>
             <a:endParaRPr lang="en-US"/>
           </a:p>
@@ -3773,7 +3833,7 @@
           <a:p>
             <a:fld id="{CCE55368-DE8C-481A-9FFC-45CFE5380273}" type="datetimeFigureOut">
               <a:rPr lang="en-US" smtClean="0"/>
-              <a:t>9/26/2025</a:t>
+              <a:t>10/2/2025</a:t>
             </a:fld>
             <a:endParaRPr lang="en-US"/>
           </a:p>
@@ -4014,7 +4074,7 @@
           <a:p>
             <a:fld id="{CCE55368-DE8C-481A-9FFC-45CFE5380273}" type="datetimeFigureOut">
               <a:rPr lang="en-US" smtClean="0"/>
-              <a:t>9/26/2025</a:t>
+              <a:t>10/2/2025</a:t>
             </a:fld>
             <a:endParaRPr lang="en-US"/>
           </a:p>
@@ -8180,7 +8240,15 @@
             <a:pPr lvl="1"/>
             <a:r>
               <a:rPr lang="en-US" sz="1800" dirty="0"/>
-              <a:t>Final output: gives the Duty Cycle of the PWM signal that needs to be generated (valued from 0 to 100)</a:t>
+              <a:t>Final output: gives the Duty Cycle of the PWM signal that needs to be generated (valued from 0 to 255, NOT 100. Because that’s the way the 8-bit-resolution-pwm-cookie crème </a:t>
+            </a:r>
+            <a:r>
+              <a:rPr lang="en-US" sz="1800" dirty="0" err="1"/>
+              <a:t>brûlées</a:t>
+            </a:r>
+            <a:r>
+              <a:rPr lang="en-US" sz="1800" dirty="0"/>
+              <a:t>)</a:t>
             </a:r>
           </a:p>
           <a:p>
@@ -8349,7 +8417,7 @@
             </a:r>
             <a:r>
               <a:rPr lang="en-US" dirty="0"/>
-              <a:t> &gt; 100) {</a:t>
+              <a:t> &gt; 255) {</a:t>
             </a:r>
           </a:p>
           <a:p>
@@ -8366,7 +8434,7 @@
             </a:r>
             <a:r>
               <a:rPr lang="en-US" dirty="0"/>
-              <a:t> = 100;</a:t>
+              <a:t> = 255;</a:t>
             </a:r>
           </a:p>
           <a:p>
@@ -8881,8 +8949,8 @@
           </a:p>
         </p:txBody>
       </p:sp>
-      <mc:AlternateContent xmlns:mc="http://schemas.openxmlformats.org/markup-compatibility/2006" xmlns:a14="http://schemas.microsoft.com/office/drawing/2010/main">
-        <mc:Choice Requires="a14">
+      <mc:AlternateContent xmlns:mc="http://schemas.openxmlformats.org/markup-compatibility/2006">
+        <mc:Choice xmlns:a14="http://schemas.microsoft.com/office/drawing/2010/main" Requires="a14">
           <p:sp>
             <p:nvSpPr>
               <p:cNvPr id="3" name="Content Placeholder 2">
@@ -8902,7 +8970,7 @@
             <p:spPr/>
             <p:txBody>
               <a:bodyPr>
-                <a:normAutofit fontScale="92500"/>
+                <a:normAutofit fontScale="85000" lnSpcReduction="10000"/>
               </a:bodyPr>
               <a:lstStyle/>
               <a:p>
@@ -9415,18 +9483,22 @@
                 </a:pPr>
                 <a:r>
                   <a:rPr lang="en-US" dirty="0"/>
-                  <a:t>NOTE: I didn’t simplify the 2b, because the 2 coefficient will not change with the 2 in </a:t>
+                  <a:t>NOTE: I didn’t simplify the 2b, because the 2 coefficient will not change with the 2 in the denominator.</a:t>
                 </a:r>
+              </a:p>
+              <a:p>
+                <a:pPr marL="0" indent="0">
+                  <a:buNone/>
+                </a:pPr>
                 <a:r>
-                  <a:rPr lang="en-US"/>
-                  <a:t>the denominator.</a:t>
+                  <a:rPr lang="en-US" dirty="0"/>
+                  <a:t>Other note: forget this stuff, we’ll just average and filter before sending the error to the function.</a:t>
                 </a:r>
-                <a:endParaRPr lang="en-US" dirty="0"/>
               </a:p>
             </p:txBody>
           </p:sp>
         </mc:Choice>
-        <mc:Fallback xmlns="">
+        <mc:Fallback>
           <p:sp>
             <p:nvSpPr>
               <p:cNvPr id="3" name="Content Placeholder 2">
@@ -9447,7 +9519,7 @@
               <a:blipFill>
                 <a:blip r:embed="rId2"/>
                 <a:stretch>
-                  <a:fillRect l="-1043" t="-2101" b="-2381"/>
+                  <a:fillRect l="-928" t="-2521" r="-1333"/>
                 </a:stretch>
               </a:blipFill>
             </p:spPr>
@@ -9602,7 +9674,7 @@
           <a:p>
             <a:r>
               <a:rPr lang="en-US" dirty="0"/>
-              <a:t>100 would work but we could probably cap it at a smaller value.</a:t>
+              <a:t>255 would work but we could probably cap it at a smaller value.</a:t>
             </a:r>
           </a:p>
         </p:txBody>
@@ -9824,7 +9896,15 @@
             </a:pPr>
             <a:r>
               <a:rPr lang="en-US" dirty="0"/>
-              <a:t>This should keep the final Duty Cycle values between 0 and 100</a:t>
+              <a:t>This should keep the final values between 0 and 255 (crème </a:t>
+            </a:r>
+            <a:r>
+              <a:rPr lang="en-US" dirty="0" err="1"/>
+              <a:t>brûlée</a:t>
+            </a:r>
+            <a:r>
+              <a:rPr lang="en-US" dirty="0"/>
+              <a:t>)</a:t>
             </a:r>
           </a:p>
           <a:p>

--- a/fall_2025/Mathematical Model/Flight Controls Mathematical Model.pptx
+++ b/fall_2025/Mathematical Model/Flight Controls Mathematical Model.pptx
@@ -124,7 +124,7 @@
 <file path=ppt/revisionInfo.xml><?xml version="1.0" encoding="utf-8"?>
 <p1510:revInfo xmlns:a="http://schemas.openxmlformats.org/drawingml/2006/main" xmlns:r="http://schemas.openxmlformats.org/officeDocument/2006/relationships" xmlns:p1510="http://schemas.microsoft.com/office/powerpoint/2015/10/main">
   <p1510:revLst>
-    <p1510:client id="{119C1645-25BF-4125-9DBD-47C0423EEB24}" v="121" dt="2025-10-02T22:40:07.270"/>
+    <p1510:client id="{119C1645-25BF-4125-9DBD-47C0423EEB24}" v="128" dt="2025-10-04T18:26:51.572"/>
   </p1510:revLst>
 </p1510:revInfo>
 </file>
@@ -926,7 +926,7 @@
   <pc:docChgLst>
     <pc:chgData name="Brady Schick" userId="b2b33ab7-3f5f-4057-91d3-3d23bb8ba623" providerId="ADAL" clId="{119C1645-25BF-4125-9DBD-47C0423EEB24}"/>
     <pc:docChg chg="custSel addSld modSld">
-      <pc:chgData name="Brady Schick" userId="b2b33ab7-3f5f-4057-91d3-3d23bb8ba623" providerId="ADAL" clId="{119C1645-25BF-4125-9DBD-47C0423EEB24}" dt="2025-10-02T22:40:31.630" v="715" actId="1076"/>
+      <pc:chgData name="Brady Schick" userId="b2b33ab7-3f5f-4057-91d3-3d23bb8ba623" providerId="ADAL" clId="{119C1645-25BF-4125-9DBD-47C0423EEB24}" dt="2025-10-04T18:26:51.572" v="821" actId="1076"/>
       <pc:docMkLst>
         <pc:docMk/>
       </pc:docMkLst>
@@ -1021,20 +1021,28 @@
           </ac:spMkLst>
         </pc:spChg>
       </pc:sldChg>
-      <pc:sldChg chg="modSp mod">
-        <pc:chgData name="Brady Schick" userId="b2b33ab7-3f5f-4057-91d3-3d23bb8ba623" providerId="ADAL" clId="{119C1645-25BF-4125-9DBD-47C0423EEB24}" dt="2025-10-02T19:15:47.384" v="673"/>
+      <pc:sldChg chg="addSp modSp mod">
+        <pc:chgData name="Brady Schick" userId="b2b33ab7-3f5f-4057-91d3-3d23bb8ba623" providerId="ADAL" clId="{119C1645-25BF-4125-9DBD-47C0423EEB24}" dt="2025-10-04T18:26:51.572" v="821" actId="1076"/>
         <pc:sldMkLst>
           <pc:docMk/>
           <pc:sldMk cId="3786574737" sldId="267"/>
         </pc:sldMkLst>
         <pc:spChg chg="mod">
-          <ac:chgData name="Brady Schick" userId="b2b33ab7-3f5f-4057-91d3-3d23bb8ba623" providerId="ADAL" clId="{119C1645-25BF-4125-9DBD-47C0423EEB24}" dt="2025-10-02T19:15:47.384" v="673"/>
+          <ac:chgData name="Brady Schick" userId="b2b33ab7-3f5f-4057-91d3-3d23bb8ba623" providerId="ADAL" clId="{119C1645-25BF-4125-9DBD-47C0423EEB24}" dt="2025-10-04T18:26:28.648" v="816" actId="1076"/>
           <ac:spMkLst>
             <pc:docMk/>
             <pc:sldMk cId="3786574737" sldId="267"/>
             <ac:spMk id="3" creationId="{6D5E60D6-9EBD-1A61-B20C-576B5403A52F}"/>
           </ac:spMkLst>
         </pc:spChg>
+        <pc:picChg chg="add mod">
+          <ac:chgData name="Brady Schick" userId="b2b33ab7-3f5f-4057-91d3-3d23bb8ba623" providerId="ADAL" clId="{119C1645-25BF-4125-9DBD-47C0423EEB24}" dt="2025-10-04T18:26:51.572" v="821" actId="1076"/>
+          <ac:picMkLst>
+            <pc:docMk/>
+            <pc:sldMk cId="3786574737" sldId="267"/>
+            <ac:picMk id="1026" creationId="{8780EBFF-2D28-691F-5683-E378A005FFFD}"/>
+          </ac:picMkLst>
+        </pc:picChg>
       </pc:sldChg>
       <pc:sldChg chg="modSp add mod">
         <pc:chgData name="Brady Schick" userId="b2b33ab7-3f5f-4057-91d3-3d23bb8ba623" providerId="ADAL" clId="{119C1645-25BF-4125-9DBD-47C0423EEB24}" dt="2025-10-02T19:15:08.069" v="656" actId="20577"/>
@@ -1455,7 +1463,7 @@
           <a:p>
             <a:fld id="{CCE55368-DE8C-481A-9FFC-45CFE5380273}" type="datetimeFigureOut">
               <a:rPr lang="en-US" smtClean="0"/>
-              <a:t>10/2/2025</a:t>
+              <a:t>10/4/2025</a:t>
             </a:fld>
             <a:endParaRPr lang="en-US"/>
           </a:p>
@@ -1653,7 +1661,7 @@
           <a:p>
             <a:fld id="{CCE55368-DE8C-481A-9FFC-45CFE5380273}" type="datetimeFigureOut">
               <a:rPr lang="en-US" smtClean="0"/>
-              <a:t>10/2/2025</a:t>
+              <a:t>10/4/2025</a:t>
             </a:fld>
             <a:endParaRPr lang="en-US"/>
           </a:p>
@@ -1861,7 +1869,7 @@
           <a:p>
             <a:fld id="{CCE55368-DE8C-481A-9FFC-45CFE5380273}" type="datetimeFigureOut">
               <a:rPr lang="en-US" smtClean="0"/>
-              <a:t>10/2/2025</a:t>
+              <a:t>10/4/2025</a:t>
             </a:fld>
             <a:endParaRPr lang="en-US"/>
           </a:p>
@@ -2059,7 +2067,7 @@
           <a:p>
             <a:fld id="{CCE55368-DE8C-481A-9FFC-45CFE5380273}" type="datetimeFigureOut">
               <a:rPr lang="en-US" smtClean="0"/>
-              <a:t>10/2/2025</a:t>
+              <a:t>10/4/2025</a:t>
             </a:fld>
             <a:endParaRPr lang="en-US"/>
           </a:p>
@@ -2334,7 +2342,7 @@
           <a:p>
             <a:fld id="{CCE55368-DE8C-481A-9FFC-45CFE5380273}" type="datetimeFigureOut">
               <a:rPr lang="en-US" smtClean="0"/>
-              <a:t>10/2/2025</a:t>
+              <a:t>10/4/2025</a:t>
             </a:fld>
             <a:endParaRPr lang="en-US"/>
           </a:p>
@@ -2599,7 +2607,7 @@
           <a:p>
             <a:fld id="{CCE55368-DE8C-481A-9FFC-45CFE5380273}" type="datetimeFigureOut">
               <a:rPr lang="en-US" smtClean="0"/>
-              <a:t>10/2/2025</a:t>
+              <a:t>10/4/2025</a:t>
             </a:fld>
             <a:endParaRPr lang="en-US"/>
           </a:p>
@@ -3011,7 +3019,7 @@
           <a:p>
             <a:fld id="{CCE55368-DE8C-481A-9FFC-45CFE5380273}" type="datetimeFigureOut">
               <a:rPr lang="en-US" smtClean="0"/>
-              <a:t>10/2/2025</a:t>
+              <a:t>10/4/2025</a:t>
             </a:fld>
             <a:endParaRPr lang="en-US"/>
           </a:p>
@@ -3152,7 +3160,7 @@
           <a:p>
             <a:fld id="{CCE55368-DE8C-481A-9FFC-45CFE5380273}" type="datetimeFigureOut">
               <a:rPr lang="en-US" smtClean="0"/>
-              <a:t>10/2/2025</a:t>
+              <a:t>10/4/2025</a:t>
             </a:fld>
             <a:endParaRPr lang="en-US"/>
           </a:p>
@@ -3265,7 +3273,7 @@
           <a:p>
             <a:fld id="{CCE55368-DE8C-481A-9FFC-45CFE5380273}" type="datetimeFigureOut">
               <a:rPr lang="en-US" smtClean="0"/>
-              <a:t>10/2/2025</a:t>
+              <a:t>10/4/2025</a:t>
             </a:fld>
             <a:endParaRPr lang="en-US"/>
           </a:p>
@@ -3576,7 +3584,7 @@
           <a:p>
             <a:fld id="{CCE55368-DE8C-481A-9FFC-45CFE5380273}" type="datetimeFigureOut">
               <a:rPr lang="en-US" smtClean="0"/>
-              <a:t>10/2/2025</a:t>
+              <a:t>10/4/2025</a:t>
             </a:fld>
             <a:endParaRPr lang="en-US"/>
           </a:p>
@@ -3864,7 +3872,7 @@
           <a:p>
             <a:fld id="{CCE55368-DE8C-481A-9FFC-45CFE5380273}" type="datetimeFigureOut">
               <a:rPr lang="en-US" smtClean="0"/>
-              <a:t>10/2/2025</a:t>
+              <a:t>10/4/2025</a:t>
             </a:fld>
             <a:endParaRPr lang="en-US"/>
           </a:p>
@@ -4105,7 +4113,7 @@
           <a:p>
             <a:fld id="{CCE55368-DE8C-481A-9FFC-45CFE5380273}" type="datetimeFigureOut">
               <a:rPr lang="en-US" smtClean="0"/>
-              <a:t>10/2/2025</a:t>
+              <a:t>10/4/2025</a:t>
             </a:fld>
             <a:endParaRPr lang="en-US"/>
           </a:p>
@@ -9869,9 +9877,16 @@
             <p:ph idx="1"/>
           </p:nvPr>
         </p:nvSpPr>
-        <p:spPr/>
-        <p:txBody>
-          <a:bodyPr/>
+        <p:spPr>
+          <a:xfrm>
+            <a:off x="1319980" y="1520825"/>
+            <a:ext cx="10515600" cy="4351338"/>
+          </a:xfrm>
+        </p:spPr>
+        <p:txBody>
+          <a:bodyPr>
+            <a:normAutofit lnSpcReduction="10000"/>
+          </a:bodyPr>
           <a:lstStyle/>
           <a:p>
             <a:pPr marL="0" indent="0" algn="ctr">
@@ -9971,6 +9986,15 @@
             <a:r>
               <a:rPr lang="en-US" dirty="0"/>
               <a:t>)</a:t>
+            </a:r>
+          </a:p>
+          <a:p>
+            <a:pPr marL="0" indent="0">
+              <a:buNone/>
+            </a:pPr>
+            <a:r>
+              <a:rPr lang="en-US" dirty="0"/>
+              <a:t>NOTE: Yaw might need to be scaled differently than Pitch and Roll (might need a, b, and c.)</a:t>
             </a:r>
           </a:p>
           <a:p>
@@ -10036,6 +10060,53 @@
           </a:p>
         </p:txBody>
       </p:sp>
+      <p:pic>
+        <p:nvPicPr>
+          <p:cNvPr id="1026" name="Picture 2" descr="SpaghettiOs® Original Canned Pasta, 15 ...">
+            <a:extLst>
+              <a:ext uri="{FF2B5EF4-FFF2-40B4-BE49-F238E27FC236}">
+                <a16:creationId xmlns:a16="http://schemas.microsoft.com/office/drawing/2014/main" id="{8780EBFF-2D28-691F-5683-E378A005FFFD}"/>
+              </a:ext>
+            </a:extLst>
+          </p:cNvPr>
+          <p:cNvPicPr>
+            <a:picLocks noChangeAspect="1" noChangeArrowheads="1"/>
+          </p:cNvPicPr>
+          <p:nvPr/>
+        </p:nvPicPr>
+        <p:blipFill>
+          <a:blip r:embed="rId2">
+            <a:extLst>
+              <a:ext uri="{28A0092B-C50C-407E-A947-70E740481C1C}">
+                <a14:useLocalDpi xmlns:a14="http://schemas.microsoft.com/office/drawing/2010/main" val="0"/>
+              </a:ext>
+            </a:extLst>
+          </a:blip>
+          <a:srcRect/>
+          <a:stretch>
+            <a:fillRect/>
+          </a:stretch>
+        </p:blipFill>
+        <p:spPr bwMode="auto">
+          <a:xfrm>
+            <a:off x="838200" y="4784110"/>
+            <a:ext cx="553065" cy="553065"/>
+          </a:xfrm>
+          <a:prstGeom prst="rect">
+            <a:avLst/>
+          </a:prstGeom>
+          <a:noFill/>
+          <a:extLst>
+            <a:ext uri="{909E8E84-426E-40DD-AFC4-6F175D3DCCD1}">
+              <a14:hiddenFill xmlns:a14="http://schemas.microsoft.com/office/drawing/2010/main">
+                <a:solidFill>
+                  <a:srgbClr val="FFFFFF"/>
+                </a:solidFill>
+              </a14:hiddenFill>
+            </a:ext>
+          </a:extLst>
+        </p:spPr>
+      </p:pic>
     </p:spTree>
     <p:extLst>
       <p:ext uri="{BB962C8B-B14F-4D97-AF65-F5344CB8AC3E}">

--- a/fall_2025/Mathematical Model/Flight Controls Mathematical Model.pptx
+++ b/fall_2025/Mathematical Model/Flight Controls Mathematical Model.pptx
@@ -926,7 +926,7 @@
   <pc:docChgLst>
     <pc:chgData name="Brady Schick" userId="b2b33ab7-3f5f-4057-91d3-3d23bb8ba623" providerId="ADAL" clId="{119C1645-25BF-4125-9DBD-47C0423EEB24}"/>
     <pc:docChg chg="custSel addSld modSld">
-      <pc:chgData name="Brady Schick" userId="b2b33ab7-3f5f-4057-91d3-3d23bb8ba623" providerId="ADAL" clId="{119C1645-25BF-4125-9DBD-47C0423EEB24}" dt="2025-10-04T18:26:51.572" v="821" actId="1076"/>
+      <pc:chgData name="Brady Schick" userId="b2b33ab7-3f5f-4057-91d3-3d23bb8ba623" providerId="ADAL" clId="{119C1645-25BF-4125-9DBD-47C0423EEB24}" dt="2025-11-02T20:56:30.893" v="874" actId="20577"/>
       <pc:docMkLst>
         <pc:docMk/>
       </pc:docMkLst>
@@ -946,13 +946,13 @@
         </pc:spChg>
       </pc:sldChg>
       <pc:sldChg chg="addSp modSp mod">
-        <pc:chgData name="Brady Schick" userId="b2b33ab7-3f5f-4057-91d3-3d23bb8ba623" providerId="ADAL" clId="{119C1645-25BF-4125-9DBD-47C0423EEB24}" dt="2025-10-02T22:40:31.630" v="715" actId="1076"/>
+        <pc:chgData name="Brady Schick" userId="b2b33ab7-3f5f-4057-91d3-3d23bb8ba623" providerId="ADAL" clId="{119C1645-25BF-4125-9DBD-47C0423EEB24}" dt="2025-10-27T13:34:40.363" v="870" actId="1036"/>
         <pc:sldMkLst>
           <pc:docMk/>
           <pc:sldMk cId="1343786567" sldId="258"/>
         </pc:sldMkLst>
         <pc:spChg chg="add mod">
-          <ac:chgData name="Brady Schick" userId="b2b33ab7-3f5f-4057-91d3-3d23bb8ba623" providerId="ADAL" clId="{119C1645-25BF-4125-9DBD-47C0423EEB24}" dt="2025-10-02T22:40:31.630" v="715" actId="1076"/>
+          <ac:chgData name="Brady Schick" userId="b2b33ab7-3f5f-4057-91d3-3d23bb8ba623" providerId="ADAL" clId="{119C1645-25BF-4125-9DBD-47C0423EEB24}" dt="2025-10-27T13:34:40.363" v="870" actId="1036"/>
           <ac:spMkLst>
             <pc:docMk/>
             <pc:sldMk cId="1343786567" sldId="258"/>
@@ -960,7 +960,151 @@
           </ac:spMkLst>
         </pc:spChg>
         <pc:spChg chg="mod">
-          <ac:chgData name="Brady Schick" userId="b2b33ab7-3f5f-4057-91d3-3d23bb8ba623" providerId="ADAL" clId="{119C1645-25BF-4125-9DBD-47C0423EEB24}" dt="2025-10-02T22:39:53.217" v="676" actId="1076"/>
+          <ac:chgData name="Brady Schick" userId="b2b33ab7-3f5f-4057-91d3-3d23bb8ba623" providerId="ADAL" clId="{119C1645-25BF-4125-9DBD-47C0423EEB24}" dt="2025-10-27T13:34:40.363" v="870" actId="1036"/>
+          <ac:spMkLst>
+            <pc:docMk/>
+            <pc:sldMk cId="1343786567" sldId="258"/>
+            <ac:spMk id="3" creationId="{3B1FF5EB-2BC9-C328-43F3-F3AD2B2D8C7C}"/>
+          </ac:spMkLst>
+        </pc:spChg>
+        <pc:spChg chg="mod">
+          <ac:chgData name="Brady Schick" userId="b2b33ab7-3f5f-4057-91d3-3d23bb8ba623" providerId="ADAL" clId="{119C1645-25BF-4125-9DBD-47C0423EEB24}" dt="2025-10-27T13:34:40.363" v="870" actId="1036"/>
+          <ac:spMkLst>
+            <pc:docMk/>
+            <pc:sldMk cId="1343786567" sldId="258"/>
+            <ac:spMk id="6" creationId="{42B021F0-E2AB-0CF0-B307-02686C5871C4}"/>
+          </ac:spMkLst>
+        </pc:spChg>
+        <pc:spChg chg="mod">
+          <ac:chgData name="Brady Schick" userId="b2b33ab7-3f5f-4057-91d3-3d23bb8ba623" providerId="ADAL" clId="{119C1645-25BF-4125-9DBD-47C0423EEB24}" dt="2025-10-27T13:34:40.363" v="870" actId="1036"/>
+          <ac:spMkLst>
+            <pc:docMk/>
+            <pc:sldMk cId="1343786567" sldId="258"/>
+            <ac:spMk id="7" creationId="{9BA42286-B363-DF76-BC64-BF5571AAC905}"/>
+          </ac:spMkLst>
+        </pc:spChg>
+        <pc:spChg chg="mod">
+          <ac:chgData name="Brady Schick" userId="b2b33ab7-3f5f-4057-91d3-3d23bb8ba623" providerId="ADAL" clId="{119C1645-25BF-4125-9DBD-47C0423EEB24}" dt="2025-10-27T13:34:40.363" v="870" actId="1036"/>
+          <ac:spMkLst>
+            <pc:docMk/>
+            <pc:sldMk cId="1343786567" sldId="258"/>
+            <ac:spMk id="8" creationId="{AC0C3396-95CA-30DB-097B-5B426018D2E5}"/>
+          </ac:spMkLst>
+        </pc:spChg>
+        <pc:spChg chg="mod">
+          <ac:chgData name="Brady Schick" userId="b2b33ab7-3f5f-4057-91d3-3d23bb8ba623" providerId="ADAL" clId="{119C1645-25BF-4125-9DBD-47C0423EEB24}" dt="2025-10-27T13:34:40.363" v="870" actId="1036"/>
+          <ac:spMkLst>
+            <pc:docMk/>
+            <pc:sldMk cId="1343786567" sldId="258"/>
+            <ac:spMk id="9" creationId="{6814009D-8479-7D79-6A41-0C4A09EDF22D}"/>
+          </ac:spMkLst>
+        </pc:spChg>
+        <pc:spChg chg="mod">
+          <ac:chgData name="Brady Schick" userId="b2b33ab7-3f5f-4057-91d3-3d23bb8ba623" providerId="ADAL" clId="{119C1645-25BF-4125-9DBD-47C0423EEB24}" dt="2025-10-27T13:34:40.363" v="870" actId="1036"/>
+          <ac:spMkLst>
+            <pc:docMk/>
+            <pc:sldMk cId="1343786567" sldId="258"/>
+            <ac:spMk id="10" creationId="{116CF671-FC1E-0E5D-609A-4F9F459290D1}"/>
+          </ac:spMkLst>
+        </pc:spChg>
+        <pc:spChg chg="mod">
+          <ac:chgData name="Brady Schick" userId="b2b33ab7-3f5f-4057-91d3-3d23bb8ba623" providerId="ADAL" clId="{119C1645-25BF-4125-9DBD-47C0423EEB24}" dt="2025-10-27T13:34:40.363" v="870" actId="1036"/>
+          <ac:spMkLst>
+            <pc:docMk/>
+            <pc:sldMk cId="1343786567" sldId="258"/>
+            <ac:spMk id="11" creationId="{E46CB958-0718-F993-3D55-6CA6D80DAF69}"/>
+          </ac:spMkLst>
+        </pc:spChg>
+        <pc:spChg chg="mod">
+          <ac:chgData name="Brady Schick" userId="b2b33ab7-3f5f-4057-91d3-3d23bb8ba623" providerId="ADAL" clId="{119C1645-25BF-4125-9DBD-47C0423EEB24}" dt="2025-10-27T13:34:40.363" v="870" actId="1036"/>
+          <ac:spMkLst>
+            <pc:docMk/>
+            <pc:sldMk cId="1343786567" sldId="258"/>
+            <ac:spMk id="12" creationId="{A29F5EC1-148D-7645-877C-B08CCD53AD73}"/>
+          </ac:spMkLst>
+        </pc:spChg>
+        <pc:spChg chg="mod">
+          <ac:chgData name="Brady Schick" userId="b2b33ab7-3f5f-4057-91d3-3d23bb8ba623" providerId="ADAL" clId="{119C1645-25BF-4125-9DBD-47C0423EEB24}" dt="2025-10-27T13:34:40.363" v="870" actId="1036"/>
+          <ac:spMkLst>
+            <pc:docMk/>
+            <pc:sldMk cId="1343786567" sldId="258"/>
+            <ac:spMk id="13" creationId="{B568F542-76CD-9630-A7BF-6626FB79C6BA}"/>
+          </ac:spMkLst>
+        </pc:spChg>
+        <pc:spChg chg="mod">
+          <ac:chgData name="Brady Schick" userId="b2b33ab7-3f5f-4057-91d3-3d23bb8ba623" providerId="ADAL" clId="{119C1645-25BF-4125-9DBD-47C0423EEB24}" dt="2025-10-27T13:34:40.363" v="870" actId="1036"/>
+          <ac:spMkLst>
+            <pc:docMk/>
+            <pc:sldMk cId="1343786567" sldId="258"/>
+            <ac:spMk id="14" creationId="{BAD11D63-B2EC-E092-9D15-D884265425FD}"/>
+          </ac:spMkLst>
+        </pc:spChg>
+        <pc:spChg chg="mod">
+          <ac:chgData name="Brady Schick" userId="b2b33ab7-3f5f-4057-91d3-3d23bb8ba623" providerId="ADAL" clId="{119C1645-25BF-4125-9DBD-47C0423EEB24}" dt="2025-10-27T13:34:40.363" v="870" actId="1036"/>
+          <ac:spMkLst>
+            <pc:docMk/>
+            <pc:sldMk cId="1343786567" sldId="258"/>
+            <ac:spMk id="15" creationId="{7778E790-C610-C76F-CE0F-6436D04F655B}"/>
+          </ac:spMkLst>
+        </pc:spChg>
+        <pc:spChg chg="mod">
+          <ac:chgData name="Brady Schick" userId="b2b33ab7-3f5f-4057-91d3-3d23bb8ba623" providerId="ADAL" clId="{119C1645-25BF-4125-9DBD-47C0423EEB24}" dt="2025-10-27T13:34:40.363" v="870" actId="1036"/>
+          <ac:spMkLst>
+            <pc:docMk/>
+            <pc:sldMk cId="1343786567" sldId="258"/>
+            <ac:spMk id="16" creationId="{B36CE7DF-1DFC-873C-D8BC-636ECF66942A}"/>
+          </ac:spMkLst>
+        </pc:spChg>
+        <pc:spChg chg="mod">
+          <ac:chgData name="Brady Schick" userId="b2b33ab7-3f5f-4057-91d3-3d23bb8ba623" providerId="ADAL" clId="{119C1645-25BF-4125-9DBD-47C0423EEB24}" dt="2025-10-27T13:34:40.363" v="870" actId="1036"/>
+          <ac:spMkLst>
+            <pc:docMk/>
+            <pc:sldMk cId="1343786567" sldId="258"/>
+            <ac:spMk id="65" creationId="{8FB02A05-7524-896B-238B-688AD16B3BC0}"/>
+          </ac:spMkLst>
+        </pc:spChg>
+        <pc:spChg chg="mod">
+          <ac:chgData name="Brady Schick" userId="b2b33ab7-3f5f-4057-91d3-3d23bb8ba623" providerId="ADAL" clId="{119C1645-25BF-4125-9DBD-47C0423EEB24}" dt="2025-10-27T13:34:40.363" v="870" actId="1036"/>
+          <ac:spMkLst>
+            <pc:docMk/>
+            <pc:sldMk cId="1343786567" sldId="258"/>
+            <ac:spMk id="68" creationId="{FB347E85-1E53-CB1C-F81D-CDD7EE376199}"/>
+          </ac:spMkLst>
+        </pc:spChg>
+        <pc:spChg chg="mod">
+          <ac:chgData name="Brady Schick" userId="b2b33ab7-3f5f-4057-91d3-3d23bb8ba623" providerId="ADAL" clId="{119C1645-25BF-4125-9DBD-47C0423EEB24}" dt="2025-10-27T13:34:40.363" v="870" actId="1036"/>
+          <ac:spMkLst>
+            <pc:docMk/>
+            <pc:sldMk cId="1343786567" sldId="258"/>
+            <ac:spMk id="102" creationId="{411D6702-13C5-3B14-80F7-4EA8C74DCF00}"/>
+          </ac:spMkLst>
+        </pc:spChg>
+        <pc:spChg chg="mod">
+          <ac:chgData name="Brady Schick" userId="b2b33ab7-3f5f-4057-91d3-3d23bb8ba623" providerId="ADAL" clId="{119C1645-25BF-4125-9DBD-47C0423EEB24}" dt="2025-10-27T13:34:40.363" v="870" actId="1036"/>
+          <ac:spMkLst>
+            <pc:docMk/>
+            <pc:sldMk cId="1343786567" sldId="258"/>
+            <ac:spMk id="103" creationId="{8C20C2E6-ECF4-7E23-E4D7-0089D28723AF}"/>
+          </ac:spMkLst>
+        </pc:spChg>
+        <pc:spChg chg="mod">
+          <ac:chgData name="Brady Schick" userId="b2b33ab7-3f5f-4057-91d3-3d23bb8ba623" providerId="ADAL" clId="{119C1645-25BF-4125-9DBD-47C0423EEB24}" dt="2025-10-27T13:34:40.363" v="870" actId="1036"/>
+          <ac:spMkLst>
+            <pc:docMk/>
+            <pc:sldMk cId="1343786567" sldId="258"/>
+            <ac:spMk id="152" creationId="{A8069555-1591-6672-747E-4DCBAFF0C1FE}"/>
+          </ac:spMkLst>
+        </pc:spChg>
+        <pc:spChg chg="mod">
+          <ac:chgData name="Brady Schick" userId="b2b33ab7-3f5f-4057-91d3-3d23bb8ba623" providerId="ADAL" clId="{119C1645-25BF-4125-9DBD-47C0423EEB24}" dt="2025-10-27T13:34:40.363" v="870" actId="1036"/>
+          <ac:spMkLst>
+            <pc:docMk/>
+            <pc:sldMk cId="1343786567" sldId="258"/>
+            <ac:spMk id="153" creationId="{AB57F696-517B-2209-5073-4E1BC2E10EA3}"/>
+          </ac:spMkLst>
+        </pc:spChg>
+        <pc:spChg chg="mod">
+          <ac:chgData name="Brady Schick" userId="b2b33ab7-3f5f-4057-91d3-3d23bb8ba623" providerId="ADAL" clId="{119C1645-25BF-4125-9DBD-47C0423EEB24}" dt="2025-10-27T13:34:40.363" v="870" actId="1036"/>
           <ac:spMkLst>
             <pc:docMk/>
             <pc:sldMk cId="1343786567" sldId="258"/>
@@ -968,13 +1112,309 @@
           </ac:spMkLst>
         </pc:spChg>
         <pc:spChg chg="mod">
-          <ac:chgData name="Brady Schick" userId="b2b33ab7-3f5f-4057-91d3-3d23bb8ba623" providerId="ADAL" clId="{119C1645-25BF-4125-9DBD-47C0423EEB24}" dt="2025-10-02T22:39:57.424" v="677" actId="1076"/>
+          <ac:chgData name="Brady Schick" userId="b2b33ab7-3f5f-4057-91d3-3d23bb8ba623" providerId="ADAL" clId="{119C1645-25BF-4125-9DBD-47C0423EEB24}" dt="2025-10-27T13:34:40.363" v="870" actId="1036"/>
           <ac:spMkLst>
             <pc:docMk/>
             <pc:sldMk cId="1343786567" sldId="258"/>
             <ac:spMk id="155" creationId="{C39DF2C8-D6D2-FEB1-3A73-AEFC70AC5636}"/>
           </ac:spMkLst>
         </pc:spChg>
+        <pc:grpChg chg="mod">
+          <ac:chgData name="Brady Schick" userId="b2b33ab7-3f5f-4057-91d3-3d23bb8ba623" providerId="ADAL" clId="{119C1645-25BF-4125-9DBD-47C0423EEB24}" dt="2025-10-27T13:34:40.363" v="870" actId="1036"/>
+          <ac:grpSpMkLst>
+            <pc:docMk/>
+            <pc:sldMk cId="1343786567" sldId="258"/>
+            <ac:grpSpMk id="21" creationId="{B40A2BBF-75F9-7C12-1DE7-CEE4392DEABE}"/>
+          </ac:grpSpMkLst>
+        </pc:grpChg>
+        <pc:grpChg chg="mod">
+          <ac:chgData name="Brady Schick" userId="b2b33ab7-3f5f-4057-91d3-3d23bb8ba623" providerId="ADAL" clId="{119C1645-25BF-4125-9DBD-47C0423EEB24}" dt="2025-10-27T13:34:40.363" v="870" actId="1036"/>
+          <ac:grpSpMkLst>
+            <pc:docMk/>
+            <pc:sldMk cId="1343786567" sldId="258"/>
+            <ac:grpSpMk id="43" creationId="{C589BF6D-1890-4D0E-ABBF-5CD79865BD60}"/>
+          </ac:grpSpMkLst>
+        </pc:grpChg>
+        <pc:grpChg chg="mod">
+          <ac:chgData name="Brady Schick" userId="b2b33ab7-3f5f-4057-91d3-3d23bb8ba623" providerId="ADAL" clId="{119C1645-25BF-4125-9DBD-47C0423EEB24}" dt="2025-10-27T13:34:40.363" v="870" actId="1036"/>
+          <ac:grpSpMkLst>
+            <pc:docMk/>
+            <pc:sldMk cId="1343786567" sldId="258"/>
+            <ac:grpSpMk id="51" creationId="{571BB130-248D-34BF-BC9E-1A604A1B495E}"/>
+          </ac:grpSpMkLst>
+        </pc:grpChg>
+        <pc:grpChg chg="mod">
+          <ac:chgData name="Brady Schick" userId="b2b33ab7-3f5f-4057-91d3-3d23bb8ba623" providerId="ADAL" clId="{119C1645-25BF-4125-9DBD-47C0423EEB24}" dt="2025-10-27T13:34:40.363" v="870" actId="1036"/>
+          <ac:grpSpMkLst>
+            <pc:docMk/>
+            <pc:sldMk cId="1343786567" sldId="258"/>
+            <ac:grpSpMk id="58" creationId="{A71DC8F1-6ABC-F53F-0488-CB1F9F7E3B1D}"/>
+          </ac:grpSpMkLst>
+        </pc:grpChg>
+        <pc:grpChg chg="mod">
+          <ac:chgData name="Brady Schick" userId="b2b33ab7-3f5f-4057-91d3-3d23bb8ba623" providerId="ADAL" clId="{119C1645-25BF-4125-9DBD-47C0423EEB24}" dt="2025-10-27T13:34:40.363" v="870" actId="1036"/>
+          <ac:grpSpMkLst>
+            <pc:docMk/>
+            <pc:sldMk cId="1343786567" sldId="258"/>
+            <ac:grpSpMk id="111" creationId="{29285013-55DC-CB40-8D2F-005D369EE96D}"/>
+          </ac:grpSpMkLst>
+        </pc:grpChg>
+        <pc:grpChg chg="mod">
+          <ac:chgData name="Brady Schick" userId="b2b33ab7-3f5f-4057-91d3-3d23bb8ba623" providerId="ADAL" clId="{119C1645-25BF-4125-9DBD-47C0423EEB24}" dt="2025-10-27T13:34:40.363" v="870" actId="1036"/>
+          <ac:grpSpMkLst>
+            <pc:docMk/>
+            <pc:sldMk cId="1343786567" sldId="258"/>
+            <ac:grpSpMk id="126" creationId="{ADC304AC-11E0-C964-FFF3-9B06DCB9BD8B}"/>
+          </ac:grpSpMkLst>
+        </pc:grpChg>
+        <pc:cxnChg chg="mod">
+          <ac:chgData name="Brady Schick" userId="b2b33ab7-3f5f-4057-91d3-3d23bb8ba623" providerId="ADAL" clId="{119C1645-25BF-4125-9DBD-47C0423EEB24}" dt="2025-10-27T13:34:40.363" v="870" actId="1036"/>
+          <ac:cxnSpMkLst>
+            <pc:docMk/>
+            <pc:sldMk cId="1343786567" sldId="258"/>
+            <ac:cxnSpMk id="27" creationId="{6213CD43-11A7-8DAB-8C92-1310D08021DB}"/>
+          </ac:cxnSpMkLst>
+        </pc:cxnChg>
+        <pc:cxnChg chg="mod">
+          <ac:chgData name="Brady Schick" userId="b2b33ab7-3f5f-4057-91d3-3d23bb8ba623" providerId="ADAL" clId="{119C1645-25BF-4125-9DBD-47C0423EEB24}" dt="2025-10-27T13:34:40.363" v="870" actId="1036"/>
+          <ac:cxnSpMkLst>
+            <pc:docMk/>
+            <pc:sldMk cId="1343786567" sldId="258"/>
+            <ac:cxnSpMk id="32" creationId="{D3641EEA-A38E-0A3D-B148-B5F2C6051AA8}"/>
+          </ac:cxnSpMkLst>
+        </pc:cxnChg>
+        <pc:cxnChg chg="mod">
+          <ac:chgData name="Brady Schick" userId="b2b33ab7-3f5f-4057-91d3-3d23bb8ba623" providerId="ADAL" clId="{119C1645-25BF-4125-9DBD-47C0423EEB24}" dt="2025-10-27T13:34:40.363" v="870" actId="1036"/>
+          <ac:cxnSpMkLst>
+            <pc:docMk/>
+            <pc:sldMk cId="1343786567" sldId="258"/>
+            <ac:cxnSpMk id="35" creationId="{6F3368D1-F2EB-DF8A-491F-2321998ED38F}"/>
+          </ac:cxnSpMkLst>
+        </pc:cxnChg>
+        <pc:cxnChg chg="mod">
+          <ac:chgData name="Brady Schick" userId="b2b33ab7-3f5f-4057-91d3-3d23bb8ba623" providerId="ADAL" clId="{119C1645-25BF-4125-9DBD-47C0423EEB24}" dt="2025-10-27T13:34:40.363" v="870" actId="1036"/>
+          <ac:cxnSpMkLst>
+            <pc:docMk/>
+            <pc:sldMk cId="1343786567" sldId="258"/>
+            <ac:cxnSpMk id="38" creationId="{7D1FBBB2-1AC6-916E-DEE2-667C77285361}"/>
+          </ac:cxnSpMkLst>
+        </pc:cxnChg>
+        <pc:cxnChg chg="mod">
+          <ac:chgData name="Brady Schick" userId="b2b33ab7-3f5f-4057-91d3-3d23bb8ba623" providerId="ADAL" clId="{119C1645-25BF-4125-9DBD-47C0423EEB24}" dt="2025-10-27T13:34:40.363" v="870" actId="1036"/>
+          <ac:cxnSpMkLst>
+            <pc:docMk/>
+            <pc:sldMk cId="1343786567" sldId="258"/>
+            <ac:cxnSpMk id="40" creationId="{246B04CE-2D0D-CF8B-044F-E3A483C510C3}"/>
+          </ac:cxnSpMkLst>
+        </pc:cxnChg>
+        <pc:cxnChg chg="mod">
+          <ac:chgData name="Brady Schick" userId="b2b33ab7-3f5f-4057-91d3-3d23bb8ba623" providerId="ADAL" clId="{119C1645-25BF-4125-9DBD-47C0423EEB24}" dt="2025-10-27T13:34:40.363" v="870" actId="1036"/>
+          <ac:cxnSpMkLst>
+            <pc:docMk/>
+            <pc:sldMk cId="1343786567" sldId="258"/>
+            <ac:cxnSpMk id="42" creationId="{E69BF800-CA24-EF3D-9B8E-973946EDB905}"/>
+          </ac:cxnSpMkLst>
+        </pc:cxnChg>
+        <pc:cxnChg chg="mod">
+          <ac:chgData name="Brady Schick" userId="b2b33ab7-3f5f-4057-91d3-3d23bb8ba623" providerId="ADAL" clId="{119C1645-25BF-4125-9DBD-47C0423EEB24}" dt="2025-10-27T13:34:40.363" v="870" actId="1036"/>
+          <ac:cxnSpMkLst>
+            <pc:docMk/>
+            <pc:sldMk cId="1343786567" sldId="258"/>
+            <ac:cxnSpMk id="47" creationId="{9F729FC1-2BEF-D985-89CB-E0C3B81AFD1B}"/>
+          </ac:cxnSpMkLst>
+        </pc:cxnChg>
+        <pc:cxnChg chg="mod">
+          <ac:chgData name="Brady Schick" userId="b2b33ab7-3f5f-4057-91d3-3d23bb8ba623" providerId="ADAL" clId="{119C1645-25BF-4125-9DBD-47C0423EEB24}" dt="2025-10-27T13:34:40.363" v="870" actId="1036"/>
+          <ac:cxnSpMkLst>
+            <pc:docMk/>
+            <pc:sldMk cId="1343786567" sldId="258"/>
+            <ac:cxnSpMk id="48" creationId="{B9BF8628-0F4A-726F-6107-3BB8A5382AE3}"/>
+          </ac:cxnSpMkLst>
+        </pc:cxnChg>
+        <pc:cxnChg chg="mod">
+          <ac:chgData name="Brady Schick" userId="b2b33ab7-3f5f-4057-91d3-3d23bb8ba623" providerId="ADAL" clId="{119C1645-25BF-4125-9DBD-47C0423EEB24}" dt="2025-10-27T13:34:40.363" v="870" actId="1036"/>
+          <ac:cxnSpMkLst>
+            <pc:docMk/>
+            <pc:sldMk cId="1343786567" sldId="258"/>
+            <ac:cxnSpMk id="55" creationId="{3967BFBE-4F2E-9B63-146D-22ED72E3ABC2}"/>
+          </ac:cxnSpMkLst>
+        </pc:cxnChg>
+        <pc:cxnChg chg="mod">
+          <ac:chgData name="Brady Schick" userId="b2b33ab7-3f5f-4057-91d3-3d23bb8ba623" providerId="ADAL" clId="{119C1645-25BF-4125-9DBD-47C0423EEB24}" dt="2025-10-27T13:34:40.363" v="870" actId="1036"/>
+          <ac:cxnSpMkLst>
+            <pc:docMk/>
+            <pc:sldMk cId="1343786567" sldId="258"/>
+            <ac:cxnSpMk id="56" creationId="{647FFE0F-F2C8-4F4F-F19C-5109F5FA26EE}"/>
+          </ac:cxnSpMkLst>
+        </pc:cxnChg>
+        <pc:cxnChg chg="mod">
+          <ac:chgData name="Brady Schick" userId="b2b33ab7-3f5f-4057-91d3-3d23bb8ba623" providerId="ADAL" clId="{119C1645-25BF-4125-9DBD-47C0423EEB24}" dt="2025-10-27T13:34:40.363" v="870" actId="1036"/>
+          <ac:cxnSpMkLst>
+            <pc:docMk/>
+            <pc:sldMk cId="1343786567" sldId="258"/>
+            <ac:cxnSpMk id="62" creationId="{64A61392-C77A-55C5-A87B-3B5085F712DE}"/>
+          </ac:cxnSpMkLst>
+        </pc:cxnChg>
+        <pc:cxnChg chg="mod">
+          <ac:chgData name="Brady Schick" userId="b2b33ab7-3f5f-4057-91d3-3d23bb8ba623" providerId="ADAL" clId="{119C1645-25BF-4125-9DBD-47C0423EEB24}" dt="2025-10-27T13:34:40.363" v="870" actId="1036"/>
+          <ac:cxnSpMkLst>
+            <pc:docMk/>
+            <pc:sldMk cId="1343786567" sldId="258"/>
+            <ac:cxnSpMk id="63" creationId="{4F6606D8-A1B4-0396-08B0-F44AF9AF84A2}"/>
+          </ac:cxnSpMkLst>
+        </pc:cxnChg>
+        <pc:cxnChg chg="mod">
+          <ac:chgData name="Brady Schick" userId="b2b33ab7-3f5f-4057-91d3-3d23bb8ba623" providerId="ADAL" clId="{119C1645-25BF-4125-9DBD-47C0423EEB24}" dt="2025-10-27T13:34:40.363" v="870" actId="1036"/>
+          <ac:cxnSpMkLst>
+            <pc:docMk/>
+            <pc:sldMk cId="1343786567" sldId="258"/>
+            <ac:cxnSpMk id="72" creationId="{AECA16D5-B584-BF8B-7529-778FE4A3F5B7}"/>
+          </ac:cxnSpMkLst>
+        </pc:cxnChg>
+        <pc:cxnChg chg="mod">
+          <ac:chgData name="Brady Schick" userId="b2b33ab7-3f5f-4057-91d3-3d23bb8ba623" providerId="ADAL" clId="{119C1645-25BF-4125-9DBD-47C0423EEB24}" dt="2025-10-27T13:34:40.363" v="870" actId="1036"/>
+          <ac:cxnSpMkLst>
+            <pc:docMk/>
+            <pc:sldMk cId="1343786567" sldId="258"/>
+            <ac:cxnSpMk id="86" creationId="{05EA2E2D-468B-D52E-198C-CF85D9003A2E}"/>
+          </ac:cxnSpMkLst>
+        </pc:cxnChg>
+        <pc:cxnChg chg="mod">
+          <ac:chgData name="Brady Schick" userId="b2b33ab7-3f5f-4057-91d3-3d23bb8ba623" providerId="ADAL" clId="{119C1645-25BF-4125-9DBD-47C0423EEB24}" dt="2025-10-27T13:34:40.363" v="870" actId="1036"/>
+          <ac:cxnSpMkLst>
+            <pc:docMk/>
+            <pc:sldMk cId="1343786567" sldId="258"/>
+            <ac:cxnSpMk id="91" creationId="{2F6B9A5F-24CF-FFD9-32B1-7706B6165BE6}"/>
+          </ac:cxnSpMkLst>
+        </pc:cxnChg>
+        <pc:cxnChg chg="mod">
+          <ac:chgData name="Brady Schick" userId="b2b33ab7-3f5f-4057-91d3-3d23bb8ba623" providerId="ADAL" clId="{119C1645-25BF-4125-9DBD-47C0423EEB24}" dt="2025-10-27T13:34:40.363" v="870" actId="1036"/>
+          <ac:cxnSpMkLst>
+            <pc:docMk/>
+            <pc:sldMk cId="1343786567" sldId="258"/>
+            <ac:cxnSpMk id="95" creationId="{DCC3044C-18F6-146C-1956-923C302D5BD8}"/>
+          </ac:cxnSpMkLst>
+        </pc:cxnChg>
+        <pc:cxnChg chg="mod">
+          <ac:chgData name="Brady Schick" userId="b2b33ab7-3f5f-4057-91d3-3d23bb8ba623" providerId="ADAL" clId="{119C1645-25BF-4125-9DBD-47C0423EEB24}" dt="2025-10-27T13:34:40.363" v="870" actId="1036"/>
+          <ac:cxnSpMkLst>
+            <pc:docMk/>
+            <pc:sldMk cId="1343786567" sldId="258"/>
+            <ac:cxnSpMk id="115" creationId="{2B0C02DD-AB4D-018D-F43E-B42DFA7027E0}"/>
+          </ac:cxnSpMkLst>
+        </pc:cxnChg>
+        <pc:cxnChg chg="mod">
+          <ac:chgData name="Brady Schick" userId="b2b33ab7-3f5f-4057-91d3-3d23bb8ba623" providerId="ADAL" clId="{119C1645-25BF-4125-9DBD-47C0423EEB24}" dt="2025-10-27T13:34:40.363" v="870" actId="1036"/>
+          <ac:cxnSpMkLst>
+            <pc:docMk/>
+            <pc:sldMk cId="1343786567" sldId="258"/>
+            <ac:cxnSpMk id="116" creationId="{BF6E34C0-2B3E-3895-DB22-FD5E9C22EFC1}"/>
+          </ac:cxnSpMkLst>
+        </pc:cxnChg>
+        <pc:cxnChg chg="mod">
+          <ac:chgData name="Brady Schick" userId="b2b33ab7-3f5f-4057-91d3-3d23bb8ba623" providerId="ADAL" clId="{119C1645-25BF-4125-9DBD-47C0423EEB24}" dt="2025-10-27T13:34:40.363" v="870" actId="1036"/>
+          <ac:cxnSpMkLst>
+            <pc:docMk/>
+            <pc:sldMk cId="1343786567" sldId="258"/>
+            <ac:cxnSpMk id="117" creationId="{44833A9C-90BA-09AA-671E-8E3D7E0ADEA8}"/>
+          </ac:cxnSpMkLst>
+        </pc:cxnChg>
+        <pc:cxnChg chg="mod">
+          <ac:chgData name="Brady Schick" userId="b2b33ab7-3f5f-4057-91d3-3d23bb8ba623" providerId="ADAL" clId="{119C1645-25BF-4125-9DBD-47C0423EEB24}" dt="2025-10-27T13:34:40.363" v="870" actId="1036"/>
+          <ac:cxnSpMkLst>
+            <pc:docMk/>
+            <pc:sldMk cId="1343786567" sldId="258"/>
+            <ac:cxnSpMk id="130" creationId="{0215D43B-2D6E-D4B5-6776-E9666218BFFD}"/>
+          </ac:cxnSpMkLst>
+        </pc:cxnChg>
+        <pc:cxnChg chg="mod">
+          <ac:chgData name="Brady Schick" userId="b2b33ab7-3f5f-4057-91d3-3d23bb8ba623" providerId="ADAL" clId="{119C1645-25BF-4125-9DBD-47C0423EEB24}" dt="2025-10-27T13:34:40.363" v="870" actId="1036"/>
+          <ac:cxnSpMkLst>
+            <pc:docMk/>
+            <pc:sldMk cId="1343786567" sldId="258"/>
+            <ac:cxnSpMk id="131" creationId="{8A0B8A40-4C5D-C8CE-DC82-C0E282621C44}"/>
+          </ac:cxnSpMkLst>
+        </pc:cxnChg>
+        <pc:cxnChg chg="mod">
+          <ac:chgData name="Brady Schick" userId="b2b33ab7-3f5f-4057-91d3-3d23bb8ba623" providerId="ADAL" clId="{119C1645-25BF-4125-9DBD-47C0423EEB24}" dt="2025-10-27T13:34:40.363" v="870" actId="1036"/>
+          <ac:cxnSpMkLst>
+            <pc:docMk/>
+            <pc:sldMk cId="1343786567" sldId="258"/>
+            <ac:cxnSpMk id="132" creationId="{014548B0-2609-41C9-3EC0-60DEA407706D}"/>
+          </ac:cxnSpMkLst>
+        </pc:cxnChg>
+        <pc:cxnChg chg="mod">
+          <ac:chgData name="Brady Schick" userId="b2b33ab7-3f5f-4057-91d3-3d23bb8ba623" providerId="ADAL" clId="{119C1645-25BF-4125-9DBD-47C0423EEB24}" dt="2025-10-27T13:34:40.363" v="870" actId="1036"/>
+          <ac:cxnSpMkLst>
+            <pc:docMk/>
+            <pc:sldMk cId="1343786567" sldId="258"/>
+            <ac:cxnSpMk id="139" creationId="{04DA9057-AED1-AD9A-6021-5F482DE02754}"/>
+          </ac:cxnSpMkLst>
+        </pc:cxnChg>
+        <pc:cxnChg chg="mod">
+          <ac:chgData name="Brady Schick" userId="b2b33ab7-3f5f-4057-91d3-3d23bb8ba623" providerId="ADAL" clId="{119C1645-25BF-4125-9DBD-47C0423EEB24}" dt="2025-10-27T13:34:40.363" v="870" actId="1036"/>
+          <ac:cxnSpMkLst>
+            <pc:docMk/>
+            <pc:sldMk cId="1343786567" sldId="258"/>
+            <ac:cxnSpMk id="142" creationId="{AA5094AE-A712-7231-9389-E797B7E1BF5A}"/>
+          </ac:cxnSpMkLst>
+        </pc:cxnChg>
+        <pc:cxnChg chg="mod">
+          <ac:chgData name="Brady Schick" userId="b2b33ab7-3f5f-4057-91d3-3d23bb8ba623" providerId="ADAL" clId="{119C1645-25BF-4125-9DBD-47C0423EEB24}" dt="2025-10-27T13:34:40.363" v="870" actId="1036"/>
+          <ac:cxnSpMkLst>
+            <pc:docMk/>
+            <pc:sldMk cId="1343786567" sldId="258"/>
+            <ac:cxnSpMk id="144" creationId="{2DDA7981-11BC-0B8B-20AD-943BCF3B730E}"/>
+          </ac:cxnSpMkLst>
+        </pc:cxnChg>
+        <pc:cxnChg chg="mod">
+          <ac:chgData name="Brady Schick" userId="b2b33ab7-3f5f-4057-91d3-3d23bb8ba623" providerId="ADAL" clId="{119C1645-25BF-4125-9DBD-47C0423EEB24}" dt="2025-10-27T13:34:40.363" v="870" actId="1036"/>
+          <ac:cxnSpMkLst>
+            <pc:docMk/>
+            <pc:sldMk cId="1343786567" sldId="258"/>
+            <ac:cxnSpMk id="146" creationId="{1B1C07E1-7E77-C8C6-BE83-8C424E658BA9}"/>
+          </ac:cxnSpMkLst>
+        </pc:cxnChg>
+        <pc:cxnChg chg="mod">
+          <ac:chgData name="Brady Schick" userId="b2b33ab7-3f5f-4057-91d3-3d23bb8ba623" providerId="ADAL" clId="{119C1645-25BF-4125-9DBD-47C0423EEB24}" dt="2025-10-27T13:34:40.363" v="870" actId="1036"/>
+          <ac:cxnSpMkLst>
+            <pc:docMk/>
+            <pc:sldMk cId="1343786567" sldId="258"/>
+            <ac:cxnSpMk id="147" creationId="{1704B7C7-A94B-AAD4-748F-8CA933E63DA1}"/>
+          </ac:cxnSpMkLst>
+        </pc:cxnChg>
+        <pc:cxnChg chg="mod">
+          <ac:chgData name="Brady Schick" userId="b2b33ab7-3f5f-4057-91d3-3d23bb8ba623" providerId="ADAL" clId="{119C1645-25BF-4125-9DBD-47C0423EEB24}" dt="2025-10-27T13:34:40.363" v="870" actId="1036"/>
+          <ac:cxnSpMkLst>
+            <pc:docMk/>
+            <pc:sldMk cId="1343786567" sldId="258"/>
+            <ac:cxnSpMk id="148" creationId="{EDDFFA7E-B640-A6F1-45D4-EA5A25FE28B1}"/>
+          </ac:cxnSpMkLst>
+        </pc:cxnChg>
+        <pc:cxnChg chg="mod">
+          <ac:chgData name="Brady Schick" userId="b2b33ab7-3f5f-4057-91d3-3d23bb8ba623" providerId="ADAL" clId="{119C1645-25BF-4125-9DBD-47C0423EEB24}" dt="2025-10-27T13:34:40.363" v="870" actId="1036"/>
+          <ac:cxnSpMkLst>
+            <pc:docMk/>
+            <pc:sldMk cId="1343786567" sldId="258"/>
+            <ac:cxnSpMk id="149" creationId="{D50DBAAA-74F3-6472-E687-FE65F89D6E7E}"/>
+          </ac:cxnSpMkLst>
+        </pc:cxnChg>
+        <pc:cxnChg chg="mod">
+          <ac:chgData name="Brady Schick" userId="b2b33ab7-3f5f-4057-91d3-3d23bb8ba623" providerId="ADAL" clId="{119C1645-25BF-4125-9DBD-47C0423EEB24}" dt="2025-10-27T13:34:40.363" v="870" actId="1036"/>
+          <ac:cxnSpMkLst>
+            <pc:docMk/>
+            <pc:sldMk cId="1343786567" sldId="258"/>
+            <ac:cxnSpMk id="150" creationId="{68B876D4-1E4C-0FD1-AF73-6C4E09BF4E61}"/>
+          </ac:cxnSpMkLst>
+        </pc:cxnChg>
+        <pc:cxnChg chg="mod">
+          <ac:chgData name="Brady Schick" userId="b2b33ab7-3f5f-4057-91d3-3d23bb8ba623" providerId="ADAL" clId="{119C1645-25BF-4125-9DBD-47C0423EEB24}" dt="2025-10-27T13:34:40.363" v="870" actId="1036"/>
+          <ac:cxnSpMkLst>
+            <pc:docMk/>
+            <pc:sldMk cId="1343786567" sldId="258"/>
+            <ac:cxnSpMk id="151" creationId="{EA3204A2-FA1B-DE7B-FAB2-AE0B9A1414B9}"/>
+          </ac:cxnSpMkLst>
+        </pc:cxnChg>
       </pc:sldChg>
       <pc:sldChg chg="modSp mod">
         <pc:chgData name="Brady Schick" userId="b2b33ab7-3f5f-4057-91d3-3d23bb8ba623" providerId="ADAL" clId="{119C1645-25BF-4125-9DBD-47C0423EEB24}" dt="2025-09-26T15:26:38.097" v="381" actId="20577"/>
@@ -1022,13 +1462,13 @@
         </pc:spChg>
       </pc:sldChg>
       <pc:sldChg chg="addSp modSp mod">
-        <pc:chgData name="Brady Schick" userId="b2b33ab7-3f5f-4057-91d3-3d23bb8ba623" providerId="ADAL" clId="{119C1645-25BF-4125-9DBD-47C0423EEB24}" dt="2025-10-04T18:26:51.572" v="821" actId="1076"/>
+        <pc:chgData name="Brady Schick" userId="b2b33ab7-3f5f-4057-91d3-3d23bb8ba623" providerId="ADAL" clId="{119C1645-25BF-4125-9DBD-47C0423EEB24}" dt="2025-11-02T20:56:30.893" v="874" actId="20577"/>
         <pc:sldMkLst>
           <pc:docMk/>
           <pc:sldMk cId="3786574737" sldId="267"/>
         </pc:sldMkLst>
         <pc:spChg chg="mod">
-          <ac:chgData name="Brady Schick" userId="b2b33ab7-3f5f-4057-91d3-3d23bb8ba623" providerId="ADAL" clId="{119C1645-25BF-4125-9DBD-47C0423EEB24}" dt="2025-10-04T18:26:28.648" v="816" actId="1076"/>
+          <ac:chgData name="Brady Schick" userId="b2b33ab7-3f5f-4057-91d3-3d23bb8ba623" providerId="ADAL" clId="{119C1645-25BF-4125-9DBD-47C0423EEB24}" dt="2025-11-02T20:56:30.893" v="874" actId="20577"/>
           <ac:spMkLst>
             <pc:docMk/>
             <pc:sldMk cId="3786574737" sldId="267"/>
@@ -1463,7 +1903,7 @@
           <a:p>
             <a:fld id="{CCE55368-DE8C-481A-9FFC-45CFE5380273}" type="datetimeFigureOut">
               <a:rPr lang="en-US" smtClean="0"/>
-              <a:t>10/4/2025</a:t>
+              <a:t>11/2/2025</a:t>
             </a:fld>
             <a:endParaRPr lang="en-US"/>
           </a:p>
@@ -1661,7 +2101,7 @@
           <a:p>
             <a:fld id="{CCE55368-DE8C-481A-9FFC-45CFE5380273}" type="datetimeFigureOut">
               <a:rPr lang="en-US" smtClean="0"/>
-              <a:t>10/4/2025</a:t>
+              <a:t>11/2/2025</a:t>
             </a:fld>
             <a:endParaRPr lang="en-US"/>
           </a:p>
@@ -1869,7 +2309,7 @@
           <a:p>
             <a:fld id="{CCE55368-DE8C-481A-9FFC-45CFE5380273}" type="datetimeFigureOut">
               <a:rPr lang="en-US" smtClean="0"/>
-              <a:t>10/4/2025</a:t>
+              <a:t>11/2/2025</a:t>
             </a:fld>
             <a:endParaRPr lang="en-US"/>
           </a:p>
@@ -2067,7 +2507,7 @@
           <a:p>
             <a:fld id="{CCE55368-DE8C-481A-9FFC-45CFE5380273}" type="datetimeFigureOut">
               <a:rPr lang="en-US" smtClean="0"/>
-              <a:t>10/4/2025</a:t>
+              <a:t>11/2/2025</a:t>
             </a:fld>
             <a:endParaRPr lang="en-US"/>
           </a:p>
@@ -2342,7 +2782,7 @@
           <a:p>
             <a:fld id="{CCE55368-DE8C-481A-9FFC-45CFE5380273}" type="datetimeFigureOut">
               <a:rPr lang="en-US" smtClean="0"/>
-              <a:t>10/4/2025</a:t>
+              <a:t>11/2/2025</a:t>
             </a:fld>
             <a:endParaRPr lang="en-US"/>
           </a:p>
@@ -2607,7 +3047,7 @@
           <a:p>
             <a:fld id="{CCE55368-DE8C-481A-9FFC-45CFE5380273}" type="datetimeFigureOut">
               <a:rPr lang="en-US" smtClean="0"/>
-              <a:t>10/4/2025</a:t>
+              <a:t>11/2/2025</a:t>
             </a:fld>
             <a:endParaRPr lang="en-US"/>
           </a:p>
@@ -3019,7 +3459,7 @@
           <a:p>
             <a:fld id="{CCE55368-DE8C-481A-9FFC-45CFE5380273}" type="datetimeFigureOut">
               <a:rPr lang="en-US" smtClean="0"/>
-              <a:t>10/4/2025</a:t>
+              <a:t>11/2/2025</a:t>
             </a:fld>
             <a:endParaRPr lang="en-US"/>
           </a:p>
@@ -3160,7 +3600,7 @@
           <a:p>
             <a:fld id="{CCE55368-DE8C-481A-9FFC-45CFE5380273}" type="datetimeFigureOut">
               <a:rPr lang="en-US" smtClean="0"/>
-              <a:t>10/4/2025</a:t>
+              <a:t>11/2/2025</a:t>
             </a:fld>
             <a:endParaRPr lang="en-US"/>
           </a:p>
@@ -3273,7 +3713,7 @@
           <a:p>
             <a:fld id="{CCE55368-DE8C-481A-9FFC-45CFE5380273}" type="datetimeFigureOut">
               <a:rPr lang="en-US" smtClean="0"/>
-              <a:t>10/4/2025</a:t>
+              <a:t>11/2/2025</a:t>
             </a:fld>
             <a:endParaRPr lang="en-US"/>
           </a:p>
@@ -3584,7 +4024,7 @@
           <a:p>
             <a:fld id="{CCE55368-DE8C-481A-9FFC-45CFE5380273}" type="datetimeFigureOut">
               <a:rPr lang="en-US" smtClean="0"/>
-              <a:t>10/4/2025</a:t>
+              <a:t>11/2/2025</a:t>
             </a:fld>
             <a:endParaRPr lang="en-US"/>
           </a:p>
@@ -3872,7 +4312,7 @@
           <a:p>
             <a:fld id="{CCE55368-DE8C-481A-9FFC-45CFE5380273}" type="datetimeFigureOut">
               <a:rPr lang="en-US" smtClean="0"/>
-              <a:t>10/4/2025</a:t>
+              <a:t>11/2/2025</a:t>
             </a:fld>
             <a:endParaRPr lang="en-US"/>
           </a:p>
@@ -4113,7 +4553,7 @@
           <a:p>
             <a:fld id="{CCE55368-DE8C-481A-9FFC-45CFE5380273}" type="datetimeFigureOut">
               <a:rPr lang="en-US" smtClean="0"/>
-              <a:t>10/4/2025</a:t>
+              <a:t>11/2/2025</a:t>
             </a:fld>
             <a:endParaRPr lang="en-US"/>
           </a:p>
@@ -5000,7 +5440,7 @@
         </p:nvSpPr>
         <p:spPr>
           <a:xfrm>
-            <a:off x="6597396" y="2631948"/>
+            <a:off x="6548236" y="2140334"/>
             <a:ext cx="557784" cy="411480"/>
           </a:xfrm>
           <a:prstGeom prst="rect">
@@ -5049,7 +5489,7 @@
         </p:nvSpPr>
         <p:spPr>
           <a:xfrm>
-            <a:off x="7653528" y="2628900"/>
+            <a:off x="7604368" y="2137286"/>
             <a:ext cx="978408" cy="1961388"/>
           </a:xfrm>
           <a:prstGeom prst="rect">
@@ -5098,7 +5538,7 @@
         </p:nvSpPr>
         <p:spPr>
           <a:xfrm>
-            <a:off x="6603492" y="3141155"/>
+            <a:off x="6554332" y="2649541"/>
             <a:ext cx="557784" cy="411480"/>
           </a:xfrm>
           <a:prstGeom prst="rect">
@@ -5147,7 +5587,7 @@
         </p:nvSpPr>
         <p:spPr>
           <a:xfrm>
-            <a:off x="6597396" y="3666553"/>
+            <a:off x="6548236" y="3174939"/>
             <a:ext cx="557784" cy="411480"/>
           </a:xfrm>
           <a:prstGeom prst="rect">
@@ -5196,7 +5636,7 @@
         </p:nvSpPr>
         <p:spPr>
           <a:xfrm>
-            <a:off x="6597396" y="4175760"/>
+            <a:off x="6548236" y="3684146"/>
             <a:ext cx="557784" cy="411480"/>
           </a:xfrm>
           <a:prstGeom prst="rect">
@@ -5245,7 +5685,7 @@
         </p:nvSpPr>
         <p:spPr>
           <a:xfrm>
-            <a:off x="5001006" y="3132202"/>
+            <a:off x="4951846" y="2640588"/>
             <a:ext cx="557784" cy="411480"/>
           </a:xfrm>
           <a:prstGeom prst="rect">
@@ -5294,7 +5734,7 @@
         </p:nvSpPr>
         <p:spPr>
           <a:xfrm>
-            <a:off x="5001006" y="2619756"/>
+            <a:off x="4951846" y="2128142"/>
             <a:ext cx="557784" cy="411480"/>
           </a:xfrm>
           <a:prstGeom prst="rect">
@@ -5343,7 +5783,7 @@
         </p:nvSpPr>
         <p:spPr>
           <a:xfrm>
-            <a:off x="9123426" y="2619756"/>
+            <a:off x="9074266" y="2128142"/>
             <a:ext cx="649986" cy="423672"/>
           </a:xfrm>
           <a:prstGeom prst="rect">
@@ -5392,7 +5832,7 @@
         </p:nvSpPr>
         <p:spPr>
           <a:xfrm>
-            <a:off x="9123426" y="3128963"/>
+            <a:off x="9074266" y="2637349"/>
             <a:ext cx="649986" cy="423672"/>
           </a:xfrm>
           <a:prstGeom prst="rect">
@@ -5441,7 +5881,7 @@
         </p:nvSpPr>
         <p:spPr>
           <a:xfrm>
-            <a:off x="9124188" y="3654361"/>
+            <a:off x="9075028" y="3162747"/>
             <a:ext cx="649986" cy="423672"/>
           </a:xfrm>
           <a:prstGeom prst="rect">
@@ -5490,7 +5930,7 @@
         </p:nvSpPr>
         <p:spPr>
           <a:xfrm>
-            <a:off x="9124188" y="4163568"/>
+            <a:off x="9075028" y="3671954"/>
             <a:ext cx="649986" cy="423672"/>
           </a:xfrm>
           <a:prstGeom prst="rect">
@@ -5539,7 +5979,7 @@
         </p:nvSpPr>
         <p:spPr>
           <a:xfrm>
-            <a:off x="10264902" y="2628900"/>
+            <a:off x="10215742" y="2137286"/>
             <a:ext cx="978408" cy="1961388"/>
           </a:xfrm>
           <a:prstGeom prst="rect">
@@ -5588,7 +6028,7 @@
         </p:nvGrpSpPr>
         <p:grpSpPr>
           <a:xfrm>
-            <a:off x="6037326" y="2674528"/>
+            <a:off x="5988166" y="2182914"/>
             <a:ext cx="393192" cy="399140"/>
             <a:chOff x="5422392" y="1652778"/>
             <a:chExt cx="393192" cy="399140"/>
@@ -5737,7 +6177,7 @@
         </p:nvCxnSpPr>
         <p:spPr>
           <a:xfrm>
-            <a:off x="5558790" y="2825496"/>
+            <a:off x="5509630" y="2333882"/>
             <a:ext cx="551688" cy="6766"/>
           </a:xfrm>
           <a:prstGeom prst="straightConnector1">
@@ -5780,7 +6220,7 @@
         </p:nvCxnSpPr>
         <p:spPr>
           <a:xfrm>
-            <a:off x="6430518" y="2832262"/>
+            <a:off x="6381358" y="2340648"/>
             <a:ext cx="166878" cy="5426"/>
           </a:xfrm>
           <a:prstGeom prst="straightConnector1">
@@ -5822,7 +6262,7 @@
         </p:nvCxnSpPr>
         <p:spPr>
           <a:xfrm>
-            <a:off x="7155180" y="2837688"/>
+            <a:off x="7106020" y="2346074"/>
             <a:ext cx="498348" cy="0"/>
           </a:xfrm>
           <a:prstGeom prst="straightConnector1">
@@ -5863,7 +6303,7 @@
         </p:nvCxnSpPr>
         <p:spPr>
           <a:xfrm>
-            <a:off x="7161276" y="3346895"/>
+            <a:off x="7112116" y="2855281"/>
             <a:ext cx="492252" cy="0"/>
           </a:xfrm>
           <a:prstGeom prst="straightConnector1">
@@ -5904,7 +6344,7 @@
         </p:nvCxnSpPr>
         <p:spPr>
           <a:xfrm flipV="1">
-            <a:off x="7155180" y="3866197"/>
+            <a:off x="7106020" y="3374583"/>
             <a:ext cx="498348" cy="6096"/>
           </a:xfrm>
           <a:prstGeom prst="straightConnector1">
@@ -5945,7 +6385,7 @@
         </p:nvCxnSpPr>
         <p:spPr>
           <a:xfrm flipV="1">
-            <a:off x="7155180" y="4375404"/>
+            <a:off x="7106020" y="3883790"/>
             <a:ext cx="498348" cy="6096"/>
           </a:xfrm>
           <a:prstGeom prst="straightConnector1">
@@ -5984,7 +6424,7 @@
         </p:nvGrpSpPr>
         <p:grpSpPr>
           <a:xfrm>
-            <a:off x="5656326" y="3185117"/>
+            <a:off x="5607166" y="2693503"/>
             <a:ext cx="393192" cy="399140"/>
             <a:chOff x="5422392" y="1652778"/>
             <a:chExt cx="393192" cy="399140"/>
@@ -6133,7 +6573,7 @@
         </p:nvCxnSpPr>
         <p:spPr>
           <a:xfrm>
-            <a:off x="5558790" y="3337942"/>
+            <a:off x="5509630" y="2846328"/>
             <a:ext cx="170688" cy="4909"/>
           </a:xfrm>
           <a:prstGeom prst="straightConnector1">
@@ -6176,7 +6616,7 @@
         </p:nvCxnSpPr>
         <p:spPr>
           <a:xfrm>
-            <a:off x="6049518" y="3342851"/>
+            <a:off x="6000358" y="2851237"/>
             <a:ext cx="553974" cy="4044"/>
           </a:xfrm>
           <a:prstGeom prst="straightConnector1">
@@ -6215,7 +6655,7 @@
         </p:nvGrpSpPr>
         <p:grpSpPr>
           <a:xfrm>
-            <a:off x="5285994" y="3709445"/>
+            <a:off x="5236834" y="3217831"/>
             <a:ext cx="393192" cy="399140"/>
             <a:chOff x="5422392" y="1652778"/>
             <a:chExt cx="393192" cy="399140"/>
@@ -6364,7 +6804,7 @@
         </p:nvCxnSpPr>
         <p:spPr>
           <a:xfrm>
-            <a:off x="4706112" y="3860101"/>
+            <a:off x="4656952" y="3368487"/>
             <a:ext cx="653034" cy="7078"/>
           </a:xfrm>
           <a:prstGeom prst="straightConnector1">
@@ -6407,7 +6847,7 @@
         </p:nvCxnSpPr>
         <p:spPr>
           <a:xfrm>
-            <a:off x="5679186" y="3867179"/>
+            <a:off x="5630026" y="3375565"/>
             <a:ext cx="918210" cy="5114"/>
           </a:xfrm>
           <a:prstGeom prst="straightConnector1">
@@ -6446,7 +6886,7 @@
         </p:nvGrpSpPr>
         <p:grpSpPr>
           <a:xfrm>
-            <a:off x="4893945" y="4213864"/>
+            <a:off x="4844785" y="3722250"/>
             <a:ext cx="393192" cy="399140"/>
             <a:chOff x="5422392" y="1652778"/>
             <a:chExt cx="393192" cy="399140"/>
@@ -6595,7 +7035,7 @@
         </p:nvCxnSpPr>
         <p:spPr>
           <a:xfrm>
-            <a:off x="4721733" y="4369308"/>
+            <a:off x="4672573" y="3877694"/>
             <a:ext cx="245364" cy="2290"/>
           </a:xfrm>
           <a:prstGeom prst="straightConnector1">
@@ -6638,7 +7078,7 @@
         </p:nvCxnSpPr>
         <p:spPr>
           <a:xfrm>
-            <a:off x="5287137" y="4371598"/>
+            <a:off x="5237977" y="3879984"/>
             <a:ext cx="1310259" cy="9902"/>
           </a:xfrm>
           <a:prstGeom prst="straightConnector1">
@@ -6677,7 +7117,7 @@
         </p:nvSpPr>
         <p:spPr>
           <a:xfrm>
-            <a:off x="3995928" y="3654361"/>
+            <a:off x="3946768" y="3162747"/>
             <a:ext cx="710184" cy="411480"/>
           </a:xfrm>
           <a:prstGeom prst="rect">
@@ -6726,7 +7166,7 @@
         </p:nvSpPr>
         <p:spPr>
           <a:xfrm>
-            <a:off x="4011549" y="4163568"/>
+            <a:off x="3962389" y="3671954"/>
             <a:ext cx="710184" cy="411480"/>
           </a:xfrm>
           <a:prstGeom prst="rect">
@@ -6778,7 +7218,7 @@
         </p:nvCxnSpPr>
         <p:spPr>
           <a:xfrm rot="5400000" flipH="1">
-            <a:off x="7717416" y="1553598"/>
+            <a:off x="7668256" y="1061984"/>
             <a:ext cx="1589772" cy="4483608"/>
           </a:xfrm>
           <a:prstGeom prst="bentConnector4">
@@ -6822,7 +7262,7 @@
         </p:nvCxnSpPr>
         <p:spPr>
           <a:xfrm rot="16200000" flipV="1">
-            <a:off x="5429383" y="3971222"/>
+            <a:off x="5380223" y="3479608"/>
             <a:ext cx="1301232" cy="380999"/>
           </a:xfrm>
           <a:prstGeom prst="bentConnector3">
@@ -6865,7 +7305,7 @@
         </p:nvCxnSpPr>
         <p:spPr>
           <a:xfrm rot="16200000" flipV="1">
-            <a:off x="5309366" y="4232206"/>
+            <a:off x="5260206" y="3740592"/>
             <a:ext cx="782312" cy="377952"/>
           </a:xfrm>
           <a:prstGeom prst="bentConnector3">
@@ -6908,7 +7348,7 @@
         </p:nvCxnSpPr>
         <p:spPr>
           <a:xfrm rot="10800000">
-            <a:off x="5123312" y="4533260"/>
+            <a:off x="5074152" y="4041646"/>
             <a:ext cx="395855" cy="284191"/>
           </a:xfrm>
           <a:prstGeom prst="bentConnector3">
@@ -6949,7 +7389,7 @@
         </p:nvSpPr>
         <p:spPr>
           <a:xfrm>
-            <a:off x="389954" y="2794776"/>
+            <a:off x="340794" y="2303162"/>
             <a:ext cx="854584" cy="411480"/>
           </a:xfrm>
           <a:prstGeom prst="rect">
@@ -6998,7 +7438,7 @@
         </p:nvSpPr>
         <p:spPr>
           <a:xfrm>
-            <a:off x="1608392" y="2585391"/>
+            <a:off x="1559232" y="2093777"/>
             <a:ext cx="1041273" cy="830249"/>
           </a:xfrm>
           <a:prstGeom prst="rect">
@@ -7047,7 +7487,7 @@
         </p:nvGrpSpPr>
         <p:grpSpPr>
           <a:xfrm>
-            <a:off x="3376041" y="2652116"/>
+            <a:off x="3326881" y="2160502"/>
             <a:ext cx="393192" cy="399140"/>
             <a:chOff x="5422392" y="1652778"/>
             <a:chExt cx="393192" cy="399140"/>
@@ -7195,7 +7635,7 @@
         </p:nvCxnSpPr>
         <p:spPr>
           <a:xfrm>
-            <a:off x="2649665" y="2809850"/>
+            <a:off x="2600505" y="2318236"/>
             <a:ext cx="799528" cy="0"/>
           </a:xfrm>
           <a:prstGeom prst="straightConnector1">
@@ -7238,7 +7678,7 @@
         </p:nvCxnSpPr>
         <p:spPr>
           <a:xfrm>
-            <a:off x="3769233" y="2809850"/>
+            <a:off x="3720073" y="2318236"/>
             <a:ext cx="1231773" cy="15646"/>
           </a:xfrm>
           <a:prstGeom prst="straightConnector1">
@@ -7279,7 +7719,7 @@
         </p:nvCxnSpPr>
         <p:spPr>
           <a:xfrm rot="16200000" flipV="1">
-            <a:off x="3442845" y="3145216"/>
+            <a:off x="3393685" y="2653602"/>
             <a:ext cx="1833492" cy="1500755"/>
           </a:xfrm>
           <a:prstGeom prst="bentConnector3">
@@ -7320,7 +7760,7 @@
         </p:nvGrpSpPr>
         <p:grpSpPr>
           <a:xfrm>
-            <a:off x="3036568" y="3173194"/>
+            <a:off x="2987408" y="2681580"/>
             <a:ext cx="393192" cy="399140"/>
             <a:chOff x="5422392" y="1652778"/>
             <a:chExt cx="393192" cy="399140"/>
@@ -7468,7 +7908,7 @@
         </p:nvCxnSpPr>
         <p:spPr>
           <a:xfrm>
-            <a:off x="2683759" y="3330928"/>
+            <a:off x="2634599" y="2839314"/>
             <a:ext cx="425961" cy="0"/>
           </a:xfrm>
           <a:prstGeom prst="straightConnector1">
@@ -7511,7 +7951,7 @@
         </p:nvCxnSpPr>
         <p:spPr>
           <a:xfrm>
-            <a:off x="3429760" y="3330928"/>
+            <a:off x="3380600" y="2839314"/>
             <a:ext cx="1571246" cy="7014"/>
           </a:xfrm>
           <a:prstGeom prst="straightConnector1">
@@ -7552,7 +7992,7 @@
         </p:nvCxnSpPr>
         <p:spPr>
           <a:xfrm rot="16200000" flipV="1">
-            <a:off x="2809625" y="3959299"/>
+            <a:off x="2760465" y="3467685"/>
             <a:ext cx="1301232" cy="380999"/>
           </a:xfrm>
           <a:prstGeom prst="bentConnector3">
@@ -7597,7 +8037,7 @@
         </p:nvCxnSpPr>
         <p:spPr>
           <a:xfrm>
-            <a:off x="1244538" y="3000516"/>
+            <a:off x="1195378" y="2508902"/>
             <a:ext cx="363854" cy="0"/>
           </a:xfrm>
           <a:prstGeom prst="straightConnector1">
@@ -7673,7 +8113,7 @@
         </p:nvCxnSpPr>
         <p:spPr>
           <a:xfrm flipV="1">
-            <a:off x="8631936" y="2831592"/>
+            <a:off x="8582776" y="2339978"/>
             <a:ext cx="491490" cy="670"/>
           </a:xfrm>
           <a:prstGeom prst="straightConnector1">
@@ -7714,7 +8154,7 @@
         </p:nvCxnSpPr>
         <p:spPr>
           <a:xfrm flipV="1">
-            <a:off x="9769220" y="2841482"/>
+            <a:off x="9720060" y="2349868"/>
             <a:ext cx="491490" cy="670"/>
           </a:xfrm>
           <a:prstGeom prst="straightConnector1">
@@ -7755,7 +8195,7 @@
         </p:nvCxnSpPr>
         <p:spPr>
           <a:xfrm flipV="1">
-            <a:off x="8631936" y="3347837"/>
+            <a:off x="8582776" y="2856223"/>
             <a:ext cx="491490" cy="670"/>
           </a:xfrm>
           <a:prstGeom prst="straightConnector1">
@@ -7796,7 +8236,7 @@
         </p:nvCxnSpPr>
         <p:spPr>
           <a:xfrm flipV="1">
-            <a:off x="9769220" y="3357727"/>
+            <a:off x="9720060" y="2866113"/>
             <a:ext cx="491490" cy="670"/>
           </a:xfrm>
           <a:prstGeom prst="straightConnector1">
@@ -7837,7 +8277,7 @@
         </p:nvCxnSpPr>
         <p:spPr>
           <a:xfrm flipV="1">
-            <a:off x="8631936" y="3852472"/>
+            <a:off x="8582776" y="3360858"/>
             <a:ext cx="491490" cy="670"/>
           </a:xfrm>
           <a:prstGeom prst="straightConnector1">
@@ -7878,7 +8318,7 @@
         </p:nvCxnSpPr>
         <p:spPr>
           <a:xfrm flipV="1">
-            <a:off x="9769220" y="3862362"/>
+            <a:off x="9720060" y="3370748"/>
             <a:ext cx="491490" cy="670"/>
           </a:xfrm>
           <a:prstGeom prst="straightConnector1">
@@ -7919,7 +8359,7 @@
         </p:nvCxnSpPr>
         <p:spPr>
           <a:xfrm flipV="1">
-            <a:off x="8631936" y="4368717"/>
+            <a:off x="8582776" y="3877103"/>
             <a:ext cx="491490" cy="670"/>
           </a:xfrm>
           <a:prstGeom prst="straightConnector1">
@@ -7960,7 +8400,7 @@
         </p:nvCxnSpPr>
         <p:spPr>
           <a:xfrm flipV="1">
-            <a:off x="9769220" y="4378607"/>
+            <a:off x="9720060" y="3886993"/>
             <a:ext cx="491490" cy="670"/>
           </a:xfrm>
           <a:prstGeom prst="straightConnector1">
@@ -7999,7 +8439,7 @@
         </p:nvSpPr>
         <p:spPr>
           <a:xfrm>
-            <a:off x="8602980" y="2339092"/>
+            <a:off x="8553820" y="1847478"/>
             <a:ext cx="552070" cy="507831"/>
           </a:xfrm>
           <a:prstGeom prst="rect">
@@ -8034,7 +8474,7 @@
         </p:nvSpPr>
         <p:spPr>
           <a:xfrm>
-            <a:off x="6963822" y="4843440"/>
+            <a:off x="6914662" y="4351826"/>
             <a:ext cx="3827718" cy="230832"/>
           </a:xfrm>
           <a:prstGeom prst="rect">
@@ -8069,7 +8509,7 @@
         </p:nvSpPr>
         <p:spPr>
           <a:xfrm>
-            <a:off x="5460015" y="2552348"/>
+            <a:off x="5410855" y="2060734"/>
             <a:ext cx="866490" cy="230832"/>
           </a:xfrm>
           <a:prstGeom prst="rect">
@@ -8104,7 +8544,7 @@
         </p:nvSpPr>
         <p:spPr>
           <a:xfrm>
-            <a:off x="5517929" y="2963062"/>
+            <a:off x="5468769" y="2471448"/>
             <a:ext cx="633410" cy="369332"/>
           </a:xfrm>
           <a:prstGeom prst="rect">
@@ -8139,7 +8579,7 @@
         </p:nvSpPr>
         <p:spPr>
           <a:xfrm rot="16200000">
-            <a:off x="2851226" y="3985752"/>
+            <a:off x="2802066" y="3494138"/>
             <a:ext cx="1140542" cy="369332"/>
           </a:xfrm>
           <a:prstGeom prst="rect">
@@ -9898,7 +10338,7 @@
             </a:r>
             <a:r>
               <a:rPr lang="en-US" baseline="-25000" dirty="0" err="1"/>
-              <a:t>fr</a:t>
+              <a:t>fl</a:t>
             </a:r>
             <a:r>
               <a:rPr lang="en-US" dirty="0"/>
@@ -9915,7 +10355,7 @@
             </a:r>
             <a:r>
               <a:rPr lang="en-US" baseline="-25000" dirty="0" err="1"/>
-              <a:t>fl</a:t>
+              <a:t>fr</a:t>
             </a:r>
             <a:r>
               <a:rPr lang="en-US" dirty="0"/>
